--- a/submission/CryptoDrishti-SIH26164-Idea-Presentation.pptx
+++ b/submission/CryptoDrishti-SIH26164-Idea-Presentation.pptx
@@ -7030,7 +7030,7 @@
         <p:spPr>
           <a:xfrm>
             <a:off x="5532120" y="1097280"/>
-            <a:ext cx="5911673" cy="4828032"/>
+            <a:ext cx="5842653" cy="4828032"/>
           </a:xfrm>
           <a:prstGeom prst="rect">
             <a:avLst/>

--- a/submission/CryptoDrishti-SIH26164-Idea-Presentation.pptx
+++ b/submission/CryptoDrishti-SIH26164-Idea-Presentation.pptx
@@ -5681,7 +5681,7 @@
                   <a:srgbClr val="1A1A1A"/>
                 </a:solidFill>
               </a:rPr>
-              <a:t>Problem Statement Title – [FILL FROM SIH PORTAL]</a:t>
+              <a:t>Problem Statement Title – Enterprise Cryptographic Discovery &amp; Analysis Tool (ECDAT)</a:t>
             </a:r>
           </a:p>
           <a:p>
@@ -5700,7 +5700,7 @@
                   <a:srgbClr val="1A1A1A"/>
                 </a:solidFill>
               </a:rPr>
-              <a:t>Theme – [FILL FROM SIH PORTAL]</a:t>
+              <a:t>Theme – 26164</a:t>
             </a:r>
           </a:p>
           <a:p>
@@ -5738,7 +5738,7 @@
                   <a:srgbClr val="1A1A1A"/>
                 </a:solidFill>
               </a:rPr>
-              <a:t>Team ID – [FILL FROM SIH PORTAL]</a:t>
+              <a:t>Team ID – 146876</a:t>
             </a:r>
           </a:p>
           <a:p>
@@ -5757,7 +5757,7 @@
                   <a:srgbClr val="1A1A1A"/>
                 </a:solidFill>
               </a:rPr>
-              <a:t>Team Name – [FILL FROM SIH PORTAL]</a:t>
+              <a:t>Team Name – Zero-Day</a:t>
             </a:r>
           </a:p>
         </p:txBody>
@@ -6309,7 +6309,7 @@
             <a:pPr algn="ctr"/>
             <a:r>
               <a:rPr lang="en-US" dirty="0" sz="900"/>
-              <a:t>[FILL FROM SIH PORTAL]</a:t>
+              <a:t>Zero-Day</a:t>
             </a:r>
             <a:endParaRPr lang="en-IN" dirty="0"/>
           </a:p>
@@ -6927,7 +6927,7 @@
             <a:pPr algn="ctr"/>
             <a:r>
               <a:rPr lang="en-US" dirty="0" sz="900"/>
-              <a:t>[FILL FROM SIH PORTAL]</a:t>
+              <a:t>Zero-Day</a:t>
             </a:r>
             <a:endParaRPr lang="en-IN" dirty="0"/>
           </a:p>
@@ -7671,7 +7671,7 @@
             <a:pPr algn="ctr"/>
             <a:r>
               <a:rPr lang="en-US" dirty="0" sz="900"/>
-              <a:t>[FILL FROM SIH PORTAL]</a:t>
+              <a:t>Zero-Day</a:t>
             </a:r>
             <a:endParaRPr lang="en-IN" dirty="0"/>
           </a:p>
@@ -8429,7 +8429,7 @@
             <a:pPr algn="ctr"/>
             <a:r>
               <a:rPr lang="en-US" dirty="0" sz="900"/>
-              <a:t>[FILL FROM SIH PORTAL]</a:t>
+              <a:t>Zero-Day</a:t>
             </a:r>
             <a:endParaRPr lang="en-IN" dirty="0"/>
           </a:p>
@@ -9338,7 +9338,7 @@
             <a:pPr algn="ctr"/>
             <a:r>
               <a:rPr lang="en-US" dirty="0" sz="900"/>
-              <a:t>[FILL FROM SIH PORTAL]</a:t>
+              <a:t>Zero-Day</a:t>
             </a:r>
             <a:endParaRPr lang="en-IN" dirty="0"/>
           </a:p>

--- a/submission/CryptoDrishti-SIH26164-Idea-Presentation.pptx
+++ b/submission/CryptoDrishti-SIH26164-Idea-Presentation.pptx
@@ -5632,8 +5632,8 @@
         </p:nvSpPr>
         <p:spPr>
           <a:xfrm>
-            <a:off x="411480" y="2057400"/>
-            <a:ext cx="5669280" cy="3337560"/>
+            <a:off x="411480" y="1975104"/>
+            <a:ext cx="5715000" cy="3246120"/>
           </a:xfrm>
           <a:prstGeom prst="rect">
             <a:avLst/>
@@ -5658,7 +5658,7 @@
             <a:r>
               <a:rPr sz="1500" b="1">
                 <a:solidFill>
-                  <a:srgbClr val="1A1A1A"/>
+                  <a:srgbClr val="0F172A"/>
                 </a:solidFill>
               </a:rPr>
               <a:t>Problem Statement ID – SIH26164</a:t>
@@ -5800,8 +5800,8 @@
         </p:nvSpPr>
         <p:spPr>
           <a:xfrm>
-            <a:off x="411480" y="5532120"/>
-            <a:ext cx="5669280" cy="822960"/>
+            <a:off x="411480" y="5376672"/>
+            <a:ext cx="5715000" cy="914400"/>
           </a:xfrm>
           <a:prstGeom prst="rect">
             <a:avLst/>
@@ -5824,12 +5824,12 @@
               <a:buNone/>
             </a:pPr>
             <a:r>
-              <a:rPr sz="1200" b="1">
+              <a:rPr sz="1500" b="1">
                 <a:solidFill>
                   <a:srgbClr val="8C1D1D"/>
                 </a:solidFill>
               </a:rPr>
-              <a:t>CryptoDrishti — cryptographic discovery, quantum-risk assessment and post-quantum migration planning.</a:t>
+              <a:t>CryptoDrishti</a:t>
             </a:r>
           </a:p>
           <a:p>
@@ -5843,12 +5843,31 @@
               <a:buNone/>
             </a:pPr>
             <a:r>
+              <a:rPr sz="1200">
+                <a:solidFill>
+                  <a:srgbClr val="1A1A1A"/>
+                </a:solidFill>
+              </a:rPr>
+              <a:t>Find every cryptographic asset an organisation owns, prove what the evidence actually supports, and say what each one must become.</a:t>
+            </a:r>
+          </a:p>
+          <a:p>
+            <a:pPr marL="0" indent="0">
+              <a:spcBef>
+                <a:spcPts val="0"/>
+              </a:spcBef>
+              <a:spcAft>
+                <a:spcPts val="200"/>
+              </a:spcAft>
+              <a:buNone/>
+            </a:pPr>
+            <a:r>
               <a:rPr sz="1100" i="1">
                 <a:solidFill>
                   <a:srgbClr val="5A5A5A"/>
                 </a:solidFill>
               </a:rPr>
-              <a:t>Problem statement raised by the National Technical Research Organisation (NTRO).</a:t>
+              <a:t>Working tool · 664 tests · CycloneDX CBOM validated against the official schema · runs offline.</a:t>
             </a:r>
           </a:p>
         </p:txBody>
@@ -5958,7 +5977,7 @@
           <a:p>
             <a:pPr eaLnBrk="1" hangingPunct="1"/>
             <a:r>
-              <a:rPr lang="en-US" sz="3000" b="1" dirty="0">
+              <a:rPr lang="en-US" sz="2900" b="1" dirty="0">
                 <a:latin typeface="Times New Roman" panose="02020603050405020304" pitchFamily="18" charset="0"/>
                 <a:ea typeface="ＭＳ Ｐゴシック" pitchFamily="1" charset="-128"/>
                 <a:cs typeface="Times New Roman" panose="02020603050405020304" pitchFamily="18" charset="0"/>
@@ -5987,7 +6006,7 @@
         <p:spPr bwMode="auto">
           <a:xfrm>
             <a:off x="411480" y="1115568"/>
-            <a:ext cx="6035040" cy="4023360"/>
+            <a:ext cx="5440680" cy="3931920"/>
           </a:xfrm>
           <a:prstGeom prst="rect">
             <a:avLst/>
@@ -6016,7 +6035,7 @@
               <a:buNone/>
             </a:pPr>
             <a:r>
-              <a:rPr sz="1300" b="1">
+              <a:rPr sz="1200" b="1">
                 <a:solidFill>
                   <a:srgbClr val="8C1D1D"/>
                 </a:solidFill>
@@ -6042,12 +6061,12 @@
               <a:buNone/>
             </a:pPr>
             <a:r>
-              <a:rPr sz="1200">
+              <a:rPr sz="1150">
                 <a:solidFill>
                   <a:srgbClr val="1A1A1A"/>
                 </a:solidFill>
               </a:rPr>
-              <a:t>An organisation cannot migrate cryptography it cannot enumerate. Keys, algorithms and protocols are scattered across source code, transitive dependencies, compiled binaries with no source, certificate stores, deployment configuration and shipped container images.</a:t>
+              <a:t>Post-quantum migration is an inventory problem before it is a mathematics problem. NIST published the replacement algorithms in 2024; almost nothing has moved, because no one can list what they have. Cryptography hides in source, transitive dependencies, binaries with no source, certificate stores, deployment config and shipped container images.</a:t>
             </a:r>
           </a:p>
           <a:p>
@@ -6061,7 +6080,7 @@
               <a:buNone/>
             </a:pPr>
             <a:r>
-              <a:rPr sz="1300" b="1">
+              <a:rPr sz="1200" b="1">
                 <a:solidFill>
                   <a:srgbClr val="8C1D1D"/>
                 </a:solidFill>
@@ -6080,12 +6099,12 @@
               <a:buNone/>
             </a:pPr>
             <a:r>
-              <a:rPr sz="1200">
+              <a:rPr sz="1150">
                 <a:solidFill>
                   <a:srgbClr val="1A1A1A"/>
                 </a:solidFill>
               </a:rPr>
-              <a:t>A single-operator tool that reads what is actually present, classifies every asset by what a quantum computer does to it, and emits a standards-conformant CycloneDX CBOM.</a:t>
+              <a:t>Seven sensors read what is actually there. Every finding becomes a distinct asset, classified by what a quantum computer does to it, scored, matched to a named replacement, and exported as a CycloneDX CBOM. One operator, one machine, no network.</a:t>
             </a:r>
           </a:p>
           <a:p>
@@ -6099,16 +6118,16 @@
               <a:buNone/>
             </a:pPr>
             <a:r>
-              <a:rPr sz="1300" b="1">
+              <a:rPr sz="1200" b="1">
                 <a:solidFill>
                   <a:srgbClr val="8C1D1D"/>
                 </a:solidFill>
               </a:rPr>
-              <a:t>What is genuinely new here</a:t>
-            </a:r>
-          </a:p>
-          <a:p>
-            <a:pPr marL="182880" indent="-182880">
+              <a:t>Three things no other inventory does</a:t>
+            </a:r>
+          </a:p>
+          <a:p>
+            <a:pPr marL="160020" indent="-160020">
               <a:spcBef>
                 <a:spcPts val="0"/>
               </a:spcBef>
@@ -6116,27 +6135,27 @@
                 <a:spcPts val="400"/>
               </a:spcAft>
               <a:buFont typeface="Arial"/>
-              <a:buChar char="•"/>
-            </a:pPr>
-            <a:r>
-              <a:rPr sz="1200" b="1">
+              <a:buChar char="–"/>
+            </a:pPr>
+            <a:r>
+              <a:rPr sz="1150" b="1">
+                <a:solidFill>
+                  <a:srgbClr val="0F172A"/>
+                </a:solidFill>
+              </a:rPr>
+              <a:t>Purpose, not keyword. </a:t>
+            </a:r>
+            <a:r>
+              <a:rPr sz="1150">
                 <a:solidFill>
                   <a:srgbClr val="1A1A1A"/>
                 </a:solidFill>
               </a:rPr>
-              <a:t>Purpose, not keyword. </a:t>
-            </a:r>
-            <a:r>
-              <a:rPr sz="1200">
-                <a:solidFill>
-                  <a:srgbClr val="1A1A1A"/>
-                </a:solidFill>
-              </a:rPr>
-              <a:t>Cryptographic purpose is resolved from the call site. RSA signing and RSA key transport are one algorithm and two different migrations — ML-DSA against ML-KEM — and the tool refuses to name a target when the evidence does not settle which.</a:t>
-            </a:r>
-          </a:p>
-          <a:p>
-            <a:pPr marL="182880" indent="-182880">
+              <a:t>RSA signing and RSA key transport are one algorithm and two migrations — ML-DSA against ML-KEM. Purpose is resolved from the call site, and when the evidence is silent the tool names no target rather than the wrong one.</a:t>
+            </a:r>
+          </a:p>
+          <a:p>
+            <a:pPr marL="160020" indent="-160020">
               <a:spcBef>
                 <a:spcPts val="0"/>
               </a:spcBef>
@@ -6144,27 +6163,27 @@
                 <a:spcPts val="400"/>
               </a:spcAft>
               <a:buFont typeface="Arial"/>
-              <a:buChar char="•"/>
-            </a:pPr>
-            <a:r>
-              <a:rPr sz="1200" b="1">
+              <a:buChar char="–"/>
+            </a:pPr>
+            <a:r>
+              <a:rPr sz="1150" b="1">
+                <a:solidFill>
+                  <a:srgbClr val="0F172A"/>
+                </a:solidFill>
+              </a:rPr>
+              <a:t>Assurance is a field, not a footnote. </a:t>
+            </a:r>
+            <a:r>
+              <a:rPr sz="1150">
                 <a:solidFill>
                   <a:srgbClr val="1A1A1A"/>
                 </a:solidFill>
               </a:rPr>
-              <a:t>Assurance is a field. </a:t>
-            </a:r>
-            <a:r>
-              <a:rPr sz="1200">
-                <a:solidFill>
-                  <a:srgbClr val="1A1A1A"/>
-                </a:solidFill>
-              </a:rPr>
-              <a:t>Capability, declared, used, observed. A library that can do RSA is not evidence that RSA is used, and the inventory says so.</a:t>
-            </a:r>
-          </a:p>
-          <a:p>
-            <a:pPr marL="182880" indent="-182880">
+              <a:t>Capability, declared, used, observed. A library that can do RSA is not proof that RSA runs.</a:t>
+            </a:r>
+          </a:p>
+          <a:p>
+            <a:pPr marL="160020" indent="-160020">
               <a:spcBef>
                 <a:spcPts val="0"/>
               </a:spcBef>
@@ -6172,23 +6191,23 @@
                 <a:spcPts val="400"/>
               </a:spcAft>
               <a:buFont typeface="Arial"/>
-              <a:buChar char="•"/>
-            </a:pPr>
-            <a:r>
-              <a:rPr sz="1200" b="1">
+              <a:buChar char="–"/>
+            </a:pPr>
+            <a:r>
+              <a:rPr sz="1150" b="1">
+                <a:solidFill>
+                  <a:srgbClr val="0F172A"/>
+                </a:solidFill>
+              </a:rPr>
+              <a:t>Containers read layer by layer. </a:t>
+            </a:r>
+            <a:r>
+              <a:rPr sz="1150">
                 <a:solidFill>
                   <a:srgbClr val="1A1A1A"/>
                 </a:solidFill>
               </a:rPr>
-              <a:t>Layer-aware containers. </a:t>
-            </a:r>
-            <a:r>
-              <a:rPr sz="1200">
-                <a:solidFill>
-                  <a:srgbClr val="1A1A1A"/>
-                </a:solidFill>
-              </a:rPr>
-              <a:t>A key deleted by a later layer is reported as historical — still extractable from the archive, not present at runtime.</a:t>
+              <a:t>A key deleted by a later layer is reported as historical: gone at runtime, still extractable from the archive.</a:t>
             </a:r>
           </a:p>
         </p:txBody>
@@ -6308,7 +6327,7 @@
           <a:p>
             <a:pPr algn="ctr"/>
             <a:r>
-              <a:rPr lang="en-US" dirty="0" sz="900"/>
+              <a:rPr lang="en-US" dirty="0" sz="1000" b="1"/>
               <a:t>Zero-Day</a:t>
             </a:r>
             <a:endParaRPr lang="en-IN" dirty="0"/>
@@ -6347,7 +6366,7 @@
       </p:pic>
       <p:pic>
         <p:nvPicPr>
-          <p:cNvPr id="15363" name="cd-shot-04-inventory" descr="04-inventory.png"/>
+          <p:cNvPr id="15363" name="cd-shot-04-inventory" descr="04-inventory-190-0-0.58.png"/>
           <p:cNvPicPr>
             <a:picLocks noChangeAspect="1"/>
           </p:cNvPicPr>
@@ -6361,8 +6380,8 @@
         </p:blipFill>
         <p:spPr>
           <a:xfrm>
-            <a:off x="6693408" y="1152144"/>
-            <a:ext cx="5084064" cy="3407221"/>
+            <a:off x="6053328" y="1188720"/>
+            <a:ext cx="5724144" cy="3550053"/>
           </a:xfrm>
           <a:prstGeom prst="rect">
             <a:avLst/>
@@ -6377,8 +6396,8 @@
         </p:nvSpPr>
         <p:spPr>
           <a:xfrm>
-            <a:off x="6693408" y="4614228"/>
-            <a:ext cx="5084064" cy="274320"/>
+            <a:off x="6053328" y="4802781"/>
+            <a:ext cx="5724144" cy="274320"/>
           </a:xfrm>
           <a:prstGeom prst="rect">
             <a:avLst/>
@@ -6400,21 +6419,21 @@
                   <a:srgbClr val="5A5A5A"/>
                 </a:solidFill>
               </a:rPr>
-              <a:t>One scan, three RSA findings, three different answers — and the third refuses to guess.</a:t>
-            </a:r>
-          </a:p>
-        </p:txBody>
-      </p:sp>
-      <p:sp>
-        <p:nvSpPr>
-          <p:cNvPr id="15365" name="cd-band"/>
+              <a:t>One scan. Three RSA findings, three different recommendations — and the third refuses to guess.</a:t>
+            </a:r>
+          </a:p>
+        </p:txBody>
+      </p:sp>
+      <p:sp>
+        <p:nvSpPr>
+          <p:cNvPr id="15365" name="cd-note"/>
           <p:cNvSpPr txBox="1"/>
           <p:nvPr/>
         </p:nvSpPr>
         <p:spPr>
           <a:xfrm>
-            <a:off x="411480" y="5138928"/>
-            <a:ext cx="11365992" cy="1115567"/>
+            <a:off x="411480" y="5230368"/>
+            <a:ext cx="11365992" cy="960120"/>
           </a:xfrm>
           <a:prstGeom prst="rect">
             <a:avLst/>
@@ -6437,20 +6456,20 @@
               <a:buNone/>
             </a:pPr>
             <a:r>
-              <a:rPr sz="1100" b="1">
+              <a:rPr sz="1050" b="1">
+                <a:solidFill>
+                  <a:srgbClr val="0F172A"/>
+                </a:solidFill>
+              </a:rPr>
+              <a:t>Where it looks — </a:t>
+            </a:r>
+            <a:r>
+              <a:rPr sz="1050">
                 <a:solidFill>
                   <a:srgbClr val="1A1A1A"/>
                 </a:solidFill>
               </a:rPr>
-              <a:t>Where it looks — </a:t>
-            </a:r>
-            <a:r>
-              <a:rPr sz="1100">
-                <a:solidFill>
-                  <a:srgbClr val="1A1A1A"/>
-                </a:solidFill>
-              </a:rPr>
-              <a:t>source code (Python AST plus curated rules for seven more languages) · dependency manifests · ELF binaries · X.509 certificates · server and application configuration · container images (OCI layout, OCI tar, docker save) · a live TLS endpoint the operator names.</a:t>
+              <a:t>source (Python AST, plus rule packs for seven more languages) · dependency manifests · ELF binaries · X.509 certificates · server and application configuration · container images (OCI layout, OCI tar, docker save) · one live TLS endpoint the operator names.</a:t>
             </a:r>
           </a:p>
           <a:p>
@@ -6464,12 +6483,12 @@
               <a:buNone/>
             </a:pPr>
             <a:r>
-              <a:rPr sz="1000" i="1">
+              <a:rPr sz="950" i="1">
                 <a:solidFill>
                   <a:srgbClr val="5A5A5A"/>
                 </a:solidFill>
               </a:rPr>
-              <a:t>Everything except the TLS probe runs entirely offline.</a:t>
+              <a:t>Every sensor but the TLS probe runs with the network unplugged.</a:t>
             </a:r>
           </a:p>
         </p:txBody>
@@ -6601,7 +6620,7 @@
         <p:spPr bwMode="auto">
           <a:xfrm>
             <a:off x="411480" y="1115568"/>
-            <a:ext cx="4846320" cy="3749039"/>
+            <a:ext cx="5532120" cy="1481328"/>
           </a:xfrm>
           <a:prstGeom prst="rect">
             <a:avLst/>
@@ -6630,7 +6649,7 @@
               <a:buNone/>
             </a:pPr>
             <a:r>
-              <a:rPr sz="1200" b="1">
+              <a:rPr sz="1100" b="1">
                 <a:solidFill>
                   <a:srgbClr val="8C1D1D"/>
                 </a:solidFill>
@@ -6649,7 +6668,7 @@
               <a:buNone/>
             </a:pPr>
             <a:r>
-              <a:rPr sz="1100">
+              <a:rPr sz="1050">
                 <a:solidFill>
                   <a:srgbClr val="1A1A1A"/>
                 </a:solidFill>
@@ -6668,7 +6687,7 @@
               <a:buNone/>
             </a:pPr>
             <a:r>
-              <a:rPr sz="1200" b="1">
+              <a:rPr sz="1100" b="1">
                 <a:solidFill>
                   <a:srgbClr val="8C1D1D"/>
                 </a:solidFill>
@@ -6687,126 +6706,12 @@
               <a:buNone/>
             </a:pPr>
             <a:r>
-              <a:rPr sz="1100">
+              <a:rPr sz="1050">
                 <a:solidFill>
                   <a:srgbClr val="1A1A1A"/>
                 </a:solidFill>
               </a:rPr>
-              <a:t>source · dependency · binary (ELF symbols) · certificate (X.509 and KeyUsage) · configuration · container · network (live TLS).</a:t>
-            </a:r>
-          </a:p>
-          <a:p>
-            <a:pPr marL="0" indent="0">
-              <a:spcBef>
-                <a:spcPts val="700"/>
-              </a:spcBef>
-              <a:spcAft>
-                <a:spcPts val="300"/>
-              </a:spcAft>
-              <a:buNone/>
-            </a:pPr>
-            <a:r>
-              <a:rPr sz="1200" b="1">
-                <a:solidFill>
-                  <a:srgbClr val="8C1D1D"/>
-                </a:solidFill>
-              </a:rPr>
-              <a:t>Risk engine</a:t>
-            </a:r>
-          </a:p>
-          <a:p>
-            <a:pPr marL="0" indent="0">
-              <a:spcBef>
-                <a:spcPts val="0"/>
-              </a:spcBef>
-              <a:spcAft>
-                <a:spcPts val="300"/>
-              </a:spcAft>
-              <a:buNone/>
-            </a:pPr>
-            <a:r>
-              <a:rPr sz="1100">
-                <a:solidFill>
-                  <a:srgbClr val="1A1A1A"/>
-                </a:solidFill>
-              </a:rPr>
-              <a:t>Mosca's inequality, X + Y &gt; Z, with a purpose-specific reading of X: harvest-now-decrypt-later for key establishment, forgery-after-Q-Day for signatures, a Grover margin for symmetric keys. Q-Day is an operator-chosen scenario, never a forecast.</a:t>
-            </a:r>
-          </a:p>
-          <a:p>
-            <a:pPr marL="0" indent="0">
-              <a:spcBef>
-                <a:spcPts val="700"/>
-              </a:spcBef>
-              <a:spcAft>
-                <a:spcPts val="300"/>
-              </a:spcAft>
-              <a:buNone/>
-            </a:pPr>
-            <a:r>
-              <a:rPr sz="1200" b="1">
-                <a:solidFill>
-                  <a:srgbClr val="8C1D1D"/>
-                </a:solidFill>
-              </a:rPr>
-              <a:t>Output</a:t>
-            </a:r>
-          </a:p>
-          <a:p>
-            <a:pPr marL="0" indent="0">
-              <a:spcBef>
-                <a:spcPts val="0"/>
-              </a:spcBef>
-              <a:spcAft>
-                <a:spcPts val="300"/>
-              </a:spcAft>
-              <a:buNone/>
-            </a:pPr>
-            <a:r>
-              <a:rPr sz="1100">
-                <a:solidFill>
-                  <a:srgbClr val="1A1A1A"/>
-                </a:solidFill>
-              </a:rPr>
-              <a:t>CycloneDX 1.6 and 1.7 CBOM, validated offline against the official JSON Schemas vendored at a pinned upstream commit, plus a self-contained HTML report.</a:t>
-            </a:r>
-          </a:p>
-          <a:p>
-            <a:pPr marL="0" indent="0">
-              <a:spcBef>
-                <a:spcPts val="700"/>
-              </a:spcBef>
-              <a:spcAft>
-                <a:spcPts val="300"/>
-              </a:spcAft>
-              <a:buNone/>
-            </a:pPr>
-            <a:r>
-              <a:rPr sz="1200" b="1">
-                <a:solidFill>
-                  <a:srgbClr val="8C1D1D"/>
-                </a:solidFill>
-              </a:rPr>
-              <a:t>Deployment</a:t>
-            </a:r>
-          </a:p>
-          <a:p>
-            <a:pPr marL="0" indent="0">
-              <a:spcBef>
-                <a:spcPts val="0"/>
-              </a:spcBef>
-              <a:spcAft>
-                <a:spcPts val="300"/>
-              </a:spcAft>
-              <a:buNone/>
-            </a:pPr>
-            <a:r>
-              <a:rPr sz="1100">
-                <a:solidFill>
-                  <a:srgbClr val="1A1A1A"/>
-                </a:solidFill>
-              </a:rPr>
-              <a:t>One operator, loopback by default. The server refuses to start on a non-loopback bind without an access token.</a:t>
+              <a:t>source · dependency · binary (ELF symbols, constants, banners) · certificate (X.509, KeyUsage) · configuration · container (layer replay with whiteouts) · network (live TLS).</a:t>
             </a:r>
           </a:p>
         </p:txBody>
@@ -6926,7 +6831,7 @@
           <a:p>
             <a:pPr algn="ctr"/>
             <a:r>
-              <a:rPr lang="en-US" dirty="0" sz="900"/>
+              <a:rPr lang="en-US" dirty="0" sz="1000" b="1"/>
               <a:t>Zero-Day</a:t>
             </a:r>
             <a:endParaRPr lang="en-IN" dirty="0"/>
@@ -6971,8 +6876,8 @@
         </p:nvSpPr>
         <p:spPr>
           <a:xfrm>
-            <a:off x="411480" y="4956048"/>
-            <a:ext cx="4846320" cy="1234440"/>
+            <a:off x="6263640" y="1115568"/>
+            <a:ext cx="5513832" cy="1481328"/>
           </a:xfrm>
           <a:prstGeom prst="rect">
             <a:avLst/>
@@ -6990,32 +6895,81 @@
                 <a:spcPts val="0"/>
               </a:spcBef>
               <a:spcAft>
-                <a:spcPts val="200"/>
+                <a:spcPts val="300"/>
               </a:spcAft>
               <a:buNone/>
             </a:pPr>
             <a:r>
-              <a:rPr sz="1050" b="1">
+              <a:rPr sz="1100" b="1">
+                <a:solidFill>
+                  <a:srgbClr val="8C1D1D"/>
+                </a:solidFill>
+              </a:rPr>
+              <a:t>Risk engine</a:t>
+            </a:r>
+          </a:p>
+          <a:p>
+            <a:pPr marL="0" indent="0">
+              <a:spcBef>
+                <a:spcPts val="0"/>
+              </a:spcBef>
+              <a:spcAft>
+                <a:spcPts val="300"/>
+              </a:spcAft>
+              <a:buNone/>
+            </a:pPr>
+            <a:r>
+              <a:rPr sz="1050">
                 <a:solidFill>
                   <a:srgbClr val="1A1A1A"/>
                 </a:solidFill>
               </a:rPr>
-              <a:t>What it does not do — </a:t>
-            </a:r>
-            <a:r>
-              <a:rPr sz="950" i="1">
-                <a:solidFill>
-                  <a:srgbClr val="5A5A5A"/>
-                </a:solidFill>
-              </a:rPr>
-              <a:t>no agent, no daemon, no telemetry and no outbound call the operator did not ask for. A scan of a directory or an image archive touches the network zero times.</a:t>
+              <a:t>Mosca's inequality, X + Y &gt; Z, read differently per purpose: harvest-now-decrypt-later for key establishment, forgery-after-Q-Day for signatures, a Grover margin for symmetric keys. Q-Day is a scenario the operator chooses, never a forecast.</a:t>
+            </a:r>
+          </a:p>
+          <a:p>
+            <a:pPr marL="0" indent="0">
+              <a:spcBef>
+                <a:spcPts val="700"/>
+              </a:spcBef>
+              <a:spcAft>
+                <a:spcPts val="300"/>
+              </a:spcAft>
+              <a:buNone/>
+            </a:pPr>
+            <a:r>
+              <a:rPr sz="1100" b="1">
+                <a:solidFill>
+                  <a:srgbClr val="8C1D1D"/>
+                </a:solidFill>
+              </a:rPr>
+              <a:t>Output and posture</a:t>
+            </a:r>
+          </a:p>
+          <a:p>
+            <a:pPr marL="0" indent="0">
+              <a:spcBef>
+                <a:spcPts val="0"/>
+              </a:spcBef>
+              <a:spcAft>
+                <a:spcPts val="300"/>
+              </a:spcAft>
+              <a:buNone/>
+            </a:pPr>
+            <a:r>
+              <a:rPr sz="1050">
+                <a:solidFill>
+                  <a:srgbClr val="1A1A1A"/>
+                </a:solidFill>
+              </a:rPr>
+              <a:t>CycloneDX 1.6 (ECMA-424) and 1.7, each validated offline against its own official schema. Loopback by default; refuses a non-loopback bind without a token.</a:t>
             </a:r>
           </a:p>
         </p:txBody>
       </p:sp>
       <p:pic>
         <p:nvPicPr>
-          <p:cNvPr id="17412" name="cd-figure-architecture" descr="architecture.png"/>
+          <p:cNvPr id="17412" name="cd-figure-architecture-dark" descr="architecture-dark.png"/>
           <p:cNvPicPr>
             <a:picLocks noChangeAspect="1"/>
           </p:cNvPicPr>
@@ -7029,8 +6983,8 @@
         </p:blipFill>
         <p:spPr>
           <a:xfrm>
-            <a:off x="5532120" y="1097280"/>
-            <a:ext cx="5842653" cy="4828032"/>
+            <a:off x="2029968" y="2633472"/>
+            <a:ext cx="8070473" cy="3273552"/>
           </a:xfrm>
           <a:prstGeom prst="rect">
             <a:avLst/>
@@ -7045,8 +6999,8 @@
         </p:nvSpPr>
         <p:spPr>
           <a:xfrm>
-            <a:off x="5532120" y="5971032"/>
-            <a:ext cx="6245352" cy="274320"/>
+            <a:off x="2029968" y="5971032"/>
+            <a:ext cx="8070473" cy="274320"/>
           </a:xfrm>
           <a:prstGeom prst="rect">
             <a:avLst/>
@@ -7068,7 +7022,7 @@
                   <a:srgbClr val="5A5A5A"/>
                 </a:solidFill>
               </a:rPr>
-              <a:t>Security gates sit between every input and every sensor. The TLS probe (dashed) is the only outbound path; no cloud, KMS, HSM or registry integration exists, so none is drawn.</a:t>
+              <a:t>Left to right: inputs, the security gate each one passes through, the seven sensors, the analysis chain, and the outputs. The TLS probe (dashed) is the only outbound path — there is no cloud, KMS, HSM or registry box, because no such integration exists.</a:t>
             </a:r>
           </a:p>
         </p:txBody>
@@ -7215,7 +7169,7 @@
         <p:spPr bwMode="auto">
           <a:xfrm>
             <a:off x="411480" y="1115568"/>
-            <a:ext cx="6035040" cy="3913632"/>
+            <a:ext cx="7315200" cy="4069080"/>
           </a:xfrm>
           <a:prstGeom prst="rect">
             <a:avLst/>
@@ -7251,7 +7205,7 @@
               <a:defRPr/>
             </a:pPr>
             <a:r>
-              <a:rPr sz="1150" b="1">
+              <a:rPr sz="1100" b="1">
                 <a:solidFill>
                   <a:srgbClr val="8C1D1D"/>
                 </a:solidFill>
@@ -7284,12 +7238,20 @@
               <a:buNone/>
             </a:pPr>
             <a:r>
+              <a:rPr sz="1050" b="1">
+                <a:solidFill>
+                  <a:srgbClr val="0F172A"/>
+                </a:solidFill>
+              </a:rPr>
+              <a:t>~9,000 lines of first-party Python and JavaScript · 664 automated tests · CI on Python 3.11, 3.12 and 3.13 · </a:t>
+            </a:r>
+            <a:r>
               <a:rPr sz="1050">
                 <a:solidFill>
                   <a:srgbClr val="1A1A1A"/>
                 </a:solidFill>
               </a:rPr>
-              <a:t>A working prototype of roughly 9,000 lines of first-party Python and JavaScript, with 664 automated tests and continuous integration on Python 3.11, 3.12 and 3.13.</a:t>
+              <a:t>every figure on this slide is reproducible by a command in this repository.</a:t>
             </a:r>
           </a:p>
           <a:p>
@@ -7303,16 +7265,16 @@
               <a:buNone/>
             </a:pPr>
             <a:r>
-              <a:rPr sz="1150" b="1">
+              <a:rPr sz="1100" b="1">
                 <a:solidFill>
                   <a:srgbClr val="8C1D1D"/>
                 </a:solidFill>
               </a:rPr>
-              <a:t>How it is validated</a:t>
-            </a:r>
-          </a:p>
-          <a:p>
-            <a:pPr marL="182880" indent="-182880">
+              <a:t>How we know it works</a:t>
+            </a:r>
+          </a:p>
+          <a:p>
+            <a:pPr marL="160020" indent="-160020">
               <a:spcBef>
                 <a:spcPts val="0"/>
               </a:spcBef>
@@ -7320,27 +7282,27 @@
                 <a:spcPts val="300"/>
               </a:spcAft>
               <a:buFont typeface="Arial"/>
-              <a:buChar char="•"/>
+              <a:buChar char="–"/>
             </a:pPr>
             <a:r>
               <a:rPr sz="1050" b="1">
                 <a:solidFill>
+                  <a:srgbClr val="0F172A"/>
+                </a:solidFill>
+              </a:rPr>
+              <a:t>Measured, not asserted. </a:t>
+            </a:r>
+            <a:r>
+              <a:rPr sz="1050">
+                <a:solidFill>
                   <a:srgbClr val="1A1A1A"/>
                 </a:solidFill>
               </a:rPr>
-              <a:t>Hand-labelled corpus. </a:t>
-            </a:r>
-            <a:r>
-              <a:rPr sz="1050">
-                <a:solidFill>
-                  <a:srgbClr val="1A1A1A"/>
-                </a:solidFill>
-              </a:rPr>
-              <a:t>116 findings across six scanners, with deliberately difficult negatives — comments, prose, crypto-shaped identifiers, a disable-list. CI fails if precision or recall regresses.</a:t>
-            </a:r>
-          </a:p>
-          <a:p>
-            <a:pPr marL="182880" indent="-182880">
+              <a:t>A hand-labelled corpus of 116 findings across six scanners, written by reading the fixtures rather than by running the tool. It found seven real detector defects that code review had missed. CI fails if precision or recall regresses.</a:t>
+            </a:r>
+          </a:p>
+          <a:p>
+            <a:pPr marL="160020" indent="-160020">
               <a:spcBef>
                 <a:spcPts val="0"/>
               </a:spcBef>
@@ -7348,23 +7310,23 @@
                 <a:spcPts val="300"/>
               </a:spcAft>
               <a:buFont typeface="Arial"/>
-              <a:buChar char="•"/>
+              <a:buChar char="–"/>
             </a:pPr>
             <a:r>
               <a:rPr sz="1050" b="1">
                 <a:solidFill>
+                  <a:srgbClr val="0F172A"/>
+                </a:solidFill>
+              </a:rPr>
+              <a:t>Conformance is checked by the standard, not by us. </a:t>
+            </a:r>
+            <a:r>
+              <a:rPr sz="1050">
+                <a:solidFill>
                   <a:srgbClr val="1A1A1A"/>
                 </a:solidFill>
               </a:rPr>
-              <a:t>Schema conformance. </a:t>
-            </a:r>
-            <a:r>
-              <a:rPr sz="1050">
-                <a:solidFill>
-                  <a:srgbClr val="1A1A1A"/>
-                </a:solidFill>
-              </a:rPr>
-              <a:t>Every CBOM is checked against the official CycloneDX JSON Schemas, offline, at a pinned commit. CI fails on any violation.</a:t>
+              <a:t>Every CBOM is validated against the official CycloneDX JSON Schemas, offline, at a pinned commit. CI fails on any violation.</a:t>
             </a:r>
           </a:p>
           <a:p>
@@ -7378,16 +7340,16 @@
               <a:buNone/>
             </a:pPr>
             <a:r>
-              <a:rPr sz="1150" b="1">
+              <a:rPr sz="1100" b="1">
                 <a:solidFill>
                   <a:srgbClr val="8C1D1D"/>
                 </a:solidFill>
               </a:rPr>
-              <a:t>Risks, and what we did about them</a:t>
-            </a:r>
-          </a:p>
-          <a:p>
-            <a:pPr marL="182880" indent="-182880">
+              <a:t>The three risks that actually matter, and the answers</a:t>
+            </a:r>
+          </a:p>
+          <a:p>
+            <a:pPr marL="160020" indent="-160020">
               <a:spcBef>
                 <a:spcPts val="0"/>
               </a:spcBef>
@@ -7395,27 +7357,27 @@
                 <a:spcPts val="300"/>
               </a:spcAft>
               <a:buFont typeface="Arial"/>
-              <a:buChar char="•"/>
+              <a:buChar char="–"/>
             </a:pPr>
             <a:r>
               <a:rPr sz="1050" b="1">
                 <a:solidFill>
+                  <a:srgbClr val="0F172A"/>
+                </a:solidFill>
+              </a:rPr>
+              <a:t>Hostile input. </a:t>
+            </a:r>
+            <a:r>
+              <a:rPr sz="1050">
+                <a:solidFill>
                   <a:srgbClr val="1A1A1A"/>
                 </a:solidFill>
               </a:rPr>
-              <a:t>Hostile input. </a:t>
-            </a:r>
-            <a:r>
-              <a:rPr sz="1050">
-                <a:solidFill>
-                  <a:srgbClr val="1A1A1A"/>
-                </a:solidFill>
-              </a:rPr>
-              <a:t>The tool reads untrusted paths and archives, so it enforces a filesystem boundary that refuses symlink escapes, vets every archive member, streams under a size budget with nothing extracted to disk, and resolves-then-vets every network address before connecting to the vetted literal.</a:t>
-            </a:r>
-          </a:p>
-          <a:p>
-            <a:pPr marL="182880" indent="-182880">
+              <a:t>It reads untrusted paths and archives, so: filesystem boundary with symlink-escape refusal, per-member archive vetting, bounded streaming with nothing extracted to disk, and a destination policy that resolves, vets every resolved address, then connects to the vetted literal.</a:t>
+            </a:r>
+          </a:p>
+          <a:p>
+            <a:pPr marL="160020" indent="-160020">
               <a:spcBef>
                 <a:spcPts val="0"/>
               </a:spcBef>
@@ -7423,27 +7385,27 @@
                 <a:spcPts val="300"/>
               </a:spcAft>
               <a:buFont typeface="Arial"/>
-              <a:buChar char="•"/>
+              <a:buChar char="–"/>
             </a:pPr>
             <a:r>
               <a:rPr sz="1050" b="1">
                 <a:solidFill>
+                  <a:srgbClr val="0F172A"/>
+                </a:solidFill>
+              </a:rPr>
+              <a:t>A partial scan mistaken for a complete one. </a:t>
+            </a:r>
+            <a:r>
+              <a:rPr sz="1050">
+                <a:solidFill>
                   <a:srgbClr val="1A1A1A"/>
                 </a:solidFill>
               </a:rPr>
-              <a:t>A partial scan read as complete. </a:t>
-            </a:r>
-            <a:r>
-              <a:rPr sz="1050">
-                <a:solidFill>
-                  <a:srgbClr val="1A1A1A"/>
-                </a:solidFill>
-              </a:rPr>
-              <a:t>The most damaging output this tool could produce. Every scan carries an explicit complete-or-partial flag and its reasons into the console, the report and the CBOM.</a:t>
-            </a:r>
-          </a:p>
-          <a:p>
-            <a:pPr marL="182880" indent="-182880">
+              <a:t>The most damaging thing this tool could produce. Every scan carries an explicit complete-or-partial flag and its reasons into the console, the report and the CBOM.</a:t>
+            </a:r>
+          </a:p>
+          <a:p>
+            <a:pPr marL="160020" indent="-160020">
               <a:spcBef>
                 <a:spcPts val="0"/>
               </a:spcBef>
@@ -7451,15 +7413,61 @@
                 <a:spcPts val="300"/>
               </a:spcAft>
               <a:buFont typeface="Arial"/>
-              <a:buChar char="•"/>
+              <a:buChar char="–"/>
             </a:pPr>
             <a:r>
               <a:rPr sz="1050" b="1">
                 <a:solidFill>
+                  <a:srgbClr val="0F172A"/>
+                </a:solidFill>
+              </a:rPr>
+              <a:t>Leaking what it finds. </a:t>
+            </a:r>
+            <a:r>
+              <a:rPr sz="1050">
+                <a:solidFill>
                   <a:srgbClr val="1A1A1A"/>
                 </a:solidFill>
               </a:rPr>
-              <a:t>Leaking what it finds. </a:t>
+              <a:t>A crypto inventory is the most sensitive file an estate owns. Evidence is redacted before export; the location is kept, because that is what makes a finding actionable.</a:t>
+            </a:r>
+          </a:p>
+          <a:p>
+            <a:pPr marL="0" indent="0">
+              <a:spcBef>
+                <a:spcPts val="700"/>
+              </a:spcBef>
+              <a:spcAft>
+                <a:spcPts val="300"/>
+              </a:spcAft>
+              <a:buNone/>
+            </a:pPr>
+            <a:r>
+              <a:rPr sz="1100" b="1">
+                <a:solidFill>
+                  <a:srgbClr val="8C1D1D"/>
+                </a:solidFill>
+              </a:rPr>
+              <a:t>What that adds up to</a:t>
+            </a:r>
+          </a:p>
+          <a:p>
+            <a:pPr marL="0" indent="0">
+              <a:spcBef>
+                <a:spcPts val="0"/>
+              </a:spcBef>
+              <a:spcAft>
+                <a:spcPts val="300"/>
+              </a:spcAft>
+              <a:buNone/>
+            </a:pPr>
+            <a:r>
+              <a:rPr sz="1050" b="1">
+                <a:solidFill>
+                  <a:srgbClr val="0F172A"/>
+                </a:solidFill>
+              </a:rPr>
+              <a:t>664 automated tests · 116 labelled benchmark findings across six scanners · 7 detector defects the benchmark found that code review did not · 0 schema violations, </a:t>
             </a:r>
             <a:r>
               <a:rPr sz="1050">
@@ -7467,7 +7475,7 @@
                   <a:srgbClr val="1A1A1A"/>
                 </a:solidFill>
               </a:rPr>
-              <a:t>Evidence is redacted before export; the location is kept, because that is what makes a finding actionable.</a:t>
+              <a:t>each checked by CI on every push to this branch.</a:t>
             </a:r>
           </a:p>
         </p:txBody>
@@ -7670,7 +7678,7 @@
           <a:p>
             <a:pPr algn="ctr"/>
             <a:r>
-              <a:rPr lang="en-US" dirty="0" sz="900"/>
+              <a:rPr lang="en-US" dirty="0" sz="1000" b="1"/>
               <a:t>Zero-Day</a:t>
             </a:r>
             <a:endParaRPr lang="en-IN" dirty="0"/>
@@ -7709,7 +7717,7 @@
       </p:pic>
       <p:pic>
         <p:nvPicPr>
-          <p:cNvPr id="17411" name="cd-shot-07-evidence-drawer" descr="07-evidence-drawer.png"/>
+          <p:cNvPr id="17411" name="cd-shot-07-evidence-drawer" descr="07-evidence-drawer-0-0-0.53.png"/>
           <p:cNvPicPr>
             <a:picLocks noChangeAspect="1"/>
           </p:cNvPicPr>
@@ -7723,8 +7731,8 @@
         </p:blipFill>
         <p:spPr>
           <a:xfrm>
-            <a:off x="6693408" y="1152144"/>
-            <a:ext cx="5084064" cy="3231397"/>
+            <a:off x="7973568" y="1152144"/>
+            <a:ext cx="3803904" cy="4134517"/>
           </a:xfrm>
           <a:prstGeom prst="rect">
             <a:avLst/>
@@ -7739,8 +7747,8 @@
         </p:nvSpPr>
         <p:spPr>
           <a:xfrm>
-            <a:off x="6693408" y="4438405"/>
-            <a:ext cx="5084064" cy="274320"/>
+            <a:off x="7973568" y="5350669"/>
+            <a:ext cx="3803904" cy="274320"/>
           </a:xfrm>
           <a:prstGeom prst="rect">
             <a:avLst/>
@@ -7762,21 +7770,21 @@
                   <a:srgbClr val="5A5A5A"/>
                 </a:solidFill>
               </a:rPr>
-              <a:t>Every finding opens onto its evidence: file, line, technique, confidence, assurance and the exposure arithmetic behind its score.</a:t>
-            </a:r>
-          </a:p>
-        </p:txBody>
-      </p:sp>
-      <p:sp>
-        <p:nvSpPr>
-          <p:cNvPr id="17413" name="cd-band"/>
+              <a:t>Every finding opens onto the evidence behind it and the arithmetic behind its score.</a:t>
+            </a:r>
+          </a:p>
+        </p:txBody>
+      </p:sp>
+      <p:sp>
+        <p:nvSpPr>
+          <p:cNvPr id="17413" name="cd-note"/>
           <p:cNvSpPr txBox="1"/>
           <p:nvPr/>
         </p:nvSpPr>
         <p:spPr>
           <a:xfrm>
-            <a:off x="411480" y="5102352"/>
-            <a:ext cx="11365992" cy="1152143"/>
+            <a:off x="411480" y="5303520"/>
+            <a:ext cx="7315200" cy="914400"/>
           </a:xfrm>
           <a:prstGeom prst="rect">
             <a:avLst/>
@@ -7799,20 +7807,20 @@
               <a:buNone/>
             </a:pPr>
             <a:r>
-              <a:rPr sz="1050" b="1">
+              <a:rPr sz="1000" b="1">
+                <a:solidFill>
+                  <a:srgbClr val="0F172A"/>
+                </a:solidFill>
+              </a:rPr>
+              <a:t>Stated limits — </a:t>
+            </a:r>
+            <a:r>
+              <a:rPr sz="1000">
                 <a:solidFill>
                   <a:srgbClr val="1A1A1A"/>
                 </a:solidFill>
               </a:rPr>
-              <a:t>Honest constraints — </a:t>
-            </a:r>
-            <a:r>
-              <a:rPr sz="1050">
-                <a:solidFill>
-                  <a:srgbClr val="1A1A1A"/>
-                </a:solidFill>
-              </a:rPr>
-              <a:t>full AST analysis is Python only; seven more languages have curated rule packs, and Rust and Swift are recognised but effectively uncovered. Binary symbol parsing is ELF only, so Mach-O and PE are out of scope. No KMS, HSM, cloud or Kubernetes integration is implemented, and none is claimed.</a:t>
+              <a:t>full AST analysis is Python only; seven more languages use curated rule packs, and Rust and Swift are recognised but effectively uncovered. Binary parsing is ELF only, so Mach-O and PE are out of scope. No KMS, HSM, cloud or Kubernetes integration exists, and none is claimed.</a:t>
             </a:r>
           </a:p>
           <a:p>
@@ -7826,20 +7834,20 @@
               <a:buNone/>
             </a:pPr>
             <a:r>
-              <a:rPr sz="1050" b="1">
-                <a:solidFill>
-                  <a:srgbClr val="1A1A1A"/>
-                </a:solidFill>
-              </a:rPr>
-              <a:t>Reproduce every number above — </a:t>
-            </a:r>
-            <a:r>
-              <a:rPr sz="950" i="1">
+              <a:rPr sz="1000" b="1">
+                <a:solidFill>
+                  <a:srgbClr val="0F172A"/>
+                </a:solidFill>
+              </a:rPr>
+              <a:t>Reproduce it — </a:t>
+            </a:r>
+            <a:r>
+              <a:rPr sz="900" i="1">
                 <a:solidFill>
                   <a:srgbClr val="5A5A5A"/>
                 </a:solidFill>
               </a:rPr>
-              <a:t>python -m pytest  ·  python -m benchmark.run  ·  python run.py --preflight-offline</a:t>
+              <a:t>python -m pytest  ·  python -m benchmark.run  ·  python run.py --demo  ·  python run.py --preflight-offline</a:t>
             </a:r>
           </a:p>
         </p:txBody>
@@ -7991,7 +7999,7 @@
         <p:spPr bwMode="auto">
           <a:xfrm>
             <a:off x="411480" y="1115568"/>
-            <a:ext cx="6035040" cy="4059936"/>
+            <a:ext cx="5532120" cy="4114800"/>
           </a:xfrm>
           <a:prstGeom prst="rect">
             <a:avLst/>
@@ -8027,7 +8035,7 @@
               <a:defRPr/>
             </a:pPr>
             <a:r>
-              <a:rPr sz="1200" b="1">
+              <a:rPr sz="1150" b="1">
                 <a:solidFill>
                   <a:srgbClr val="8C1D1D"/>
                 </a:solidFill>
@@ -8051,7 +8059,7 @@
                   <a:srgbClr val="1A1A1A"/>
                 </a:solidFill>
               </a:rPr>
-              <a:t>Security engineers and migration programme owners who have been told to move to post-quantum cryptography and do not yet have an inventory to move.</a:t>
+              <a:t>Security engineers and migration programme owners who have been told to move to post-quantum cryptography and have no inventory to move.</a:t>
             </a:r>
           </a:p>
           <a:p>
@@ -8065,16 +8073,16 @@
               <a:buNone/>
             </a:pPr>
             <a:r>
-              <a:rPr sz="1200" b="1">
+              <a:rPr sz="1150" b="1">
                 <a:solidFill>
                   <a:srgbClr val="8C1D1D"/>
                 </a:solidFill>
               </a:rPr>
-              <a:t>What it changes</a:t>
-            </a:r>
-          </a:p>
-          <a:p>
-            <a:pPr marL="182880" indent="-182880">
+              <a:t>What changes for them</a:t>
+            </a:r>
+          </a:p>
+          <a:p>
+            <a:pPr marL="160020" indent="-160020">
               <a:spcBef>
                 <a:spcPts val="0"/>
               </a:spcBef>
@@ -8082,7 +8090,7 @@
                 <a:spcPts val="300"/>
               </a:spcAft>
               <a:buFont typeface="Arial"/>
-              <a:buChar char="•"/>
+              <a:buChar char="–"/>
             </a:pPr>
             <a:r>
               <a:rPr sz="1100">
@@ -8090,11 +8098,11 @@
                   <a:srgbClr val="1A1A1A"/>
                 </a:solidFill>
               </a:rPr>
-              <a:t>Turns “we think we use RSA somewhere” into a per-asset list with file, line, purpose, evidence strength and a named replacement.</a:t>
-            </a:r>
-          </a:p>
-          <a:p>
-            <a:pPr marL="182880" indent="-182880">
+              <a:t>“We think we use RSA somewhere” becomes a per-asset list with file, line, purpose, evidence strength and a named replacement.</a:t>
+            </a:r>
+          </a:p>
+          <a:p>
+            <a:pPr marL="160020" indent="-160020">
               <a:spcBef>
                 <a:spcPts val="0"/>
               </a:spcBef>
@@ -8102,7 +8110,7 @@
                 <a:spcPts val="300"/>
               </a:spcAft>
               <a:buFont typeface="Arial"/>
-              <a:buChar char="•"/>
+              <a:buChar char="–"/>
             </a:pPr>
             <a:r>
               <a:rPr sz="1100">
@@ -8110,11 +8118,11 @@
                   <a:srgbClr val="1A1A1A"/>
                 </a:solidFill>
               </a:rPr>
-              <a:t>Separates what an estate runs from what it merely has available, so a migration plan is not padded with libraries nobody calls.</a:t>
-            </a:r>
-          </a:p>
-          <a:p>
-            <a:pPr marL="182880" indent="-182880">
+              <a:t>What an estate runs is separated from what it merely has installed, so the migration plan is not padded with libraries nobody calls.</a:t>
+            </a:r>
+          </a:p>
+          <a:p>
+            <a:pPr marL="160020" indent="-160020">
               <a:spcBef>
                 <a:spcPts val="0"/>
               </a:spcBef>
@@ -8122,7 +8130,7 @@
                 <a:spcPts val="300"/>
               </a:spcAft>
               <a:buFont typeface="Arial"/>
-              <a:buChar char="•"/>
+              <a:buChar char="–"/>
             </a:pPr>
             <a:r>
               <a:rPr sz="1100">
@@ -8130,7 +8138,27 @@
                   <a:srgbClr val="1A1A1A"/>
                 </a:solidFill>
               </a:rPr>
-              <a:t>Produces a CBOM a regulator or a downstream tool can actually consume, in a published standard rather than a bespoke format.</a:t>
+              <a:t>The output is a published standard a regulator or a downstream tool can consume, not a bespoke report format.</a:t>
+            </a:r>
+          </a:p>
+          <a:p>
+            <a:pPr marL="160020" indent="-160020">
+              <a:spcBef>
+                <a:spcPts val="0"/>
+              </a:spcBef>
+              <a:spcAft>
+                <a:spcPts val="300"/>
+              </a:spcAft>
+              <a:buFont typeface="Arial"/>
+              <a:buChar char="–"/>
+            </a:pPr>
+            <a:r>
+              <a:rPr sz="1100">
+                <a:solidFill>
+                  <a:srgbClr val="1A1A1A"/>
+                </a:solidFill>
+              </a:rPr>
+              <a:t>A partial scan is labelled partial, so nobody signs off an estate on an inventory that silently missed half of it.</a:t>
             </a:r>
           </a:p>
           <a:p>
@@ -8144,7 +8172,7 @@
               <a:buNone/>
             </a:pPr>
             <a:r>
-              <a:rPr sz="1200" b="1">
+              <a:rPr sz="1150" b="1">
                 <a:solidFill>
                   <a:srgbClr val="8C1D1D"/>
                 </a:solidFill>
@@ -8163,12 +8191,20 @@
               <a:buNone/>
             </a:pPr>
             <a:r>
+              <a:rPr sz="1100" b="1">
+                <a:solidFill>
+                  <a:srgbClr val="0F172A"/>
+                </a:solidFill>
+              </a:rPr>
+              <a:t>Over the project's own labelled corpus of 116 findings: </a:t>
+            </a:r>
+            <a:r>
               <a:rPr sz="1100">
                 <a:solidFill>
                   <a:srgbClr val="1A1A1A"/>
                 </a:solidFill>
               </a:rPr>
-              <a:t>Across the project's own labelled corpus of 116 findings: precision 1.000, recall 1.000, F1 1.000, with cryptographic purpose correct on 114 of 114 scored cases.</a:t>
+              <a:t>precision 1.000, recall 1.000, F1 1.000, with cryptographic purpose correct on 114 of 114 scored cases.</a:t>
             </a:r>
           </a:p>
           <a:p>
@@ -8187,45 +8223,7 @@
                   <a:srgbClr val="5A5A5A"/>
                 </a:solidFill>
               </a:rPr>
-              <a:t>These figures measure a developer-written synthetic corpus. They are NOT an estimate of real-world enterprise accuracy, which this project has not measured and does not claim. Network-sensor accuracy is excluded, because what a TLS handshake negotiates depends on the local library build.</a:t>
-            </a:r>
-          </a:p>
-          <a:p>
-            <a:pPr marL="0" indent="0">
-              <a:spcBef>
-                <a:spcPts val="700"/>
-              </a:spcBef>
-              <a:spcAft>
-                <a:spcPts val="300"/>
-              </a:spcAft>
-              <a:buNone/>
-            </a:pPr>
-            <a:r>
-              <a:rPr sz="1200" b="1">
-                <a:solidFill>
-                  <a:srgbClr val="8C1D1D"/>
-                </a:solidFill>
-              </a:rPr>
-              <a:t>Adoption cost</a:t>
-            </a:r>
-          </a:p>
-          <a:p>
-            <a:pPr marL="0" indent="0">
-              <a:spcBef>
-                <a:spcPts val="0"/>
-              </a:spcBef>
-              <a:spcAft>
-                <a:spcPts val="300"/>
-              </a:spcAft>
-              <a:buNone/>
-            </a:pPr>
-            <a:r>
-              <a:rPr sz="1100">
-                <a:solidFill>
-                  <a:srgbClr val="1A1A1A"/>
-                </a:solidFill>
-              </a:rPr>
-              <a:t>One command, no daemon, no network, no cloud account. It reads a repository, a binary tree or a container image on the machine it is already running on.</a:t>
+              <a:t>Read that precisely. These figures measure a developer-written synthetic corpus. They are NOT an estimate of real-world enterprise accuracy, which this project has not measured and does not claim. Network-sensor accuracy is excluded, because what a TLS handshake negotiates depends on the local library build.</a:t>
             </a:r>
           </a:p>
         </p:txBody>
@@ -8428,7 +8426,7 @@
           <a:p>
             <a:pPr algn="ctr"/>
             <a:r>
-              <a:rPr lang="en-US" dirty="0" sz="900"/>
+              <a:rPr lang="en-US" dirty="0" sz="1000" b="1"/>
               <a:t>Zero-Day</a:t>
             </a:r>
             <a:endParaRPr lang="en-IN" dirty="0"/>
@@ -8465,59 +8463,9 @@
           </a:prstGeom>
         </p:spPr>
       </p:pic>
-      <p:sp>
-        <p:nvSpPr>
-          <p:cNvPr id="17411" name="cd-note"/>
-          <p:cNvSpPr txBox="1"/>
-          <p:nvPr/>
-        </p:nvSpPr>
-        <p:spPr>
-          <a:xfrm>
-            <a:off x="411480" y="5230368"/>
-            <a:ext cx="6035040" cy="1005840"/>
-          </a:xfrm>
-          <a:prstGeom prst="rect">
-            <a:avLst/>
-          </a:prstGeom>
-          <a:noFill/>
-        </p:spPr>
-        <p:txBody>
-          <a:bodyPr wrap="square">
-            <a:spAutoFit/>
-          </a:bodyPr>
-          <a:lstStyle/>
-          <a:p>
-            <a:pPr marL="0" indent="0">
-              <a:spcBef>
-                <a:spcPts val="0"/>
-              </a:spcBef>
-              <a:spcAft>
-                <a:spcPts val="200"/>
-              </a:spcAft>
-              <a:buNone/>
-            </a:pPr>
-            <a:r>
-              <a:rPr sz="1050" b="1">
-                <a:solidFill>
-                  <a:srgbClr val="1A1A1A"/>
-                </a:solidFill>
-              </a:rPr>
-              <a:t>Both screens beside this text come from one command — </a:t>
-            </a:r>
-            <a:r>
-              <a:rPr sz="950" i="1">
-                <a:solidFill>
-                  <a:srgbClr val="5A5A5A"/>
-                </a:solidFill>
-              </a:rPr>
-              <a:t>python run.py --demo builds a synthetic estate and a container image, scans them, records an operator override and leaves the console showing exactly what is shown here.</a:t>
-            </a:r>
-          </a:p>
-        </p:txBody>
-      </p:sp>
       <p:pic>
         <p:nvPicPr>
-          <p:cNvPr id="17412" name="cd-shot-06-scan-history" descr="06-scan-history.png"/>
+          <p:cNvPr id="17411" name="cd-shot-01-assessment" descr="01-assessment-190-0-1.png"/>
           <p:cNvPicPr>
             <a:picLocks noChangeAspect="1"/>
           </p:cNvPicPr>
@@ -8531,8 +8479,8 @@
         </p:blipFill>
         <p:spPr>
           <a:xfrm>
-            <a:off x="6693408" y="1152144"/>
-            <a:ext cx="5084064" cy="1300374"/>
+            <a:off x="6144768" y="1152144"/>
+            <a:ext cx="5632704" cy="3731444"/>
           </a:xfrm>
           <a:prstGeom prst="rect">
             <a:avLst/>
@@ -8541,14 +8489,14 @@
       </p:pic>
       <p:sp>
         <p:nvSpPr>
-          <p:cNvPr id="17413" name="cd-caption"/>
+          <p:cNvPr id="17412" name="cd-caption"/>
           <p:cNvSpPr txBox="1"/>
           <p:nvPr/>
         </p:nvSpPr>
         <p:spPr>
           <a:xfrm>
-            <a:off x="6693408" y="2507382"/>
-            <a:ext cx="5084064" cy="274320"/>
+            <a:off x="6144768" y="4947596"/>
+            <a:ext cx="5632704" cy="274320"/>
           </a:xfrm>
           <a:prstGeom prst="rect">
             <a:avLst/>
@@ -8570,45 +8518,21 @@
                   <a:srgbClr val="5A5A5A"/>
                 </a:solidFill>
               </a:rPr>
-              <a:t>A partial scan is labelled PARTIAL, with the reason, rather than passed off as a complete inventory.</a:t>
-            </a:r>
-          </a:p>
-        </p:txBody>
-      </p:sp>
-      <p:pic>
-        <p:nvPicPr>
-          <p:cNvPr id="17414" name="cd-shot-02-exposure" descr="02-exposure.png"/>
-          <p:cNvPicPr>
-            <a:picLocks noChangeAspect="1"/>
-          </p:cNvPicPr>
+              <a:t>The whole estate in one screen — with the partial-scan warning stated at the top rather than buried in a payload.</a:t>
+            </a:r>
+          </a:p>
+        </p:txBody>
+      </p:sp>
+      <p:sp>
+        <p:nvSpPr>
+          <p:cNvPr id="17413" name="cd-note"/>
+          <p:cNvSpPr txBox="1"/>
           <p:nvPr/>
-        </p:nvPicPr>
-        <p:blipFill>
-          <a:blip r:embed="rId5"/>
-          <a:stretch>
-            <a:fillRect/>
-          </a:stretch>
-        </p:blipFill>
+        </p:nvSpPr>
         <p:spPr>
           <a:xfrm>
-            <a:off x="6693408" y="3056021"/>
-            <a:ext cx="5084064" cy="2776565"/>
-          </a:xfrm>
-          <a:prstGeom prst="rect">
-            <a:avLst/>
-          </a:prstGeom>
-        </p:spPr>
-      </p:pic>
-      <p:sp>
-        <p:nvSpPr>
-          <p:cNvPr id="17415" name="cd-caption"/>
-          <p:cNvSpPr txBox="1"/>
-          <p:nvPr/>
-        </p:nvSpPr>
-        <p:spPr>
-          <a:xfrm>
-            <a:off x="6693408" y="5887450"/>
-            <a:ext cx="5084064" cy="274320"/>
+            <a:off x="6144768" y="5358384"/>
+            <a:ext cx="5632704" cy="868680"/>
           </a:xfrm>
           <a:prstGeom prst="rect">
             <a:avLst/>
@@ -8622,15 +8546,29 @@
           <a:lstStyle/>
           <a:p>
             <a:pPr marL="0" indent="0">
-              <a:buNone/>
-            </a:pPr>
-            <a:r>
-              <a:rPr sz="950">
+              <a:spcBef>
+                <a:spcPts val="0"/>
+              </a:spcBef>
+              <a:spcAft>
+                <a:spcPts val="200"/>
+              </a:spcAft>
+              <a:buNone/>
+            </a:pPr>
+            <a:r>
+              <a:rPr sz="1050" b="1">
+                <a:solidFill>
+                  <a:srgbClr val="0F172A"/>
+                </a:solidFill>
+              </a:rPr>
+              <a:t>Adoption cost — </a:t>
+            </a:r>
+            <a:r>
+              <a:rPr sz="950" i="1">
                 <a:solidFill>
                   <a:srgbClr val="5A5A5A"/>
                 </a:solidFill>
               </a:rPr>
-              <a:t>Exposure is shown as arithmetic the operator can argue with — secrecy, migration effort and the chosen Q-Day scenario, each labelled by where its value came from.</a:t>
+              <a:t>one command. No daemon, no agent, no cloud account, no network. It reads a repository, a binary tree or a container image on the machine it is already running on.</a:t>
             </a:r>
           </a:p>
         </p:txBody>
@@ -8761,7 +8699,7 @@
           <a:p>
             <a:pPr eaLnBrk="1" hangingPunct="1"/>
             <a:r>
-              <a:rPr lang="en-US" sz="3000" b="1" dirty="0">
+              <a:rPr lang="en-US" sz="2900" b="1" dirty="0">
                 <a:latin typeface="Times New Roman" panose="02020603050405020304" pitchFamily="18" charset="0"/>
                 <a:ea typeface="ＭＳ Ｐゴシック" pitchFamily="1" charset="-128"/>
                 <a:cs typeface="Times New Roman" panose="02020603050405020304" pitchFamily="18" charset="0"/>
@@ -8782,7 +8720,7 @@
         <p:spPr bwMode="auto">
           <a:xfrm>
             <a:off x="411480" y="1115568"/>
-            <a:ext cx="5989320" cy="3931920"/>
+            <a:ext cx="5760720" cy="4206240"/>
           </a:xfrm>
           <a:prstGeom prst="rect">
             <a:avLst/>
@@ -8818,7 +8756,7 @@
               <a:defRPr/>
             </a:pPr>
             <a:r>
-              <a:rPr sz="1150" b="1">
+              <a:rPr sz="1100" b="1">
                 <a:solidFill>
                   <a:srgbClr val="8C1D1D"/>
                 </a:solidFill>
@@ -8841,7 +8779,7 @@
             </a:endParaRPr>
           </a:p>
           <a:p>
-            <a:pPr marL="182880" indent="-182880">
+            <a:pPr marL="160020" indent="-160020">
               <a:spcBef>
                 <a:spcPts val="0"/>
               </a:spcBef>
@@ -8849,7 +8787,7 @@
                 <a:spcPts val="200"/>
               </a:spcAft>
               <a:buFont typeface="Arial"/>
-              <a:buChar char="•"/>
+              <a:buChar char="–"/>
             </a:pPr>
             <a:r>
               <a:rPr sz="1050">
@@ -8857,11 +8795,11 @@
                   <a:srgbClr val="1A1A1A"/>
                 </a:solidFill>
               </a:rPr>
-              <a:t>FIPS 203 — ML-KEM, module-lattice key encapsulation</a:t>
-            </a:r>
-          </a:p>
-          <a:p>
-            <a:pPr marL="182880" indent="-182880">
+              <a:t>FIPS 203 — ML-KEM · FIPS 204 — ML-DSA · FIPS 205 — SLH-DSA</a:t>
+            </a:r>
+          </a:p>
+          <a:p>
+            <a:pPr marL="160020" indent="-160020">
               <a:spcBef>
                 <a:spcPts val="0"/>
               </a:spcBef>
@@ -8869,7 +8807,7 @@
                 <a:spcPts val="200"/>
               </a:spcAft>
               <a:buFont typeface="Arial"/>
-              <a:buChar char="•"/>
+              <a:buChar char="–"/>
             </a:pPr>
             <a:r>
               <a:rPr sz="1050">
@@ -8877,11 +8815,11 @@
                   <a:srgbClr val="1A1A1A"/>
                 </a:solidFill>
               </a:rPr>
-              <a:t>FIPS 204 — ML-DSA, module-lattice digital signatures</a:t>
-            </a:r>
-          </a:p>
-          <a:p>
-            <a:pPr marL="182880" indent="-182880">
+              <a:t>FIPS 202 — SHA-3 and SHAKE · SP 800-208 — LMS</a:t>
+            </a:r>
+          </a:p>
+          <a:p>
+            <a:pPr marL="160020" indent="-160020">
               <a:spcBef>
                 <a:spcPts val="0"/>
               </a:spcBef>
@@ -8889,7 +8827,7 @@
                 <a:spcPts val="200"/>
               </a:spcAft>
               <a:buFont typeface="Arial"/>
-              <a:buChar char="•"/>
+              <a:buChar char="–"/>
             </a:pPr>
             <a:r>
               <a:rPr sz="1050">
@@ -8897,11 +8835,30 @@
                   <a:srgbClr val="1A1A1A"/>
                 </a:solidFill>
               </a:rPr>
-              <a:t>FIPS 205 — SLH-DSA, stateless hash-based signatures</a:t>
-            </a:r>
-          </a:p>
-          <a:p>
-            <a:pPr marL="182880" indent="-182880">
+              <a:t>NIST IR 8547 — transition to post-quantum cryptography standards</a:t>
+            </a:r>
+          </a:p>
+          <a:p>
+            <a:pPr marL="0" indent="0">
+              <a:spcBef>
+                <a:spcPts val="600"/>
+              </a:spcBef>
+              <a:spcAft>
+                <a:spcPts val="200"/>
+              </a:spcAft>
+              <a:buNone/>
+            </a:pPr>
+            <a:r>
+              <a:rPr sz="1100" b="1">
+                <a:solidFill>
+                  <a:srgbClr val="8C1D1D"/>
+                </a:solidFill>
+              </a:rPr>
+              <a:t>Formats and specifications</a:t>
+            </a:r>
+          </a:p>
+          <a:p>
+            <a:pPr marL="160020" indent="-160020">
               <a:spcBef>
                 <a:spcPts val="0"/>
               </a:spcBef>
@@ -8909,7 +8866,7 @@
                 <a:spcPts val="200"/>
               </a:spcAft>
               <a:buFont typeface="Arial"/>
-              <a:buChar char="•"/>
+              <a:buChar char="–"/>
             </a:pPr>
             <a:r>
               <a:rPr sz="1050">
@@ -8917,11 +8874,11 @@
                   <a:srgbClr val="1A1A1A"/>
                 </a:solidFill>
               </a:rPr>
-              <a:t>FIPS 202 — SHA-3 and SHAKE; SP 800-208 — LMS</a:t>
-            </a:r>
-          </a:p>
-          <a:p>
-            <a:pPr marL="182880" indent="-182880">
+              <a:t>CycloneDX 1.6 (ECMA-424) and CycloneDX 1.7 — cryptographic bill of materials; schemas vendored from the CycloneDX specification repository at pinned commit 0bd48c8</a:t>
+            </a:r>
+          </a:p>
+          <a:p>
+            <a:pPr marL="160020" indent="-160020">
               <a:spcBef>
                 <a:spcPts val="0"/>
               </a:spcBef>
@@ -8929,7 +8886,7 @@
                 <a:spcPts val="200"/>
               </a:spcAft>
               <a:buFont typeface="Arial"/>
-              <a:buChar char="•"/>
+              <a:buChar char="–"/>
             </a:pPr>
             <a:r>
               <a:rPr sz="1050">
@@ -8937,7 +8894,27 @@
                   <a:srgbClr val="1A1A1A"/>
                 </a:solidFill>
               </a:rPr>
-              <a:t>NIST IR 8547 — transition to post-quantum cryptography standards</a:t>
+              <a:t>RFC 8996 — deprecation of TLS 1.0 and 1.1 · RFC 7693 — BLAKE2 · RFC 8032 — EdDSA · RFC 7748 — X25519 and X448</a:t>
+            </a:r>
+          </a:p>
+          <a:p>
+            <a:pPr marL="160020" indent="-160020">
+              <a:spcBef>
+                <a:spcPts val="0"/>
+              </a:spcBef>
+              <a:spcAft>
+                <a:spcPts val="200"/>
+              </a:spcAft>
+              <a:buFont typeface="Arial"/>
+              <a:buChar char="–"/>
+            </a:pPr>
+            <a:r>
+              <a:rPr sz="1050">
+                <a:solidFill>
+                  <a:srgbClr val="1A1A1A"/>
+                </a:solidFill>
+              </a:rPr>
+              <a:t>OCI Image Format Specification — image layout and layer whiteouts</a:t>
             </a:r>
           </a:p>
           <a:p>
@@ -8951,16 +8928,16 @@
               <a:buNone/>
             </a:pPr>
             <a:r>
-              <a:rPr sz="1150" b="1">
+              <a:rPr sz="1100" b="1">
                 <a:solidFill>
                   <a:srgbClr val="8C1D1D"/>
                 </a:solidFill>
               </a:rPr>
-              <a:t>Formats and specifications</a:t>
-            </a:r>
-          </a:p>
-          <a:p>
-            <a:pPr marL="182880" indent="-182880">
+              <a:t>Method</a:t>
+            </a:r>
+          </a:p>
+          <a:p>
+            <a:pPr marL="160020" indent="-160020">
               <a:spcBef>
                 <a:spcPts val="0"/>
               </a:spcBef>
@@ -8968,7 +8945,7 @@
                 <a:spcPts val="200"/>
               </a:spcAft>
               <a:buFont typeface="Arial"/>
-              <a:buChar char="•"/>
+              <a:buChar char="–"/>
             </a:pPr>
             <a:r>
               <a:rPr sz="1050">
@@ -8976,11 +8953,30 @@
                   <a:srgbClr val="1A1A1A"/>
                 </a:solidFill>
               </a:rPr>
-              <a:t>CycloneDX 1.6 (ECMA-424) and CycloneDX 1.7 — cryptographic bill of materials; schemas vendored from the CycloneDX specification repository at pinned commit 0bd48c8</a:t>
-            </a:r>
-          </a:p>
-          <a:p>
-            <a:pPr marL="182880" indent="-182880">
+              <a:t>Mosca's inequality (X + Y &gt; Z) for exposure timing; Shor's and Grover's algorithms for the classification split.</a:t>
+            </a:r>
+          </a:p>
+          <a:p>
+            <a:pPr marL="0" indent="0">
+              <a:spcBef>
+                <a:spcPts val="600"/>
+              </a:spcBef>
+              <a:spcAft>
+                <a:spcPts val="200"/>
+              </a:spcAft>
+              <a:buNone/>
+            </a:pPr>
+            <a:r>
+              <a:rPr sz="1100" b="1">
+                <a:solidFill>
+                  <a:srgbClr val="8C1D1D"/>
+                </a:solidFill>
+              </a:rPr>
+              <a:t>Project</a:t>
+            </a:r>
+          </a:p>
+          <a:p>
+            <a:pPr marL="160020" indent="-160020">
               <a:spcBef>
                 <a:spcPts val="0"/>
               </a:spcBef>
@@ -8988,7 +8984,7 @@
                 <a:spcPts val="200"/>
               </a:spcAft>
               <a:buFont typeface="Arial"/>
-              <a:buChar char="•"/>
+              <a:buChar char="–"/>
             </a:pPr>
             <a:r>
               <a:rPr sz="1050">
@@ -8996,11 +8992,11 @@
                   <a:srgbClr val="1A1A1A"/>
                 </a:solidFill>
               </a:rPr>
-              <a:t>RFC 8996 — deprecation of TLS 1.0 and 1.1</a:t>
-            </a:r>
-          </a:p>
-          <a:p>
-            <a:pPr marL="182880" indent="-182880">
+              <a:t>github.com/sgtsujith141-wq/cryptodrishti — source, 664 tests, the labelled corpus and its committed results, the vendored schemas, and the architecture diagram's editable source.</a:t>
+            </a:r>
+          </a:p>
+          <a:p>
+            <a:pPr marL="160020" indent="-160020">
               <a:spcBef>
                 <a:spcPts val="0"/>
               </a:spcBef>
@@ -9008,7 +9004,7 @@
                 <a:spcPts val="200"/>
               </a:spcAft>
               <a:buFont typeface="Arial"/>
-              <a:buChar char="•"/>
+              <a:buChar char="–"/>
             </a:pPr>
             <a:r>
               <a:rPr sz="1050">
@@ -9016,125 +9012,7 @@
                   <a:srgbClr val="1A1A1A"/>
                 </a:solidFill>
               </a:rPr>
-              <a:t>RFC 7693 — BLAKE2 · RFC 8032 — EdDSA · RFC 7748 — X25519 and X448</a:t>
-            </a:r>
-          </a:p>
-          <a:p>
-            <a:pPr marL="182880" indent="-182880">
-              <a:spcBef>
-                <a:spcPts val="0"/>
-              </a:spcBef>
-              <a:spcAft>
-                <a:spcPts val="200"/>
-              </a:spcAft>
-              <a:buFont typeface="Arial"/>
-              <a:buChar char="•"/>
-            </a:pPr>
-            <a:r>
-              <a:rPr sz="1050">
-                <a:solidFill>
-                  <a:srgbClr val="1A1A1A"/>
-                </a:solidFill>
-              </a:rPr>
-              <a:t>OCI Image Format Specification — image layout and layer whiteouts</a:t>
-            </a:r>
-          </a:p>
-          <a:p>
-            <a:pPr marL="0" indent="0">
-              <a:spcBef>
-                <a:spcPts val="600"/>
-              </a:spcBef>
-              <a:spcAft>
-                <a:spcPts val="200"/>
-              </a:spcAft>
-              <a:buNone/>
-            </a:pPr>
-            <a:r>
-              <a:rPr sz="1150" b="1">
-                <a:solidFill>
-                  <a:srgbClr val="8C1D1D"/>
-                </a:solidFill>
-              </a:rPr>
-              <a:t>Method</a:t>
-            </a:r>
-          </a:p>
-          <a:p>
-            <a:pPr marL="182880" indent="-182880">
-              <a:spcBef>
-                <a:spcPts val="0"/>
-              </a:spcBef>
-              <a:spcAft>
-                <a:spcPts val="200"/>
-              </a:spcAft>
-              <a:buFont typeface="Arial"/>
-              <a:buChar char="•"/>
-            </a:pPr>
-            <a:r>
-              <a:rPr sz="1050">
-                <a:solidFill>
-                  <a:srgbClr val="1A1A1A"/>
-                </a:solidFill>
-              </a:rPr>
-              <a:t>Mosca's inequality (X + Y &gt; Z) for exposure timing; Shor's and Grover's algorithms for the classification split.</a:t>
-            </a:r>
-          </a:p>
-          <a:p>
-            <a:pPr marL="0" indent="0">
-              <a:spcBef>
-                <a:spcPts val="600"/>
-              </a:spcBef>
-              <a:spcAft>
-                <a:spcPts val="200"/>
-              </a:spcAft>
-              <a:buNone/>
-            </a:pPr>
-            <a:r>
-              <a:rPr sz="1150" b="1">
-                <a:solidFill>
-                  <a:srgbClr val="8C1D1D"/>
-                </a:solidFill>
-              </a:rPr>
-              <a:t>Project</a:t>
-            </a:r>
-          </a:p>
-          <a:p>
-            <a:pPr marL="182880" indent="-182880">
-              <a:spcBef>
-                <a:spcPts val="0"/>
-              </a:spcBef>
-              <a:spcAft>
-                <a:spcPts val="200"/>
-              </a:spcAft>
-              <a:buFont typeface="Arial"/>
-              <a:buChar char="•"/>
-            </a:pPr>
-            <a:r>
-              <a:rPr sz="1050">
-                <a:solidFill>
-                  <a:srgbClr val="1A1A1A"/>
-                </a:solidFill>
-              </a:rPr>
-              <a:t>github.com/sgtsujith141-wq/cryptodrishti — source, 664 tests, the labelled benchmark corpus and its committed results, the vendored schemas, and the architecture diagram's editable source.</a:t>
-            </a:r>
-          </a:p>
-          <a:p>
-            <a:pPr marL="182880" indent="-182880">
-              <a:spcBef>
-                <a:spcPts val="0"/>
-              </a:spcBef>
-              <a:spcAft>
-                <a:spcPts val="200"/>
-              </a:spcAft>
-              <a:buFont typeface="Arial"/>
-              <a:buChar char="•"/>
-            </a:pPr>
-            <a:r>
-              <a:rPr sz="1050">
-                <a:solidFill>
-                  <a:srgbClr val="1A1A1A"/>
-                </a:solidFill>
-              </a:rPr>
-              <a:t>Problem statement SIH26164, raised by the National Technical Research Organisation (NTRO).</a:t>
+              <a:t>Problem statement SIH26164, National Technical Research Organisation (NTRO).</a:t>
             </a:r>
           </a:p>
         </p:txBody>
@@ -9337,7 +9215,7 @@
           <a:p>
             <a:pPr algn="ctr"/>
             <a:r>
-              <a:rPr lang="en-US" dirty="0" sz="900"/>
+              <a:rPr lang="en-US" dirty="0" sz="1000" b="1"/>
               <a:t>Zero-Day</a:t>
             </a:r>
             <a:endParaRPr lang="en-IN" dirty="0"/>
@@ -9374,51 +9252,9 @@
           </a:prstGeom>
         </p:spPr>
       </p:pic>
-      <p:sp>
-        <p:nvSpPr>
-          <p:cNvPr id="17411" name="cd-note"/>
-          <p:cNvSpPr txBox="1"/>
-          <p:nvPr/>
-        </p:nvSpPr>
-        <p:spPr>
-          <a:xfrm>
-            <a:off x="6693408" y="1115568"/>
-            <a:ext cx="5084064" cy="822960"/>
-          </a:xfrm>
-          <a:prstGeom prst="rect">
-            <a:avLst/>
-          </a:prstGeom>
-          <a:noFill/>
-        </p:spPr>
-        <p:txBody>
-          <a:bodyPr wrap="square">
-            <a:spAutoFit/>
-          </a:bodyPr>
-          <a:lstStyle/>
-          <a:p>
-            <a:pPr marL="0" indent="0">
-              <a:spcBef>
-                <a:spcPts val="0"/>
-              </a:spcBef>
-              <a:spcAft>
-                <a:spcPts val="200"/>
-              </a:spcAft>
-              <a:buNone/>
-            </a:pPr>
-            <a:r>
-              <a:rPr sz="1000" i="1">
-                <a:solidFill>
-                  <a:srgbClr val="5A5A5A"/>
-                </a:solidFill>
-              </a:rPr>
-              <a:t>Every externally sourced claim in this deck is one of the standards or specifications listed here. Nothing is claimed about quantum-computer arrival dates, regulatory deadlines or competing products: Q-Day is treated throughout as an operator-chosen scenario.</a:t>
-            </a:r>
-          </a:p>
-        </p:txBody>
-      </p:sp>
       <p:pic>
         <p:nvPicPr>
-          <p:cNvPr id="17412" name="cd-shot-05-cbom-export" descr="05-cbom-export-top46.png"/>
+          <p:cNvPr id="17411" name="cd-shot-05-cbom-export" descr="05-cbom-export-190-0-0.5.png"/>
           <p:cNvPicPr>
             <a:picLocks noChangeAspect="1"/>
           </p:cNvPicPr>
@@ -9432,8 +9268,8 @@
         </p:blipFill>
         <p:spPr>
           <a:xfrm>
-            <a:off x="6693408" y="1993392"/>
-            <a:ext cx="5084064" cy="926026"/>
+            <a:off x="6355080" y="1152144"/>
+            <a:ext cx="5422392" cy="1137505"/>
           </a:xfrm>
           <a:prstGeom prst="rect">
             <a:avLst/>
@@ -9442,14 +9278,14 @@
       </p:pic>
       <p:sp>
         <p:nvSpPr>
-          <p:cNvPr id="17413" name="cd-caption"/>
+          <p:cNvPr id="17412" name="cd-caption"/>
           <p:cNvSpPr txBox="1"/>
           <p:nvPr/>
         </p:nvSpPr>
         <p:spPr>
           <a:xfrm>
-            <a:off x="6693408" y="2974282"/>
-            <a:ext cx="5084064" cy="274320"/>
+            <a:off x="6355080" y="2353656"/>
+            <a:ext cx="5422392" cy="274320"/>
           </a:xfrm>
           <a:prstGeom prst="rect">
             <a:avLst/>
@@ -9471,14 +9307,14 @@
                   <a:srgbClr val="5A5A5A"/>
                 </a:solidFill>
               </a:rPr>
-              <a:t>Export and validation are the same screen: the CBOM is checked against the official schema on the spot.</a:t>
+              <a:t>Export and validation are the same screen: checked against the official schema on the spot.</a:t>
             </a:r>
           </a:p>
         </p:txBody>
       </p:sp>
       <p:pic>
         <p:nvPicPr>
-          <p:cNvPr id="17414" name="cd-shot-03-migration-plan" descr="03-migration-plan-top72.png"/>
+          <p:cNvPr id="17413" name="cd-shot-03-migration-plan" descr="03-migration-plan-190-0-0.72.png"/>
           <p:cNvPicPr>
             <a:picLocks noChangeAspect="1"/>
           </p:cNvPicPr>
@@ -9492,8 +9328,8 @@
         </p:blipFill>
         <p:spPr>
           <a:xfrm>
-            <a:off x="6693408" y="3522922"/>
-            <a:ext cx="5084064" cy="1718898"/>
+            <a:off x="6355080" y="2792569"/>
+            <a:ext cx="5422392" cy="1943166"/>
           </a:xfrm>
           <a:prstGeom prst="rect">
             <a:avLst/>
@@ -9502,14 +9338,14 @@
       </p:pic>
       <p:sp>
         <p:nvSpPr>
-          <p:cNvPr id="17415" name="cd-caption"/>
+          <p:cNvPr id="17414" name="cd-caption"/>
           <p:cNvSpPr txBox="1"/>
           <p:nvPr/>
         </p:nvSpPr>
         <p:spPr>
           <a:xfrm>
-            <a:off x="6693408" y="5296684"/>
-            <a:ext cx="5084064" cy="274320"/>
+            <a:off x="6355080" y="4799743"/>
+            <a:ext cx="5422392" cy="274320"/>
           </a:xfrm>
           <a:prstGeom prst="rect">
             <a:avLst/>
@@ -9531,7 +9367,49 @@
                   <a:srgbClr val="5A5A5A"/>
                 </a:solidFill>
               </a:rPr>
-              <a:t>The standards on the left, applied: every asset is given the target that matches its purpose, and anything unresolved is handed to a human instead of guessed.</a:t>
+              <a:t>The standards on the left, applied — every asset given the target that matches its resolved purpose.</a:t>
+            </a:r>
+          </a:p>
+        </p:txBody>
+      </p:sp>
+      <p:sp>
+        <p:nvSpPr>
+          <p:cNvPr id="17415" name="cd-note"/>
+          <p:cNvSpPr txBox="1"/>
+          <p:nvPr/>
+        </p:nvSpPr>
+        <p:spPr>
+          <a:xfrm>
+            <a:off x="6355080" y="5256942"/>
+            <a:ext cx="5422392" cy="822960"/>
+          </a:xfrm>
+          <a:prstGeom prst="rect">
+            <a:avLst/>
+          </a:prstGeom>
+          <a:noFill/>
+        </p:spPr>
+        <p:txBody>
+          <a:bodyPr wrap="square">
+            <a:spAutoFit/>
+          </a:bodyPr>
+          <a:lstStyle/>
+          <a:p>
+            <a:pPr marL="0" indent="0">
+              <a:spcBef>
+                <a:spcPts val="0"/>
+              </a:spcBef>
+              <a:spcAft>
+                <a:spcPts val="200"/>
+              </a:spcAft>
+              <a:buNone/>
+            </a:pPr>
+            <a:r>
+              <a:rPr sz="900" i="1">
+                <a:solidFill>
+                  <a:srgbClr val="5A5A5A"/>
+                </a:solidFill>
+              </a:rPr>
+              <a:t>Every externally sourced claim in this deck is one of the standards listed here. Nothing is claimed about quantum-computer arrival dates, regulatory deadlines or competing products — Q-Day is treated throughout as an operator-chosen scenario.</a:t>
             </a:r>
           </a:p>
         </p:txBody>

--- a/submission/CryptoDrishti-SIH26164-Idea-Presentation.pptx
+++ b/submission/CryptoDrishti-SIH26164-Idea-Presentation.pptx
@@ -8177,7 +8177,7 @@
                   <a:srgbClr val="8C1D1D"/>
                 </a:solidFill>
               </a:rPr>
-              <a:t>Measured evidence</a:t>
+              <a:t>Measured evidence — on a synthetic corpus, and only that</a:t>
             </a:r>
           </a:p>
           <a:p>
@@ -8196,7 +8196,7 @@
                   <a:srgbClr val="0F172A"/>
                 </a:solidFill>
               </a:rPr>
-              <a:t>Over the project's own labelled corpus of 116 findings: </a:t>
+              <a:t>Precision 1.000  ·  recall 1.000  ·  F1 1.000 </a:t>
             </a:r>
             <a:r>
               <a:rPr sz="1100">
@@ -8204,7 +8204,7 @@
                   <a:srgbClr val="1A1A1A"/>
                 </a:solidFill>
               </a:rPr>
-              <a:t>precision 1.000, recall 1.000, F1 1.000, with cryptographic purpose correct on 114 of 114 scored cases.</a:t>
+              <a:t>over 116 hand-labelled findings across six scanners.</a:t>
             </a:r>
           </a:p>
           <a:p>
@@ -8218,12 +8218,39 @@
               <a:buNone/>
             </a:pPr>
             <a:r>
+              <a:rPr sz="1100" b="1">
+                <a:solidFill>
+                  <a:srgbClr val="0F172A"/>
+                </a:solidFill>
+              </a:rPr>
+              <a:t>Cryptographic purpose correct on 114 of 114 </a:t>
+            </a:r>
+            <a:r>
+              <a:rPr sz="1100">
+                <a:solidFill>
+                  <a:srgbClr val="1A1A1A"/>
+                </a:solidFill>
+              </a:rPr>
+              <a:t>scored cases; assurance on 116 of 116.</a:t>
+            </a:r>
+          </a:p>
+          <a:p>
+            <a:pPr marL="0" indent="0">
+              <a:spcBef>
+                <a:spcPts val="0"/>
+              </a:spcBef>
+              <a:spcAft>
+                <a:spcPts val="300"/>
+              </a:spcAft>
+              <a:buNone/>
+            </a:pPr>
+            <a:r>
               <a:rPr sz="1000" i="1">
                 <a:solidFill>
                   <a:srgbClr val="5A5A5A"/>
                 </a:solidFill>
               </a:rPr>
-              <a:t>Read that precisely. These figures measure a developer-written synthetic corpus. They are NOT an estimate of real-world enterprise accuracy, which this project has not measured and does not claim. Network-sensor accuracy is excluded, because what a TLS handshake negotiates depends on the local library build.</a:t>
+              <a:t>Read that precisely. These figures measure a developer-written corpus this project wrote. They are NOT an estimate of real-world enterprise accuracy, which has not been measured and is not claimed. Network-sensor accuracy is excluded entirely, because what a TLS handshake negotiates depends on the local library build.</a:t>
             </a:r>
           </a:p>
         </p:txBody>
@@ -8463,9 +8490,70 @@
           </a:prstGeom>
         </p:spPr>
       </p:pic>
+      <p:sp>
+        <p:nvSpPr>
+          <p:cNvPr id="17411" name="cd-note"/>
+          <p:cNvSpPr txBox="1"/>
+          <p:nvPr/>
+        </p:nvSpPr>
+        <p:spPr>
+          <a:xfrm>
+            <a:off x="411480" y="5248656"/>
+            <a:ext cx="5532120" cy="987552"/>
+          </a:xfrm>
+          <a:prstGeom prst="rect">
+            <a:avLst/>
+          </a:prstGeom>
+          <a:noFill/>
+        </p:spPr>
+        <p:txBody>
+          <a:bodyPr wrap="square">
+            <a:spAutoFit/>
+          </a:bodyPr>
+          <a:lstStyle/>
+          <a:p>
+            <a:pPr marL="0" indent="0">
+              <a:spcBef>
+                <a:spcPts val="0"/>
+              </a:spcBef>
+              <a:spcAft>
+                <a:spcPts val="200"/>
+              </a:spcAft>
+              <a:buNone/>
+            </a:pPr>
+            <a:r>
+              <a:rPr sz="1100" b="1">
+                <a:solidFill>
+                  <a:srgbClr val="8C1D1D"/>
+                </a:solidFill>
+              </a:rPr>
+              <a:t>Why it matters</a:t>
+            </a:r>
+          </a:p>
+          <a:p>
+            <a:pPr marL="0" indent="0">
+              <a:spcBef>
+                <a:spcPts val="0"/>
+              </a:spcBef>
+              <a:spcAft>
+                <a:spcPts val="200"/>
+              </a:spcAft>
+              <a:buNone/>
+            </a:pPr>
+            <a:r>
+              <a:rPr sz="1050">
+                <a:solidFill>
+                  <a:srgbClr val="1A1A1A"/>
+                </a:solidFill>
+              </a:rPr>
+              <a:t>The inventory is the gate every other migration step waits behind. Standardised algorithms do not help an estate that cannot say where its cryptography is. This produces that list, with the evidence attached, on a machine that never has to leave the building.</a:t>
+            </a:r>
+          </a:p>
+        </p:txBody>
+      </p:sp>
       <p:pic>
         <p:nvPicPr>
-          <p:cNvPr id="17411" name="cd-shot-01-assessment" descr="01-assessment-190-0-1.png"/>
+          <p:cNvPr id="17412" name="cd-shot-01-assessment" descr="01-assessment-190-0-1.png"/>
           <p:cNvPicPr>
             <a:picLocks noChangeAspect="1"/>
           </p:cNvPicPr>
@@ -8489,7 +8577,7 @@
       </p:pic>
       <p:sp>
         <p:nvSpPr>
-          <p:cNvPr id="17412" name="cd-caption"/>
+          <p:cNvPr id="17413" name="cd-caption"/>
           <p:cNvSpPr txBox="1"/>
           <p:nvPr/>
         </p:nvSpPr>
@@ -8525,7 +8613,7 @@
       </p:sp>
       <p:sp>
         <p:nvSpPr>
-          <p:cNvPr id="17413" name="cd-note"/>
+          <p:cNvPr id="17414" name="cd-note"/>
           <p:cNvSpPr txBox="1"/>
           <p:nvPr/>
         </p:nvSpPr>
@@ -9013,6 +9101,44 @@
                 </a:solidFill>
               </a:rPr>
               <a:t>Problem statement SIH26164, National Technical Research Organisation (NTRO).</a:t>
+            </a:r>
+          </a:p>
+          <a:p>
+            <a:pPr marL="0" indent="0">
+              <a:spcBef>
+                <a:spcPts val="600"/>
+              </a:spcBef>
+              <a:spcAft>
+                <a:spcPts val="200"/>
+              </a:spcAft>
+              <a:buNone/>
+            </a:pPr>
+            <a:r>
+              <a:rPr sz="1100" b="1">
+                <a:solidFill>
+                  <a:srgbClr val="8C1D1D"/>
+                </a:solidFill>
+              </a:rPr>
+              <a:t>Where this has not been checked</a:t>
+            </a:r>
+          </a:p>
+          <a:p>
+            <a:pPr marL="0" indent="0">
+              <a:spcBef>
+                <a:spcPts val="0"/>
+              </a:spcBef>
+              <a:spcAft>
+                <a:spcPts val="200"/>
+              </a:spcAft>
+              <a:buNone/>
+            </a:pPr>
+            <a:r>
+              <a:rPr sz="1050">
+                <a:solidFill>
+                  <a:srgbClr val="1A1A1A"/>
+                </a:solidFill>
+              </a:rPr>
+              <a:t>The classifications follow NIST IR 8547 and the CycloneDX specification as we read them; they have not been reviewed by an external cryptographer. The vendored schemas are checksummed and pinned, and CI fails if they drift — but they are a snapshot of an upstream that moves.</a:t>
             </a:r>
           </a:p>
         </p:txBody>

--- a/submission/CryptoDrishti-SIH26164-Idea-Presentation.pptx
+++ b/submission/CryptoDrishti-SIH26164-Idea-Presentation.pptx
@@ -5632,8 +5632,8 @@
         </p:nvSpPr>
         <p:spPr>
           <a:xfrm>
-            <a:off x="411480" y="1975104"/>
-            <a:ext cx="5715000" cy="3246120"/>
+            <a:off x="420624" y="1810512"/>
+            <a:ext cx="5897880" cy="3931920"/>
           </a:xfrm>
           <a:prstGeom prst="rect">
             <a:avLst/>
@@ -5651,17 +5651,17 @@
                 <a:spcPts val="0"/>
               </a:spcBef>
               <a:spcAft>
-                <a:spcPts val="900"/>
-              </a:spcAft>
-              <a:buNone/>
-            </a:pPr>
-            <a:r>
-              <a:rPr sz="1500" b="1">
-                <a:solidFill>
-                  <a:srgbClr val="0F172A"/>
-                </a:solidFill>
-              </a:rPr>
-              <a:t>Problem Statement ID – SIH26164</a:t>
+                <a:spcPts val="400"/>
+              </a:spcAft>
+              <a:buNone/>
+            </a:pPr>
+            <a:r>
+              <a:rPr sz="3000" b="1" i="0">
+                <a:solidFill>
+                  <a:srgbClr val="9E3A24"/>
+                </a:solidFill>
+              </a:rPr>
+              <a:t>CryptoDrishti</a:t>
             </a:r>
             <a:endParaRPr lang="en-US" dirty="0"/>
           </a:p>
@@ -5671,17 +5671,17 @@
                 <a:spcPts val="0"/>
               </a:spcBef>
               <a:spcAft>
-                <a:spcPts val="900"/>
-              </a:spcAft>
-              <a:buNone/>
-            </a:pPr>
-            <a:r>
-              <a:rPr sz="1500">
-                <a:solidFill>
-                  <a:srgbClr val="1A1A1A"/>
-                </a:solidFill>
-              </a:rPr>
-              <a:t>Problem Statement Title – Enterprise Cryptographic Discovery &amp; Analysis Tool (ECDAT)</a:t>
+                <a:spcPts val="1300"/>
+              </a:spcAft>
+              <a:buNone/>
+            </a:pPr>
+            <a:r>
+              <a:rPr sz="1800" b="0" i="0">
+                <a:solidFill>
+                  <a:srgbClr val="1A1A1C"/>
+                </a:solidFill>
+              </a:rPr>
+              <a:t>An evidence-driven tool for discovering enterprise cryptography, assessing quantum exposure and planning post-quantum migration.</a:t>
             </a:r>
           </a:p>
           <a:p>
@@ -5690,17 +5690,25 @@
                 <a:spcPts val="0"/>
               </a:spcBef>
               <a:spcAft>
-                <a:spcPts val="900"/>
-              </a:spcAft>
-              <a:buNone/>
-            </a:pPr>
-            <a:r>
-              <a:rPr sz="1500">
-                <a:solidFill>
-                  <a:srgbClr val="1A1A1A"/>
-                </a:solidFill>
-              </a:rPr>
-              <a:t>Theme – 26164</a:t>
+                <a:spcPts val="500"/>
+              </a:spcAft>
+              <a:buNone/>
+            </a:pPr>
+            <a:r>
+              <a:rPr sz="1600" b="1" i="0">
+                <a:solidFill>
+                  <a:srgbClr val="1A1A1C"/>
+                </a:solidFill>
+              </a:rPr>
+              <a:t>Problem Statement ID – </a:t>
+            </a:r>
+            <a:r>
+              <a:rPr sz="1600" b="0" i="0">
+                <a:solidFill>
+                  <a:srgbClr val="3E3E44"/>
+                </a:solidFill>
+              </a:rPr>
+              <a:t>SIH26164</a:t>
             </a:r>
           </a:p>
           <a:p>
@@ -5709,17 +5717,25 @@
                 <a:spcPts val="0"/>
               </a:spcBef>
               <a:spcAft>
-                <a:spcPts val="900"/>
-              </a:spcAft>
-              <a:buNone/>
-            </a:pPr>
-            <a:r>
-              <a:rPr sz="1500">
-                <a:solidFill>
-                  <a:srgbClr val="1A1A1A"/>
-                </a:solidFill>
-              </a:rPr>
-              <a:t>PS Category – Software</a:t>
+                <a:spcPts val="500"/>
+              </a:spcAft>
+              <a:buNone/>
+            </a:pPr>
+            <a:r>
+              <a:rPr sz="1600" b="1" i="0">
+                <a:solidFill>
+                  <a:srgbClr val="1A1A1C"/>
+                </a:solidFill>
+              </a:rPr>
+              <a:t>Problem Statement Title – </a:t>
+            </a:r>
+            <a:r>
+              <a:rPr sz="1600" b="0" i="0">
+                <a:solidFill>
+                  <a:srgbClr val="3E3E44"/>
+                </a:solidFill>
+              </a:rPr>
+              <a:t>Enterprise Cryptographic Discovery &amp; Analysis Tool (ECDAT)</a:t>
             </a:r>
           </a:p>
           <a:p>
@@ -5728,17 +5744,25 @@
                 <a:spcPts val="0"/>
               </a:spcBef>
               <a:spcAft>
-                <a:spcPts val="900"/>
-              </a:spcAft>
-              <a:buNone/>
-            </a:pPr>
-            <a:r>
-              <a:rPr sz="1500">
-                <a:solidFill>
-                  <a:srgbClr val="1A1A1A"/>
-                </a:solidFill>
-              </a:rPr>
-              <a:t>Team ID – 146876</a:t>
+                <a:spcPts val="500"/>
+              </a:spcAft>
+              <a:buNone/>
+            </a:pPr>
+            <a:r>
+              <a:rPr sz="1600" b="1" i="0">
+                <a:solidFill>
+                  <a:srgbClr val="1A1A1C"/>
+                </a:solidFill>
+              </a:rPr>
+              <a:t>Theme – </a:t>
+            </a:r>
+            <a:r>
+              <a:rPr sz="1600" b="0" i="0">
+                <a:solidFill>
+                  <a:srgbClr val="3E3E44"/>
+                </a:solidFill>
+              </a:rPr>
+              <a:t>26164</a:t>
             </a:r>
           </a:p>
           <a:p>
@@ -5747,17 +5771,79 @@
                 <a:spcPts val="0"/>
               </a:spcBef>
               <a:spcAft>
-                <a:spcPts val="900"/>
-              </a:spcAft>
-              <a:buNone/>
-            </a:pPr>
-            <a:r>
-              <a:rPr sz="1500">
-                <a:solidFill>
-                  <a:srgbClr val="1A1A1A"/>
-                </a:solidFill>
-              </a:rPr>
-              <a:t>Team Name – Zero-Day</a:t>
+                <a:spcPts val="500"/>
+              </a:spcAft>
+              <a:buNone/>
+            </a:pPr>
+            <a:r>
+              <a:rPr sz="1600" b="1" i="0">
+                <a:solidFill>
+                  <a:srgbClr val="1A1A1C"/>
+                </a:solidFill>
+              </a:rPr>
+              <a:t>PS Category – </a:t>
+            </a:r>
+            <a:r>
+              <a:rPr sz="1600" b="0" i="0">
+                <a:solidFill>
+                  <a:srgbClr val="3E3E44"/>
+                </a:solidFill>
+              </a:rPr>
+              <a:t>Software</a:t>
+            </a:r>
+          </a:p>
+          <a:p>
+            <a:pPr marL="0" indent="0">
+              <a:spcBef>
+                <a:spcPts val="0"/>
+              </a:spcBef>
+              <a:spcAft>
+                <a:spcPts val="500"/>
+              </a:spcAft>
+              <a:buNone/>
+            </a:pPr>
+            <a:r>
+              <a:rPr sz="1600" b="1" i="0">
+                <a:solidFill>
+                  <a:srgbClr val="1A1A1C"/>
+                </a:solidFill>
+              </a:rPr>
+              <a:t>Team ID – </a:t>
+            </a:r>
+            <a:r>
+              <a:rPr sz="1600" b="0" i="0">
+                <a:solidFill>
+                  <a:srgbClr val="3E3E44"/>
+                </a:solidFill>
+              </a:rPr>
+              <a:t>146876</a:t>
+            </a:r>
+          </a:p>
+          <a:p>
+            <a:pPr marL="0" indent="0">
+              <a:spcBef>
+                <a:spcPts val="0"/>
+              </a:spcBef>
+              <a:spcAft>
+                <a:spcPts val="500"/>
+              </a:spcAft>
+              <a:buNone/>
+            </a:pPr>
+            <a:r>
+              <a:rPr sz="1600" b="1" i="0">
+                <a:solidFill>
+                  <a:srgbClr val="1A1A1C"/>
+                </a:solidFill>
+              </a:rPr>
+              <a:t>Team Name – </a:t>
+            </a:r>
+            <a:r>
+              <a:rPr sz="1600" b="0" i="0">
+                <a:solidFill>
+                  <a:srgbClr val="3E3E44"/>
+                </a:solidFill>
+              </a:rPr>
+              <a:t>Zero-Day</a:t>
             </a:r>
           </a:p>
         </p:txBody>
@@ -5792,86 +5878,6 @@
           </a:prstGeom>
         </p:spPr>
       </p:pic>
-      <p:sp>
-        <p:nvSpPr>
-          <p:cNvPr id="38" name="cd-note"/>
-          <p:cNvSpPr txBox="1"/>
-          <p:nvPr/>
-        </p:nvSpPr>
-        <p:spPr>
-          <a:xfrm>
-            <a:off x="411480" y="5376672"/>
-            <a:ext cx="5715000" cy="914400"/>
-          </a:xfrm>
-          <a:prstGeom prst="rect">
-            <a:avLst/>
-          </a:prstGeom>
-          <a:noFill/>
-        </p:spPr>
-        <p:txBody>
-          <a:bodyPr wrap="square">
-            <a:spAutoFit/>
-          </a:bodyPr>
-          <a:lstStyle/>
-          <a:p>
-            <a:pPr marL="0" indent="0">
-              <a:spcBef>
-                <a:spcPts val="0"/>
-              </a:spcBef>
-              <a:spcAft>
-                <a:spcPts val="200"/>
-              </a:spcAft>
-              <a:buNone/>
-            </a:pPr>
-            <a:r>
-              <a:rPr sz="1500" b="1">
-                <a:solidFill>
-                  <a:srgbClr val="8C1D1D"/>
-                </a:solidFill>
-              </a:rPr>
-              <a:t>CryptoDrishti</a:t>
-            </a:r>
-          </a:p>
-          <a:p>
-            <a:pPr marL="0" indent="0">
-              <a:spcBef>
-                <a:spcPts val="0"/>
-              </a:spcBef>
-              <a:spcAft>
-                <a:spcPts val="200"/>
-              </a:spcAft>
-              <a:buNone/>
-            </a:pPr>
-            <a:r>
-              <a:rPr sz="1200">
-                <a:solidFill>
-                  <a:srgbClr val="1A1A1A"/>
-                </a:solidFill>
-              </a:rPr>
-              <a:t>Find every cryptographic asset an organisation owns, prove what the evidence actually supports, and say what each one must become.</a:t>
-            </a:r>
-          </a:p>
-          <a:p>
-            <a:pPr marL="0" indent="0">
-              <a:spcBef>
-                <a:spcPts val="0"/>
-              </a:spcBef>
-              <a:spcAft>
-                <a:spcPts val="200"/>
-              </a:spcAft>
-              <a:buNone/>
-            </a:pPr>
-            <a:r>
-              <a:rPr sz="1100" i="1">
-                <a:solidFill>
-                  <a:srgbClr val="5A5A5A"/>
-                </a:solidFill>
-              </a:rPr>
-              <a:t>Working tool · 664 tests · CycloneDX CBOM validated against the official schema · runs offline.</a:t>
-            </a:r>
-          </a:p>
-        </p:txBody>
-      </p:sp>
     </p:spTree>
   </p:cSld>
   <p:clrMapOvr>
@@ -5977,7 +5983,7 @@
           <a:p>
             <a:pPr eaLnBrk="1" hangingPunct="1"/>
             <a:r>
-              <a:rPr lang="en-US" sz="2900" b="1" dirty="0">
+              <a:rPr lang="en-US" sz="2800" b="1" dirty="0">
                 <a:latin typeface="Times New Roman" panose="02020603050405020304" pitchFamily="18" charset="0"/>
                 <a:ea typeface="ＭＳ Ｐゴシック" pitchFamily="1" charset="-128"/>
                 <a:cs typeface="Times New Roman" panose="02020603050405020304" pitchFamily="18" charset="0"/>
@@ -6005,8 +6011,8 @@
         </p:nvSpPr>
         <p:spPr bwMode="auto">
           <a:xfrm>
-            <a:off x="411480" y="1115568"/>
-            <a:ext cx="5440680" cy="3931920"/>
+            <a:off x="420624" y="1097280"/>
+            <a:ext cx="5541264" cy="3895344"/>
           </a:xfrm>
           <a:prstGeom prst="rect">
             <a:avLst/>
@@ -6030,14 +6036,14 @@
                 <a:spcPts val="0"/>
               </a:spcBef>
               <a:spcAft>
-                <a:spcPts val="400"/>
-              </a:spcAft>
-              <a:buNone/>
-            </a:pPr>
-            <a:r>
-              <a:rPr sz="1200" b="1">
-                <a:solidFill>
-                  <a:srgbClr val="8C1D1D"/>
+                <a:spcPts val="500"/>
+              </a:spcAft>
+              <a:buNone/>
+            </a:pPr>
+            <a:r>
+              <a:rPr sz="2100" b="1" i="0">
+                <a:solidFill>
+                  <a:srgbClr val="9E3A24"/>
                 </a:solidFill>
               </a:rPr>
               <a:t>The problem</a:t>
@@ -6056,36 +6062,36 @@
                 <a:spcPts val="0"/>
               </a:spcBef>
               <a:spcAft>
-                <a:spcPts val="400"/>
-              </a:spcAft>
-              <a:buNone/>
-            </a:pPr>
-            <a:r>
-              <a:rPr sz="1150">
-                <a:solidFill>
-                  <a:srgbClr val="1A1A1A"/>
-                </a:solidFill>
-              </a:rPr>
-              <a:t>Post-quantum migration is an inventory problem before it is a mathematics problem. NIST published the replacement algorithms in 2024; almost nothing has moved, because no one can list what they have. Cryptography hides in source, transitive dependencies, binaries with no source, certificate stores, deployment config and shipped container images.</a:t>
+                <a:spcPts val="600"/>
+              </a:spcAft>
+              <a:buNone/>
+            </a:pPr>
+            <a:r>
+              <a:rPr sz="1800" b="0" i="0">
+                <a:solidFill>
+                  <a:srgbClr val="3E3E44"/>
+                </a:solidFill>
+              </a:rPr>
+              <a:t>Cryptographic assets are spread across application code, third-party libraries, configuration, certificates, compiled binaries and container images. Each records cryptography differently, and none of them is a list. Without a reliable inventory, an organisation cannot say which assets need quantum-safe migration, or in what order.</a:t>
             </a:r>
           </a:p>
           <a:p>
             <a:pPr marL="0" indent="0">
               <a:spcBef>
-                <a:spcPts val="800"/>
-              </a:spcBef>
-              <a:spcAft>
-                <a:spcPts val="400"/>
-              </a:spcAft>
-              <a:buNone/>
-            </a:pPr>
-            <a:r>
-              <a:rPr sz="1200" b="1">
-                <a:solidFill>
-                  <a:srgbClr val="8C1D1D"/>
-                </a:solidFill>
-              </a:rPr>
-              <a:t>Our solution</a:t>
+                <a:spcPts val="900"/>
+              </a:spcBef>
+              <a:spcAft>
+                <a:spcPts val="500"/>
+              </a:spcAft>
+              <a:buNone/>
+            </a:pPr>
+            <a:r>
+              <a:rPr sz="2100" b="1" i="0">
+                <a:solidFill>
+                  <a:srgbClr val="9E3A24"/>
+                </a:solidFill>
+              </a:rPr>
+              <a:t>What CryptoDrishti is</a:t>
             </a:r>
           </a:p>
           <a:p>
@@ -6094,120 +6100,17 @@
                 <a:spcPts val="0"/>
               </a:spcBef>
               <a:spcAft>
-                <a:spcPts val="400"/>
-              </a:spcAft>
-              <a:buNone/>
-            </a:pPr>
-            <a:r>
-              <a:rPr sz="1150">
-                <a:solidFill>
-                  <a:srgbClr val="1A1A1A"/>
-                </a:solidFill>
-              </a:rPr>
-              <a:t>Seven sensors read what is actually there. Every finding becomes a distinct asset, classified by what a quantum computer does to it, scored, matched to a named replacement, and exported as a CycloneDX CBOM. One operator, one machine, no network.</a:t>
-            </a:r>
-          </a:p>
-          <a:p>
-            <a:pPr marL="0" indent="0">
-              <a:spcBef>
-                <a:spcPts val="800"/>
-              </a:spcBef>
-              <a:spcAft>
-                <a:spcPts val="400"/>
-              </a:spcAft>
-              <a:buNone/>
-            </a:pPr>
-            <a:r>
-              <a:rPr sz="1200" b="1">
-                <a:solidFill>
-                  <a:srgbClr val="8C1D1D"/>
-                </a:solidFill>
-              </a:rPr>
-              <a:t>Three things no other inventory does</a:t>
-            </a:r>
-          </a:p>
-          <a:p>
-            <a:pPr marL="160020" indent="-160020">
-              <a:spcBef>
-                <a:spcPts val="0"/>
-              </a:spcBef>
-              <a:spcAft>
-                <a:spcPts val="400"/>
-              </a:spcAft>
-              <a:buFont typeface="Arial"/>
-              <a:buChar char="–"/>
-            </a:pPr>
-            <a:r>
-              <a:rPr sz="1150" b="1">
-                <a:solidFill>
-                  <a:srgbClr val="0F172A"/>
-                </a:solidFill>
-              </a:rPr>
-              <a:t>Purpose, not keyword. </a:t>
-            </a:r>
-            <a:r>
-              <a:rPr sz="1150">
-                <a:solidFill>
-                  <a:srgbClr val="1A1A1A"/>
-                </a:solidFill>
-              </a:rPr>
-              <a:t>RSA signing and RSA key transport are one algorithm and two migrations — ML-DSA against ML-KEM. Purpose is resolved from the call site, and when the evidence is silent the tool names no target rather than the wrong one.</a:t>
-            </a:r>
-          </a:p>
-          <a:p>
-            <a:pPr marL="160020" indent="-160020">
-              <a:spcBef>
-                <a:spcPts val="0"/>
-              </a:spcBef>
-              <a:spcAft>
-                <a:spcPts val="400"/>
-              </a:spcAft>
-              <a:buFont typeface="Arial"/>
-              <a:buChar char="–"/>
-            </a:pPr>
-            <a:r>
-              <a:rPr sz="1150" b="1">
-                <a:solidFill>
-                  <a:srgbClr val="0F172A"/>
-                </a:solidFill>
-              </a:rPr>
-              <a:t>Assurance is a field, not a footnote. </a:t>
-            </a:r>
-            <a:r>
-              <a:rPr sz="1150">
-                <a:solidFill>
-                  <a:srgbClr val="1A1A1A"/>
-                </a:solidFill>
-              </a:rPr>
-              <a:t>Capability, declared, used, observed. A library that can do RSA is not proof that RSA runs.</a:t>
-            </a:r>
-          </a:p>
-          <a:p>
-            <a:pPr marL="160020" indent="-160020">
-              <a:spcBef>
-                <a:spcPts val="0"/>
-              </a:spcBef>
-              <a:spcAft>
-                <a:spcPts val="400"/>
-              </a:spcAft>
-              <a:buFont typeface="Arial"/>
-              <a:buChar char="–"/>
-            </a:pPr>
-            <a:r>
-              <a:rPr sz="1150" b="1">
-                <a:solidFill>
-                  <a:srgbClr val="0F172A"/>
-                </a:solidFill>
-              </a:rPr>
-              <a:t>Containers read layer by layer. </a:t>
-            </a:r>
-            <a:r>
-              <a:rPr sz="1150">
-                <a:solidFill>
-                  <a:srgbClr val="1A1A1A"/>
-                </a:solidFill>
-              </a:rPr>
-              <a:t>A key deleted by a later layer is reported as historical: gone at runtime, still extractable from the archive.</a:t>
+                <a:spcPts val="0"/>
+              </a:spcAft>
+              <a:buNone/>
+            </a:pPr>
+            <a:r>
+              <a:rPr sz="1800" b="0" i="0">
+                <a:solidFill>
+                  <a:srgbClr val="3E3E44"/>
+                </a:solidFill>
+              </a:rPr>
+              <a:t>CryptoDrishti discovers cryptographic evidence across those surfaces, normalises it into one inventory, assesses each asset's quantum exposure, and produces evidence-backed migration recommendations and a CycloneDX Cryptography Bill of Materials.</a:t>
             </a:r>
           </a:p>
         </p:txBody>
@@ -6327,7 +6230,7 @@
           <a:p>
             <a:pPr algn="ctr"/>
             <a:r>
-              <a:rPr lang="en-US" dirty="0" sz="1000" b="1"/>
+              <a:rPr lang="en-US" dirty="0" sz="1100" b="1"/>
               <a:t>Zero-Day</a:t>
             </a:r>
             <a:endParaRPr lang="en-IN" dirty="0"/>
@@ -6364,40 +6267,16 @@
           </a:prstGeom>
         </p:spPr>
       </p:pic>
-      <p:pic>
-        <p:nvPicPr>
-          <p:cNvPr id="15363" name="cd-shot-04-inventory" descr="04-inventory-190-0-0.58.png"/>
-          <p:cNvPicPr>
-            <a:picLocks noChangeAspect="1"/>
-          </p:cNvPicPr>
+      <p:sp>
+        <p:nvSpPr>
+          <p:cNvPr id="15363" name="cd-right"/>
+          <p:cNvSpPr txBox="1"/>
           <p:nvPr/>
-        </p:nvPicPr>
-        <p:blipFill>
-          <a:blip r:embed="rId4"/>
-          <a:stretch>
-            <a:fillRect/>
-          </a:stretch>
-        </p:blipFill>
+        </p:nvSpPr>
         <p:spPr>
           <a:xfrm>
-            <a:off x="6053328" y="1188720"/>
-            <a:ext cx="5724144" cy="3550053"/>
-          </a:xfrm>
-          <a:prstGeom prst="rect">
-            <a:avLst/>
-          </a:prstGeom>
-        </p:spPr>
-      </p:pic>
-      <p:sp>
-        <p:nvSpPr>
-          <p:cNvPr id="15364" name="cd-caption"/>
-          <p:cNvSpPr txBox="1"/>
-          <p:nvPr/>
-        </p:nvSpPr>
-        <p:spPr>
-          <a:xfrm>
-            <a:off x="6053328" y="4802781"/>
-            <a:ext cx="5724144" cy="274320"/>
+            <a:off x="6400800" y="1097280"/>
+            <a:ext cx="5367527" cy="3895344"/>
           </a:xfrm>
           <a:prstGeom prst="rect">
             <a:avLst/>
@@ -6405,35 +6284,219 @@
           <a:noFill/>
         </p:spPr>
         <p:txBody>
-          <a:bodyPr wrap="square">
+          <a:bodyPr wrap="square" lIns="0" rIns="0" tIns="0" bIns="0">
             <a:spAutoFit/>
           </a:bodyPr>
           <a:lstStyle/>
           <a:p>
             <a:pPr marL="0" indent="0">
-              <a:buNone/>
-            </a:pPr>
-            <a:r>
-              <a:rPr sz="950">
-                <a:solidFill>
-                  <a:srgbClr val="5A5A5A"/>
-                </a:solidFill>
-              </a:rPr>
-              <a:t>One scan. Three RSA findings, three different recommendations — and the third refuses to guess.</a:t>
-            </a:r>
-          </a:p>
-        </p:txBody>
-      </p:sp>
-      <p:sp>
-        <p:nvSpPr>
-          <p:cNvPr id="15365" name="cd-note"/>
+              <a:spcBef>
+                <a:spcPts val="0"/>
+              </a:spcBef>
+              <a:spcAft>
+                <a:spcPts val="500"/>
+              </a:spcAft>
+              <a:buNone/>
+            </a:pPr>
+            <a:r>
+              <a:rPr sz="2100" b="1" i="0">
+                <a:solidFill>
+                  <a:srgbClr val="9E3A24"/>
+                </a:solidFill>
+              </a:rPr>
+              <a:t>What it does</a:t>
+            </a:r>
+          </a:p>
+          <a:p>
+            <a:pPr marL="146050" indent="-146050">
+              <a:spcBef>
+                <a:spcPts val="0"/>
+              </a:spcBef>
+              <a:spcAft>
+                <a:spcPts val="500"/>
+              </a:spcAft>
+              <a:buFont typeface="Arial"/>
+              <a:buChar char="–"/>
+            </a:pPr>
+            <a:r>
+              <a:rPr sz="1500" b="1" i="0">
+                <a:solidFill>
+                  <a:srgbClr val="1A1A1C"/>
+                </a:solidFill>
+              </a:rPr>
+              <a:t>Multi-surface discovery — </a:t>
+            </a:r>
+            <a:r>
+              <a:rPr sz="1500" b="0" i="0">
+                <a:solidFill>
+                  <a:srgbClr val="3E3E44"/>
+                </a:solidFill>
+              </a:rPr>
+              <a:t>seven sensors: code, dependencies, binaries, certificates, configuration, images, one named TLS endpoint</a:t>
+            </a:r>
+          </a:p>
+          <a:p>
+            <a:pPr marL="146050" indent="-146050">
+              <a:spcBef>
+                <a:spcPts val="0"/>
+              </a:spcBef>
+              <a:spcAft>
+                <a:spcPts val="500"/>
+              </a:spcAft>
+              <a:buFont typeface="Arial"/>
+              <a:buChar char="–"/>
+            </a:pPr>
+            <a:r>
+              <a:rPr sz="1500" b="1" i="0">
+                <a:solidFill>
+                  <a:srgbClr val="1A1A1C"/>
+                </a:solidFill>
+              </a:rPr>
+              <a:t>Purpose-aware classification — </a:t>
+            </a:r>
+            <a:r>
+              <a:rPr sz="1500" b="0" i="0">
+                <a:solidFill>
+                  <a:srgbClr val="3E3E44"/>
+                </a:solidFill>
+              </a:rPr>
+              <a:t>an algorithm is classified by what it is used for, not by its name</a:t>
+            </a:r>
+          </a:p>
+          <a:p>
+            <a:pPr marL="146050" indent="-146050">
+              <a:spcBef>
+                <a:spcPts val="0"/>
+              </a:spcBef>
+              <a:spcAft>
+                <a:spcPts val="500"/>
+              </a:spcAft>
+              <a:buFont typeface="Arial"/>
+              <a:buChar char="–"/>
+            </a:pPr>
+            <a:r>
+              <a:rPr sz="1500" b="1" i="0">
+                <a:solidFill>
+                  <a:srgbClr val="1A1A1C"/>
+                </a:solidFill>
+              </a:rPr>
+              <a:t>Evidence assurance — </a:t>
+            </a:r>
+            <a:r>
+              <a:rPr sz="1500" b="0" i="0">
+                <a:solidFill>
+                  <a:srgbClr val="3E3E44"/>
+                </a:solidFill>
+              </a:rPr>
+              <a:t>capability, declared, used and observed stay distinct grades</a:t>
+            </a:r>
+          </a:p>
+          <a:p>
+            <a:pPr marL="146050" indent="-146050">
+              <a:spcBef>
+                <a:spcPts val="0"/>
+              </a:spcBef>
+              <a:spcAft>
+                <a:spcPts val="500"/>
+              </a:spcAft>
+              <a:buFont typeface="Arial"/>
+              <a:buChar char="–"/>
+            </a:pPr>
+            <a:r>
+              <a:rPr sz="1500" b="1" i="0">
+                <a:solidFill>
+                  <a:srgbClr val="1A1A1C"/>
+                </a:solidFill>
+              </a:rPr>
+              <a:t>Per-asset risk prioritisation — </a:t>
+            </a:r>
+            <a:r>
+              <a:rPr sz="1500" b="0" i="0">
+                <a:solidFill>
+                  <a:srgbClr val="3E3E44"/>
+                </a:solidFill>
+              </a:rPr>
+              <a:t>Mosca's inequality with operator-supplied asset context</a:t>
+            </a:r>
+          </a:p>
+          <a:p>
+            <a:pPr marL="146050" indent="-146050">
+              <a:spcBef>
+                <a:spcPts val="0"/>
+              </a:spcBef>
+              <a:spcAft>
+                <a:spcPts val="500"/>
+              </a:spcAft>
+              <a:buFont typeface="Arial"/>
+              <a:buChar char="–"/>
+            </a:pPr>
+            <a:r>
+              <a:rPr sz="1500" b="1" i="0">
+                <a:solidFill>
+                  <a:srgbClr val="1A1A1C"/>
+                </a:solidFill>
+              </a:rPr>
+              <a:t>Standards-conformant export — </a:t>
+            </a:r>
+            <a:r>
+              <a:rPr sz="1500" b="0" i="0">
+                <a:solidFill>
+                  <a:srgbClr val="3E3E44"/>
+                </a:solidFill>
+              </a:rPr>
+              <a:t>CycloneDX 1.6 / 1.7, validated offline against the official schema</a:t>
+            </a:r>
+          </a:p>
+          <a:p>
+            <a:pPr marL="0" indent="0">
+              <a:spcBef>
+                <a:spcPts val="900"/>
+              </a:spcBef>
+              <a:spcAft>
+                <a:spcPts val="500"/>
+              </a:spcAft>
+              <a:buNone/>
+            </a:pPr>
+            <a:r>
+              <a:rPr sz="2100" b="1" i="0">
+                <a:solidFill>
+                  <a:srgbClr val="9E3A24"/>
+                </a:solidFill>
+              </a:rPr>
+              <a:t>What makes it different</a:t>
+            </a:r>
+          </a:p>
+          <a:p>
+            <a:pPr marL="0" indent="0">
+              <a:spcBef>
+                <a:spcPts val="0"/>
+              </a:spcBef>
+              <a:spcAft>
+                <a:spcPts val="0"/>
+              </a:spcAft>
+              <a:buNone/>
+            </a:pPr>
+            <a:r>
+              <a:rPr sz="1500" b="0" i="0">
+                <a:solidFill>
+                  <a:srgbClr val="3E3E44"/>
+                </a:solidFill>
+              </a:rPr>
+              <a:t>Finding RSA in a library is not observing RSA signing at a call site — capability, declaration, use and observation stay apart.</a:t>
+            </a:r>
+          </a:p>
+        </p:txBody>
+      </p:sp>
+      <p:sp>
+        <p:nvSpPr>
+          <p:cNvPr id="15364" name="cd-caption"/>
           <p:cNvSpPr txBox="1"/>
           <p:nvPr/>
         </p:nvSpPr>
         <p:spPr>
           <a:xfrm>
-            <a:off x="411480" y="5230368"/>
-            <a:ext cx="11365992" cy="960120"/>
+            <a:off x="420624" y="5285231"/>
+            <a:ext cx="11347703" cy="274320"/>
           </a:xfrm>
           <a:prstGeom prst="rect">
             <a:avLst/>
@@ -6441,7 +6504,7 @@
           <a:noFill/>
         </p:spPr>
         <p:txBody>
-          <a:bodyPr wrap="square">
+          <a:bodyPr wrap="square" lIns="0" rIns="0" tIns="0" bIns="0">
             <a:spAutoFit/>
           </a:bodyPr>
           <a:lstStyle/>
@@ -6451,25 +6514,149 @@
                 <a:spcPts val="0"/>
               </a:spcBef>
               <a:spcAft>
+                <a:spcPts val="0"/>
+              </a:spcAft>
+              <a:buNone/>
+            </a:pPr>
+            <a:r>
+              <a:rPr sz="1300" b="0" i="1">
+                <a:solidFill>
+                  <a:srgbClr val="63636B"/>
+                </a:solidFill>
+              </a:rPr>
+              <a:t>The implemented pipeline — every stage below exists in the tool.</a:t>
+            </a:r>
+          </a:p>
+        </p:txBody>
+      </p:sp>
+      <p:sp>
+        <p:nvSpPr>
+          <p:cNvPr id="15365" name="cd-stage"/>
+          <p:cNvSpPr/>
+          <p:nvPr/>
+        </p:nvSpPr>
+        <p:spPr>
+          <a:xfrm>
+            <a:off x="420624" y="5577840"/>
+            <a:ext cx="2727197" cy="585216"/>
+          </a:xfrm>
+          <a:prstGeom prst="rect">
+            <a:avLst/>
+          </a:prstGeom>
+          <a:solidFill>
+            <a:srgbClr val="F4F2EE"/>
+          </a:solidFill>
+          <a:ln w="9525">
+            <a:solidFill>
+              <a:srgbClr val="D2D0CB"/>
+            </a:solidFill>
+          </a:ln>
+          <a:effectLst/>
+        </p:spPr>
+        <p:style>
+          <a:lnRef idx="1">
+            <a:schemeClr val="accent1"/>
+          </a:lnRef>
+          <a:fillRef idx="3">
+            <a:schemeClr val="accent1"/>
+          </a:fillRef>
+          <a:effectRef idx="2">
+            <a:schemeClr val="accent1"/>
+          </a:effectRef>
+          <a:fontRef idx="minor">
+            <a:schemeClr val="lt1"/>
+          </a:fontRef>
+        </p:style>
+        <p:txBody>
+          <a:bodyPr rtlCol="0" anchor="ctr"/>
+          <a:lstStyle/>
+          <a:p>
+            <a:pPr algn="ctr"/>
+          </a:p>
+        </p:txBody>
+      </p:sp>
+      <p:sp>
+        <p:nvSpPr>
+          <p:cNvPr id="15366" name="cd-panel-edge"/>
+          <p:cNvSpPr/>
+          <p:nvPr/>
+        </p:nvSpPr>
+        <p:spPr>
+          <a:xfrm>
+            <a:off x="420624" y="5577840"/>
+            <a:ext cx="38100" cy="585216"/>
+          </a:xfrm>
+          <a:prstGeom prst="rect">
+            <a:avLst/>
+          </a:prstGeom>
+          <a:solidFill>
+            <a:srgbClr val="9E3A24"/>
+          </a:solidFill>
+          <a:ln>
+            <a:noFill/>
+          </a:ln>
+          <a:effectLst/>
+        </p:spPr>
+        <p:style>
+          <a:lnRef idx="1">
+            <a:schemeClr val="accent1"/>
+          </a:lnRef>
+          <a:fillRef idx="3">
+            <a:schemeClr val="accent1"/>
+          </a:fillRef>
+          <a:effectRef idx="2">
+            <a:schemeClr val="accent1"/>
+          </a:effectRef>
+          <a:fontRef idx="minor">
+            <a:schemeClr val="lt1"/>
+          </a:fontRef>
+        </p:style>
+        <p:txBody>
+          <a:bodyPr rtlCol="0" anchor="ctr"/>
+          <a:lstStyle/>
+          <a:p>
+            <a:pPr algn="ctr"/>
+          </a:p>
+        </p:txBody>
+      </p:sp>
+      <p:sp>
+        <p:nvSpPr>
+          <p:cNvPr id="15367" name="cd-stage-text"/>
+          <p:cNvSpPr txBox="1"/>
+          <p:nvPr/>
+        </p:nvSpPr>
+        <p:spPr>
+          <a:xfrm>
+            <a:off x="566928" y="5660136"/>
+            <a:ext cx="2471165" cy="457200"/>
+          </a:xfrm>
+          <a:prstGeom prst="rect">
+            <a:avLst/>
+          </a:prstGeom>
+          <a:noFill/>
+        </p:spPr>
+        <p:txBody>
+          <a:bodyPr wrap="square" lIns="0" rIns="0" tIns="0" bIns="0">
+            <a:spAutoFit/>
+          </a:bodyPr>
+          <a:lstStyle/>
+          <a:p>
+            <a:pPr marL="0" indent="0">
+              <a:spcBef>
+                <a:spcPts val="0"/>
+              </a:spcBef>
+              <a:spcAft>
                 <a:spcPts val="300"/>
               </a:spcAft>
               <a:buNone/>
             </a:pPr>
             <a:r>
-              <a:rPr sz="1050" b="1">
-                <a:solidFill>
-                  <a:srgbClr val="0F172A"/>
-                </a:solidFill>
-              </a:rPr>
-              <a:t>Where it looks — </a:t>
-            </a:r>
-            <a:r>
-              <a:rPr sz="1050">
-                <a:solidFill>
-                  <a:srgbClr val="1A1A1A"/>
-                </a:solidFill>
-              </a:rPr>
-              <a:t>source (Python AST, plus rule packs for seven more languages) · dependency manifests · ELF binaries · X.509 certificates · server and application configuration · container images (OCI layout, OCI tar, docker save) · one live TLS endpoint the operator names.</a:t>
+              <a:rPr sz="1500" b="1" i="0">
+                <a:solidFill>
+                  <a:srgbClr val="1B3A6B"/>
+                </a:solidFill>
+              </a:rPr>
+              <a:t>DISCOVERY SOURCES</a:t>
             </a:r>
           </a:p>
           <a:p>
@@ -6478,17 +6665,470 @@
                 <a:spcPts val="0"/>
               </a:spcBef>
               <a:spcAft>
+                <a:spcPts val="0"/>
+              </a:spcAft>
+              <a:buNone/>
+            </a:pPr>
+            <a:r>
+              <a:rPr sz="1300" b="0" i="0">
+                <a:solidFill>
+                  <a:srgbClr val="63636B"/>
+                </a:solidFill>
+              </a:rPr>
+              <a:t>code · deps · binaries · certs · config</a:t>
+            </a:r>
+          </a:p>
+        </p:txBody>
+      </p:sp>
+      <p:sp>
+        <p:nvSpPr>
+          <p:cNvPr id="15368" name="cd-stage"/>
+          <p:cNvSpPr/>
+          <p:nvPr/>
+        </p:nvSpPr>
+        <p:spPr>
+          <a:xfrm>
+            <a:off x="3294125" y="5577840"/>
+            <a:ext cx="2727197" cy="585216"/>
+          </a:xfrm>
+          <a:prstGeom prst="rect">
+            <a:avLst/>
+          </a:prstGeom>
+          <a:solidFill>
+            <a:srgbClr val="F4F2EE"/>
+          </a:solidFill>
+          <a:ln w="9525">
+            <a:solidFill>
+              <a:srgbClr val="D2D0CB"/>
+            </a:solidFill>
+          </a:ln>
+          <a:effectLst/>
+        </p:spPr>
+        <p:style>
+          <a:lnRef idx="1">
+            <a:schemeClr val="accent1"/>
+          </a:lnRef>
+          <a:fillRef idx="3">
+            <a:schemeClr val="accent1"/>
+          </a:fillRef>
+          <a:effectRef idx="2">
+            <a:schemeClr val="accent1"/>
+          </a:effectRef>
+          <a:fontRef idx="minor">
+            <a:schemeClr val="lt1"/>
+          </a:fontRef>
+        </p:style>
+        <p:txBody>
+          <a:bodyPr rtlCol="0" anchor="ctr"/>
+          <a:lstStyle/>
+          <a:p>
+            <a:pPr algn="ctr"/>
+          </a:p>
+        </p:txBody>
+      </p:sp>
+      <p:sp>
+        <p:nvSpPr>
+          <p:cNvPr id="15369" name="cd-panel-edge"/>
+          <p:cNvSpPr/>
+          <p:nvPr/>
+        </p:nvSpPr>
+        <p:spPr>
+          <a:xfrm>
+            <a:off x="3294125" y="5577840"/>
+            <a:ext cx="38100" cy="585216"/>
+          </a:xfrm>
+          <a:prstGeom prst="rect">
+            <a:avLst/>
+          </a:prstGeom>
+          <a:solidFill>
+            <a:srgbClr val="9E3A24"/>
+          </a:solidFill>
+          <a:ln>
+            <a:noFill/>
+          </a:ln>
+          <a:effectLst/>
+        </p:spPr>
+        <p:style>
+          <a:lnRef idx="1">
+            <a:schemeClr val="accent1"/>
+          </a:lnRef>
+          <a:fillRef idx="3">
+            <a:schemeClr val="accent1"/>
+          </a:fillRef>
+          <a:effectRef idx="2">
+            <a:schemeClr val="accent1"/>
+          </a:effectRef>
+          <a:fontRef idx="minor">
+            <a:schemeClr val="lt1"/>
+          </a:fontRef>
+        </p:style>
+        <p:txBody>
+          <a:bodyPr rtlCol="0" anchor="ctr"/>
+          <a:lstStyle/>
+          <a:p>
+            <a:pPr algn="ctr"/>
+          </a:p>
+        </p:txBody>
+      </p:sp>
+      <p:sp>
+        <p:nvSpPr>
+          <p:cNvPr id="15370" name="cd-stage-text"/>
+          <p:cNvSpPr txBox="1"/>
+          <p:nvPr/>
+        </p:nvSpPr>
+        <p:spPr>
+          <a:xfrm>
+            <a:off x="3440429" y="5660136"/>
+            <a:ext cx="2471165" cy="457200"/>
+          </a:xfrm>
+          <a:prstGeom prst="rect">
+            <a:avLst/>
+          </a:prstGeom>
+          <a:noFill/>
+        </p:spPr>
+        <p:txBody>
+          <a:bodyPr wrap="square" lIns="0" rIns="0" tIns="0" bIns="0">
+            <a:spAutoFit/>
+          </a:bodyPr>
+          <a:lstStyle/>
+          <a:p>
+            <a:pPr marL="0" indent="0">
+              <a:spcBef>
+                <a:spcPts val="0"/>
+              </a:spcBef>
+              <a:spcAft>
                 <a:spcPts val="300"/>
               </a:spcAft>
               <a:buNone/>
             </a:pPr>
             <a:r>
-              <a:rPr sz="950" i="1">
-                <a:solidFill>
-                  <a:srgbClr val="5A5A5A"/>
-                </a:solidFill>
-              </a:rPr>
-              <a:t>Every sensor but the TLS probe runs with the network unplugged.</a:t>
+              <a:rPr sz="1500" b="1" i="0">
+                <a:solidFill>
+                  <a:srgbClr val="1B3A6B"/>
+                </a:solidFill>
+              </a:rPr>
+              <a:t>NORMALISED INVENTORY</a:t>
+            </a:r>
+          </a:p>
+          <a:p>
+            <a:pPr marL="0" indent="0">
+              <a:spcBef>
+                <a:spcPts val="0"/>
+              </a:spcBef>
+              <a:spcAft>
+                <a:spcPts val="0"/>
+              </a:spcAft>
+              <a:buNone/>
+            </a:pPr>
+            <a:r>
+              <a:rPr sz="1300" b="0" i="0">
+                <a:solidFill>
+                  <a:srgbClr val="63636B"/>
+                </a:solidFill>
+              </a:rPr>
+              <a:t>assets with purpose + assurance</a:t>
+            </a:r>
+          </a:p>
+        </p:txBody>
+      </p:sp>
+      <p:sp>
+        <p:nvSpPr>
+          <p:cNvPr id="15371" name="cd-stage"/>
+          <p:cNvSpPr/>
+          <p:nvPr/>
+        </p:nvSpPr>
+        <p:spPr>
+          <a:xfrm>
+            <a:off x="6167627" y="5577840"/>
+            <a:ext cx="2727197" cy="585216"/>
+          </a:xfrm>
+          <a:prstGeom prst="rect">
+            <a:avLst/>
+          </a:prstGeom>
+          <a:solidFill>
+            <a:srgbClr val="F4F2EE"/>
+          </a:solidFill>
+          <a:ln w="9525">
+            <a:solidFill>
+              <a:srgbClr val="D2D0CB"/>
+            </a:solidFill>
+          </a:ln>
+          <a:effectLst/>
+        </p:spPr>
+        <p:style>
+          <a:lnRef idx="1">
+            <a:schemeClr val="accent1"/>
+          </a:lnRef>
+          <a:fillRef idx="3">
+            <a:schemeClr val="accent1"/>
+          </a:fillRef>
+          <a:effectRef idx="2">
+            <a:schemeClr val="accent1"/>
+          </a:effectRef>
+          <a:fontRef idx="minor">
+            <a:schemeClr val="lt1"/>
+          </a:fontRef>
+        </p:style>
+        <p:txBody>
+          <a:bodyPr rtlCol="0" anchor="ctr"/>
+          <a:lstStyle/>
+          <a:p>
+            <a:pPr algn="ctr"/>
+          </a:p>
+        </p:txBody>
+      </p:sp>
+      <p:sp>
+        <p:nvSpPr>
+          <p:cNvPr id="15372" name="cd-panel-edge"/>
+          <p:cNvSpPr/>
+          <p:nvPr/>
+        </p:nvSpPr>
+        <p:spPr>
+          <a:xfrm>
+            <a:off x="6167627" y="5577840"/>
+            <a:ext cx="38100" cy="585216"/>
+          </a:xfrm>
+          <a:prstGeom prst="rect">
+            <a:avLst/>
+          </a:prstGeom>
+          <a:solidFill>
+            <a:srgbClr val="9E3A24"/>
+          </a:solidFill>
+          <a:ln>
+            <a:noFill/>
+          </a:ln>
+          <a:effectLst/>
+        </p:spPr>
+        <p:style>
+          <a:lnRef idx="1">
+            <a:schemeClr val="accent1"/>
+          </a:lnRef>
+          <a:fillRef idx="3">
+            <a:schemeClr val="accent1"/>
+          </a:fillRef>
+          <a:effectRef idx="2">
+            <a:schemeClr val="accent1"/>
+          </a:effectRef>
+          <a:fontRef idx="minor">
+            <a:schemeClr val="lt1"/>
+          </a:fontRef>
+        </p:style>
+        <p:txBody>
+          <a:bodyPr rtlCol="0" anchor="ctr"/>
+          <a:lstStyle/>
+          <a:p>
+            <a:pPr algn="ctr"/>
+          </a:p>
+        </p:txBody>
+      </p:sp>
+      <p:sp>
+        <p:nvSpPr>
+          <p:cNvPr id="15373" name="cd-stage-text"/>
+          <p:cNvSpPr txBox="1"/>
+          <p:nvPr/>
+        </p:nvSpPr>
+        <p:spPr>
+          <a:xfrm>
+            <a:off x="6313931" y="5660136"/>
+            <a:ext cx="2471165" cy="457200"/>
+          </a:xfrm>
+          <a:prstGeom prst="rect">
+            <a:avLst/>
+          </a:prstGeom>
+          <a:noFill/>
+        </p:spPr>
+        <p:txBody>
+          <a:bodyPr wrap="square" lIns="0" rIns="0" tIns="0" bIns="0">
+            <a:spAutoFit/>
+          </a:bodyPr>
+          <a:lstStyle/>
+          <a:p>
+            <a:pPr marL="0" indent="0">
+              <a:spcBef>
+                <a:spcPts val="0"/>
+              </a:spcBef>
+              <a:spcAft>
+                <a:spcPts val="300"/>
+              </a:spcAft>
+              <a:buNone/>
+            </a:pPr>
+            <a:r>
+              <a:rPr sz="1500" b="1" i="0">
+                <a:solidFill>
+                  <a:srgbClr val="1B3A6B"/>
+                </a:solidFill>
+              </a:rPr>
+              <a:t>RISK + MIGRATION</a:t>
+            </a:r>
+          </a:p>
+          <a:p>
+            <a:pPr marL="0" indent="0">
+              <a:spcBef>
+                <a:spcPts val="0"/>
+              </a:spcBef>
+              <a:spcAft>
+                <a:spcPts val="0"/>
+              </a:spcAft>
+              <a:buNone/>
+            </a:pPr>
+            <a:r>
+              <a:rPr sz="1300" b="0" i="0">
+                <a:solidFill>
+                  <a:srgbClr val="63636B"/>
+                </a:solidFill>
+              </a:rPr>
+              <a:t>Mosca exposure → matched target</a:t>
+            </a:r>
+          </a:p>
+        </p:txBody>
+      </p:sp>
+      <p:sp>
+        <p:nvSpPr>
+          <p:cNvPr id="15374" name="cd-stage"/>
+          <p:cNvSpPr/>
+          <p:nvPr/>
+        </p:nvSpPr>
+        <p:spPr>
+          <a:xfrm>
+            <a:off x="9041130" y="5577840"/>
+            <a:ext cx="2727197" cy="585216"/>
+          </a:xfrm>
+          <a:prstGeom prst="rect">
+            <a:avLst/>
+          </a:prstGeom>
+          <a:solidFill>
+            <a:srgbClr val="F4F2EE"/>
+          </a:solidFill>
+          <a:ln w="9525">
+            <a:solidFill>
+              <a:srgbClr val="D2D0CB"/>
+            </a:solidFill>
+          </a:ln>
+          <a:effectLst/>
+        </p:spPr>
+        <p:style>
+          <a:lnRef idx="1">
+            <a:schemeClr val="accent1"/>
+          </a:lnRef>
+          <a:fillRef idx="3">
+            <a:schemeClr val="accent1"/>
+          </a:fillRef>
+          <a:effectRef idx="2">
+            <a:schemeClr val="accent1"/>
+          </a:effectRef>
+          <a:fontRef idx="minor">
+            <a:schemeClr val="lt1"/>
+          </a:fontRef>
+        </p:style>
+        <p:txBody>
+          <a:bodyPr rtlCol="0" anchor="ctr"/>
+          <a:lstStyle/>
+          <a:p>
+            <a:pPr algn="ctr"/>
+          </a:p>
+        </p:txBody>
+      </p:sp>
+      <p:sp>
+        <p:nvSpPr>
+          <p:cNvPr id="15375" name="cd-panel-edge"/>
+          <p:cNvSpPr/>
+          <p:nvPr/>
+        </p:nvSpPr>
+        <p:spPr>
+          <a:xfrm>
+            <a:off x="9041130" y="5577840"/>
+            <a:ext cx="38100" cy="585216"/>
+          </a:xfrm>
+          <a:prstGeom prst="rect">
+            <a:avLst/>
+          </a:prstGeom>
+          <a:solidFill>
+            <a:srgbClr val="9E3A24"/>
+          </a:solidFill>
+          <a:ln>
+            <a:noFill/>
+          </a:ln>
+          <a:effectLst/>
+        </p:spPr>
+        <p:style>
+          <a:lnRef idx="1">
+            <a:schemeClr val="accent1"/>
+          </a:lnRef>
+          <a:fillRef idx="3">
+            <a:schemeClr val="accent1"/>
+          </a:fillRef>
+          <a:effectRef idx="2">
+            <a:schemeClr val="accent1"/>
+          </a:effectRef>
+          <a:fontRef idx="minor">
+            <a:schemeClr val="lt1"/>
+          </a:fontRef>
+        </p:style>
+        <p:txBody>
+          <a:bodyPr rtlCol="0" anchor="ctr"/>
+          <a:lstStyle/>
+          <a:p>
+            <a:pPr algn="ctr"/>
+          </a:p>
+        </p:txBody>
+      </p:sp>
+      <p:sp>
+        <p:nvSpPr>
+          <p:cNvPr id="15376" name="cd-stage-text"/>
+          <p:cNvSpPr txBox="1"/>
+          <p:nvPr/>
+        </p:nvSpPr>
+        <p:spPr>
+          <a:xfrm>
+            <a:off x="9187434" y="5660136"/>
+            <a:ext cx="2471165" cy="457200"/>
+          </a:xfrm>
+          <a:prstGeom prst="rect">
+            <a:avLst/>
+          </a:prstGeom>
+          <a:noFill/>
+        </p:spPr>
+        <p:txBody>
+          <a:bodyPr wrap="square" lIns="0" rIns="0" tIns="0" bIns="0">
+            <a:spAutoFit/>
+          </a:bodyPr>
+          <a:lstStyle/>
+          <a:p>
+            <a:pPr marL="0" indent="0">
+              <a:spcBef>
+                <a:spcPts val="0"/>
+              </a:spcBef>
+              <a:spcAft>
+                <a:spcPts val="300"/>
+              </a:spcAft>
+              <a:buNone/>
+            </a:pPr>
+            <a:r>
+              <a:rPr sz="1500" b="1" i="0">
+                <a:solidFill>
+                  <a:srgbClr val="1B3A6B"/>
+                </a:solidFill>
+              </a:rPr>
+              <a:t>CBOM + REPORT</a:t>
+            </a:r>
+          </a:p>
+          <a:p>
+            <a:pPr marL="0" indent="0">
+              <a:spcBef>
+                <a:spcPts val="0"/>
+              </a:spcBef>
+              <a:spcAft>
+                <a:spcPts val="0"/>
+              </a:spcAft>
+              <a:buNone/>
+            </a:pPr>
+            <a:r>
+              <a:rPr sz="1300" b="0" i="0">
+                <a:solidFill>
+                  <a:srgbClr val="63636B"/>
+                </a:solidFill>
+              </a:rPr>
+              <a:t>CycloneDX 1.6 / 1.7 + HTML report</a:t>
             </a:r>
           </a:p>
         </p:txBody>
@@ -6619,8 +7259,8 @@
         </p:nvSpPr>
         <p:spPr bwMode="auto">
           <a:xfrm>
-            <a:off x="411480" y="1115568"/>
-            <a:ext cx="5532120" cy="1481328"/>
+            <a:off x="420624" y="1097280"/>
+            <a:ext cx="5541264" cy="2359152"/>
           </a:xfrm>
           <a:prstGeom prst="rect">
             <a:avLst/>
@@ -6644,74 +7284,97 @@
                 <a:spcPts val="0"/>
               </a:spcBef>
               <a:spcAft>
-                <a:spcPts val="300"/>
-              </a:spcAft>
-              <a:buNone/>
-            </a:pPr>
-            <a:r>
-              <a:rPr sz="1100" b="1">
-                <a:solidFill>
-                  <a:srgbClr val="8C1D1D"/>
-                </a:solidFill>
-              </a:rPr>
-              <a:t>Stack</a:t>
-            </a:r>
-          </a:p>
-          <a:p>
-            <a:pPr marL="0" indent="0">
-              <a:spcBef>
-                <a:spcPts val="0"/>
-              </a:spcBef>
-              <a:spcAft>
-                <a:spcPts val="300"/>
-              </a:spcAft>
-              <a:buNone/>
-            </a:pPr>
-            <a:r>
-              <a:rPr sz="1050">
-                <a:solidFill>
-                  <a:srgbClr val="1A1A1A"/>
-                </a:solidFill>
-              </a:rPr>
-              <a:t>Python 3.11+ · FastAPI · SQLite · a vanilla JavaScript console with no build step, no framework and no CDN.</a:t>
-            </a:r>
-          </a:p>
-          <a:p>
-            <a:pPr marL="0" indent="0">
-              <a:spcBef>
-                <a:spcPts val="700"/>
-              </a:spcBef>
-              <a:spcAft>
-                <a:spcPts val="300"/>
-              </a:spcAft>
-              <a:buNone/>
-            </a:pPr>
-            <a:r>
-              <a:rPr sz="1100" b="1">
-                <a:solidFill>
-                  <a:srgbClr val="8C1D1D"/>
-                </a:solidFill>
-              </a:rPr>
-              <a:t>Seven discovery sensors</a:t>
-            </a:r>
-          </a:p>
-          <a:p>
-            <a:pPr marL="0" indent="0">
-              <a:spcBef>
-                <a:spcPts val="0"/>
-              </a:spcBef>
-              <a:spcAft>
-                <a:spcPts val="300"/>
-              </a:spcAft>
-              <a:buNone/>
-            </a:pPr>
-            <a:r>
-              <a:rPr sz="1050">
-                <a:solidFill>
-                  <a:srgbClr val="1A1A1A"/>
-                </a:solidFill>
-              </a:rPr>
-              <a:t>source · dependency · binary (ELF symbols, constants, banners) · certificate (X.509, KeyUsage) · configuration · container (layer replay with whiteouts) · network (live TLS).</a:t>
+                <a:spcPts val="500"/>
+              </a:spcAft>
+              <a:buNone/>
+            </a:pPr>
+            <a:r>
+              <a:rPr sz="2100" b="1" i="0">
+                <a:solidFill>
+                  <a:srgbClr val="9E3A24"/>
+                </a:solidFill>
+              </a:rPr>
+              <a:t>System architecture</a:t>
+            </a:r>
+          </a:p>
+          <a:p>
+            <a:pPr marL="146050" indent="-146050">
+              <a:spcBef>
+                <a:spcPts val="0"/>
+              </a:spcBef>
+              <a:spcAft>
+                <a:spcPts val="400"/>
+              </a:spcAft>
+              <a:buFont typeface="Arial"/>
+              <a:buChar char="–"/>
+            </a:pPr>
+            <a:r>
+              <a:rPr sz="1500" b="0" i="0">
+                <a:solidFill>
+                  <a:srgbClr val="3E3E44"/>
+                </a:solidFill>
+              </a:rPr>
+              <a:t>Inputs — a directory, a container image archive, or a named TLS endpoint</a:t>
+            </a:r>
+          </a:p>
+          <a:p>
+            <a:pPr marL="146050" indent="-146050">
+              <a:spcBef>
+                <a:spcPts val="0"/>
+              </a:spcBef>
+              <a:spcAft>
+                <a:spcPts val="400"/>
+              </a:spcAft>
+              <a:buFont typeface="Arial"/>
+              <a:buChar char="–"/>
+            </a:pPr>
+            <a:r>
+              <a:rPr sz="1500" b="0" i="0">
+                <a:solidFill>
+                  <a:srgbClr val="3E3E44"/>
+                </a:solidFill>
+              </a:rPr>
+              <a:t>Seven sensors return evidence, not verdicts; hits become distinct assets carrying purpose and assurance</a:t>
+            </a:r>
+          </a:p>
+          <a:p>
+            <a:pPr marL="146050" indent="-146050">
+              <a:spcBef>
+                <a:spcPts val="0"/>
+              </a:spcBef>
+              <a:spcAft>
+                <a:spcPts val="400"/>
+              </a:spcAft>
+              <a:buFont typeface="Arial"/>
+              <a:buChar char="–"/>
+            </a:pPr>
+            <a:r>
+              <a:rPr sz="1500" b="0" i="0">
+                <a:solidFill>
+                  <a:srgbClr val="3E3E44"/>
+                </a:solidFill>
+              </a:rPr>
+              <a:t>Correlation links findings sharing an artefact, never merges them; a 74-algorithm registry classifies each</a:t>
+            </a:r>
+          </a:p>
+          <a:p>
+            <a:pPr marL="146050" indent="-146050">
+              <a:spcBef>
+                <a:spcPts val="0"/>
+              </a:spcBef>
+              <a:spcAft>
+                <a:spcPts val="400"/>
+              </a:spcAft>
+              <a:buFont typeface="Arial"/>
+              <a:buChar char="–"/>
+            </a:pPr>
+            <a:r>
+              <a:rPr sz="1500" b="0" i="0">
+                <a:solidFill>
+                  <a:srgbClr val="3E3E44"/>
+                </a:solidFill>
+              </a:rPr>
+              <a:t>Mosca X + Y &gt; Z read per purpose, then a named target, a CycloneDX CBOM and a traceable HTML report</a:t>
             </a:r>
           </a:p>
         </p:txBody>
@@ -6831,7 +7494,7 @@
           <a:p>
             <a:pPr algn="ctr"/>
             <a:r>
-              <a:rPr lang="en-US" dirty="0" sz="1000" b="1"/>
+              <a:rPr lang="en-US" dirty="0" sz="1100" b="1"/>
               <a:t>Zero-Day</a:t>
             </a:r>
             <a:endParaRPr lang="en-IN" dirty="0"/>
@@ -6870,14 +7533,14 @@
       </p:pic>
       <p:sp>
         <p:nvSpPr>
-          <p:cNvPr id="17411" name="cd-note"/>
+          <p:cNvPr id="17411" name="cd-impl"/>
           <p:cNvSpPr txBox="1"/>
           <p:nvPr/>
         </p:nvSpPr>
         <p:spPr>
           <a:xfrm>
-            <a:off x="6263640" y="1115568"/>
-            <a:ext cx="5513832" cy="1481328"/>
+            <a:off x="6400800" y="1097280"/>
+            <a:ext cx="5367527" cy="2359152"/>
           </a:xfrm>
           <a:prstGeom prst="rect">
             <a:avLst/>
@@ -6885,7 +7548,7 @@
           <a:noFill/>
         </p:spPr>
         <p:txBody>
-          <a:bodyPr wrap="square">
+          <a:bodyPr wrap="square" lIns="0" rIns="0" tIns="0" bIns="0">
             <a:spAutoFit/>
           </a:bodyPr>
           <a:lstStyle/>
@@ -6895,112 +7558,255 @@
                 <a:spcPts val="0"/>
               </a:spcBef>
               <a:spcAft>
-                <a:spcPts val="300"/>
-              </a:spcAft>
-              <a:buNone/>
-            </a:pPr>
-            <a:r>
-              <a:rPr sz="1100" b="1">
-                <a:solidFill>
-                  <a:srgbClr val="8C1D1D"/>
-                </a:solidFill>
-              </a:rPr>
-              <a:t>Risk engine</a:t>
-            </a:r>
-          </a:p>
-          <a:p>
-            <a:pPr marL="0" indent="0">
-              <a:spcBef>
-                <a:spcPts val="0"/>
-              </a:spcBef>
-              <a:spcAft>
-                <a:spcPts val="300"/>
-              </a:spcAft>
-              <a:buNone/>
-            </a:pPr>
-            <a:r>
-              <a:rPr sz="1050">
-                <a:solidFill>
-                  <a:srgbClr val="1A1A1A"/>
-                </a:solidFill>
-              </a:rPr>
-              <a:t>Mosca's inequality, X + Y &gt; Z, read differently per purpose: harvest-now-decrypt-later for key establishment, forgery-after-Q-Day for signatures, a Grover margin for symmetric keys. Q-Day is a scenario the operator chooses, never a forecast.</a:t>
-            </a:r>
-          </a:p>
-          <a:p>
-            <a:pPr marL="0" indent="0">
-              <a:spcBef>
-                <a:spcPts val="700"/>
-              </a:spcBef>
-              <a:spcAft>
-                <a:spcPts val="300"/>
-              </a:spcAft>
-              <a:buNone/>
-            </a:pPr>
-            <a:r>
-              <a:rPr sz="1100" b="1">
-                <a:solidFill>
-                  <a:srgbClr val="8C1D1D"/>
-                </a:solidFill>
-              </a:rPr>
-              <a:t>Output and posture</a:t>
-            </a:r>
-          </a:p>
-          <a:p>
-            <a:pPr marL="0" indent="0">
-              <a:spcBef>
-                <a:spcPts val="0"/>
-              </a:spcBef>
-              <a:spcAft>
-                <a:spcPts val="300"/>
-              </a:spcAft>
-              <a:buNone/>
-            </a:pPr>
-            <a:r>
-              <a:rPr sz="1050">
-                <a:solidFill>
-                  <a:srgbClr val="1A1A1A"/>
-                </a:solidFill>
-              </a:rPr>
-              <a:t>CycloneDX 1.6 (ECMA-424) and 1.7, each validated offline against its own official schema. Loopback by default; refuses a non-loopback bind without a token.</a:t>
-            </a:r>
-          </a:p>
-        </p:txBody>
-      </p:sp>
-      <p:pic>
-        <p:nvPicPr>
-          <p:cNvPr id="17412" name="cd-figure-architecture-dark" descr="architecture-dark.png"/>
-          <p:cNvPicPr>
-            <a:picLocks noChangeAspect="1"/>
-          </p:cNvPicPr>
+                <a:spcPts val="500"/>
+              </a:spcAft>
+              <a:buNone/>
+            </a:pPr>
+            <a:r>
+              <a:rPr sz="2100" b="1" i="0">
+                <a:solidFill>
+                  <a:srgbClr val="9E3A24"/>
+                </a:solidFill>
+              </a:rPr>
+              <a:t>Technical implementation</a:t>
+            </a:r>
+          </a:p>
+          <a:p>
+            <a:pPr marL="146050" indent="-146050">
+              <a:spcBef>
+                <a:spcPts val="0"/>
+              </a:spcBef>
+              <a:spcAft>
+                <a:spcPts val="400"/>
+              </a:spcAft>
+              <a:buFont typeface="Arial"/>
+              <a:buChar char="–"/>
+            </a:pPr>
+            <a:r>
+              <a:rPr sz="1500" b="1" i="0">
+                <a:solidFill>
+                  <a:srgbClr val="1A1A1C"/>
+                </a:solidFill>
+              </a:rPr>
+              <a:t>Backend / API — </a:t>
+            </a:r>
+            <a:r>
+              <a:rPr sz="1500" b="0" i="0">
+                <a:solidFill>
+                  <a:srgbClr val="3E3E44"/>
+                </a:solidFill>
+              </a:rPr>
+              <a:t>Python 3.11+, FastAPI, uvicorn</a:t>
+            </a:r>
+          </a:p>
+          <a:p>
+            <a:pPr marL="146050" indent="-146050">
+              <a:spcBef>
+                <a:spcPts val="0"/>
+              </a:spcBef>
+              <a:spcAft>
+                <a:spcPts val="400"/>
+              </a:spcAft>
+              <a:buFont typeface="Arial"/>
+              <a:buChar char="–"/>
+            </a:pPr>
+            <a:r>
+              <a:rPr sz="1500" b="1" i="0">
+                <a:solidFill>
+                  <a:srgbClr val="1A1A1C"/>
+                </a:solidFill>
+              </a:rPr>
+              <a:t>Persistence — </a:t>
+            </a:r>
+            <a:r>
+              <a:rPr sz="1500" b="0" i="0">
+                <a:solidFill>
+                  <a:srgbClr val="3E3E44"/>
+                </a:solidFill>
+              </a:rPr>
+              <a:t>SQLite (WAL) — scans, findings, overrides</a:t>
+            </a:r>
+          </a:p>
+          <a:p>
+            <a:pPr marL="146050" indent="-146050">
+              <a:spcBef>
+                <a:spcPts val="0"/>
+              </a:spcBef>
+              <a:spcAft>
+                <a:spcPts val="400"/>
+              </a:spcAft>
+              <a:buFont typeface="Arial"/>
+              <a:buChar char="–"/>
+            </a:pPr>
+            <a:r>
+              <a:rPr sz="1500" b="1" i="0">
+                <a:solidFill>
+                  <a:srgbClr val="1A1A1C"/>
+                </a:solidFill>
+              </a:rPr>
+              <a:t>Console — </a:t>
+            </a:r>
+            <a:r>
+              <a:rPr sz="1500" b="0" i="0">
+                <a:solidFill>
+                  <a:srgbClr val="3E3E44"/>
+                </a:solidFill>
+              </a:rPr>
+              <a:t>vanilla JavaScript, 2,881 lines, no framework</a:t>
+            </a:r>
+          </a:p>
+          <a:p>
+            <a:pPr marL="146050" indent="-146050">
+              <a:spcBef>
+                <a:spcPts val="0"/>
+              </a:spcBef>
+              <a:spcAft>
+                <a:spcPts val="400"/>
+              </a:spcAft>
+              <a:buFont typeface="Arial"/>
+              <a:buChar char="–"/>
+            </a:pPr>
+            <a:r>
+              <a:rPr sz="1500" b="1" i="0">
+                <a:solidFill>
+                  <a:srgbClr val="1A1A1C"/>
+                </a:solidFill>
+              </a:rPr>
+              <a:t>Source scanning — </a:t>
+            </a:r>
+            <a:r>
+              <a:rPr sz="1500" b="0" i="0">
+                <a:solidFill>
+                  <a:srgbClr val="3E3E44"/>
+                </a:solidFill>
+              </a:rPr>
+              <a:t>Python AST; 60 rules across 7 more languages</a:t>
+            </a:r>
+          </a:p>
+          <a:p>
+            <a:pPr marL="146050" indent="-146050">
+              <a:spcBef>
+                <a:spcPts val="0"/>
+              </a:spcBef>
+              <a:spcAft>
+                <a:spcPts val="400"/>
+              </a:spcAft>
+              <a:buFont typeface="Arial"/>
+              <a:buChar char="–"/>
+            </a:pPr>
+            <a:r>
+              <a:rPr sz="1500" b="1" i="0">
+                <a:solidFill>
+                  <a:srgbClr val="1A1A1C"/>
+                </a:solidFill>
+              </a:rPr>
+              <a:t>Dependencies — </a:t>
+            </a:r>
+            <a:r>
+              <a:rPr sz="1500" b="0" i="0">
+                <a:solidFill>
+                  <a:srgbClr val="3E3E44"/>
+                </a:solidFill>
+              </a:rPr>
+              <a:t>13 manifest formats, 22 known crypto libraries</a:t>
+            </a:r>
+          </a:p>
+          <a:p>
+            <a:pPr marL="146050" indent="-146050">
+              <a:spcBef>
+                <a:spcPts val="0"/>
+              </a:spcBef>
+              <a:spcAft>
+                <a:spcPts val="400"/>
+              </a:spcAft>
+              <a:buFont typeface="Arial"/>
+              <a:buChar char="–"/>
+            </a:pPr>
+            <a:r>
+              <a:rPr sz="1500" b="1" i="0">
+                <a:solidFill>
+                  <a:srgbClr val="1A1A1C"/>
+                </a:solidFill>
+              </a:rPr>
+              <a:t>Binaries — </a:t>
+            </a:r>
+            <a:r>
+              <a:rPr sz="1500" b="0" i="0">
+                <a:solidFill>
+                  <a:srgbClr val="3E3E44"/>
+                </a:solidFill>
+              </a:rPr>
+              <a:t>ELF symbols — 72 symbols, 8 constants, 9 banners</a:t>
+            </a:r>
+          </a:p>
+          <a:p>
+            <a:pPr marL="146050" indent="-146050">
+              <a:spcBef>
+                <a:spcPts val="0"/>
+              </a:spcBef>
+              <a:spcAft>
+                <a:spcPts val="400"/>
+              </a:spcAft>
+              <a:buFont typeface="Arial"/>
+              <a:buChar char="–"/>
+            </a:pPr>
+            <a:r>
+              <a:rPr sz="1500" b="1" i="0">
+                <a:solidFill>
+                  <a:srgbClr val="1A1A1C"/>
+                </a:solidFill>
+              </a:rPr>
+              <a:t>Containers — </a:t>
+            </a:r>
+            <a:r>
+              <a:rPr sz="1500" b="0" i="0">
+                <a:solidFill>
+                  <a:srgbClr val="3E3E44"/>
+                </a:solidFill>
+              </a:rPr>
+              <a:t>OCI, OCI tar, docker-save; layer replay</a:t>
+            </a:r>
+          </a:p>
+          <a:p>
+            <a:pPr marL="146050" indent="-146050">
+              <a:spcBef>
+                <a:spcPts val="0"/>
+              </a:spcBef>
+              <a:spcAft>
+                <a:spcPts val="400"/>
+              </a:spcAft>
+              <a:buFont typeface="Arial"/>
+              <a:buChar char="–"/>
+            </a:pPr>
+            <a:r>
+              <a:rPr sz="1500" b="1" i="0">
+                <a:solidFill>
+                  <a:srgbClr val="1A1A1C"/>
+                </a:solidFill>
+              </a:rPr>
+              <a:t>Export — </a:t>
+            </a:r>
+            <a:r>
+              <a:rPr sz="1500" b="0" i="0">
+                <a:solidFill>
+                  <a:srgbClr val="3E3E44"/>
+                </a:solidFill>
+              </a:rPr>
+              <a:t>CycloneDX 1.6 / 1.7 with offline schema validation</a:t>
+            </a:r>
+          </a:p>
+        </p:txBody>
+      </p:sp>
+      <p:sp>
+        <p:nvSpPr>
+          <p:cNvPr id="17412" name="cd-rsa-head"/>
+          <p:cNvSpPr txBox="1"/>
           <p:nvPr/>
-        </p:nvPicPr>
-        <p:blipFill>
-          <a:blip r:embed="rId4"/>
-          <a:stretch>
-            <a:fillRect/>
-          </a:stretch>
-        </p:blipFill>
+        </p:nvSpPr>
         <p:spPr>
           <a:xfrm>
-            <a:off x="2029968" y="2633472"/>
-            <a:ext cx="8070473" cy="3273552"/>
-          </a:xfrm>
-          <a:prstGeom prst="rect">
-            <a:avLst/>
-          </a:prstGeom>
-        </p:spPr>
-      </p:pic>
-      <p:sp>
-        <p:nvSpPr>
-          <p:cNvPr id="17413" name="cd-caption"/>
-          <p:cNvSpPr txBox="1"/>
-          <p:nvPr/>
-        </p:nvSpPr>
-        <p:spPr>
-          <a:xfrm>
-            <a:off x="2029968" y="5971032"/>
-            <a:ext cx="8070473" cy="274320"/>
+            <a:off x="420624" y="3529584"/>
+            <a:ext cx="11347703" cy="329184"/>
           </a:xfrm>
           <a:prstGeom prst="rect">
             <a:avLst/>
@@ -7008,21 +7814,946 @@
           <a:noFill/>
         </p:spPr>
         <p:txBody>
-          <a:bodyPr wrap="square">
+          <a:bodyPr wrap="square" lIns="0" rIns="0" tIns="0" bIns="0">
             <a:spAutoFit/>
           </a:bodyPr>
           <a:lstStyle/>
           <a:p>
             <a:pPr marL="0" indent="0">
-              <a:buNone/>
-            </a:pPr>
-            <a:r>
-              <a:rPr sz="950">
-                <a:solidFill>
-                  <a:srgbClr val="5A5A5A"/>
-                </a:solidFill>
-              </a:rPr>
-              <a:t>Left to right: inputs, the security gate each one passes through, the seven sensors, the analysis chain, and the outputs. The TLS probe (dashed) is the only outbound path — there is no cloud, KMS, HSM or registry box, because no such integration exists.</a:t>
+              <a:spcBef>
+                <a:spcPts val="0"/>
+              </a:spcBef>
+              <a:spcAft>
+                <a:spcPts val="0"/>
+              </a:spcAft>
+              <a:buNone/>
+            </a:pPr>
+            <a:r>
+              <a:rPr sz="2100" b="1" i="0">
+                <a:solidFill>
+                  <a:srgbClr val="9E3A24"/>
+                </a:solidFill>
+              </a:rPr>
+              <a:t>One algorithm, three decisions. </a:t>
+            </a:r>
+            <a:r>
+              <a:rPr sz="1800" b="0" i="0">
+                <a:solidFill>
+                  <a:srgbClr val="3E3E44"/>
+                </a:solidFill>
+              </a:rPr>
+              <a:t>The same RSA, resolved three ways by a single scan.</a:t>
+            </a:r>
+          </a:p>
+        </p:txBody>
+      </p:sp>
+      <p:sp>
+        <p:nvSpPr>
+          <p:cNvPr id="17414" name="cd-rsa-col"/>
+          <p:cNvSpPr txBox="1"/>
+          <p:nvPr/>
+        </p:nvSpPr>
+        <p:spPr>
+          <a:xfrm>
+            <a:off x="420624" y="3895344"/>
+            <a:ext cx="2999232" cy="237744"/>
+          </a:xfrm>
+          <a:prstGeom prst="rect">
+            <a:avLst/>
+          </a:prstGeom>
+          <a:noFill/>
+        </p:spPr>
+        <p:txBody>
+          <a:bodyPr wrap="square" lIns="0" rIns="0" tIns="0" bIns="0">
+            <a:spAutoFit/>
+          </a:bodyPr>
+          <a:lstStyle/>
+          <a:p>
+            <a:pPr marL="0" indent="0">
+              <a:spcBef>
+                <a:spcPts val="0"/>
+              </a:spcBef>
+              <a:spcAft>
+                <a:spcPts val="0"/>
+              </a:spcAft>
+              <a:buNone/>
+            </a:pPr>
+            <a:r>
+              <a:rPr sz="1200" b="1" i="0">
+                <a:solidFill>
+                  <a:srgbClr val="63636B"/>
+                </a:solidFill>
+              </a:rPr>
+              <a:t>EVIDENCE</a:t>
+            </a:r>
+          </a:p>
+        </p:txBody>
+      </p:sp>
+      <p:sp>
+        <p:nvSpPr>
+          <p:cNvPr id="17415" name="cd-rsa-col"/>
+          <p:cNvSpPr txBox="1"/>
+          <p:nvPr/>
+        </p:nvSpPr>
+        <p:spPr>
+          <a:xfrm>
+            <a:off x="3547872" y="3895344"/>
+            <a:ext cx="2578608" cy="237744"/>
+          </a:xfrm>
+          <a:prstGeom prst="rect">
+            <a:avLst/>
+          </a:prstGeom>
+          <a:noFill/>
+        </p:spPr>
+        <p:txBody>
+          <a:bodyPr wrap="square" lIns="0" rIns="0" tIns="0" bIns="0">
+            <a:spAutoFit/>
+          </a:bodyPr>
+          <a:lstStyle/>
+          <a:p>
+            <a:pPr marL="0" indent="0">
+              <a:spcBef>
+                <a:spcPts val="0"/>
+              </a:spcBef>
+              <a:spcAft>
+                <a:spcPts val="0"/>
+              </a:spcAft>
+              <a:buNone/>
+            </a:pPr>
+            <a:r>
+              <a:rPr sz="1200" b="1" i="0">
+                <a:solidFill>
+                  <a:srgbClr val="63636B"/>
+                </a:solidFill>
+              </a:rPr>
+              <a:t>WHY THE PURPOSE RESOLVES THAT WAY</a:t>
+            </a:r>
+          </a:p>
+        </p:txBody>
+      </p:sp>
+      <p:sp>
+        <p:nvSpPr>
+          <p:cNvPr id="17416" name="cd-rsa-col"/>
+          <p:cNvSpPr txBox="1"/>
+          <p:nvPr/>
+        </p:nvSpPr>
+        <p:spPr>
+          <a:xfrm>
+            <a:off x="6236208" y="3895344"/>
+            <a:ext cx="2432304" cy="237744"/>
+          </a:xfrm>
+          <a:prstGeom prst="rect">
+            <a:avLst/>
+          </a:prstGeom>
+          <a:noFill/>
+        </p:spPr>
+        <p:txBody>
+          <a:bodyPr wrap="square" lIns="0" rIns="0" tIns="0" bIns="0">
+            <a:spAutoFit/>
+          </a:bodyPr>
+          <a:lstStyle/>
+          <a:p>
+            <a:pPr marL="0" indent="0">
+              <a:spcBef>
+                <a:spcPts val="0"/>
+              </a:spcBef>
+              <a:spcAft>
+                <a:spcPts val="0"/>
+              </a:spcAft>
+              <a:buNone/>
+            </a:pPr>
+            <a:r>
+              <a:rPr sz="1200" b="1" i="0">
+                <a:solidFill>
+                  <a:srgbClr val="63636B"/>
+                </a:solidFill>
+              </a:rPr>
+              <a:t>RECOMMENDATION</a:t>
+            </a:r>
+          </a:p>
+        </p:txBody>
+      </p:sp>
+      <p:sp>
+        <p:nvSpPr>
+          <p:cNvPr id="17417" name="cd-rsa-col"/>
+          <p:cNvSpPr txBox="1"/>
+          <p:nvPr/>
+        </p:nvSpPr>
+        <p:spPr>
+          <a:xfrm>
+            <a:off x="8796528" y="3895344"/>
+            <a:ext cx="2971800" cy="237744"/>
+          </a:xfrm>
+          <a:prstGeom prst="rect">
+            <a:avLst/>
+          </a:prstGeom>
+          <a:noFill/>
+        </p:spPr>
+        <p:txBody>
+          <a:bodyPr wrap="square" lIns="0" rIns="0" tIns="0" bIns="0">
+            <a:spAutoFit/>
+          </a:bodyPr>
+          <a:lstStyle/>
+          <a:p>
+            <a:pPr marL="0" indent="0">
+              <a:spcBef>
+                <a:spcPts val="0"/>
+              </a:spcBef>
+              <a:spcAft>
+                <a:spcPts val="0"/>
+              </a:spcAft>
+              <a:buNone/>
+            </a:pPr>
+            <a:r>
+              <a:rPr sz="1200" b="1" i="0">
+                <a:solidFill>
+                  <a:srgbClr val="63636B"/>
+                </a:solidFill>
+              </a:rPr>
+              <a:t>MEANING</a:t>
+            </a:r>
+          </a:p>
+        </p:txBody>
+      </p:sp>
+      <p:sp>
+        <p:nvSpPr>
+          <p:cNvPr id="17418" name="cd-rule"/>
+          <p:cNvSpPr/>
+          <p:nvPr/>
+        </p:nvSpPr>
+        <p:spPr>
+          <a:xfrm>
+            <a:off x="420624" y="4123944"/>
+            <a:ext cx="11347703" cy="12700"/>
+          </a:xfrm>
+          <a:prstGeom prst="rect">
+            <a:avLst/>
+          </a:prstGeom>
+          <a:solidFill>
+            <a:srgbClr val="D2D0CB"/>
+          </a:solidFill>
+          <a:ln>
+            <a:noFill/>
+          </a:ln>
+          <a:effectLst/>
+        </p:spPr>
+        <p:style>
+          <a:lnRef idx="1">
+            <a:schemeClr val="accent1"/>
+          </a:lnRef>
+          <a:fillRef idx="3">
+            <a:schemeClr val="accent1"/>
+          </a:fillRef>
+          <a:effectRef idx="2">
+            <a:schemeClr val="accent1"/>
+          </a:effectRef>
+          <a:fontRef idx="minor">
+            <a:schemeClr val="lt1"/>
+          </a:fontRef>
+        </p:style>
+        <p:txBody>
+          <a:bodyPr rtlCol="0" anchor="ctr"/>
+          <a:lstStyle/>
+          <a:p>
+            <a:pPr algn="ctr"/>
+          </a:p>
+        </p:txBody>
+      </p:sp>
+      <p:sp>
+        <p:nvSpPr>
+          <p:cNvPr id="17419" name="cd-rsa-ev"/>
+          <p:cNvSpPr txBox="1"/>
+          <p:nvPr/>
+        </p:nvSpPr>
+        <p:spPr>
+          <a:xfrm>
+            <a:off x="420624" y="4206240"/>
+            <a:ext cx="2999232" cy="365760"/>
+          </a:xfrm>
+          <a:prstGeom prst="rect">
+            <a:avLst/>
+          </a:prstGeom>
+          <a:noFill/>
+        </p:spPr>
+        <p:txBody>
+          <a:bodyPr wrap="square" lIns="0" rIns="0" tIns="0" bIns="0">
+            <a:spAutoFit/>
+          </a:bodyPr>
+          <a:lstStyle/>
+          <a:p>
+            <a:pPr marL="0" indent="0">
+              <a:spcBef>
+                <a:spcPts val="0"/>
+              </a:spcBef>
+              <a:spcAft>
+                <a:spcPts val="200"/>
+              </a:spcAft>
+              <a:buNone/>
+            </a:pPr>
+            <a:r>
+              <a:rPr sz="1600" b="1" i="0">
+                <a:solidFill>
+                  <a:srgbClr val="1A1A1C"/>
+                </a:solidFill>
+              </a:rPr>
+              <a:t>Case 1 — RSA signing</a:t>
+            </a:r>
+          </a:p>
+          <a:p>
+            <a:pPr marL="0" indent="0">
+              <a:spcBef>
+                <a:spcPts val="0"/>
+              </a:spcBef>
+              <a:spcAft>
+                <a:spcPts val="0"/>
+              </a:spcAft>
+              <a:buNone/>
+            </a:pPr>
+            <a:r>
+              <a:rPr sz="1300" b="0" i="0">
+                <a:solidFill>
+                  <a:srgbClr val="63636B"/>
+                </a:solidFill>
+              </a:rPr>
+              <a:t>svc-payments/signing.py:15   (source · used)</a:t>
+            </a:r>
+          </a:p>
+        </p:txBody>
+      </p:sp>
+      <p:sp>
+        <p:nvSpPr>
+          <p:cNvPr id="17420" name="cd-rsa-cell"/>
+          <p:cNvSpPr txBox="1"/>
+          <p:nvPr/>
+        </p:nvSpPr>
+        <p:spPr>
+          <a:xfrm>
+            <a:off x="3547872" y="4261103"/>
+            <a:ext cx="2578608" cy="310896"/>
+          </a:xfrm>
+          <a:prstGeom prst="rect">
+            <a:avLst/>
+          </a:prstGeom>
+          <a:noFill/>
+        </p:spPr>
+        <p:txBody>
+          <a:bodyPr wrap="square" lIns="0" rIns="0" tIns="0" bIns="0">
+            <a:spAutoFit/>
+          </a:bodyPr>
+          <a:lstStyle/>
+          <a:p>
+            <a:pPr marL="0" indent="0">
+              <a:spcBef>
+                <a:spcPts val="0"/>
+              </a:spcBef>
+              <a:spcAft>
+                <a:spcPts val="0"/>
+              </a:spcAft>
+              <a:buNone/>
+            </a:pPr>
+            <a:r>
+              <a:rPr sz="1500" b="0" i="0">
+                <a:solidFill>
+                  <a:srgbClr val="3E3E44"/>
+                </a:solidFill>
+              </a:rPr>
+              <a:t>RSA-PSS padding signs</a:t>
+            </a:r>
+          </a:p>
+        </p:txBody>
+      </p:sp>
+      <p:sp>
+        <p:nvSpPr>
+          <p:cNvPr id="17421" name="cd-rsa-cell"/>
+          <p:cNvSpPr txBox="1"/>
+          <p:nvPr/>
+        </p:nvSpPr>
+        <p:spPr>
+          <a:xfrm>
+            <a:off x="6236208" y="4261103"/>
+            <a:ext cx="2432304" cy="310896"/>
+          </a:xfrm>
+          <a:prstGeom prst="rect">
+            <a:avLst/>
+          </a:prstGeom>
+          <a:noFill/>
+        </p:spPr>
+        <p:txBody>
+          <a:bodyPr wrap="square" lIns="0" rIns="0" tIns="0" bIns="0">
+            <a:spAutoFit/>
+          </a:bodyPr>
+          <a:lstStyle/>
+          <a:p>
+            <a:pPr marL="0" indent="0">
+              <a:spcBef>
+                <a:spcPts val="0"/>
+              </a:spcBef>
+              <a:spcAft>
+                <a:spcPts val="0"/>
+              </a:spcAft>
+              <a:buNone/>
+            </a:pPr>
+            <a:r>
+              <a:rPr sz="1600" b="1" i="0">
+                <a:solidFill>
+                  <a:srgbClr val="9E3A24"/>
+                </a:solidFill>
+              </a:rPr>
+              <a:t>ML-DSA-65</a:t>
+            </a:r>
+          </a:p>
+        </p:txBody>
+      </p:sp>
+      <p:sp>
+        <p:nvSpPr>
+          <p:cNvPr id="17422" name="cd-rsa-cell"/>
+          <p:cNvSpPr txBox="1"/>
+          <p:nvPr/>
+        </p:nvSpPr>
+        <p:spPr>
+          <a:xfrm>
+            <a:off x="8796528" y="4261103"/>
+            <a:ext cx="2971800" cy="310896"/>
+          </a:xfrm>
+          <a:prstGeom prst="rect">
+            <a:avLst/>
+          </a:prstGeom>
+          <a:noFill/>
+        </p:spPr>
+        <p:txBody>
+          <a:bodyPr wrap="square" lIns="0" rIns="0" tIns="0" bIns="0">
+            <a:spAutoFit/>
+          </a:bodyPr>
+          <a:lstStyle/>
+          <a:p>
+            <a:pPr marL="0" indent="0">
+              <a:spcBef>
+                <a:spcPts val="0"/>
+              </a:spcBef>
+              <a:spcAft>
+                <a:spcPts val="0"/>
+              </a:spcAft>
+              <a:buNone/>
+            </a:pPr>
+            <a:r>
+              <a:rPr sz="1500" b="0" i="0">
+                <a:solidFill>
+                  <a:srgbClr val="3E3E44"/>
+                </a:solidFill>
+              </a:rPr>
+              <a:t>signature-oriented migration</a:t>
+            </a:r>
+          </a:p>
+        </p:txBody>
+      </p:sp>
+      <p:sp>
+        <p:nvSpPr>
+          <p:cNvPr id="17423" name="cd-rule"/>
+          <p:cNvSpPr/>
+          <p:nvPr/>
+        </p:nvSpPr>
+        <p:spPr>
+          <a:xfrm>
+            <a:off x="420624" y="4654296"/>
+            <a:ext cx="11347703" cy="12700"/>
+          </a:xfrm>
+          <a:prstGeom prst="rect">
+            <a:avLst/>
+          </a:prstGeom>
+          <a:solidFill>
+            <a:srgbClr val="D2D0CB"/>
+          </a:solidFill>
+          <a:ln>
+            <a:noFill/>
+          </a:ln>
+          <a:effectLst/>
+        </p:spPr>
+        <p:style>
+          <a:lnRef idx="1">
+            <a:schemeClr val="accent1"/>
+          </a:lnRef>
+          <a:fillRef idx="3">
+            <a:schemeClr val="accent1"/>
+          </a:fillRef>
+          <a:effectRef idx="2">
+            <a:schemeClr val="accent1"/>
+          </a:effectRef>
+          <a:fontRef idx="minor">
+            <a:schemeClr val="lt1"/>
+          </a:fontRef>
+        </p:style>
+        <p:txBody>
+          <a:bodyPr rtlCol="0" anchor="ctr"/>
+          <a:lstStyle/>
+          <a:p>
+            <a:pPr algn="ctr"/>
+          </a:p>
+        </p:txBody>
+      </p:sp>
+      <p:sp>
+        <p:nvSpPr>
+          <p:cNvPr id="17424" name="cd-rsa-ev"/>
+          <p:cNvSpPr txBox="1"/>
+          <p:nvPr/>
+        </p:nvSpPr>
+        <p:spPr>
+          <a:xfrm>
+            <a:off x="420624" y="4736592"/>
+            <a:ext cx="2999232" cy="365760"/>
+          </a:xfrm>
+          <a:prstGeom prst="rect">
+            <a:avLst/>
+          </a:prstGeom>
+          <a:noFill/>
+        </p:spPr>
+        <p:txBody>
+          <a:bodyPr wrap="square" lIns="0" rIns="0" tIns="0" bIns="0">
+            <a:spAutoFit/>
+          </a:bodyPr>
+          <a:lstStyle/>
+          <a:p>
+            <a:pPr marL="0" indent="0">
+              <a:spcBef>
+                <a:spcPts val="0"/>
+              </a:spcBef>
+              <a:spcAft>
+                <a:spcPts val="200"/>
+              </a:spcAft>
+              <a:buNone/>
+            </a:pPr>
+            <a:r>
+              <a:rPr sz="1600" b="1" i="0">
+                <a:solidFill>
+                  <a:srgbClr val="1A1A1C"/>
+                </a:solidFill>
+              </a:rPr>
+              <a:t>Case 2 — RSA key establishment</a:t>
+            </a:r>
+          </a:p>
+          <a:p>
+            <a:pPr marL="0" indent="0">
+              <a:spcBef>
+                <a:spcPts val="0"/>
+              </a:spcBef>
+              <a:spcAft>
+                <a:spcPts val="0"/>
+              </a:spcAft>
+              <a:buNone/>
+            </a:pPr>
+            <a:r>
+              <a:rPr sz="1300" b="0" i="0">
+                <a:solidFill>
+                  <a:srgbClr val="63636B"/>
+                </a:solidFill>
+              </a:rPr>
+              <a:t>svc-gateway/transport.py:16   (source · used)</a:t>
+            </a:r>
+          </a:p>
+        </p:txBody>
+      </p:sp>
+      <p:sp>
+        <p:nvSpPr>
+          <p:cNvPr id="17425" name="cd-rsa-cell"/>
+          <p:cNvSpPr txBox="1"/>
+          <p:nvPr/>
+        </p:nvSpPr>
+        <p:spPr>
+          <a:xfrm>
+            <a:off x="3547872" y="4791455"/>
+            <a:ext cx="2578608" cy="310896"/>
+          </a:xfrm>
+          <a:prstGeom prst="rect">
+            <a:avLst/>
+          </a:prstGeom>
+          <a:noFill/>
+        </p:spPr>
+        <p:txBody>
+          <a:bodyPr wrap="square" lIns="0" rIns="0" tIns="0" bIns="0">
+            <a:spAutoFit/>
+          </a:bodyPr>
+          <a:lstStyle/>
+          <a:p>
+            <a:pPr marL="0" indent="0">
+              <a:spcBef>
+                <a:spcPts val="0"/>
+              </a:spcBef>
+              <a:spcAft>
+                <a:spcPts val="0"/>
+              </a:spcAft>
+              <a:buNone/>
+            </a:pPr>
+            <a:r>
+              <a:rPr sz="1500" b="0" i="0">
+                <a:solidFill>
+                  <a:srgbClr val="3E3E44"/>
+                </a:solidFill>
+              </a:rPr>
+              <a:t>RSA-OAEP padding wraps a key</a:t>
+            </a:r>
+          </a:p>
+        </p:txBody>
+      </p:sp>
+      <p:sp>
+        <p:nvSpPr>
+          <p:cNvPr id="17426" name="cd-rsa-cell"/>
+          <p:cNvSpPr txBox="1"/>
+          <p:nvPr/>
+        </p:nvSpPr>
+        <p:spPr>
+          <a:xfrm>
+            <a:off x="6236208" y="4791455"/>
+            <a:ext cx="2432304" cy="310896"/>
+          </a:xfrm>
+          <a:prstGeom prst="rect">
+            <a:avLst/>
+          </a:prstGeom>
+          <a:noFill/>
+        </p:spPr>
+        <p:txBody>
+          <a:bodyPr wrap="square" lIns="0" rIns="0" tIns="0" bIns="0">
+            <a:spAutoFit/>
+          </a:bodyPr>
+          <a:lstStyle/>
+          <a:p>
+            <a:pPr marL="0" indent="0">
+              <a:spcBef>
+                <a:spcPts val="0"/>
+              </a:spcBef>
+              <a:spcAft>
+                <a:spcPts val="0"/>
+              </a:spcAft>
+              <a:buNone/>
+            </a:pPr>
+            <a:r>
+              <a:rPr sz="1600" b="1" i="0">
+                <a:solidFill>
+                  <a:srgbClr val="9E3A24"/>
+                </a:solidFill>
+              </a:rPr>
+              <a:t>X25519MLKEM768</a:t>
+            </a:r>
+          </a:p>
+        </p:txBody>
+      </p:sp>
+      <p:sp>
+        <p:nvSpPr>
+          <p:cNvPr id="17427" name="cd-rsa-cell"/>
+          <p:cNvSpPr txBox="1"/>
+          <p:nvPr/>
+        </p:nvSpPr>
+        <p:spPr>
+          <a:xfrm>
+            <a:off x="8796528" y="4791455"/>
+            <a:ext cx="2971800" cy="310896"/>
+          </a:xfrm>
+          <a:prstGeom prst="rect">
+            <a:avLst/>
+          </a:prstGeom>
+          <a:noFill/>
+        </p:spPr>
+        <p:txBody>
+          <a:bodyPr wrap="square" lIns="0" rIns="0" tIns="0" bIns="0">
+            <a:spAutoFit/>
+          </a:bodyPr>
+          <a:lstStyle/>
+          <a:p>
+            <a:pPr marL="0" indent="0">
+              <a:spcBef>
+                <a:spcPts val="0"/>
+              </a:spcBef>
+              <a:spcAft>
+                <a:spcPts val="0"/>
+              </a:spcAft>
+              <a:buNone/>
+            </a:pPr>
+            <a:r>
+              <a:rPr sz="1500" b="0" i="0">
+                <a:solidFill>
+                  <a:srgbClr val="3E3E44"/>
+                </a:solidFill>
+              </a:rPr>
+              <a:t>key-establishment migration</a:t>
+            </a:r>
+          </a:p>
+        </p:txBody>
+      </p:sp>
+      <p:sp>
+        <p:nvSpPr>
+          <p:cNvPr id="17428" name="cd-rule"/>
+          <p:cNvSpPr/>
+          <p:nvPr/>
+        </p:nvSpPr>
+        <p:spPr>
+          <a:xfrm>
+            <a:off x="420624" y="5184648"/>
+            <a:ext cx="11347703" cy="12700"/>
+          </a:xfrm>
+          <a:prstGeom prst="rect">
+            <a:avLst/>
+          </a:prstGeom>
+          <a:solidFill>
+            <a:srgbClr val="D2D0CB"/>
+          </a:solidFill>
+          <a:ln>
+            <a:noFill/>
+          </a:ln>
+          <a:effectLst/>
+        </p:spPr>
+        <p:style>
+          <a:lnRef idx="1">
+            <a:schemeClr val="accent1"/>
+          </a:lnRef>
+          <a:fillRef idx="3">
+            <a:schemeClr val="accent1"/>
+          </a:fillRef>
+          <a:effectRef idx="2">
+            <a:schemeClr val="accent1"/>
+          </a:effectRef>
+          <a:fontRef idx="minor">
+            <a:schemeClr val="lt1"/>
+          </a:fontRef>
+        </p:style>
+        <p:txBody>
+          <a:bodyPr rtlCol="0" anchor="ctr"/>
+          <a:lstStyle/>
+          <a:p>
+            <a:pPr algn="ctr"/>
+          </a:p>
+        </p:txBody>
+      </p:sp>
+      <p:sp>
+        <p:nvSpPr>
+          <p:cNvPr id="17429" name="cd-rsa-ev"/>
+          <p:cNvSpPr txBox="1"/>
+          <p:nvPr/>
+        </p:nvSpPr>
+        <p:spPr>
+          <a:xfrm>
+            <a:off x="420624" y="5266944"/>
+            <a:ext cx="2999232" cy="365760"/>
+          </a:xfrm>
+          <a:prstGeom prst="rect">
+            <a:avLst/>
+          </a:prstGeom>
+          <a:noFill/>
+        </p:spPr>
+        <p:txBody>
+          <a:bodyPr wrap="square" lIns="0" rIns="0" tIns="0" bIns="0">
+            <a:spAutoFit/>
+          </a:bodyPr>
+          <a:lstStyle/>
+          <a:p>
+            <a:pPr marL="0" indent="0">
+              <a:spcBef>
+                <a:spcPts val="0"/>
+              </a:spcBef>
+              <a:spcAft>
+                <a:spcPts val="200"/>
+              </a:spcAft>
+              <a:buNone/>
+            </a:pPr>
+            <a:r>
+              <a:rPr sz="1600" b="1" i="0">
+                <a:solidFill>
+                  <a:srgbClr val="1A1A1C"/>
+                </a:solidFill>
+              </a:rPr>
+              <a:t>Case 3 — RSA, unresolved</a:t>
+            </a:r>
+          </a:p>
+          <a:p>
+            <a:pPr marL="0" indent="0">
+              <a:spcBef>
+                <a:spcPts val="0"/>
+              </a:spcBef>
+              <a:spcAft>
+                <a:spcPts val="0"/>
+              </a:spcAft>
+              <a:buNone/>
+            </a:pPr>
+            <a:r>
+              <a:rPr sz="1300" b="0" i="0">
+                <a:solidFill>
+                  <a:srgbClr val="63636B"/>
+                </a:solidFill>
+              </a:rPr>
+              <a:t>legacy/nginx.conf:5   (config · declared)</a:t>
+            </a:r>
+          </a:p>
+        </p:txBody>
+      </p:sp>
+      <p:sp>
+        <p:nvSpPr>
+          <p:cNvPr id="17430" name="cd-rsa-cell"/>
+          <p:cNvSpPr txBox="1"/>
+          <p:nvPr/>
+        </p:nvSpPr>
+        <p:spPr>
+          <a:xfrm>
+            <a:off x="3547872" y="5321807"/>
+            <a:ext cx="2578608" cy="310896"/>
+          </a:xfrm>
+          <a:prstGeom prst="rect">
+            <a:avLst/>
+          </a:prstGeom>
+          <a:noFill/>
+        </p:spPr>
+        <p:txBody>
+          <a:bodyPr wrap="square" lIns="0" rIns="0" tIns="0" bIns="0">
+            <a:spAutoFit/>
+          </a:bodyPr>
+          <a:lstStyle/>
+          <a:p>
+            <a:pPr marL="0" indent="0">
+              <a:spcBef>
+                <a:spcPts val="0"/>
+              </a:spcBef>
+              <a:spcAft>
+                <a:spcPts val="0"/>
+              </a:spcAft>
+              <a:buNone/>
+            </a:pPr>
+            <a:r>
+              <a:rPr sz="1500" b="0" i="0">
+                <a:solidFill>
+                  <a:srgbClr val="3E3E44"/>
+                </a:solidFill>
+              </a:rPr>
+              <a:t>a cipher list permits RSA, purpose unstated</a:t>
+            </a:r>
+          </a:p>
+        </p:txBody>
+      </p:sp>
+      <p:sp>
+        <p:nvSpPr>
+          <p:cNvPr id="17431" name="cd-rsa-cell"/>
+          <p:cNvSpPr txBox="1"/>
+          <p:nvPr/>
+        </p:nvSpPr>
+        <p:spPr>
+          <a:xfrm>
+            <a:off x="6236208" y="5321807"/>
+            <a:ext cx="2432304" cy="310896"/>
+          </a:xfrm>
+          <a:prstGeom prst="rect">
+            <a:avLst/>
+          </a:prstGeom>
+          <a:noFill/>
+        </p:spPr>
+        <p:txBody>
+          <a:bodyPr wrap="square" lIns="0" rIns="0" tIns="0" bIns="0">
+            <a:spAutoFit/>
+          </a:bodyPr>
+          <a:lstStyle/>
+          <a:p>
+            <a:pPr marL="0" indent="0">
+              <a:spcBef>
+                <a:spcPts val="0"/>
+              </a:spcBef>
+              <a:spcAft>
+                <a:spcPts val="0"/>
+              </a:spcAft>
+              <a:buNone/>
+            </a:pPr>
+            <a:r>
+              <a:rPr sz="1600" b="1" i="1">
+                <a:solidFill>
+                  <a:srgbClr val="63636B"/>
+                </a:solidFill>
+              </a:rPr>
+              <a:t>Purpose must be resolved first</a:t>
+            </a:r>
+          </a:p>
+        </p:txBody>
+      </p:sp>
+      <p:sp>
+        <p:nvSpPr>
+          <p:cNvPr id="17432" name="cd-rsa-cell"/>
+          <p:cNvSpPr txBox="1"/>
+          <p:nvPr/>
+        </p:nvSpPr>
+        <p:spPr>
+          <a:xfrm>
+            <a:off x="8796528" y="5321807"/>
+            <a:ext cx="2971800" cy="310896"/>
+          </a:xfrm>
+          <a:prstGeom prst="rect">
+            <a:avLst/>
+          </a:prstGeom>
+          <a:noFill/>
+        </p:spPr>
+        <p:txBody>
+          <a:bodyPr wrap="square" lIns="0" rIns="0" tIns="0" bIns="0">
+            <a:spAutoFit/>
+          </a:bodyPr>
+          <a:lstStyle/>
+          <a:p>
+            <a:pPr marL="0" indent="0">
+              <a:spcBef>
+                <a:spcPts val="0"/>
+              </a:spcBef>
+              <a:spcAft>
+                <a:spcPts val="0"/>
+              </a:spcAft>
+              <a:buNone/>
+            </a:pPr>
+            <a:r>
+              <a:rPr sz="1500" b="0" i="0">
+                <a:solidFill>
+                  <a:srgbClr val="3E3E44"/>
+                </a:solidFill>
+              </a:rPr>
+              <a:t>further evidence required</a:t>
+            </a:r>
+          </a:p>
+        </p:txBody>
+      </p:sp>
+      <p:sp>
+        <p:nvSpPr>
+          <p:cNvPr id="17433" name="cd-security"/>
+          <p:cNvSpPr txBox="1"/>
+          <p:nvPr/>
+        </p:nvSpPr>
+        <p:spPr>
+          <a:xfrm>
+            <a:off x="420624" y="5760720"/>
+            <a:ext cx="11347703" cy="475488"/>
+          </a:xfrm>
+          <a:prstGeom prst="rect">
+            <a:avLst/>
+          </a:prstGeom>
+          <a:noFill/>
+        </p:spPr>
+        <p:txBody>
+          <a:bodyPr wrap="square" lIns="0" rIns="0" tIns="0" bIns="0">
+            <a:spAutoFit/>
+          </a:bodyPr>
+          <a:lstStyle/>
+          <a:p>
+            <a:pPr marL="0" indent="0">
+              <a:spcBef>
+                <a:spcPts val="0"/>
+              </a:spcBef>
+              <a:spcAft>
+                <a:spcPts val="0"/>
+              </a:spcAft>
+              <a:buNone/>
+            </a:pPr>
+            <a:r>
+              <a:rPr sz="1300" b="1" i="0">
+                <a:solidFill>
+                  <a:srgbClr val="1A1A1C"/>
+                </a:solidFill>
+              </a:rPr>
+              <a:t>Security design — </a:t>
+            </a:r>
+            <a:r>
+              <a:rPr sz="1300" b="0" i="0">
+                <a:solidFill>
+                  <a:srgbClr val="63636B"/>
+                </a:solidFill>
+              </a:rPr>
+              <a:t>operator-named targets only, every resolved address vetted first; local-first with nothing written to disk; partial scans disclosed and exported evidence redacted.</a:t>
             </a:r>
           </a:p>
         </p:txBody>
@@ -7168,8 +8899,8 @@
         </p:nvSpPr>
         <p:spPr bwMode="auto">
           <a:xfrm>
-            <a:off x="411480" y="1115568"/>
-            <a:ext cx="7315200" cy="4069080"/>
+            <a:off x="420624" y="1097280"/>
+            <a:ext cx="6510528" cy="4937760"/>
           </a:xfrm>
           <a:prstGeom prst="rect">
             <a:avLst/>
@@ -7196,7 +8927,7 @@
                 <a:spcPts val="0"/>
               </a:spcBef>
               <a:spcAft>
-                <a:spcPts val="300"/>
+                <a:spcPts val="500"/>
               </a:spcAft>
               <a:buClrTx/>
               <a:buSzTx/>
@@ -7205,12 +8936,12 @@
               <a:defRPr/>
             </a:pPr>
             <a:r>
-              <a:rPr sz="1100" b="1">
-                <a:solidFill>
-                  <a:srgbClr val="8C1D1D"/>
-                </a:solidFill>
-              </a:rPr>
-              <a:t>It is built, not proposed</a:t>
+              <a:rPr sz="2100" b="1" i="0">
+                <a:solidFill>
+                  <a:srgbClr val="9E3A24"/>
+                </a:solidFill>
+              </a:rPr>
+              <a:t>Implemented prototype</a:t>
             </a:r>
             <a:endParaRPr kumimoji="0" lang="en-US" sz="2800" b="0" i="0" u="none" strike="noStrike" kern="1200" cap="none" spc="0" normalizeH="0" baseline="0" noProof="0" dirty="0">
               <a:ln>
@@ -7228,254 +8959,234 @@
             </a:endParaRPr>
           </a:p>
           <a:p>
-            <a:pPr marL="0" indent="0">
-              <a:spcBef>
-                <a:spcPts val="0"/>
-              </a:spcBef>
-              <a:spcAft>
-                <a:spcPts val="300"/>
-              </a:spcAft>
-              <a:buNone/>
-            </a:pPr>
-            <a:r>
-              <a:rPr sz="1050" b="1">
-                <a:solidFill>
-                  <a:srgbClr val="0F172A"/>
-                </a:solidFill>
-              </a:rPr>
-              <a:t>~9,000 lines of first-party Python and JavaScript · 664 automated tests · CI on Python 3.11, 3.12 and 3.13 · </a:t>
-            </a:r>
-            <a:r>
-              <a:rPr sz="1050">
-                <a:solidFill>
-                  <a:srgbClr val="1A1A1A"/>
-                </a:solidFill>
-              </a:rPr>
-              <a:t>every figure on this slide is reproducible by a command in this repository.</a:t>
-            </a:r>
-          </a:p>
-          <a:p>
-            <a:pPr marL="0" indent="0">
-              <a:spcBef>
-                <a:spcPts val="700"/>
-              </a:spcBef>
-              <a:spcAft>
-                <a:spcPts val="300"/>
-              </a:spcAft>
-              <a:buNone/>
-            </a:pPr>
-            <a:r>
-              <a:rPr sz="1100" b="1">
-                <a:solidFill>
-                  <a:srgbClr val="8C1D1D"/>
-                </a:solidFill>
-              </a:rPr>
-              <a:t>How we know it works</a:t>
-            </a:r>
-          </a:p>
-          <a:p>
-            <a:pPr marL="160020" indent="-160020">
-              <a:spcBef>
-                <a:spcPts val="0"/>
-              </a:spcBef>
-              <a:spcAft>
-                <a:spcPts val="300"/>
+            <a:pPr marL="146050" indent="-146050">
+              <a:spcBef>
+                <a:spcPts val="0"/>
+              </a:spcBef>
+              <a:spcAft>
+                <a:spcPts val="400"/>
               </a:spcAft>
               <a:buFont typeface="Arial"/>
               <a:buChar char="–"/>
             </a:pPr>
             <a:r>
-              <a:rPr sz="1050" b="1">
-                <a:solidFill>
-                  <a:srgbClr val="0F172A"/>
-                </a:solidFill>
-              </a:rPr>
-              <a:t>Measured, not asserted. </a:t>
-            </a:r>
-            <a:r>
-              <a:rPr sz="1050">
-                <a:solidFill>
-                  <a:srgbClr val="1A1A1A"/>
-                </a:solidFill>
-              </a:rPr>
-              <a:t>A hand-labelled corpus of 116 findings across six scanners, written by reading the fixtures rather than by running the tool. It found seven real detector defects that code review had missed. CI fails if precision or recall regresses.</a:t>
-            </a:r>
-          </a:p>
-          <a:p>
-            <a:pPr marL="160020" indent="-160020">
-              <a:spcBef>
-                <a:spcPts val="0"/>
-              </a:spcBef>
-              <a:spcAft>
-                <a:spcPts val="300"/>
+              <a:rPr sz="1500" b="0" i="0">
+                <a:solidFill>
+                  <a:srgbClr val="3E3E44"/>
+                </a:solidFill>
+              </a:rPr>
+              <a:t>Seven scanning surfaces, each returning evidence with a location, a technique and a confidence</a:t>
+            </a:r>
+          </a:p>
+          <a:p>
+            <a:pPr marL="146050" indent="-146050">
+              <a:spcBef>
+                <a:spcPts val="0"/>
+              </a:spcBef>
+              <a:spcAft>
+                <a:spcPts val="400"/>
               </a:spcAft>
               <a:buFont typeface="Arial"/>
               <a:buChar char="–"/>
             </a:pPr>
             <a:r>
-              <a:rPr sz="1050" b="1">
-                <a:solidFill>
-                  <a:srgbClr val="0F172A"/>
-                </a:solidFill>
-              </a:rPr>
-              <a:t>Conformance is checked by the standard, not by us. </a:t>
-            </a:r>
-            <a:r>
-              <a:rPr sz="1050">
-                <a:solidFill>
-                  <a:srgbClr val="1A1A1A"/>
-                </a:solidFill>
-              </a:rPr>
-              <a:t>Every CBOM is validated against the official CycloneDX JSON Schemas, offline, at a pinned commit. CI fails on any violation.</a:t>
-            </a:r>
-          </a:p>
-          <a:p>
-            <a:pPr marL="0" indent="0">
-              <a:spcBef>
-                <a:spcPts val="700"/>
-              </a:spcBef>
-              <a:spcAft>
-                <a:spcPts val="300"/>
-              </a:spcAft>
-              <a:buNone/>
-            </a:pPr>
-            <a:r>
-              <a:rPr sz="1100" b="1">
-                <a:solidFill>
-                  <a:srgbClr val="8C1D1D"/>
-                </a:solidFill>
-              </a:rPr>
-              <a:t>The three risks that actually matter, and the answers</a:t>
-            </a:r>
-          </a:p>
-          <a:p>
-            <a:pPr marL="160020" indent="-160020">
-              <a:spcBef>
-                <a:spcPts val="0"/>
-              </a:spcBef>
-              <a:spcAft>
-                <a:spcPts val="300"/>
+              <a:rPr sz="1500" b="0" i="0">
+                <a:solidFill>
+                  <a:srgbClr val="3E3E44"/>
+                </a:solidFill>
+              </a:rPr>
+              <a:t>An inventory of distinct assets, carrying purpose and assurance on every one</a:t>
+            </a:r>
+          </a:p>
+          <a:p>
+            <a:pPr marL="146050" indent="-146050">
+              <a:spcBef>
+                <a:spcPts val="0"/>
+              </a:spcBef>
+              <a:spcAft>
+                <a:spcPts val="400"/>
               </a:spcAft>
               <a:buFont typeface="Arial"/>
               <a:buChar char="–"/>
             </a:pPr>
             <a:r>
-              <a:rPr sz="1050" b="1">
-                <a:solidFill>
-                  <a:srgbClr val="0F172A"/>
-                </a:solidFill>
-              </a:rPr>
-              <a:t>Hostile input. </a:t>
-            </a:r>
-            <a:r>
-              <a:rPr sz="1050">
-                <a:solidFill>
-                  <a:srgbClr val="1A1A1A"/>
-                </a:solidFill>
-              </a:rPr>
-              <a:t>It reads untrusted paths and archives, so: filesystem boundary with symlink-escape refusal, per-member archive vetting, bounded streaming with nothing extracted to disk, and a destination policy that resolves, vets every resolved address, then connects to the vetted literal.</a:t>
-            </a:r>
-          </a:p>
-          <a:p>
-            <a:pPr marL="160020" indent="-160020">
-              <a:spcBef>
-                <a:spcPts val="0"/>
-              </a:spcBef>
-              <a:spcAft>
-                <a:spcPts val="300"/>
+              <a:rPr sz="1500" b="0" i="0">
+                <a:solidFill>
+                  <a:srgbClr val="3E3E44"/>
+                </a:solidFill>
+              </a:rPr>
+              <a:t>A quantum-risk model taking operator-supplied shelf life, criticality and constraints, saved per asset and surviving a rescan</a:t>
+            </a:r>
+          </a:p>
+          <a:p>
+            <a:pPr marL="146050" indent="-146050">
+              <a:spcBef>
+                <a:spcPts val="0"/>
+              </a:spcBef>
+              <a:spcAft>
+                <a:spcPts val="400"/>
               </a:spcAft>
               <a:buFont typeface="Arial"/>
               <a:buChar char="–"/>
             </a:pPr>
             <a:r>
-              <a:rPr sz="1050" b="1">
-                <a:solidFill>
-                  <a:srgbClr val="0F172A"/>
-                </a:solidFill>
-              </a:rPr>
-              <a:t>A partial scan mistaken for a complete one. </a:t>
-            </a:r>
-            <a:r>
-              <a:rPr sz="1050">
-                <a:solidFill>
-                  <a:srgbClr val="1A1A1A"/>
-                </a:solidFill>
-              </a:rPr>
-              <a:t>The most damaging thing this tool could produce. Every scan carries an explicit complete-or-partial flag and its reasons into the console, the report and the CBOM.</a:t>
-            </a:r>
-          </a:p>
-          <a:p>
-            <a:pPr marL="160020" indent="-160020">
-              <a:spcBef>
-                <a:spcPts val="0"/>
-              </a:spcBef>
-              <a:spcAft>
-                <a:spcPts val="300"/>
+              <a:rPr sz="1500" b="0" i="0">
+                <a:solidFill>
+                  <a:srgbClr val="3E3E44"/>
+                </a:solidFill>
+              </a:rPr>
+              <a:t>Interactive investigation: filters, an evidence drawer, scan history</a:t>
+            </a:r>
+          </a:p>
+          <a:p>
+            <a:pPr marL="146050" indent="-146050">
+              <a:spcBef>
+                <a:spcPts val="0"/>
+              </a:spcBef>
+              <a:spcAft>
+                <a:spcPts val="400"/>
               </a:spcAft>
               <a:buFont typeface="Arial"/>
               <a:buChar char="–"/>
             </a:pPr>
             <a:r>
-              <a:rPr sz="1050" b="1">
-                <a:solidFill>
-                  <a:srgbClr val="0F172A"/>
-                </a:solidFill>
-              </a:rPr>
-              <a:t>Leaking what it finds. </a:t>
-            </a:r>
-            <a:r>
-              <a:rPr sz="1050">
-                <a:solidFill>
-                  <a:srgbClr val="1A1A1A"/>
-                </a:solidFill>
-              </a:rPr>
-              <a:t>A crypto inventory is the most sensitive file an estate owns. Evidence is redacted before export; the location is kept, because that is what makes a finding actionable.</a:t>
+              <a:rPr sz="1500" b="0" i="0">
+                <a:solidFill>
+                  <a:srgbClr val="3E3E44"/>
+                </a:solidFill>
+              </a:rPr>
+              <a:t>CycloneDX 1.6 / 1.7 export and a self-contained HTML report reaching every finding</a:t>
             </a:r>
           </a:p>
           <a:p>
             <a:pPr marL="0" indent="0">
               <a:spcBef>
-                <a:spcPts val="700"/>
-              </a:spcBef>
-              <a:spcAft>
-                <a:spcPts val="300"/>
-              </a:spcAft>
-              <a:buNone/>
-            </a:pPr>
-            <a:r>
-              <a:rPr sz="1100" b="1">
-                <a:solidFill>
-                  <a:srgbClr val="8C1D1D"/>
-                </a:solidFill>
-              </a:rPr>
-              <a:t>What that adds up to</a:t>
-            </a:r>
-          </a:p>
-          <a:p>
-            <a:pPr marL="0" indent="0">
-              <a:spcBef>
-                <a:spcPts val="0"/>
-              </a:spcBef>
-              <a:spcAft>
-                <a:spcPts val="300"/>
-              </a:spcAft>
-              <a:buNone/>
-            </a:pPr>
-            <a:r>
-              <a:rPr sz="1050" b="1">
-                <a:solidFill>
-                  <a:srgbClr val="0F172A"/>
-                </a:solidFill>
-              </a:rPr>
-              <a:t>664 automated tests · 116 labelled benchmark findings across six scanners · 7 detector defects the benchmark found that code review did not · 0 schema violations, </a:t>
-            </a:r>
-            <a:r>
-              <a:rPr sz="1050">
-                <a:solidFill>
-                  <a:srgbClr val="1A1A1A"/>
-                </a:solidFill>
-              </a:rPr>
-              <a:t>each checked by CI on every push to this branch.</a:t>
+                <a:spcPts val="900"/>
+              </a:spcBef>
+              <a:spcAft>
+                <a:spcPts val="500"/>
+              </a:spcAft>
+              <a:buNone/>
+            </a:pPr>
+            <a:r>
+              <a:rPr sz="2100" b="1" i="0">
+                <a:solidFill>
+                  <a:srgbClr val="9E3A24"/>
+                </a:solidFill>
+              </a:rPr>
+              <a:t>Validation</a:t>
+            </a:r>
+          </a:p>
+          <a:p>
+            <a:pPr marL="146050" indent="-146050">
+              <a:spcBef>
+                <a:spcPts val="0"/>
+              </a:spcBef>
+              <a:spcAft>
+                <a:spcPts val="400"/>
+              </a:spcAft>
+              <a:buFont typeface="Arial"/>
+              <a:buChar char="–"/>
+            </a:pPr>
+            <a:r>
+              <a:rPr sz="1500" b="1" i="0">
+                <a:solidFill>
+                  <a:srgbClr val="1A1A1C"/>
+                </a:solidFill>
+              </a:rPr>
+              <a:t>664 automated tests — </a:t>
+            </a:r>
+            <a:r>
+              <a:rPr sz="1500" b="0" i="0">
+                <a:solidFill>
+                  <a:srgbClr val="3E3E44"/>
+                </a:solidFill>
+              </a:rPr>
+              <a:t>on Python 3.11, 3.12 and 3.13 in CI</a:t>
+            </a:r>
+          </a:p>
+          <a:p>
+            <a:pPr marL="146050" indent="-146050">
+              <a:spcBef>
+                <a:spcPts val="0"/>
+              </a:spcBef>
+              <a:spcAft>
+                <a:spcPts val="400"/>
+              </a:spcAft>
+              <a:buFont typeface="Arial"/>
+              <a:buChar char="–"/>
+            </a:pPr>
+            <a:r>
+              <a:rPr sz="1500" b="1" i="0">
+                <a:solidFill>
+                  <a:srgbClr val="1A1A1C"/>
+                </a:solidFill>
+              </a:rPr>
+              <a:t>Official schema validation — </a:t>
+            </a:r>
+            <a:r>
+              <a:rPr sz="1500" b="0" i="0">
+                <a:solidFill>
+                  <a:srgbClr val="3E3E44"/>
+                </a:solidFill>
+              </a:rPr>
+              <a:t>every CBOM checked offline against the CycloneDX schemas at pinned commit 0bd48c8; CI fails on a violation</a:t>
+            </a:r>
+          </a:p>
+          <a:p>
+            <a:pPr marL="146050" indent="-146050">
+              <a:spcBef>
+                <a:spcPts val="0"/>
+              </a:spcBef>
+              <a:spcAft>
+                <a:spcPts val="400"/>
+              </a:spcAft>
+              <a:buFont typeface="Arial"/>
+              <a:buChar char="–"/>
+            </a:pPr>
+            <a:r>
+              <a:rPr sz="1500" b="1" i="0">
+                <a:solidFill>
+                  <a:srgbClr val="1A1A1C"/>
+                </a:solidFill>
+              </a:rPr>
+              <a:t>Hand-labelled benchmark — </a:t>
+            </a:r>
+            <a:r>
+              <a:rPr sz="1500" b="0" i="0">
+                <a:solidFill>
+                  <a:srgbClr val="3E3E44"/>
+                </a:solidFill>
+              </a:rPr>
+              <a:t>116 findings over six scanners, labelled from the fixtures, not from the tool's output</a:t>
+            </a:r>
+          </a:p>
+          <a:p>
+            <a:pPr marL="146050" indent="-146050">
+              <a:spcBef>
+                <a:spcPts val="0"/>
+              </a:spcBef>
+              <a:spcAft>
+                <a:spcPts val="400"/>
+              </a:spcAft>
+              <a:buFont typeface="Arial"/>
+              <a:buChar char="–"/>
+            </a:pPr>
+            <a:r>
+              <a:rPr sz="1500" b="1" i="0">
+                <a:solidFill>
+                  <a:srgbClr val="1A1A1C"/>
+                </a:solidFill>
+              </a:rPr>
+              <a:t>A test per defect found — </a:t>
+            </a:r>
+            <a:r>
+              <a:rPr sz="1500" b="0" i="0">
+                <a:solidFill>
+                  <a:srgbClr val="3E3E44"/>
+                </a:solidFill>
+              </a:rPr>
+              <a:t>the benchmark caught seven detector defects code review had missed</a:t>
             </a:r>
           </a:p>
         </p:txBody>
@@ -7678,7 +9389,7 @@
           <a:p>
             <a:pPr algn="ctr"/>
             <a:r>
-              <a:rPr lang="en-US" dirty="0" sz="1000" b="1"/>
+              <a:rPr lang="en-US" dirty="0" sz="1100" b="1"/>
               <a:t>Zero-Day</a:t>
             </a:r>
             <a:endParaRPr lang="en-IN" dirty="0"/>
@@ -7717,7 +9428,7 @@
       </p:pic>
       <p:pic>
         <p:nvPicPr>
-          <p:cNvPr id="17411" name="cd-shot-07-evidence-drawer" descr="07-evidence-drawer-0-0-0.53.png"/>
+          <p:cNvPr id="17411" name="cd-shot-01-assessment-0.30" descr="01-assessment-0.300-0.115-0.990-0.725.png"/>
           <p:cNvPicPr>
             <a:picLocks noChangeAspect="1"/>
           </p:cNvPicPr>
@@ -7731,8 +9442,8 @@
         </p:blipFill>
         <p:spPr>
           <a:xfrm>
-            <a:off x="7973568" y="1152144"/>
-            <a:ext cx="3803904" cy="4134517"/>
+            <a:off x="7278624" y="1133856"/>
+            <a:ext cx="4489703" cy="2481152"/>
           </a:xfrm>
           <a:prstGeom prst="rect">
             <a:avLst/>
@@ -7747,8 +9458,8 @@
         </p:nvSpPr>
         <p:spPr>
           <a:xfrm>
-            <a:off x="7973568" y="5350669"/>
-            <a:ext cx="3803904" cy="274320"/>
+            <a:off x="7278624" y="3715592"/>
+            <a:ext cx="4489703" cy="274320"/>
           </a:xfrm>
           <a:prstGeom prst="rect">
             <a:avLst/>
@@ -7756,35 +9467,41 @@
           <a:noFill/>
         </p:spPr>
         <p:txBody>
-          <a:bodyPr wrap="square">
+          <a:bodyPr wrap="square" lIns="0" rIns="0" tIns="0" bIns="0">
             <a:spAutoFit/>
           </a:bodyPr>
           <a:lstStyle/>
           <a:p>
             <a:pPr marL="0" indent="0">
-              <a:buNone/>
-            </a:pPr>
-            <a:r>
-              <a:rPr sz="950">
-                <a:solidFill>
-                  <a:srgbClr val="5A5A5A"/>
-                </a:solidFill>
-              </a:rPr>
-              <a:t>Every finding opens onto the evidence behind it and the arithmetic behind its score.</a:t>
-            </a:r>
-          </a:p>
-        </p:txBody>
-      </p:sp>
-      <p:sp>
-        <p:nvSpPr>
-          <p:cNvPr id="17413" name="cd-note"/>
+              <a:spcBef>
+                <a:spcPts val="0"/>
+              </a:spcBef>
+              <a:spcAft>
+                <a:spcPts val="0"/>
+              </a:spcAft>
+              <a:buNone/>
+            </a:pPr>
+            <a:r>
+              <a:rPr sz="1300" b="0" i="1">
+                <a:solidFill>
+                  <a:srgbClr val="63636B"/>
+                </a:solidFill>
+              </a:rPr>
+              <a:t>Live console, demo estate — the partial-scan warning names the refused endpoint, above the real counts.</a:t>
+            </a:r>
+          </a:p>
+        </p:txBody>
+      </p:sp>
+      <p:sp>
+        <p:nvSpPr>
+          <p:cNvPr id="17413" name="cd-feas"/>
           <p:cNvSpPr txBox="1"/>
           <p:nvPr/>
         </p:nvSpPr>
         <p:spPr>
           <a:xfrm>
-            <a:off x="411480" y="5303520"/>
-            <a:ext cx="7315200" cy="914400"/>
+            <a:off x="7278624" y="4224528"/>
+            <a:ext cx="4489703" cy="2011680"/>
           </a:xfrm>
           <a:prstGeom prst="rect">
             <a:avLst/>
@@ -7792,7 +9509,7 @@
           <a:noFill/>
         </p:spPr>
         <p:txBody>
-          <a:bodyPr wrap="square">
+          <a:bodyPr wrap="square" lIns="0" rIns="0" tIns="0" bIns="0">
             <a:spAutoFit/>
           </a:bodyPr>
           <a:lstStyle/>
@@ -7802,25 +9519,25 @@
                 <a:spcPts val="0"/>
               </a:spcBef>
               <a:spcAft>
-                <a:spcPts val="300"/>
-              </a:spcAft>
-              <a:buNone/>
-            </a:pPr>
-            <a:r>
-              <a:rPr sz="1000" b="1">
-                <a:solidFill>
-                  <a:srgbClr val="0F172A"/>
-                </a:solidFill>
-              </a:rPr>
-              <a:t>Stated limits — </a:t>
-            </a:r>
-            <a:r>
-              <a:rPr sz="1000">
-                <a:solidFill>
-                  <a:srgbClr val="1A1A1A"/>
-                </a:solidFill>
-              </a:rPr>
-              <a:t>full AST analysis is Python only; seven more languages use curated rule packs, and Rust and Swift are recognised but effectively uncovered. Binary parsing is ELF only, so Mach-O and PE are out of scope. No KMS, HSM, cloud or Kubernetes integration exists, and none is claimed.</a:t>
+                <a:spcPts val="400"/>
+              </a:spcAft>
+              <a:buNone/>
+            </a:pPr>
+            <a:r>
+              <a:rPr sz="1500" b="1" i="0">
+                <a:solidFill>
+                  <a:srgbClr val="1A1A1C"/>
+                </a:solidFill>
+              </a:rPr>
+              <a:t>Why deployment is feasible — </a:t>
+            </a:r>
+            <a:r>
+              <a:rPr sz="1500" b="0" i="0">
+                <a:solidFill>
+                  <a:srgbClr val="3E3E44"/>
+                </a:solidFill>
+              </a:rPr>
+              <a:t>The tool is local-first: one machine, loopback by default, no cloud service, and it validates its own output offline. Committed demo fixtures reproduce every figure in this deck with one command.</a:t>
             </a:r>
           </a:p>
           <a:p>
@@ -7829,25 +9546,25 @@
                 <a:spcPts val="0"/>
               </a:spcBef>
               <a:spcAft>
-                <a:spcPts val="300"/>
-              </a:spcAft>
-              <a:buNone/>
-            </a:pPr>
-            <a:r>
-              <a:rPr sz="1000" b="1">
-                <a:solidFill>
-                  <a:srgbClr val="0F172A"/>
-                </a:solidFill>
-              </a:rPr>
-              <a:t>Reproduce it — </a:t>
-            </a:r>
-            <a:r>
-              <a:rPr sz="900" i="1">
-                <a:solidFill>
-                  <a:srgbClr val="5A5A5A"/>
-                </a:solidFill>
-              </a:rPr>
-              <a:t>python -m pytest  ·  python -m benchmark.run  ·  python run.py --demo  ·  python run.py --preflight-offline</a:t>
+                <a:spcPts val="0"/>
+              </a:spcAft>
+              <a:buNone/>
+            </a:pPr>
+            <a:r>
+              <a:rPr sz="1300" b="1" i="0">
+                <a:solidFill>
+                  <a:srgbClr val="1A1A1C"/>
+                </a:solidFill>
+              </a:rPr>
+              <a:t>Current limits — </a:t>
+            </a:r>
+            <a:r>
+              <a:rPr sz="1300" b="0" i="0">
+                <a:solidFill>
+                  <a:srgbClr val="63636B"/>
+                </a:solidFill>
+              </a:rPr>
+              <a:t>Full AST analysis is Python only; seven further languages use rule packs, and Rust and Swift are recognised but effectively uncovered. Binary parsing is ELF only. No KMS, HSM, cloud or Kubernetes integration. A working prototype, not a deployed product.</a:t>
             </a:r>
           </a:p>
         </p:txBody>
@@ -7998,8 +9715,8 @@
         </p:nvSpPr>
         <p:spPr bwMode="auto">
           <a:xfrm>
-            <a:off x="411480" y="1115568"/>
-            <a:ext cx="5532120" cy="4114800"/>
+            <a:off x="420624" y="1097280"/>
+            <a:ext cx="6035040" cy="4663440"/>
           </a:xfrm>
           <a:prstGeom prst="rect">
             <a:avLst/>
@@ -8026,7 +9743,7 @@
                 <a:spcPts val="0"/>
               </a:spcBef>
               <a:spcAft>
-                <a:spcPts val="300"/>
+                <a:spcPts val="500"/>
               </a:spcAft>
               <a:buClrTx/>
               <a:buSzTx/>
@@ -8035,12 +9752,12 @@
               <a:defRPr/>
             </a:pPr>
             <a:r>
-              <a:rPr sz="1150" b="1">
-                <a:solidFill>
-                  <a:srgbClr val="8C1D1D"/>
-                </a:solidFill>
-              </a:rPr>
-              <a:t>Who it is for</a:t>
+              <a:rPr sz="2100" b="1" i="0">
+                <a:solidFill>
+                  <a:srgbClr val="9E3A24"/>
+                </a:solidFill>
+              </a:rPr>
+              <a:t>How a migration team actually uses the output</a:t>
             </a:r>
           </a:p>
           <a:p>
@@ -8049,135 +9766,79 @@
                 <a:spcPts val="0"/>
               </a:spcBef>
               <a:spcAft>
-                <a:spcPts val="300"/>
-              </a:spcAft>
-              <a:buNone/>
-            </a:pPr>
-            <a:r>
-              <a:rPr sz="1100">
-                <a:solidFill>
-                  <a:srgbClr val="1A1A1A"/>
-                </a:solidFill>
-              </a:rPr>
-              <a:t>Security engineers and migration programme owners who have been told to move to post-quantum cryptography and have no inventory to move.</a:t>
+                <a:spcPts val="700"/>
+              </a:spcAft>
+              <a:buNone/>
+            </a:pPr>
+            <a:r>
+              <a:rPr sz="1600" b="1" i="0">
+                <a:solidFill>
+                  <a:srgbClr val="1B3A6B"/>
+                </a:solidFill>
+              </a:rPr>
+              <a:t>DISCOVER  </a:t>
+            </a:r>
+            <a:r>
+              <a:rPr sz="1600" b="0" i="0">
+                <a:solidFill>
+                  <a:srgbClr val="3E3E44"/>
+                </a:solidFill>
+              </a:rPr>
+              <a:t>Build an inventory of the cryptographic assets present across the supported surfaces.</a:t>
             </a:r>
           </a:p>
           <a:p>
             <a:pPr marL="0" indent="0">
               <a:spcBef>
+                <a:spcPts val="0"/>
+              </a:spcBef>
+              <a:spcAft>
                 <a:spcPts val="700"/>
-              </a:spcBef>
-              <a:spcAft>
-                <a:spcPts val="300"/>
-              </a:spcAft>
-              <a:buNone/>
-            </a:pPr>
-            <a:r>
-              <a:rPr sz="1150" b="1">
-                <a:solidFill>
-                  <a:srgbClr val="8C1D1D"/>
-                </a:solidFill>
-              </a:rPr>
-              <a:t>What changes for them</a:t>
-            </a:r>
-          </a:p>
-          <a:p>
-            <a:pPr marL="160020" indent="-160020">
-              <a:spcBef>
-                <a:spcPts val="0"/>
-              </a:spcBef>
-              <a:spcAft>
-                <a:spcPts val="300"/>
-              </a:spcAft>
-              <a:buFont typeface="Arial"/>
-              <a:buChar char="–"/>
-            </a:pPr>
-            <a:r>
-              <a:rPr sz="1100">
-                <a:solidFill>
-                  <a:srgbClr val="1A1A1A"/>
-                </a:solidFill>
-              </a:rPr>
-              <a:t>“We think we use RSA somewhere” becomes a per-asset list with file, line, purpose, evidence strength and a named replacement.</a:t>
-            </a:r>
-          </a:p>
-          <a:p>
-            <a:pPr marL="160020" indent="-160020">
-              <a:spcBef>
-                <a:spcPts val="0"/>
-              </a:spcBef>
-              <a:spcAft>
-                <a:spcPts val="300"/>
-              </a:spcAft>
-              <a:buFont typeface="Arial"/>
-              <a:buChar char="–"/>
-            </a:pPr>
-            <a:r>
-              <a:rPr sz="1100">
-                <a:solidFill>
-                  <a:srgbClr val="1A1A1A"/>
-                </a:solidFill>
-              </a:rPr>
-              <a:t>What an estate runs is separated from what it merely has installed, so the migration plan is not padded with libraries nobody calls.</a:t>
-            </a:r>
-          </a:p>
-          <a:p>
-            <a:pPr marL="160020" indent="-160020">
-              <a:spcBef>
-                <a:spcPts val="0"/>
-              </a:spcBef>
-              <a:spcAft>
-                <a:spcPts val="300"/>
-              </a:spcAft>
-              <a:buFont typeface="Arial"/>
-              <a:buChar char="–"/>
-            </a:pPr>
-            <a:r>
-              <a:rPr sz="1100">
-                <a:solidFill>
-                  <a:srgbClr val="1A1A1A"/>
-                </a:solidFill>
-              </a:rPr>
-              <a:t>The output is a published standard a regulator or a downstream tool can consume, not a bespoke report format.</a:t>
-            </a:r>
-          </a:p>
-          <a:p>
-            <a:pPr marL="160020" indent="-160020">
-              <a:spcBef>
-                <a:spcPts val="0"/>
-              </a:spcBef>
-              <a:spcAft>
-                <a:spcPts val="300"/>
-              </a:spcAft>
-              <a:buFont typeface="Arial"/>
-              <a:buChar char="–"/>
-            </a:pPr>
-            <a:r>
-              <a:rPr sz="1100">
-                <a:solidFill>
-                  <a:srgbClr val="1A1A1A"/>
-                </a:solidFill>
-              </a:rPr>
-              <a:t>A partial scan is labelled partial, so nobody signs off an estate on an inventory that silently missed half of it.</a:t>
+              </a:spcAft>
+              <a:buNone/>
+            </a:pPr>
+            <a:r>
+              <a:rPr sz="1600" b="1" i="0">
+                <a:solidFill>
+                  <a:srgbClr val="1B3A6B"/>
+                </a:solidFill>
+              </a:rPr>
+              <a:t>UNDERSTAND  </a:t>
+            </a:r>
+            <a:r>
+              <a:rPr sz="1600" b="0" i="0">
+                <a:solidFill>
+                  <a:srgbClr val="3E3E44"/>
+                </a:solidFill>
+              </a:rPr>
+              <a:t>For each asset: the algorithm, the purpose it serves, how strong the evidence is, and exactly where it lives.</a:t>
             </a:r>
           </a:p>
           <a:p>
             <a:pPr marL="0" indent="0">
               <a:spcBef>
+                <a:spcPts val="0"/>
+              </a:spcBef>
+              <a:spcAft>
                 <a:spcPts val="700"/>
-              </a:spcBef>
-              <a:spcAft>
-                <a:spcPts val="300"/>
-              </a:spcAft>
-              <a:buNone/>
-            </a:pPr>
-            <a:r>
-              <a:rPr sz="1150" b="1">
-                <a:solidFill>
-                  <a:srgbClr val="8C1D1D"/>
-                </a:solidFill>
-              </a:rPr>
-              <a:t>Measured evidence — on a synthetic corpus, and only that</a:t>
+              </a:spcAft>
+              <a:buNone/>
+            </a:pPr>
+            <a:r>
+              <a:rPr sz="1600" b="1" i="0">
+                <a:solidFill>
+                  <a:srgbClr val="1B3A6B"/>
+                </a:solidFill>
+              </a:rPr>
+              <a:t>PRIORITISE  </a:t>
+            </a:r>
+            <a:r>
+              <a:rPr sz="1600" b="0" i="0">
+                <a:solidFill>
+                  <a:srgbClr val="3E3E44"/>
+                </a:solidFill>
+              </a:rPr>
+              <a:t>Assess quantum exposure with documented assumptions and operator-supplied asset context, so the order of work is defensible.</a:t>
             </a:r>
           </a:p>
           <a:p>
@@ -8186,25 +9847,25 @@
                 <a:spcPts val="0"/>
               </a:spcBef>
               <a:spcAft>
-                <a:spcPts val="300"/>
-              </a:spcAft>
-              <a:buNone/>
-            </a:pPr>
-            <a:r>
-              <a:rPr sz="1100" b="1">
-                <a:solidFill>
-                  <a:srgbClr val="0F172A"/>
-                </a:solidFill>
-              </a:rPr>
-              <a:t>Precision 1.000  ·  recall 1.000  ·  F1 1.000 </a:t>
-            </a:r>
-            <a:r>
-              <a:rPr sz="1100">
-                <a:solidFill>
-                  <a:srgbClr val="1A1A1A"/>
-                </a:solidFill>
-              </a:rPr>
-              <a:t>over 116 hand-labelled findings across six scanners.</a:t>
+                <a:spcPts val="700"/>
+              </a:spcAft>
+              <a:buNone/>
+            </a:pPr>
+            <a:r>
+              <a:rPr sz="1600" b="1" i="0">
+                <a:solidFill>
+                  <a:srgbClr val="1B3A6B"/>
+                </a:solidFill>
+              </a:rPr>
+              <a:t>PLAN  </a:t>
+            </a:r>
+            <a:r>
+              <a:rPr sz="1600" b="0" i="0">
+                <a:solidFill>
+                  <a:srgbClr val="3E3E44"/>
+                </a:solidFill>
+              </a:rPr>
+              <a:t>Attach a purpose-appropriate migration target — or record that more evidence is needed before one can be chosen.</a:t>
             </a:r>
           </a:p>
           <a:p>
@@ -8213,44 +9874,63 @@
                 <a:spcPts val="0"/>
               </a:spcBef>
               <a:spcAft>
-                <a:spcPts val="300"/>
-              </a:spcAft>
-              <a:buNone/>
-            </a:pPr>
-            <a:r>
-              <a:rPr sz="1100" b="1">
-                <a:solidFill>
-                  <a:srgbClr val="0F172A"/>
-                </a:solidFill>
-              </a:rPr>
-              <a:t>Cryptographic purpose correct on 114 of 114 </a:t>
-            </a:r>
-            <a:r>
-              <a:rPr sz="1100">
-                <a:solidFill>
-                  <a:srgbClr val="1A1A1A"/>
-                </a:solidFill>
-              </a:rPr>
-              <a:t>scored cases; assurance on 116 of 116.</a:t>
+                <a:spcPts val="700"/>
+              </a:spcAft>
+              <a:buNone/>
+            </a:pPr>
+            <a:r>
+              <a:rPr sz="1600" b="1" i="0">
+                <a:solidFill>
+                  <a:srgbClr val="1B3A6B"/>
+                </a:solidFill>
+              </a:rPr>
+              <a:t>EXPORT  </a:t>
+            </a:r>
+            <a:r>
+              <a:rPr sz="1600" b="0" i="0">
+                <a:solidFill>
+                  <a:srgbClr val="3E3E44"/>
+                </a:solidFill>
+              </a:rPr>
+              <a:t>Produce a schema-validated CBOM and a traceable report that another team or tool can consume.</a:t>
             </a:r>
           </a:p>
           <a:p>
             <a:pPr marL="0" indent="0">
               <a:spcBef>
-                <a:spcPts val="0"/>
-              </a:spcBef>
-              <a:spcAft>
-                <a:spcPts val="300"/>
-              </a:spcAft>
-              <a:buNone/>
-            </a:pPr>
-            <a:r>
-              <a:rPr sz="1000" i="1">
-                <a:solidFill>
-                  <a:srgbClr val="5A5A5A"/>
-                </a:solidFill>
-              </a:rPr>
-              <a:t>Read that precisely. These figures measure a developer-written corpus this project wrote. They are NOT an estimate of real-world enterprise accuracy, which has not been measured and is not claimed. Network-sensor accuracy is excluded entirely, because what a TLS handshake negotiates depends on the local library build.</a:t>
+                <a:spcPts val="900"/>
+              </a:spcBef>
+              <a:spcAft>
+                <a:spcPts val="500"/>
+              </a:spcAft>
+              <a:buNone/>
+            </a:pPr>
+            <a:r>
+              <a:rPr sz="2100" b="1" i="0">
+                <a:solidFill>
+                  <a:srgbClr val="9E3A24"/>
+                </a:solidFill>
+              </a:rPr>
+              <a:t>Intended users</a:t>
+            </a:r>
+          </a:p>
+          <a:p>
+            <a:pPr marL="0" indent="0">
+              <a:spcBef>
+                <a:spcPts val="0"/>
+              </a:spcBef>
+              <a:spcAft>
+                <a:spcPts val="0"/>
+              </a:spcAft>
+              <a:buNone/>
+            </a:pPr>
+            <a:r>
+              <a:rPr sz="1500" b="0" i="0">
+                <a:solidFill>
+                  <a:srgbClr val="3E3E44"/>
+                </a:solidFill>
+              </a:rPr>
+              <a:t>Intended for security engineering teams, cryptographic inventory and migration-planning teams, and infrastructure operators. These are intended users; the tool has not been deployed in production.</a:t>
             </a:r>
           </a:p>
         </p:txBody>
@@ -8453,7 +10133,7 @@
           <a:p>
             <a:pPr algn="ctr"/>
             <a:r>
-              <a:rPr lang="en-US" dirty="0" sz="1000" b="1"/>
+              <a:rPr lang="en-US" dirty="0" sz="1100" b="1"/>
               <a:t>Zero-Day</a:t>
             </a:r>
             <a:endParaRPr lang="en-IN" dirty="0"/>
@@ -8492,14 +10172,14 @@
       </p:pic>
       <p:sp>
         <p:nvSpPr>
-          <p:cNvPr id="17411" name="cd-note"/>
+          <p:cNvPr id="17411" name="cd-bench-head"/>
           <p:cNvSpPr txBox="1"/>
           <p:nvPr/>
         </p:nvSpPr>
         <p:spPr>
           <a:xfrm>
-            <a:off x="411480" y="5248656"/>
-            <a:ext cx="5532120" cy="987552"/>
+            <a:off x="6876288" y="1097280"/>
+            <a:ext cx="4892040" cy="365760"/>
           </a:xfrm>
           <a:prstGeom prst="rect">
             <a:avLst/>
@@ -8507,7 +10187,7 @@
           <a:noFill/>
         </p:spPr>
         <p:txBody>
-          <a:bodyPr wrap="square">
+          <a:bodyPr wrap="square" lIns="0" rIns="0" tIns="0" bIns="0">
             <a:spAutoFit/>
           </a:bodyPr>
           <a:lstStyle/>
@@ -8517,74 +10197,121 @@
                 <a:spcPts val="0"/>
               </a:spcBef>
               <a:spcAft>
-                <a:spcPts val="200"/>
-              </a:spcAft>
-              <a:buNone/>
-            </a:pPr>
-            <a:r>
-              <a:rPr sz="1100" b="1">
-                <a:solidFill>
-                  <a:srgbClr val="8C1D1D"/>
-                </a:solidFill>
-              </a:rPr>
-              <a:t>Why it matters</a:t>
-            </a:r>
-          </a:p>
-          <a:p>
-            <a:pPr marL="0" indent="0">
-              <a:spcBef>
-                <a:spcPts val="0"/>
-              </a:spcBef>
-              <a:spcAft>
-                <a:spcPts val="200"/>
-              </a:spcAft>
-              <a:buNone/>
-            </a:pPr>
-            <a:r>
-              <a:rPr sz="1050">
-                <a:solidFill>
-                  <a:srgbClr val="1A1A1A"/>
-                </a:solidFill>
-              </a:rPr>
-              <a:t>The inventory is the gate every other migration step waits behind. Standardised algorithms do not help an estate that cannot say where its cryptography is. This produces that list, with the evidence attached, on a machine that never has to leave the building.</a:t>
-            </a:r>
-          </a:p>
-        </p:txBody>
-      </p:sp>
-      <p:pic>
-        <p:nvPicPr>
-          <p:cNvPr id="17412" name="cd-shot-01-assessment" descr="01-assessment-190-0-1.png"/>
-          <p:cNvPicPr>
-            <a:picLocks noChangeAspect="1"/>
-          </p:cNvPicPr>
+                <a:spcPts val="500"/>
+              </a:spcAft>
+              <a:buNone/>
+            </a:pPr>
+            <a:r>
+              <a:rPr sz="2100" b="1" i="0">
+                <a:solidFill>
+                  <a:srgbClr val="9E3A24"/>
+                </a:solidFill>
+              </a:rPr>
+              <a:t>Benchmark evidence</a:t>
+            </a:r>
+          </a:p>
+        </p:txBody>
+      </p:sp>
+      <p:sp>
+        <p:nvSpPr>
+          <p:cNvPr id="17412" name="cd-bench-a"/>
+          <p:cNvSpPr/>
           <p:nvPr/>
-        </p:nvPicPr>
-        <p:blipFill>
-          <a:blip r:embed="rId4"/>
-          <a:stretch>
-            <a:fillRect/>
-          </a:stretch>
-        </p:blipFill>
+        </p:nvSpPr>
         <p:spPr>
           <a:xfrm>
-            <a:off x="6144768" y="1152144"/>
-            <a:ext cx="5632704" cy="3731444"/>
+            <a:off x="6876288" y="1517904"/>
+            <a:ext cx="4892040" cy="1152144"/>
           </a:xfrm>
           <a:prstGeom prst="rect">
             <a:avLst/>
           </a:prstGeom>
-        </p:spPr>
-      </p:pic>
-      <p:sp>
-        <p:nvSpPr>
-          <p:cNvPr id="17413" name="cd-caption"/>
+          <a:solidFill>
+            <a:srgbClr val="F4F2EE"/>
+          </a:solidFill>
+          <a:ln w="9525">
+            <a:solidFill>
+              <a:srgbClr val="D2D0CB"/>
+            </a:solidFill>
+          </a:ln>
+          <a:effectLst/>
+        </p:spPr>
+        <p:style>
+          <a:lnRef idx="1">
+            <a:schemeClr val="accent1"/>
+          </a:lnRef>
+          <a:fillRef idx="3">
+            <a:schemeClr val="accent1"/>
+          </a:fillRef>
+          <a:effectRef idx="2">
+            <a:schemeClr val="accent1"/>
+          </a:effectRef>
+          <a:fontRef idx="minor">
+            <a:schemeClr val="lt1"/>
+          </a:fontRef>
+        </p:style>
+        <p:txBody>
+          <a:bodyPr rtlCol="0" anchor="ctr"/>
+          <a:lstStyle/>
+          <a:p>
+            <a:pPr algn="ctr"/>
+          </a:p>
+        </p:txBody>
+      </p:sp>
+      <p:sp>
+        <p:nvSpPr>
+          <p:cNvPr id="17413" name="cd-panel-edge"/>
+          <p:cNvSpPr/>
+          <p:nvPr/>
+        </p:nvSpPr>
+        <p:spPr>
+          <a:xfrm>
+            <a:off x="6876288" y="1517904"/>
+            <a:ext cx="38100" cy="1152144"/>
+          </a:xfrm>
+          <a:prstGeom prst="rect">
+            <a:avLst/>
+          </a:prstGeom>
+          <a:solidFill>
+            <a:srgbClr val="9E3A24"/>
+          </a:solidFill>
+          <a:ln>
+            <a:noFill/>
+          </a:ln>
+          <a:effectLst/>
+        </p:spPr>
+        <p:style>
+          <a:lnRef idx="1">
+            <a:schemeClr val="accent1"/>
+          </a:lnRef>
+          <a:fillRef idx="3">
+            <a:schemeClr val="accent1"/>
+          </a:fillRef>
+          <a:effectRef idx="2">
+            <a:schemeClr val="accent1"/>
+          </a:effectRef>
+          <a:fontRef idx="minor">
+            <a:schemeClr val="lt1"/>
+          </a:fontRef>
+        </p:style>
+        <p:txBody>
+          <a:bodyPr rtlCol="0" anchor="ctr"/>
+          <a:lstStyle/>
+          <a:p>
+            <a:pPr algn="ctr"/>
+          </a:p>
+        </p:txBody>
+      </p:sp>
+      <p:sp>
+        <p:nvSpPr>
+          <p:cNvPr id="17414" name="cd-bench-at"/>
           <p:cNvSpPr txBox="1"/>
           <p:nvPr/>
         </p:nvSpPr>
         <p:spPr>
           <a:xfrm>
-            <a:off x="6144768" y="4947596"/>
-            <a:ext cx="5632704" cy="274320"/>
+            <a:off x="7040879" y="1636776"/>
+            <a:ext cx="4581144" cy="950976"/>
           </a:xfrm>
           <a:prstGeom prst="rect">
             <a:avLst/>
@@ -8592,35 +10319,201 @@
           <a:noFill/>
         </p:spPr>
         <p:txBody>
-          <a:bodyPr wrap="square">
+          <a:bodyPr wrap="square" lIns="0" rIns="0" tIns="0" bIns="0">
             <a:spAutoFit/>
           </a:bodyPr>
           <a:lstStyle/>
           <a:p>
             <a:pPr marL="0" indent="0">
-              <a:buNone/>
-            </a:pPr>
-            <a:r>
-              <a:rPr sz="950">
-                <a:solidFill>
-                  <a:srgbClr val="5A5A5A"/>
-                </a:solidFill>
-              </a:rPr>
-              <a:t>The whole estate in one screen — with the partial-scan warning stated at the top rather than buried in a payload.</a:t>
-            </a:r>
-          </a:p>
-        </p:txBody>
-      </p:sp>
-      <p:sp>
-        <p:nvSpPr>
-          <p:cNvPr id="17414" name="cd-note"/>
+              <a:spcBef>
+                <a:spcPts val="0"/>
+              </a:spcBef>
+              <a:spcAft>
+                <a:spcPts val="500"/>
+              </a:spcAft>
+              <a:buNone/>
+            </a:pPr>
+            <a:r>
+              <a:rPr sz="1500" b="1" i="0">
+                <a:solidFill>
+                  <a:srgbClr val="1A1A1C"/>
+                </a:solidFill>
+              </a:rPr>
+              <a:t>Like-for-like: the same corpus, before and after</a:t>
+            </a:r>
+          </a:p>
+          <a:p>
+            <a:pPr marL="0" indent="0">
+              <a:spcBef>
+                <a:spcPts val="0"/>
+              </a:spcBef>
+              <a:spcAft>
+                <a:spcPts val="300"/>
+              </a:spcAft>
+              <a:buNone/>
+            </a:pPr>
+            <a:r>
+              <a:rPr sz="1500" b="1" i="0">
+                <a:solidFill>
+                  <a:srgbClr val="3E3E44"/>
+                </a:solidFill>
+              </a:rPr>
+              <a:t>Baseline: </a:t>
+            </a:r>
+            <a:r>
+              <a:rPr sz="1500" b="0" i="0">
+                <a:solidFill>
+                  <a:srgbClr val="3E3E44"/>
+                </a:solidFill>
+              </a:rPr>
+              <a:t>79 TP · 5 FP · 5 FN   </a:t>
+            </a:r>
+            <a:r>
+              <a:rPr sz="1500" b="1" i="0">
+                <a:solidFill>
+                  <a:srgbClr val="9E3A24"/>
+                </a:solidFill>
+              </a:rPr>
+              <a:t>F1 0.941</a:t>
+            </a:r>
+          </a:p>
+          <a:p>
+            <a:pPr marL="0" indent="0">
+              <a:spcBef>
+                <a:spcPts val="0"/>
+              </a:spcBef>
+              <a:spcAft>
+                <a:spcPts val="300"/>
+              </a:spcAft>
+              <a:buNone/>
+            </a:pPr>
+            <a:r>
+              <a:rPr sz="1500" b="1" i="0">
+                <a:solidFill>
+                  <a:srgbClr val="3E3E44"/>
+                </a:solidFill>
+              </a:rPr>
+              <a:t>After detector fixes: </a:t>
+            </a:r>
+            <a:r>
+              <a:rPr sz="1500" b="0" i="0">
+                <a:solidFill>
+                  <a:srgbClr val="3E3E44"/>
+                </a:solidFill>
+              </a:rPr>
+              <a:t>84 TP · 3 FP · 0 FN   </a:t>
+            </a:r>
+            <a:r>
+              <a:rPr sz="1500" b="1" i="0">
+                <a:solidFill>
+                  <a:srgbClr val="9E3A24"/>
+                </a:solidFill>
+              </a:rPr>
+              <a:t>F1 0.983</a:t>
+            </a:r>
+          </a:p>
+        </p:txBody>
+      </p:sp>
+      <p:sp>
+        <p:nvSpPr>
+          <p:cNvPr id="17415" name="cd-bench-b"/>
+          <p:cNvSpPr/>
+          <p:nvPr/>
+        </p:nvSpPr>
+        <p:spPr>
+          <a:xfrm>
+            <a:off x="6876288" y="2834639"/>
+            <a:ext cx="4892040" cy="841248"/>
+          </a:xfrm>
+          <a:prstGeom prst="rect">
+            <a:avLst/>
+          </a:prstGeom>
+          <a:solidFill>
+            <a:srgbClr val="F4F2EE"/>
+          </a:solidFill>
+          <a:ln w="9525">
+            <a:solidFill>
+              <a:srgbClr val="D2D0CB"/>
+            </a:solidFill>
+          </a:ln>
+          <a:effectLst/>
+        </p:spPr>
+        <p:style>
+          <a:lnRef idx="1">
+            <a:schemeClr val="accent1"/>
+          </a:lnRef>
+          <a:fillRef idx="3">
+            <a:schemeClr val="accent1"/>
+          </a:fillRef>
+          <a:effectRef idx="2">
+            <a:schemeClr val="accent1"/>
+          </a:effectRef>
+          <a:fontRef idx="minor">
+            <a:schemeClr val="lt1"/>
+          </a:fontRef>
+        </p:style>
+        <p:txBody>
+          <a:bodyPr rtlCol="0" anchor="ctr"/>
+          <a:lstStyle/>
+          <a:p>
+            <a:pPr algn="ctr"/>
+          </a:p>
+        </p:txBody>
+      </p:sp>
+      <p:sp>
+        <p:nvSpPr>
+          <p:cNvPr id="17416" name="cd-panel-edge"/>
+          <p:cNvSpPr/>
+          <p:nvPr/>
+        </p:nvSpPr>
+        <p:spPr>
+          <a:xfrm>
+            <a:off x="6876288" y="2834639"/>
+            <a:ext cx="38100" cy="841248"/>
+          </a:xfrm>
+          <a:prstGeom prst="rect">
+            <a:avLst/>
+          </a:prstGeom>
+          <a:solidFill>
+            <a:srgbClr val="9E3A24"/>
+          </a:solidFill>
+          <a:ln>
+            <a:noFill/>
+          </a:ln>
+          <a:effectLst/>
+        </p:spPr>
+        <p:style>
+          <a:lnRef idx="1">
+            <a:schemeClr val="accent1"/>
+          </a:lnRef>
+          <a:fillRef idx="3">
+            <a:schemeClr val="accent1"/>
+          </a:fillRef>
+          <a:effectRef idx="2">
+            <a:schemeClr val="accent1"/>
+          </a:effectRef>
+          <a:fontRef idx="minor">
+            <a:schemeClr val="lt1"/>
+          </a:fontRef>
+        </p:style>
+        <p:txBody>
+          <a:bodyPr rtlCol="0" anchor="ctr"/>
+          <a:lstStyle/>
+          <a:p>
+            <a:pPr algn="ctr"/>
+          </a:p>
+        </p:txBody>
+      </p:sp>
+      <p:sp>
+        <p:nvSpPr>
+          <p:cNvPr id="17417" name="cd-bench-bt"/>
           <p:cNvSpPr txBox="1"/>
           <p:nvPr/>
         </p:nvSpPr>
         <p:spPr>
           <a:xfrm>
-            <a:off x="6144768" y="5358384"/>
-            <a:ext cx="5632704" cy="868680"/>
+            <a:off x="7040879" y="2953511"/>
+            <a:ext cx="4581144" cy="603504"/>
           </a:xfrm>
           <a:prstGeom prst="rect">
             <a:avLst/>
@@ -8628,7 +10521,7 @@
           <a:noFill/>
         </p:spPr>
         <p:txBody>
-          <a:bodyPr wrap="square">
+          <a:bodyPr wrap="square" lIns="0" rIns="0" tIns="0" bIns="0">
             <a:spAutoFit/>
           </a:bodyPr>
           <a:lstStyle/>
@@ -8638,25 +10531,86 @@
                 <a:spcPts val="0"/>
               </a:spcBef>
               <a:spcAft>
-                <a:spcPts val="200"/>
-              </a:spcAft>
-              <a:buNone/>
-            </a:pPr>
-            <a:r>
-              <a:rPr sz="1050" b="1">
-                <a:solidFill>
-                  <a:srgbClr val="0F172A"/>
-                </a:solidFill>
-              </a:rPr>
-              <a:t>Adoption cost — </a:t>
-            </a:r>
-            <a:r>
-              <a:rPr sz="950" i="1">
-                <a:solidFill>
-                  <a:srgbClr val="5A5A5A"/>
-                </a:solidFill>
-              </a:rPr>
-              <a:t>one command. No daemon, no agent, no cloud account, no network. It reads a repository, a binary tree or a container image on the machine it is already running on.</a:t>
+                <a:spcPts val="500"/>
+              </a:spcAft>
+              <a:buNone/>
+            </a:pPr>
+            <a:r>
+              <a:rPr sz="1500" b="1" i="0">
+                <a:solidFill>
+                  <a:srgbClr val="1A1A1C"/>
+                </a:solidFill>
+              </a:rPr>
+              <a:t>Expanded synthetic corpus, six scanners</a:t>
+            </a:r>
+          </a:p>
+          <a:p>
+            <a:pPr marL="0" indent="0">
+              <a:spcBef>
+                <a:spcPts val="0"/>
+              </a:spcBef>
+              <a:spcAft>
+                <a:spcPts val="0"/>
+              </a:spcAft>
+              <a:buNone/>
+            </a:pPr>
+            <a:r>
+              <a:rPr sz="1500" b="0" i="0">
+                <a:solidFill>
+                  <a:srgbClr val="3E3E44"/>
+                </a:solidFill>
+              </a:rPr>
+              <a:t>116 TP · 0 FP · 0 FN   </a:t>
+            </a:r>
+            <a:r>
+              <a:rPr sz="1500" b="1" i="0">
+                <a:solidFill>
+                  <a:srgbClr val="9E3A24"/>
+                </a:solidFill>
+              </a:rPr>
+              <a:t>F1 1.000</a:t>
+            </a:r>
+          </a:p>
+        </p:txBody>
+      </p:sp>
+      <p:sp>
+        <p:nvSpPr>
+          <p:cNvPr id="17418" name="cd-bench-caveat"/>
+          <p:cNvSpPr txBox="1"/>
+          <p:nvPr/>
+        </p:nvSpPr>
+        <p:spPr>
+          <a:xfrm>
+            <a:off x="6876288" y="3822191"/>
+            <a:ext cx="4892040" cy="1463040"/>
+          </a:xfrm>
+          <a:prstGeom prst="rect">
+            <a:avLst/>
+          </a:prstGeom>
+          <a:noFill/>
+        </p:spPr>
+        <p:txBody>
+          <a:bodyPr wrap="square" lIns="0" rIns="0" tIns="0" bIns="0">
+            <a:spAutoFit/>
+          </a:bodyPr>
+          <a:lstStyle/>
+          <a:p>
+            <a:pPr marL="0" indent="0">
+              <a:spcBef>
+                <a:spcPts val="0"/>
+              </a:spcBef>
+              <a:spcAft>
+                <a:spcPts val="0"/>
+              </a:spcAft>
+              <a:buNone/>
+            </a:pPr>
+            <a:r>
+              <a:rPr sz="1300" b="0" i="1">
+                <a:solidFill>
+                  <a:srgbClr val="63636B"/>
+                </a:solidFill>
+              </a:rPr>
+              <a:t>Both corpora were created by the developers of this tool. These figures measure those corpora and nothing else — they are NOT an estimate of real-world enterprise accuracy, which has not been measured. The two experiments are not comparable to each other: the expanded corpus covers three scanners the original did not exercise.</a:t>
             </a:r>
           </a:p>
         </p:txBody>
@@ -8787,7 +10741,7 @@
           <a:p>
             <a:pPr eaLnBrk="1" hangingPunct="1"/>
             <a:r>
-              <a:rPr lang="en-US" sz="2900" b="1" dirty="0">
+              <a:rPr lang="en-US" sz="2800" b="1" dirty="0">
                 <a:latin typeface="Times New Roman" panose="02020603050405020304" pitchFamily="18" charset="0"/>
                 <a:ea typeface="ＭＳ Ｐゴシック" pitchFamily="1" charset="-128"/>
                 <a:cs typeface="Times New Roman" panose="02020603050405020304" pitchFamily="18" charset="0"/>
@@ -8807,8 +10761,8 @@
         </p:nvSpPr>
         <p:spPr bwMode="auto">
           <a:xfrm>
-            <a:off x="411480" y="1115568"/>
-            <a:ext cx="5760720" cy="4206240"/>
+            <a:off x="420624" y="1097280"/>
+            <a:ext cx="5541264" cy="4663440"/>
           </a:xfrm>
           <a:prstGeom prst="rect">
             <a:avLst/>
@@ -8835,7 +10789,7 @@
                 <a:spcPts val="0"/>
               </a:spcBef>
               <a:spcAft>
-                <a:spcPts val="200"/>
+                <a:spcPts val="500"/>
               </a:spcAft>
               <a:buClrTx/>
               <a:buSzTx/>
@@ -8844,12 +10798,12 @@
               <a:defRPr/>
             </a:pPr>
             <a:r>
-              <a:rPr sz="1100" b="1">
-                <a:solidFill>
-                  <a:srgbClr val="8C1D1D"/>
-                </a:solidFill>
-              </a:rPr>
-              <a:t>Standards implemented</a:t>
+              <a:rPr sz="1600" b="1" i="0">
+                <a:solidFill>
+                  <a:srgbClr val="9E3A24"/>
+                </a:solidFill>
+              </a:rPr>
+              <a:t>Cryptography standards informing classification and migration</a:t>
             </a:r>
             <a:endParaRPr kumimoji="0" lang="en-US" sz="2800" b="0" i="0" u="none" strike="noStrike" kern="1200" cap="none" spc="0" normalizeH="0" baseline="0" noProof="0" dirty="0">
               <a:ln>
@@ -8867,278 +10821,162 @@
             </a:endParaRPr>
           </a:p>
           <a:p>
-            <a:pPr marL="160020" indent="-160020">
-              <a:spcBef>
-                <a:spcPts val="0"/>
-              </a:spcBef>
-              <a:spcAft>
-                <a:spcPts val="200"/>
+            <a:pPr marL="146050" indent="-146050">
+              <a:spcBef>
+                <a:spcPts val="0"/>
+              </a:spcBef>
+              <a:spcAft>
+                <a:spcPts val="400"/>
               </a:spcAft>
               <a:buFont typeface="Arial"/>
               <a:buChar char="–"/>
             </a:pPr>
             <a:r>
-              <a:rPr sz="1050">
-                <a:solidFill>
-                  <a:srgbClr val="1A1A1A"/>
-                </a:solidFill>
-              </a:rPr>
-              <a:t>FIPS 203 — ML-KEM · FIPS 204 — ML-DSA · FIPS 205 — SLH-DSA</a:t>
-            </a:r>
-          </a:p>
-          <a:p>
-            <a:pPr marL="160020" indent="-160020">
-              <a:spcBef>
-                <a:spcPts val="0"/>
-              </a:spcBef>
-              <a:spcAft>
-                <a:spcPts val="200"/>
+              <a:rPr sz="1300" b="0" i="0">
+                <a:solidFill>
+                  <a:srgbClr val="3E3E44"/>
+                </a:solidFill>
+              </a:rPr>
+              <a:t>FIPS 203 — Module-Lattice-Based Key-Encapsulation Mechanism (ML-KEM). NIST, 2024. doi.org/10.6028/NIST.FIPS.203</a:t>
+            </a:r>
+          </a:p>
+          <a:p>
+            <a:pPr marL="146050" indent="-146050">
+              <a:spcBef>
+                <a:spcPts val="0"/>
+              </a:spcBef>
+              <a:spcAft>
+                <a:spcPts val="400"/>
               </a:spcAft>
               <a:buFont typeface="Arial"/>
               <a:buChar char="–"/>
             </a:pPr>
             <a:r>
-              <a:rPr sz="1050">
-                <a:solidFill>
-                  <a:srgbClr val="1A1A1A"/>
-                </a:solidFill>
-              </a:rPr>
-              <a:t>FIPS 202 — SHA-3 and SHAKE · SP 800-208 — LMS</a:t>
-            </a:r>
-          </a:p>
-          <a:p>
-            <a:pPr marL="160020" indent="-160020">
-              <a:spcBef>
-                <a:spcPts val="0"/>
-              </a:spcBef>
-              <a:spcAft>
-                <a:spcPts val="200"/>
+              <a:rPr sz="1300" b="0" i="0">
+                <a:solidFill>
+                  <a:srgbClr val="3E3E44"/>
+                </a:solidFill>
+              </a:rPr>
+              <a:t>FIPS 204 — Module-Lattice-Based Digital Signature Standard (ML-DSA). NIST, 2024. doi.org/10.6028/NIST.FIPS.204</a:t>
+            </a:r>
+          </a:p>
+          <a:p>
+            <a:pPr marL="146050" indent="-146050">
+              <a:spcBef>
+                <a:spcPts val="0"/>
+              </a:spcBef>
+              <a:spcAft>
+                <a:spcPts val="400"/>
               </a:spcAft>
               <a:buFont typeface="Arial"/>
               <a:buChar char="–"/>
             </a:pPr>
             <a:r>
-              <a:rPr sz="1050">
-                <a:solidFill>
-                  <a:srgbClr val="1A1A1A"/>
-                </a:solidFill>
-              </a:rPr>
-              <a:t>NIST IR 8547 — transition to post-quantum cryptography standards</a:t>
-            </a:r>
-          </a:p>
-          <a:p>
-            <a:pPr marL="0" indent="0">
-              <a:spcBef>
-                <a:spcPts val="600"/>
-              </a:spcBef>
-              <a:spcAft>
-                <a:spcPts val="200"/>
-              </a:spcAft>
-              <a:buNone/>
-            </a:pPr>
-            <a:r>
-              <a:rPr sz="1100" b="1">
-                <a:solidFill>
-                  <a:srgbClr val="8C1D1D"/>
-                </a:solidFill>
-              </a:rPr>
-              <a:t>Formats and specifications</a:t>
-            </a:r>
-          </a:p>
-          <a:p>
-            <a:pPr marL="160020" indent="-160020">
-              <a:spcBef>
-                <a:spcPts val="0"/>
-              </a:spcBef>
-              <a:spcAft>
-                <a:spcPts val="200"/>
+              <a:rPr sz="1300" b="0" i="0">
+                <a:solidFill>
+                  <a:srgbClr val="3E3E44"/>
+                </a:solidFill>
+              </a:rPr>
+              <a:t>FIPS 205 — Stateless Hash-Based Digital Signature Standard (SLH-DSA). NIST, 2024. doi.org/10.6028/NIST.FIPS.205</a:t>
+            </a:r>
+          </a:p>
+          <a:p>
+            <a:pPr marL="146050" indent="-146050">
+              <a:spcBef>
+                <a:spcPts val="0"/>
+              </a:spcBef>
+              <a:spcAft>
+                <a:spcPts val="400"/>
               </a:spcAft>
               <a:buFont typeface="Arial"/>
               <a:buChar char="–"/>
             </a:pPr>
             <a:r>
-              <a:rPr sz="1050">
-                <a:solidFill>
-                  <a:srgbClr val="1A1A1A"/>
-                </a:solidFill>
-              </a:rPr>
-              <a:t>CycloneDX 1.6 (ECMA-424) and CycloneDX 1.7 — cryptographic bill of materials; schemas vendored from the CycloneDX specification repository at pinned commit 0bd48c8</a:t>
-            </a:r>
-          </a:p>
-          <a:p>
-            <a:pPr marL="160020" indent="-160020">
-              <a:spcBef>
-                <a:spcPts val="0"/>
-              </a:spcBef>
-              <a:spcAft>
-                <a:spcPts val="200"/>
+              <a:rPr sz="1300" b="0" i="0">
+                <a:solidFill>
+                  <a:srgbClr val="3E3E44"/>
+                </a:solidFill>
+              </a:rPr>
+              <a:t>NIST IR 8547 (initial public draft) — Transition to Post-Quantum Cryptography Standards. NIST, 2024.</a:t>
+            </a:r>
+          </a:p>
+          <a:p>
+            <a:pPr marL="0" indent="0">
+              <a:spcBef>
+                <a:spcPts val="900"/>
+              </a:spcBef>
+              <a:spcAft>
+                <a:spcPts val="500"/>
+              </a:spcAft>
+              <a:buNone/>
+            </a:pPr>
+            <a:r>
+              <a:rPr sz="1600" b="1" i="0">
+                <a:solidFill>
+                  <a:srgbClr val="9E3A24"/>
+                </a:solidFill>
+              </a:rPr>
+              <a:t>Risk methodology</a:t>
+            </a:r>
+          </a:p>
+          <a:p>
+            <a:pPr marL="146050" indent="-146050">
+              <a:spcBef>
+                <a:spcPts val="0"/>
+              </a:spcBef>
+              <a:spcAft>
+                <a:spcPts val="400"/>
               </a:spcAft>
               <a:buFont typeface="Arial"/>
               <a:buChar char="–"/>
             </a:pPr>
             <a:r>
-              <a:rPr sz="1050">
-                <a:solidFill>
-                  <a:srgbClr val="1A1A1A"/>
-                </a:solidFill>
-              </a:rPr>
-              <a:t>RFC 8996 — deprecation of TLS 1.0 and 1.1 · RFC 7693 — BLAKE2 · RFC 8032 — EdDSA · RFC 7748 — X25519 and X448</a:t>
-            </a:r>
-          </a:p>
-          <a:p>
-            <a:pPr marL="160020" indent="-160020">
-              <a:spcBef>
-                <a:spcPts val="0"/>
-              </a:spcBef>
-              <a:spcAft>
-                <a:spcPts val="200"/>
+              <a:rPr sz="1300" b="0" i="0">
+                <a:solidFill>
+                  <a:srgbClr val="3E3E44"/>
+                </a:solidFill>
+              </a:rPr>
+              <a:t>M. Mosca, “Cybersecurity in an Era with Quantum Computers: Will We Be Ready?”, IEEE Security &amp; Privacy, vol. 16, no. 5, 2018 — the source of the X + Y &gt; Z inequality used by the risk model.</a:t>
+            </a:r>
+          </a:p>
+          <a:p>
+            <a:pPr marL="146050" indent="-146050">
+              <a:spcBef>
+                <a:spcPts val="0"/>
+              </a:spcBef>
+              <a:spcAft>
+                <a:spcPts val="400"/>
               </a:spcAft>
               <a:buFont typeface="Arial"/>
               <a:buChar char="–"/>
             </a:pPr>
             <a:r>
-              <a:rPr sz="1050">
-                <a:solidFill>
-                  <a:srgbClr val="1A1A1A"/>
-                </a:solidFill>
-              </a:rPr>
-              <a:t>OCI Image Format Specification — image layout and layer whiteouts</a:t>
-            </a:r>
-          </a:p>
-          <a:p>
-            <a:pPr marL="0" indent="0">
-              <a:spcBef>
-                <a:spcPts val="600"/>
-              </a:spcBef>
-              <a:spcAft>
-                <a:spcPts val="200"/>
-              </a:spcAft>
-              <a:buNone/>
-            </a:pPr>
-            <a:r>
-              <a:rPr sz="1100" b="1">
-                <a:solidFill>
-                  <a:srgbClr val="8C1D1D"/>
-                </a:solidFill>
-              </a:rPr>
-              <a:t>Method</a:t>
-            </a:r>
-          </a:p>
-          <a:p>
-            <a:pPr marL="160020" indent="-160020">
-              <a:spcBef>
-                <a:spcPts val="0"/>
-              </a:spcBef>
-              <a:spcAft>
-                <a:spcPts val="200"/>
+              <a:rPr sz="1300" b="0" i="0">
+                <a:solidFill>
+                  <a:srgbClr val="3E3E44"/>
+                </a:solidFill>
+              </a:rPr>
+              <a:t>P. W. Shor, “Polynomial-Time Algorithms for Prime Factorization and Discrete Logarithms on a Quantum Computer”, SIAM J. Computing, 1997.</a:t>
+            </a:r>
+          </a:p>
+          <a:p>
+            <a:pPr marL="146050" indent="-146050">
+              <a:spcBef>
+                <a:spcPts val="0"/>
+              </a:spcBef>
+              <a:spcAft>
+                <a:spcPts val="400"/>
               </a:spcAft>
               <a:buFont typeface="Arial"/>
               <a:buChar char="–"/>
             </a:pPr>
             <a:r>
-              <a:rPr sz="1050">
-                <a:solidFill>
-                  <a:srgbClr val="1A1A1A"/>
-                </a:solidFill>
-              </a:rPr>
-              <a:t>Mosca's inequality (X + Y &gt; Z) for exposure timing; Shor's and Grover's algorithms for the classification split.</a:t>
-            </a:r>
-          </a:p>
-          <a:p>
-            <a:pPr marL="0" indent="0">
-              <a:spcBef>
-                <a:spcPts val="600"/>
-              </a:spcBef>
-              <a:spcAft>
-                <a:spcPts val="200"/>
-              </a:spcAft>
-              <a:buNone/>
-            </a:pPr>
-            <a:r>
-              <a:rPr sz="1100" b="1">
-                <a:solidFill>
-                  <a:srgbClr val="8C1D1D"/>
-                </a:solidFill>
-              </a:rPr>
-              <a:t>Project</a:t>
-            </a:r>
-          </a:p>
-          <a:p>
-            <a:pPr marL="160020" indent="-160020">
-              <a:spcBef>
-                <a:spcPts val="0"/>
-              </a:spcBef>
-              <a:spcAft>
-                <a:spcPts val="200"/>
-              </a:spcAft>
-              <a:buFont typeface="Arial"/>
-              <a:buChar char="–"/>
-            </a:pPr>
-            <a:r>
-              <a:rPr sz="1050">
-                <a:solidFill>
-                  <a:srgbClr val="1A1A1A"/>
-                </a:solidFill>
-              </a:rPr>
-              <a:t>github.com/sgtsujith141-wq/cryptodrishti — source, 664 tests, the labelled corpus and its committed results, the vendored schemas, and the architecture diagram's editable source.</a:t>
-            </a:r>
-          </a:p>
-          <a:p>
-            <a:pPr marL="160020" indent="-160020">
-              <a:spcBef>
-                <a:spcPts val="0"/>
-              </a:spcBef>
-              <a:spcAft>
-                <a:spcPts val="200"/>
-              </a:spcAft>
-              <a:buFont typeface="Arial"/>
-              <a:buChar char="–"/>
-            </a:pPr>
-            <a:r>
-              <a:rPr sz="1050">
-                <a:solidFill>
-                  <a:srgbClr val="1A1A1A"/>
-                </a:solidFill>
-              </a:rPr>
-              <a:t>Problem statement SIH26164, National Technical Research Organisation (NTRO).</a:t>
-            </a:r>
-          </a:p>
-          <a:p>
-            <a:pPr marL="0" indent="0">
-              <a:spcBef>
-                <a:spcPts val="600"/>
-              </a:spcBef>
-              <a:spcAft>
-                <a:spcPts val="200"/>
-              </a:spcAft>
-              <a:buNone/>
-            </a:pPr>
-            <a:r>
-              <a:rPr sz="1100" b="1">
-                <a:solidFill>
-                  <a:srgbClr val="8C1D1D"/>
-                </a:solidFill>
-              </a:rPr>
-              <a:t>Where this has not been checked</a:t>
-            </a:r>
-          </a:p>
-          <a:p>
-            <a:pPr marL="0" indent="0">
-              <a:spcBef>
-                <a:spcPts val="0"/>
-              </a:spcBef>
-              <a:spcAft>
-                <a:spcPts val="200"/>
-              </a:spcAft>
-              <a:buNone/>
-            </a:pPr>
-            <a:r>
-              <a:rPr sz="1050">
-                <a:solidFill>
-                  <a:srgbClr val="1A1A1A"/>
-                </a:solidFill>
-              </a:rPr>
-              <a:t>The classifications follow NIST IR 8547 and the CycloneDX specification as we read them; they have not been reviewed by an external cryptographer. The vendored schemas are checksummed and pinned, and CI fails if they drift — but they are a snapshot of an upstream that moves.</a:t>
+              <a:rPr sz="1300" b="0" i="0">
+                <a:solidFill>
+                  <a:srgbClr val="3E3E44"/>
+                </a:solidFill>
+              </a:rPr>
+              <a:t>L. K. Grover, “A fast quantum mechanical algorithm for database search”, STOC 1996 — the basis for the symmetric-key margin.</a:t>
             </a:r>
           </a:p>
         </p:txBody>
@@ -9341,7 +11179,7 @@
           <a:p>
             <a:pPr algn="ctr"/>
             <a:r>
-              <a:rPr lang="en-US" dirty="0" sz="1000" b="1"/>
+              <a:rPr lang="en-US" dirty="0" sz="1100" b="1"/>
               <a:t>Zero-Day</a:t>
             </a:r>
             <a:endParaRPr lang="en-IN" dirty="0"/>
@@ -9378,40 +11216,16 @@
           </a:prstGeom>
         </p:spPr>
       </p:pic>
-      <p:pic>
-        <p:nvPicPr>
-          <p:cNvPr id="17411" name="cd-shot-05-cbom-export" descr="05-cbom-export-190-0-0.5.png"/>
-          <p:cNvPicPr>
-            <a:picLocks noChangeAspect="1"/>
-          </p:cNvPicPr>
+      <p:sp>
+        <p:nvSpPr>
+          <p:cNvPr id="17411" name="cd-refs-right"/>
+          <p:cNvSpPr txBox="1"/>
           <p:nvPr/>
-        </p:nvPicPr>
-        <p:blipFill>
-          <a:blip r:embed="rId4"/>
-          <a:stretch>
-            <a:fillRect/>
-          </a:stretch>
-        </p:blipFill>
+        </p:nvSpPr>
         <p:spPr>
           <a:xfrm>
-            <a:off x="6355080" y="1152144"/>
-            <a:ext cx="5422392" cy="1137505"/>
-          </a:xfrm>
-          <a:prstGeom prst="rect">
-            <a:avLst/>
-          </a:prstGeom>
-        </p:spPr>
-      </p:pic>
-      <p:sp>
-        <p:nvSpPr>
-          <p:cNvPr id="17412" name="cd-caption"/>
-          <p:cNvSpPr txBox="1"/>
-          <p:nvPr/>
-        </p:nvSpPr>
-        <p:spPr>
-          <a:xfrm>
-            <a:off x="6355080" y="2353656"/>
-            <a:ext cx="5422392" cy="274320"/>
+            <a:off x="6400800" y="1097280"/>
+            <a:ext cx="5367527" cy="4663440"/>
           </a:xfrm>
           <a:prstGeom prst="rect">
             <a:avLst/>
@@ -9419,59 +11233,180 @@
           <a:noFill/>
         </p:spPr>
         <p:txBody>
-          <a:bodyPr wrap="square">
+          <a:bodyPr wrap="square" lIns="0" rIns="0" tIns="0" bIns="0">
             <a:spAutoFit/>
           </a:bodyPr>
           <a:lstStyle/>
           <a:p>
             <a:pPr marL="0" indent="0">
-              <a:buNone/>
-            </a:pPr>
-            <a:r>
-              <a:rPr sz="950">
-                <a:solidFill>
-                  <a:srgbClr val="5A5A5A"/>
-                </a:solidFill>
-              </a:rPr>
-              <a:t>Export and validation are the same screen: checked against the official schema on the spot.</a:t>
-            </a:r>
-          </a:p>
-        </p:txBody>
-      </p:sp>
-      <p:pic>
-        <p:nvPicPr>
-          <p:cNvPr id="17413" name="cd-shot-03-migration-plan" descr="03-migration-plan-190-0-0.72.png"/>
-          <p:cNvPicPr>
-            <a:picLocks noChangeAspect="1"/>
-          </p:cNvPicPr>
+              <a:spcBef>
+                <a:spcPts val="0"/>
+              </a:spcBef>
+              <a:spcAft>
+                <a:spcPts val="500"/>
+              </a:spcAft>
+              <a:buNone/>
+            </a:pPr>
+            <a:r>
+              <a:rPr sz="1600" b="1" i="0">
+                <a:solidFill>
+                  <a:srgbClr val="9E3A24"/>
+                </a:solidFill>
+              </a:rPr>
+              <a:t>CBOM and container formats</a:t>
+            </a:r>
+          </a:p>
+          <a:p>
+            <a:pPr marL="146050" indent="-146050">
+              <a:spcBef>
+                <a:spcPts val="0"/>
+              </a:spcBef>
+              <a:spcAft>
+                <a:spcPts val="400"/>
+              </a:spcAft>
+              <a:buFont typeface="Arial"/>
+              <a:buChar char="–"/>
+            </a:pPr>
+            <a:r>
+              <a:rPr sz="1300" b="0" i="0">
+                <a:solidFill>
+                  <a:srgbClr val="3E3E44"/>
+                </a:solidFill>
+              </a:rPr>
+              <a:t>CycloneDX v1.6, standardised as ECMA-424 (1st edition, June 2024) — cyclonedx.org/specification/overview</a:t>
+            </a:r>
+          </a:p>
+          <a:p>
+            <a:pPr marL="146050" indent="-146050">
+              <a:spcBef>
+                <a:spcPts val="0"/>
+              </a:spcBef>
+              <a:spcAft>
+                <a:spcPts val="400"/>
+              </a:spcAft>
+              <a:buFont typeface="Arial"/>
+              <a:buChar char="–"/>
+            </a:pPr>
+            <a:r>
+              <a:rPr sz="1300" b="0" i="0">
+                <a:solidFill>
+                  <a:srgbClr val="3E3E44"/>
+                </a:solidFill>
+              </a:rPr>
+              <a:t>CycloneDX v1.7 JSON Schema. Both schemas vendored in this repository at pinned commit 0bd48c8 and checksummed.</a:t>
+            </a:r>
+          </a:p>
+          <a:p>
+            <a:pPr marL="146050" indent="-146050">
+              <a:spcBef>
+                <a:spcPts val="0"/>
+              </a:spcBef>
+              <a:spcAft>
+                <a:spcPts val="400"/>
+              </a:spcAft>
+              <a:buFont typeface="Arial"/>
+              <a:buChar char="–"/>
+            </a:pPr>
+            <a:r>
+              <a:rPr sz="1300" b="0" i="0">
+                <a:solidFill>
+                  <a:srgbClr val="3E3E44"/>
+                </a:solidFill>
+              </a:rPr>
+              <a:t>OCI Image Format Specification — image layout, manifests and layer whiteouts. github.com/opencontainers/image-spec</a:t>
+            </a:r>
+          </a:p>
+          <a:p>
+            <a:pPr marL="146050" indent="-146050">
+              <a:spcBef>
+                <a:spcPts val="0"/>
+              </a:spcBef>
+              <a:spcAft>
+                <a:spcPts val="400"/>
+              </a:spcAft>
+              <a:buFont typeface="Arial"/>
+              <a:buChar char="–"/>
+            </a:pPr>
+            <a:r>
+              <a:rPr sz="1300" b="0" i="0">
+                <a:solidFill>
+                  <a:srgbClr val="3E3E44"/>
+                </a:solidFill>
+              </a:rPr>
+              <a:t>RFC 8996 — Deprecating TLS 1.0 and TLS 1.1. rfc-editor.org/rfc/rfc8996</a:t>
+            </a:r>
+          </a:p>
+          <a:p>
+            <a:pPr marL="0" indent="0">
+              <a:spcBef>
+                <a:spcPts val="900"/>
+              </a:spcBef>
+              <a:spcAft>
+                <a:spcPts val="500"/>
+              </a:spcAft>
+              <a:buNone/>
+            </a:pPr>
+            <a:r>
+              <a:rPr sz="1600" b="1" i="0">
+                <a:solidFill>
+                  <a:srgbClr val="9E3A24"/>
+                </a:solidFill>
+              </a:rPr>
+              <a:t>Problem statement and repository</a:t>
+            </a:r>
+          </a:p>
+          <a:p>
+            <a:pPr marL="146050" indent="-146050">
+              <a:spcBef>
+                <a:spcPts val="0"/>
+              </a:spcBef>
+              <a:spcAft>
+                <a:spcPts val="400"/>
+              </a:spcAft>
+              <a:buFont typeface="Arial"/>
+              <a:buChar char="–"/>
+            </a:pPr>
+            <a:r>
+              <a:rPr sz="1300" b="0" i="0">
+                <a:solidFill>
+                  <a:srgbClr val="3E3E44"/>
+                </a:solidFill>
+              </a:rPr>
+              <a:t>Smart India Hackathon 2026, Problem Statement SIH26164 — Enterprise Cryptographic Discovery &amp; Analysis Tool (ECDAT), National Technical Research Organisation (NTRO).</a:t>
+            </a:r>
+          </a:p>
+          <a:p>
+            <a:pPr marL="146050" indent="-146050">
+              <a:spcBef>
+                <a:spcPts val="0"/>
+              </a:spcBef>
+              <a:spcAft>
+                <a:spcPts val="400"/>
+              </a:spcAft>
+              <a:buFont typeface="Arial"/>
+              <a:buChar char="–"/>
+            </a:pPr>
+            <a:r>
+              <a:rPr sz="1300" b="0" i="0">
+                <a:solidFill>
+                  <a:srgbClr val="3E3E44"/>
+                </a:solidFill>
+              </a:rPr>
+              <a:t>Source, 664 tests, the labelled benchmark corpus and its committed results, and the vendored schemas: github.com/sgtsujith141-wq/cryptodrishti</a:t>
+            </a:r>
+          </a:p>
+        </p:txBody>
+      </p:sp>
+      <p:sp>
+        <p:nvSpPr>
+          <p:cNvPr id="17412" name="cd-ref-note"/>
+          <p:cNvSpPr txBox="1"/>
           <p:nvPr/>
-        </p:nvPicPr>
-        <p:blipFill>
-          <a:blip r:embed="rId5"/>
-          <a:stretch>
-            <a:fillRect/>
-          </a:stretch>
-        </p:blipFill>
+        </p:nvSpPr>
         <p:spPr>
           <a:xfrm>
-            <a:off x="6355080" y="2792569"/>
-            <a:ext cx="5422392" cy="1943166"/>
-          </a:xfrm>
-          <a:prstGeom prst="rect">
-            <a:avLst/>
-          </a:prstGeom>
-        </p:spPr>
-      </p:pic>
-      <p:sp>
-        <p:nvSpPr>
-          <p:cNvPr id="17414" name="cd-caption"/>
-          <p:cNvSpPr txBox="1"/>
-          <p:nvPr/>
-        </p:nvSpPr>
-        <p:spPr>
-          <a:xfrm>
-            <a:off x="6355080" y="4799743"/>
-            <a:ext cx="5422392" cy="274320"/>
+            <a:off x="420624" y="5742432"/>
+            <a:ext cx="11347703" cy="512064"/>
           </a:xfrm>
           <a:prstGeom prst="rect">
             <a:avLst/>
@@ -9479,63 +11414,35 @@
           <a:noFill/>
         </p:spPr>
         <p:txBody>
-          <a:bodyPr wrap="square">
+          <a:bodyPr wrap="square" lIns="0" rIns="0" tIns="0" bIns="0">
             <a:spAutoFit/>
           </a:bodyPr>
           <a:lstStyle/>
           <a:p>
             <a:pPr marL="0" indent="0">
-              <a:buNone/>
-            </a:pPr>
-            <a:r>
-              <a:rPr sz="950">
-                <a:solidFill>
-                  <a:srgbClr val="5A5A5A"/>
-                </a:solidFill>
-              </a:rPr>
-              <a:t>The standards on the left, applied — every asset given the target that matches its resolved purpose.</a:t>
-            </a:r>
-          </a:p>
-        </p:txBody>
-      </p:sp>
-      <p:sp>
-        <p:nvSpPr>
-          <p:cNvPr id="17415" name="cd-note"/>
-          <p:cNvSpPr txBox="1"/>
-          <p:nvPr/>
-        </p:nvSpPr>
-        <p:spPr>
-          <a:xfrm>
-            <a:off x="6355080" y="5256942"/>
-            <a:ext cx="5422392" cy="822960"/>
-          </a:xfrm>
-          <a:prstGeom prst="rect">
-            <a:avLst/>
-          </a:prstGeom>
-          <a:noFill/>
-        </p:spPr>
-        <p:txBody>
-          <a:bodyPr wrap="square">
-            <a:spAutoFit/>
-          </a:bodyPr>
-          <a:lstStyle/>
-          <a:p>
-            <a:pPr marL="0" indent="0">
-              <a:spcBef>
-                <a:spcPts val="0"/>
-              </a:spcBef>
-              <a:spcAft>
-                <a:spcPts val="200"/>
-              </a:spcAft>
-              <a:buNone/>
-            </a:pPr>
-            <a:r>
-              <a:rPr sz="900" i="1">
-                <a:solidFill>
-                  <a:srgbClr val="5A5A5A"/>
-                </a:solidFill>
-              </a:rPr>
-              <a:t>Every externally sourced claim in this deck is one of the standards listed here. Nothing is claimed about quantum-computer arrival dates, regulatory deadlines or competing products — Q-Day is treated throughout as an operator-chosen scenario.</a:t>
+              <a:spcBef>
+                <a:spcPts val="0"/>
+              </a:spcBef>
+              <a:spcAft>
+                <a:spcPts val="0"/>
+              </a:spcAft>
+              <a:buNone/>
+            </a:pPr>
+            <a:r>
+              <a:rPr sz="1300" b="1" i="0">
+                <a:solidFill>
+                  <a:srgbClr val="1A1A1C"/>
+                </a:solidFill>
+              </a:rPr>
+              <a:t>Scope of these references — </a:t>
+            </a:r>
+            <a:r>
+              <a:rPr sz="1300" b="0" i="0">
+                <a:solidFill>
+                  <a:srgbClr val="63636B"/>
+                </a:solidFill>
+              </a:rPr>
+              <a:t>CryptoDrishti discovers, classifies, assesses and recommends cryptography. It does not implement the post-quantum primitives above; it uses them as the standards that inform classification and migration targets.</a:t>
             </a:r>
           </a:p>
         </p:txBody>

--- a/submission/CryptoDrishti-SIH26164-Idea-Presentation.pptx
+++ b/submission/CryptoDrishti-SIH26164-Idea-Presentation.pptx
@@ -6012,7 +6012,7 @@
         <p:spPr bwMode="auto">
           <a:xfrm>
             <a:off x="420624" y="1097280"/>
-            <a:ext cx="5541264" cy="3895344"/>
+            <a:ext cx="4992624" cy="4846320"/>
           </a:xfrm>
           <a:prstGeom prst="rect">
             <a:avLst/>
@@ -6041,7 +6041,7 @@
               <a:buNone/>
             </a:pPr>
             <a:r>
-              <a:rPr sz="2100" b="1" i="0">
+              <a:rPr sz="1900" b="1" i="0">
                 <a:solidFill>
                   <a:srgbClr val="9E3A24"/>
                 </a:solidFill>
@@ -6062,12 +6062,12 @@
                 <a:spcPts val="0"/>
               </a:spcBef>
               <a:spcAft>
-                <a:spcPts val="600"/>
-              </a:spcAft>
-              <a:buNone/>
-            </a:pPr>
-            <a:r>
-              <a:rPr sz="1800" b="0" i="0">
+                <a:spcPts val="900"/>
+              </a:spcAft>
+              <a:buNone/>
+            </a:pPr>
+            <a:r>
+              <a:rPr sz="1500" b="0" i="0">
                 <a:solidFill>
                   <a:srgbClr val="3E3E44"/>
                 </a:solidFill>
@@ -6078,7 +6078,45 @@
           <a:p>
             <a:pPr marL="0" indent="0">
               <a:spcBef>
+                <a:spcPts val="700"/>
+              </a:spcBef>
+              <a:spcAft>
+                <a:spcPts val="500"/>
+              </a:spcAft>
+              <a:buNone/>
+            </a:pPr>
+            <a:r>
+              <a:rPr sz="1900" b="1" i="0">
+                <a:solidFill>
+                  <a:srgbClr val="9E3A24"/>
+                </a:solidFill>
+              </a:rPr>
+              <a:t>What CryptoDrishti does</a:t>
+            </a:r>
+          </a:p>
+          <a:p>
+            <a:pPr marL="0" indent="0">
+              <a:spcBef>
+                <a:spcPts val="0"/>
+              </a:spcBef>
+              <a:spcAft>
                 <a:spcPts val="900"/>
+              </a:spcAft>
+              <a:buNone/>
+            </a:pPr>
+            <a:r>
+              <a:rPr sz="1500" b="0" i="0">
+                <a:solidFill>
+                  <a:srgbClr val="3E3E44"/>
+                </a:solidFill>
+              </a:rPr>
+              <a:t>CryptoDrishti discovers cryptographic evidence across those surfaces, normalises it into one inventory, assesses each asset's quantum exposure, and produces evidence-backed migration recommendations and a CycloneDX Cryptography Bill of Materials.</a:t>
+            </a:r>
+          </a:p>
+          <a:p>
+            <a:pPr marL="0" indent="0">
+              <a:spcBef>
+                <a:spcPts val="700"/>
               </a:spcBef>
               <a:spcAft>
                 <a:spcPts val="500"/>
@@ -6086,12 +6124,12 @@
               <a:buNone/>
             </a:pPr>
             <a:r>
-              <a:rPr sz="2100" b="1" i="0">
+              <a:rPr sz="1900" b="1" i="0">
                 <a:solidFill>
                   <a:srgbClr val="9E3A24"/>
                 </a:solidFill>
               </a:rPr>
-              <a:t>What CryptoDrishti is</a:t>
+              <a:t>Why it is different</a:t>
             </a:r>
           </a:p>
           <a:p>
@@ -6105,12 +6143,12 @@
               <a:buNone/>
             </a:pPr>
             <a:r>
-              <a:rPr sz="1800" b="0" i="0">
+              <a:rPr sz="1500" b="0" i="0">
                 <a:solidFill>
                   <a:srgbClr val="3E3E44"/>
                 </a:solidFill>
               </a:rPr>
-              <a:t>CryptoDrishti discovers cryptographic evidence across those surfaces, normalises it into one inventory, assesses each asset's quantum exposure, and produces evidence-backed migration recommendations and a CycloneDX Cryptography Bill of Materials.</a:t>
+              <a:t>Finding RSA in a library is not observing RSA signing at a call site — capability, declaration, use and observation stay apart.</a:t>
             </a:r>
           </a:p>
         </p:txBody>
@@ -6269,14 +6307,14 @@
       </p:pic>
       <p:sp>
         <p:nvSpPr>
-          <p:cNvPr id="15363" name="cd-right"/>
+          <p:cNvPr id="15363" name="cd-diag-eyebrow"/>
           <p:cNvSpPr txBox="1"/>
           <p:nvPr/>
         </p:nvSpPr>
         <p:spPr>
           <a:xfrm>
-            <a:off x="6400800" y="1097280"/>
-            <a:ext cx="5367527" cy="3895344"/>
+            <a:off x="5687568" y="1078992"/>
+            <a:ext cx="6080759" cy="237744"/>
           </a:xfrm>
           <a:prstGeom prst="rect">
             <a:avLst/>
@@ -6289,262 +6327,44 @@
           </a:bodyPr>
           <a:lstStyle/>
           <a:p>
-            <a:pPr marL="0" indent="0">
-              <a:spcBef>
-                <a:spcPts val="0"/>
-              </a:spcBef>
-              <a:spcAft>
-                <a:spcPts val="500"/>
-              </a:spcAft>
-              <a:buNone/>
-            </a:pPr>
-            <a:r>
-              <a:rPr sz="2100" b="1" i="0">
-                <a:solidFill>
-                  <a:srgbClr val="9E3A24"/>
-                </a:solidFill>
-              </a:rPr>
-              <a:t>What it does</a:t>
-            </a:r>
-          </a:p>
-          <a:p>
-            <a:pPr marL="146050" indent="-146050">
-              <a:spcBef>
-                <a:spcPts val="0"/>
-              </a:spcBef>
-              <a:spcAft>
-                <a:spcPts val="500"/>
-              </a:spcAft>
-              <a:buFont typeface="Arial"/>
-              <a:buChar char="–"/>
-            </a:pPr>
-            <a:r>
-              <a:rPr sz="1500" b="1" i="0">
-                <a:solidFill>
-                  <a:srgbClr val="1A1A1C"/>
-                </a:solidFill>
-              </a:rPr>
-              <a:t>Multi-surface discovery — </a:t>
-            </a:r>
-            <a:r>
-              <a:rPr sz="1500" b="0" i="0">
-                <a:solidFill>
-                  <a:srgbClr val="3E3E44"/>
-                </a:solidFill>
-              </a:rPr>
-              <a:t>seven sensors: code, dependencies, binaries, certificates, configuration, images, one named TLS endpoint</a:t>
-            </a:r>
-          </a:p>
-          <a:p>
-            <a:pPr marL="146050" indent="-146050">
-              <a:spcBef>
-                <a:spcPts val="0"/>
-              </a:spcBef>
-              <a:spcAft>
-                <a:spcPts val="500"/>
-              </a:spcAft>
-              <a:buFont typeface="Arial"/>
-              <a:buChar char="–"/>
-            </a:pPr>
-            <a:r>
-              <a:rPr sz="1500" b="1" i="0">
-                <a:solidFill>
-                  <a:srgbClr val="1A1A1C"/>
-                </a:solidFill>
-              </a:rPr>
-              <a:t>Purpose-aware classification — </a:t>
-            </a:r>
-            <a:r>
-              <a:rPr sz="1500" b="0" i="0">
-                <a:solidFill>
-                  <a:srgbClr val="3E3E44"/>
-                </a:solidFill>
-              </a:rPr>
-              <a:t>an algorithm is classified by what it is used for, not by its name</a:t>
-            </a:r>
-          </a:p>
-          <a:p>
-            <a:pPr marL="146050" indent="-146050">
-              <a:spcBef>
-                <a:spcPts val="0"/>
-              </a:spcBef>
-              <a:spcAft>
-                <a:spcPts val="500"/>
-              </a:spcAft>
-              <a:buFont typeface="Arial"/>
-              <a:buChar char="–"/>
-            </a:pPr>
-            <a:r>
-              <a:rPr sz="1500" b="1" i="0">
-                <a:solidFill>
-                  <a:srgbClr val="1A1A1C"/>
-                </a:solidFill>
-              </a:rPr>
-              <a:t>Evidence assurance — </a:t>
-            </a:r>
-            <a:r>
-              <a:rPr sz="1500" b="0" i="0">
-                <a:solidFill>
-                  <a:srgbClr val="3E3E44"/>
-                </a:solidFill>
-              </a:rPr>
-              <a:t>capability, declared, used and observed stay distinct grades</a:t>
-            </a:r>
-          </a:p>
-          <a:p>
-            <a:pPr marL="146050" indent="-146050">
-              <a:spcBef>
-                <a:spcPts val="0"/>
-              </a:spcBef>
-              <a:spcAft>
-                <a:spcPts val="500"/>
-              </a:spcAft>
-              <a:buFont typeface="Arial"/>
-              <a:buChar char="–"/>
-            </a:pPr>
-            <a:r>
-              <a:rPr sz="1500" b="1" i="0">
-                <a:solidFill>
-                  <a:srgbClr val="1A1A1C"/>
-                </a:solidFill>
-              </a:rPr>
-              <a:t>Per-asset risk prioritisation — </a:t>
-            </a:r>
-            <a:r>
-              <a:rPr sz="1500" b="0" i="0">
-                <a:solidFill>
-                  <a:srgbClr val="3E3E44"/>
-                </a:solidFill>
-              </a:rPr>
-              <a:t>Mosca's inequality with operator-supplied asset context</a:t>
-            </a:r>
-          </a:p>
-          <a:p>
-            <a:pPr marL="146050" indent="-146050">
-              <a:spcBef>
-                <a:spcPts val="0"/>
-              </a:spcBef>
-              <a:spcAft>
-                <a:spcPts val="500"/>
-              </a:spcAft>
-              <a:buFont typeface="Arial"/>
-              <a:buChar char="–"/>
-            </a:pPr>
-            <a:r>
-              <a:rPr sz="1500" b="1" i="0">
-                <a:solidFill>
-                  <a:srgbClr val="1A1A1C"/>
-                </a:solidFill>
-              </a:rPr>
-              <a:t>Standards-conformant export — </a:t>
-            </a:r>
-            <a:r>
-              <a:rPr sz="1500" b="0" i="0">
-                <a:solidFill>
-                  <a:srgbClr val="3E3E44"/>
-                </a:solidFill>
-              </a:rPr>
-              <a:t>CycloneDX 1.6 / 1.7, validated offline against the official schema</a:t>
-            </a:r>
-          </a:p>
-          <a:p>
-            <a:pPr marL="0" indent="0">
-              <a:spcBef>
-                <a:spcPts val="900"/>
-              </a:spcBef>
-              <a:spcAft>
-                <a:spcPts val="500"/>
-              </a:spcAft>
-              <a:buNone/>
-            </a:pPr>
-            <a:r>
-              <a:rPr sz="2100" b="1" i="0">
-                <a:solidFill>
-                  <a:srgbClr val="9E3A24"/>
-                </a:solidFill>
-              </a:rPr>
-              <a:t>What makes it different</a:t>
-            </a:r>
-          </a:p>
-          <a:p>
-            <a:pPr marL="0" indent="0">
-              <a:spcBef>
-                <a:spcPts val="0"/>
-              </a:spcBef>
-              <a:spcAft>
-                <a:spcPts val="0"/>
-              </a:spcAft>
-              <a:buNone/>
-            </a:pPr>
-            <a:r>
-              <a:rPr sz="1500" b="0" i="0">
-                <a:solidFill>
-                  <a:srgbClr val="3E3E44"/>
-                </a:solidFill>
-              </a:rPr>
-              <a:t>Finding RSA in a library is not observing RSA signing at a call site — capability, declaration, use and observation stay apart.</a:t>
-            </a:r>
-          </a:p>
-        </p:txBody>
-      </p:sp>
-      <p:sp>
-        <p:nvSpPr>
-          <p:cNvPr id="15364" name="cd-caption"/>
-          <p:cNvSpPr txBox="1"/>
-          <p:nvPr/>
-        </p:nvSpPr>
-        <p:spPr>
-          <a:xfrm>
-            <a:off x="420624" y="5285231"/>
-            <a:ext cx="11347703" cy="274320"/>
-          </a:xfrm>
-          <a:prstGeom prst="rect">
-            <a:avLst/>
-          </a:prstGeom>
-          <a:noFill/>
-        </p:spPr>
-        <p:txBody>
-          <a:bodyPr wrap="square" lIns="0" rIns="0" tIns="0" bIns="0">
-            <a:spAutoFit/>
-          </a:bodyPr>
-          <a:lstStyle/>
-          <a:p>
-            <a:pPr marL="0" indent="0">
-              <a:spcBef>
-                <a:spcPts val="0"/>
-              </a:spcBef>
-              <a:spcAft>
-                <a:spcPts val="0"/>
-              </a:spcAft>
-              <a:buNone/>
-            </a:pPr>
-            <a:r>
-              <a:rPr sz="1300" b="0" i="1">
+            <a:pPr algn="l" marL="0" indent="0">
+              <a:spcBef>
+                <a:spcPts val="0"/>
+              </a:spcBef>
+              <a:spcAft>
+                <a:spcPts val="0"/>
+              </a:spcAft>
+              <a:buNone/>
+            </a:pPr>
+            <a:r>
+              <a:rPr sz="1100" b="1" i="0">
                 <a:solidFill>
                   <a:srgbClr val="63636B"/>
                 </a:solidFill>
               </a:rPr>
-              <a:t>The implemented pipeline — every stage below exists in the tool.</a:t>
-            </a:r>
-          </a:p>
-        </p:txBody>
-      </p:sp>
-      <p:sp>
-        <p:nvSpPr>
-          <p:cNvPr id="15365" name="cd-stage"/>
+              <a:t>WHERE THE EVIDENCE COMES FROM</a:t>
+            </a:r>
+          </a:p>
+        </p:txBody>
+      </p:sp>
+      <p:sp>
+        <p:nvSpPr>
+          <p:cNvPr id="15364" name="cd-surface"/>
           <p:cNvSpPr/>
           <p:nvPr/>
         </p:nvSpPr>
         <p:spPr>
           <a:xfrm>
-            <a:off x="420624" y="5577840"/>
-            <a:ext cx="2727197" cy="585216"/>
-          </a:xfrm>
-          <a:prstGeom prst="rect">
-            <a:avLst/>
+            <a:off x="5687568" y="1353312"/>
+            <a:ext cx="2939796" cy="530352"/>
+          </a:xfrm>
+          <a:prstGeom prst="roundRect">
+            <a:avLst>
+              <a:gd name="adj" fmla="val 9000"/>
+            </a:avLst>
           </a:prstGeom>
           <a:solidFill>
-            <a:srgbClr val="F4F2EE"/>
+            <a:srgbClr val="F5F3EF"/>
           </a:solidFill>
           <a:ln w="9525">
             <a:solidFill>
@@ -6568,23 +6388,725 @@
           </a:fontRef>
         </p:style>
         <p:txBody>
-          <a:bodyPr rtlCol="0" anchor="ctr"/>
-          <a:lstStyle/>
-          <a:p>
-            <a:pPr algn="ctr"/>
-          </a:p>
-        </p:txBody>
-      </p:sp>
-      <p:sp>
-        <p:nvSpPr>
-          <p:cNvPr id="15366" name="cd-panel-edge"/>
+          <a:bodyPr rtlCol="0" anchor="ctr" wrap="square" lIns="54864" rIns="54864" tIns="27432" bIns="27432"/>
+          <a:lstStyle/>
+          <a:p>
+            <a:pPr algn="ctr" marL="0" indent="0">
+              <a:spcBef>
+                <a:spcPts val="0"/>
+              </a:spcBef>
+              <a:spcAft>
+                <a:spcPts val="200"/>
+              </a:spcAft>
+              <a:buNone/>
+            </a:pPr>
+            <a:r>
+              <a:rPr sz="1300" b="1" i="0">
+                <a:solidFill>
+                  <a:srgbClr val="1A1A1C"/>
+                </a:solidFill>
+              </a:rPr>
+              <a:t>Source code</a:t>
+            </a:r>
+          </a:p>
+          <a:p>
+            <a:pPr algn="ctr" marL="0" indent="0">
+              <a:spcBef>
+                <a:spcPts val="0"/>
+              </a:spcBef>
+              <a:spcAft>
+                <a:spcPts val="0"/>
+              </a:spcAft>
+              <a:buNone/>
+            </a:pPr>
+            <a:r>
+              <a:rPr sz="1050" b="0" i="0">
+                <a:solidFill>
+                  <a:srgbClr val="63636B"/>
+                </a:solidFill>
+              </a:rPr>
+              <a:t>Python AST + rule packs</a:t>
+            </a:r>
+          </a:p>
+        </p:txBody>
+      </p:sp>
+      <p:sp>
+        <p:nvSpPr>
+          <p:cNvPr id="15365" name="cd-surface"/>
           <p:cNvSpPr/>
           <p:nvPr/>
         </p:nvSpPr>
         <p:spPr>
           <a:xfrm>
-            <a:off x="420624" y="5577840"/>
-            <a:ext cx="38100" cy="585216"/>
+            <a:off x="8828532" y="1353312"/>
+            <a:ext cx="2939796" cy="530352"/>
+          </a:xfrm>
+          <a:prstGeom prst="roundRect">
+            <a:avLst>
+              <a:gd name="adj" fmla="val 9000"/>
+            </a:avLst>
+          </a:prstGeom>
+          <a:solidFill>
+            <a:srgbClr val="F5F3EF"/>
+          </a:solidFill>
+          <a:ln w="9525">
+            <a:solidFill>
+              <a:srgbClr val="D2D0CB"/>
+            </a:solidFill>
+          </a:ln>
+          <a:effectLst/>
+        </p:spPr>
+        <p:style>
+          <a:lnRef idx="1">
+            <a:schemeClr val="accent1"/>
+          </a:lnRef>
+          <a:fillRef idx="3">
+            <a:schemeClr val="accent1"/>
+          </a:fillRef>
+          <a:effectRef idx="2">
+            <a:schemeClr val="accent1"/>
+          </a:effectRef>
+          <a:fontRef idx="minor">
+            <a:schemeClr val="lt1"/>
+          </a:fontRef>
+        </p:style>
+        <p:txBody>
+          <a:bodyPr rtlCol="0" anchor="ctr" wrap="square" lIns="54864" rIns="54864" tIns="27432" bIns="27432"/>
+          <a:lstStyle/>
+          <a:p>
+            <a:pPr algn="ctr" marL="0" indent="0">
+              <a:spcBef>
+                <a:spcPts val="0"/>
+              </a:spcBef>
+              <a:spcAft>
+                <a:spcPts val="200"/>
+              </a:spcAft>
+              <a:buNone/>
+            </a:pPr>
+            <a:r>
+              <a:rPr sz="1300" b="1" i="0">
+                <a:solidFill>
+                  <a:srgbClr val="1A1A1C"/>
+                </a:solidFill>
+              </a:rPr>
+              <a:t>Dependencies</a:t>
+            </a:r>
+          </a:p>
+          <a:p>
+            <a:pPr algn="ctr" marL="0" indent="0">
+              <a:spcBef>
+                <a:spcPts val="0"/>
+              </a:spcBef>
+              <a:spcAft>
+                <a:spcPts val="0"/>
+              </a:spcAft>
+              <a:buNone/>
+            </a:pPr>
+            <a:r>
+              <a:rPr sz="1050" b="0" i="0">
+                <a:solidFill>
+                  <a:srgbClr val="63636B"/>
+                </a:solidFill>
+              </a:rPr>
+              <a:t>13 manifest formats</a:t>
+            </a:r>
+          </a:p>
+        </p:txBody>
+      </p:sp>
+      <p:sp>
+        <p:nvSpPr>
+          <p:cNvPr id="15366" name="cd-surface"/>
+          <p:cNvSpPr/>
+          <p:nvPr/>
+        </p:nvSpPr>
+        <p:spPr>
+          <a:xfrm>
+            <a:off x="5687568" y="2002536"/>
+            <a:ext cx="2939796" cy="530352"/>
+          </a:xfrm>
+          <a:prstGeom prst="roundRect">
+            <a:avLst>
+              <a:gd name="adj" fmla="val 9000"/>
+            </a:avLst>
+          </a:prstGeom>
+          <a:solidFill>
+            <a:srgbClr val="F5F3EF"/>
+          </a:solidFill>
+          <a:ln w="9525">
+            <a:solidFill>
+              <a:srgbClr val="D2D0CB"/>
+            </a:solidFill>
+          </a:ln>
+          <a:effectLst/>
+        </p:spPr>
+        <p:style>
+          <a:lnRef idx="1">
+            <a:schemeClr val="accent1"/>
+          </a:lnRef>
+          <a:fillRef idx="3">
+            <a:schemeClr val="accent1"/>
+          </a:fillRef>
+          <a:effectRef idx="2">
+            <a:schemeClr val="accent1"/>
+          </a:effectRef>
+          <a:fontRef idx="minor">
+            <a:schemeClr val="lt1"/>
+          </a:fontRef>
+        </p:style>
+        <p:txBody>
+          <a:bodyPr rtlCol="0" anchor="ctr" wrap="square" lIns="54864" rIns="54864" tIns="27432" bIns="27432"/>
+          <a:lstStyle/>
+          <a:p>
+            <a:pPr algn="ctr" marL="0" indent="0">
+              <a:spcBef>
+                <a:spcPts val="0"/>
+              </a:spcBef>
+              <a:spcAft>
+                <a:spcPts val="200"/>
+              </a:spcAft>
+              <a:buNone/>
+            </a:pPr>
+            <a:r>
+              <a:rPr sz="1300" b="1" i="0">
+                <a:solidFill>
+                  <a:srgbClr val="1A1A1C"/>
+                </a:solidFill>
+              </a:rPr>
+              <a:t>Binaries</a:t>
+            </a:r>
+          </a:p>
+          <a:p>
+            <a:pPr algn="ctr" marL="0" indent="0">
+              <a:spcBef>
+                <a:spcPts val="0"/>
+              </a:spcBef>
+              <a:spcAft>
+                <a:spcPts val="0"/>
+              </a:spcAft>
+              <a:buNone/>
+            </a:pPr>
+            <a:r>
+              <a:rPr sz="1050" b="0" i="0">
+                <a:solidFill>
+                  <a:srgbClr val="63636B"/>
+                </a:solidFill>
+              </a:rPr>
+              <a:t>ELF symbols, constants</a:t>
+            </a:r>
+          </a:p>
+        </p:txBody>
+      </p:sp>
+      <p:sp>
+        <p:nvSpPr>
+          <p:cNvPr id="15367" name="cd-surface"/>
+          <p:cNvSpPr/>
+          <p:nvPr/>
+        </p:nvSpPr>
+        <p:spPr>
+          <a:xfrm>
+            <a:off x="8828532" y="2002536"/>
+            <a:ext cx="2939796" cy="530352"/>
+          </a:xfrm>
+          <a:prstGeom prst="roundRect">
+            <a:avLst>
+              <a:gd name="adj" fmla="val 9000"/>
+            </a:avLst>
+          </a:prstGeom>
+          <a:solidFill>
+            <a:srgbClr val="F5F3EF"/>
+          </a:solidFill>
+          <a:ln w="9525">
+            <a:solidFill>
+              <a:srgbClr val="D2D0CB"/>
+            </a:solidFill>
+          </a:ln>
+          <a:effectLst/>
+        </p:spPr>
+        <p:style>
+          <a:lnRef idx="1">
+            <a:schemeClr val="accent1"/>
+          </a:lnRef>
+          <a:fillRef idx="3">
+            <a:schemeClr val="accent1"/>
+          </a:fillRef>
+          <a:effectRef idx="2">
+            <a:schemeClr val="accent1"/>
+          </a:effectRef>
+          <a:fontRef idx="minor">
+            <a:schemeClr val="lt1"/>
+          </a:fontRef>
+        </p:style>
+        <p:txBody>
+          <a:bodyPr rtlCol="0" anchor="ctr" wrap="square" lIns="54864" rIns="54864" tIns="27432" bIns="27432"/>
+          <a:lstStyle/>
+          <a:p>
+            <a:pPr algn="ctr" marL="0" indent="0">
+              <a:spcBef>
+                <a:spcPts val="0"/>
+              </a:spcBef>
+              <a:spcAft>
+                <a:spcPts val="200"/>
+              </a:spcAft>
+              <a:buNone/>
+            </a:pPr>
+            <a:r>
+              <a:rPr sz="1300" b="1" i="0">
+                <a:solidFill>
+                  <a:srgbClr val="1A1A1C"/>
+                </a:solidFill>
+              </a:rPr>
+              <a:t>Configuration</a:t>
+            </a:r>
+          </a:p>
+          <a:p>
+            <a:pPr algn="ctr" marL="0" indent="0">
+              <a:spcBef>
+                <a:spcPts val="0"/>
+              </a:spcBef>
+              <a:spcAft>
+                <a:spcPts val="0"/>
+              </a:spcAft>
+              <a:buNone/>
+            </a:pPr>
+            <a:r>
+              <a:rPr sz="1050" b="0" i="0">
+                <a:solidFill>
+                  <a:srgbClr val="63636B"/>
+                </a:solidFill>
+              </a:rPr>
+              <a:t>nginx · sshd · OpenSSL</a:t>
+            </a:r>
+          </a:p>
+        </p:txBody>
+      </p:sp>
+      <p:sp>
+        <p:nvSpPr>
+          <p:cNvPr id="15368" name="cd-surface"/>
+          <p:cNvSpPr/>
+          <p:nvPr/>
+        </p:nvSpPr>
+        <p:spPr>
+          <a:xfrm>
+            <a:off x="5687568" y="2651760"/>
+            <a:ext cx="2939796" cy="530352"/>
+          </a:xfrm>
+          <a:prstGeom prst="roundRect">
+            <a:avLst>
+              <a:gd name="adj" fmla="val 9000"/>
+            </a:avLst>
+          </a:prstGeom>
+          <a:solidFill>
+            <a:srgbClr val="F5F3EF"/>
+          </a:solidFill>
+          <a:ln w="9525">
+            <a:solidFill>
+              <a:srgbClr val="D2D0CB"/>
+            </a:solidFill>
+          </a:ln>
+          <a:effectLst/>
+        </p:spPr>
+        <p:style>
+          <a:lnRef idx="1">
+            <a:schemeClr val="accent1"/>
+          </a:lnRef>
+          <a:fillRef idx="3">
+            <a:schemeClr val="accent1"/>
+          </a:fillRef>
+          <a:effectRef idx="2">
+            <a:schemeClr val="accent1"/>
+          </a:effectRef>
+          <a:fontRef idx="minor">
+            <a:schemeClr val="lt1"/>
+          </a:fontRef>
+        </p:style>
+        <p:txBody>
+          <a:bodyPr rtlCol="0" anchor="ctr" wrap="square" lIns="54864" rIns="54864" tIns="27432" bIns="27432"/>
+          <a:lstStyle/>
+          <a:p>
+            <a:pPr algn="ctr" marL="0" indent="0">
+              <a:spcBef>
+                <a:spcPts val="0"/>
+              </a:spcBef>
+              <a:spcAft>
+                <a:spcPts val="200"/>
+              </a:spcAft>
+              <a:buNone/>
+            </a:pPr>
+            <a:r>
+              <a:rPr sz="1300" b="1" i="0">
+                <a:solidFill>
+                  <a:srgbClr val="1A1A1C"/>
+                </a:solidFill>
+              </a:rPr>
+              <a:t>Certificates</a:t>
+            </a:r>
+          </a:p>
+          <a:p>
+            <a:pPr algn="ctr" marL="0" indent="0">
+              <a:spcBef>
+                <a:spcPts val="0"/>
+              </a:spcBef>
+              <a:spcAft>
+                <a:spcPts val="0"/>
+              </a:spcAft>
+              <a:buNone/>
+            </a:pPr>
+            <a:r>
+              <a:rPr sz="1050" b="0" i="0">
+                <a:solidFill>
+                  <a:srgbClr val="63636B"/>
+                </a:solidFill>
+              </a:rPr>
+              <a:t>X.509 · PEM/DER</a:t>
+            </a:r>
+          </a:p>
+        </p:txBody>
+      </p:sp>
+      <p:sp>
+        <p:nvSpPr>
+          <p:cNvPr id="15369" name="cd-surface"/>
+          <p:cNvSpPr/>
+          <p:nvPr/>
+        </p:nvSpPr>
+        <p:spPr>
+          <a:xfrm>
+            <a:off x="8828532" y="2651760"/>
+            <a:ext cx="2939796" cy="530352"/>
+          </a:xfrm>
+          <a:prstGeom prst="roundRect">
+            <a:avLst>
+              <a:gd name="adj" fmla="val 9000"/>
+            </a:avLst>
+          </a:prstGeom>
+          <a:solidFill>
+            <a:srgbClr val="F5F3EF"/>
+          </a:solidFill>
+          <a:ln w="9525">
+            <a:solidFill>
+              <a:srgbClr val="D2D0CB"/>
+            </a:solidFill>
+          </a:ln>
+          <a:effectLst/>
+        </p:spPr>
+        <p:style>
+          <a:lnRef idx="1">
+            <a:schemeClr val="accent1"/>
+          </a:lnRef>
+          <a:fillRef idx="3">
+            <a:schemeClr val="accent1"/>
+          </a:fillRef>
+          <a:effectRef idx="2">
+            <a:schemeClr val="accent1"/>
+          </a:effectRef>
+          <a:fontRef idx="minor">
+            <a:schemeClr val="lt1"/>
+          </a:fontRef>
+        </p:style>
+        <p:txBody>
+          <a:bodyPr rtlCol="0" anchor="ctr" wrap="square" lIns="54864" rIns="54864" tIns="27432" bIns="27432"/>
+          <a:lstStyle/>
+          <a:p>
+            <a:pPr algn="ctr" marL="0" indent="0">
+              <a:spcBef>
+                <a:spcPts val="0"/>
+              </a:spcBef>
+              <a:spcAft>
+                <a:spcPts val="200"/>
+              </a:spcAft>
+              <a:buNone/>
+            </a:pPr>
+            <a:r>
+              <a:rPr sz="1300" b="1" i="0">
+                <a:solidFill>
+                  <a:srgbClr val="1A1A1C"/>
+                </a:solidFill>
+              </a:rPr>
+              <a:t>Containers</a:t>
+            </a:r>
+          </a:p>
+          <a:p>
+            <a:pPr algn="ctr" marL="0" indent="0">
+              <a:spcBef>
+                <a:spcPts val="0"/>
+              </a:spcBef>
+              <a:spcAft>
+                <a:spcPts val="0"/>
+              </a:spcAft>
+              <a:buNone/>
+            </a:pPr>
+            <a:r>
+              <a:rPr sz="1050" b="0" i="0">
+                <a:solidFill>
+                  <a:srgbClr val="63636B"/>
+                </a:solidFill>
+              </a:rPr>
+              <a:t>OCI · docker save</a:t>
+            </a:r>
+          </a:p>
+        </p:txBody>
+      </p:sp>
+      <p:sp>
+        <p:nvSpPr>
+          <p:cNvPr id="15370" name="cd-caret"/>
+          <p:cNvSpPr/>
+          <p:nvPr/>
+        </p:nvSpPr>
+        <p:spPr>
+          <a:xfrm>
+            <a:off x="8645652" y="3236975"/>
+            <a:ext cx="118872" cy="136702"/>
+          </a:xfrm>
+          <a:prstGeom prst="downArrow">
+            <a:avLst/>
+          </a:prstGeom>
+          <a:solidFill>
+            <a:srgbClr val="63636B"/>
+          </a:solidFill>
+          <a:ln>
+            <a:noFill/>
+          </a:ln>
+          <a:effectLst/>
+        </p:spPr>
+        <p:style>
+          <a:lnRef idx="1">
+            <a:schemeClr val="accent1"/>
+          </a:lnRef>
+          <a:fillRef idx="3">
+            <a:schemeClr val="accent1"/>
+          </a:fillRef>
+          <a:effectRef idx="2">
+            <a:schemeClr val="accent1"/>
+          </a:effectRef>
+          <a:fontRef idx="minor">
+            <a:schemeClr val="lt1"/>
+          </a:fontRef>
+        </p:style>
+        <p:txBody>
+          <a:bodyPr rtlCol="0" anchor="ctr"/>
+          <a:lstStyle/>
+          <a:p>
+            <a:pPr algn="ctr"/>
+          </a:p>
+        </p:txBody>
+      </p:sp>
+      <p:sp>
+        <p:nvSpPr>
+          <p:cNvPr id="15371" name="cd-band"/>
+          <p:cNvSpPr/>
+          <p:nvPr/>
+        </p:nvSpPr>
+        <p:spPr>
+          <a:xfrm>
+            <a:off x="5687568" y="3474719"/>
+            <a:ext cx="6080759" cy="566928"/>
+          </a:xfrm>
+          <a:prstGeom prst="roundRect">
+            <a:avLst>
+              <a:gd name="adj" fmla="val 12000"/>
+            </a:avLst>
+          </a:prstGeom>
+          <a:solidFill>
+            <a:srgbClr val="1B3A6B"/>
+          </a:solidFill>
+          <a:ln>
+            <a:noFill/>
+          </a:ln>
+          <a:effectLst/>
+        </p:spPr>
+        <p:style>
+          <a:lnRef idx="1">
+            <a:schemeClr val="accent1"/>
+          </a:lnRef>
+          <a:fillRef idx="3">
+            <a:schemeClr val="accent1"/>
+          </a:fillRef>
+          <a:effectRef idx="2">
+            <a:schemeClr val="accent1"/>
+          </a:effectRef>
+          <a:fontRef idx="minor">
+            <a:schemeClr val="lt1"/>
+          </a:fontRef>
+        </p:style>
+        <p:txBody>
+          <a:bodyPr rtlCol="0" anchor="ctr" wrap="square" lIns="54864" rIns="54864" tIns="27432" bIns="27432"/>
+          <a:lstStyle/>
+          <a:p>
+            <a:pPr algn="ctr" marL="0" indent="0">
+              <a:spcBef>
+                <a:spcPts val="0"/>
+              </a:spcBef>
+              <a:spcAft>
+                <a:spcPts val="100"/>
+              </a:spcAft>
+              <a:buNone/>
+            </a:pPr>
+            <a:r>
+              <a:rPr sz="1600" b="1" i="0">
+                <a:solidFill>
+                  <a:srgbClr val="FFFFFF"/>
+                </a:solidFill>
+              </a:rPr>
+              <a:t>CRYPTODRISHTI</a:t>
+            </a:r>
+          </a:p>
+          <a:p>
+            <a:pPr algn="ctr" marL="0" indent="0">
+              <a:spcBef>
+                <a:spcPts val="0"/>
+              </a:spcBef>
+              <a:spcAft>
+                <a:spcPts val="0"/>
+              </a:spcAft>
+              <a:buNone/>
+            </a:pPr>
+            <a:r>
+              <a:rPr sz="1100" b="0" i="0">
+                <a:solidFill>
+                  <a:srgbClr val="D8DEEA"/>
+                </a:solidFill>
+              </a:rPr>
+              <a:t>normalise → correlate → classify → score</a:t>
+            </a:r>
+          </a:p>
+        </p:txBody>
+      </p:sp>
+      <p:sp>
+        <p:nvSpPr>
+          <p:cNvPr id="15372" name="cd-caret"/>
+          <p:cNvSpPr/>
+          <p:nvPr/>
+        </p:nvSpPr>
+        <p:spPr>
+          <a:xfrm>
+            <a:off x="8645652" y="4114800"/>
+            <a:ext cx="118872" cy="136702"/>
+          </a:xfrm>
+          <a:prstGeom prst="downArrow">
+            <a:avLst/>
+          </a:prstGeom>
+          <a:solidFill>
+            <a:srgbClr val="63636B"/>
+          </a:solidFill>
+          <a:ln>
+            <a:noFill/>
+          </a:ln>
+          <a:effectLst/>
+        </p:spPr>
+        <p:style>
+          <a:lnRef idx="1">
+            <a:schemeClr val="accent1"/>
+          </a:lnRef>
+          <a:fillRef idx="3">
+            <a:schemeClr val="accent1"/>
+          </a:fillRef>
+          <a:effectRef idx="2">
+            <a:schemeClr val="accent1"/>
+          </a:effectRef>
+          <a:fontRef idx="minor">
+            <a:schemeClr val="lt1"/>
+          </a:fontRef>
+        </p:style>
+        <p:txBody>
+          <a:bodyPr rtlCol="0" anchor="ctr"/>
+          <a:lstStyle/>
+          <a:p>
+            <a:pPr algn="ctr"/>
+          </a:p>
+        </p:txBody>
+      </p:sp>
+      <p:sp>
+        <p:nvSpPr>
+          <p:cNvPr id="15373" name="cd-out"/>
+          <p:cNvSpPr/>
+          <p:nvPr/>
+        </p:nvSpPr>
+        <p:spPr>
+          <a:xfrm>
+            <a:off x="5687568" y="4352544"/>
+            <a:ext cx="1396745" cy="566928"/>
+          </a:xfrm>
+          <a:prstGeom prst="roundRect">
+            <a:avLst>
+              <a:gd name="adj" fmla="val 9000"/>
+            </a:avLst>
+          </a:prstGeom>
+          <a:solidFill>
+            <a:srgbClr val="F5F3EF"/>
+          </a:solidFill>
+          <a:ln w="9525">
+            <a:solidFill>
+              <a:srgbClr val="D2D0CB"/>
+            </a:solidFill>
+          </a:ln>
+          <a:effectLst/>
+        </p:spPr>
+        <p:style>
+          <a:lnRef idx="1">
+            <a:schemeClr val="accent1"/>
+          </a:lnRef>
+          <a:fillRef idx="3">
+            <a:schemeClr val="accent1"/>
+          </a:fillRef>
+          <a:effectRef idx="2">
+            <a:schemeClr val="accent1"/>
+          </a:effectRef>
+          <a:fontRef idx="minor">
+            <a:schemeClr val="lt1"/>
+          </a:fontRef>
+        </p:style>
+        <p:txBody>
+          <a:bodyPr rtlCol="0" anchor="ctr" wrap="square" lIns="54864" rIns="54864" tIns="27432" bIns="27432"/>
+          <a:lstStyle/>
+          <a:p>
+            <a:pPr algn="ctr" marL="0" indent="0">
+              <a:spcBef>
+                <a:spcPts val="0"/>
+              </a:spcBef>
+              <a:spcAft>
+                <a:spcPts val="200"/>
+              </a:spcAft>
+              <a:buNone/>
+            </a:pPr>
+            <a:r>
+              <a:rPr sz="1150" b="1" i="0">
+                <a:solidFill>
+                  <a:srgbClr val="1B3A6B"/>
+                </a:solidFill>
+              </a:rPr>
+              <a:t>INVENTORY</a:t>
+            </a:r>
+          </a:p>
+          <a:p>
+            <a:pPr algn="ctr" marL="0" indent="0">
+              <a:spcBef>
+                <a:spcPts val="0"/>
+              </a:spcBef>
+              <a:spcAft>
+                <a:spcPts val="0"/>
+              </a:spcAft>
+              <a:buNone/>
+            </a:pPr>
+            <a:r>
+              <a:rPr sz="1100" b="0" i="0">
+                <a:solidFill>
+                  <a:srgbClr val="63636B"/>
+                </a:solidFill>
+              </a:rPr>
+              <a:t>distinct assets</a:t>
+            </a:r>
+          </a:p>
+        </p:txBody>
+      </p:sp>
+      <p:sp>
+        <p:nvSpPr>
+          <p:cNvPr id="15374" name="cd-chip-edge"/>
+          <p:cNvSpPr/>
+          <p:nvPr/>
+        </p:nvSpPr>
+        <p:spPr>
+          <a:xfrm>
+            <a:off x="5687568" y="4352544"/>
+            <a:ext cx="40640" cy="566928"/>
           </a:xfrm>
           <a:prstGeom prst="rect">
             <a:avLst/>
@@ -6621,81 +7143,22 @@
       </p:sp>
       <p:sp>
         <p:nvSpPr>
-          <p:cNvPr id="15367" name="cd-stage-text"/>
-          <p:cNvSpPr txBox="1"/>
-          <p:nvPr/>
-        </p:nvSpPr>
-        <p:spPr>
-          <a:xfrm>
-            <a:off x="566928" y="5660136"/>
-            <a:ext cx="2471165" cy="457200"/>
-          </a:xfrm>
-          <a:prstGeom prst="rect">
-            <a:avLst/>
-          </a:prstGeom>
-          <a:noFill/>
-        </p:spPr>
-        <p:txBody>
-          <a:bodyPr wrap="square" lIns="0" rIns="0" tIns="0" bIns="0">
-            <a:spAutoFit/>
-          </a:bodyPr>
-          <a:lstStyle/>
-          <a:p>
-            <a:pPr marL="0" indent="0">
-              <a:spcBef>
-                <a:spcPts val="0"/>
-              </a:spcBef>
-              <a:spcAft>
-                <a:spcPts val="300"/>
-              </a:spcAft>
-              <a:buNone/>
-            </a:pPr>
-            <a:r>
-              <a:rPr sz="1500" b="1" i="0">
-                <a:solidFill>
-                  <a:srgbClr val="1B3A6B"/>
-                </a:solidFill>
-              </a:rPr>
-              <a:t>DISCOVERY SOURCES</a:t>
-            </a:r>
-          </a:p>
-          <a:p>
-            <a:pPr marL="0" indent="0">
-              <a:spcBef>
-                <a:spcPts val="0"/>
-              </a:spcBef>
-              <a:spcAft>
-                <a:spcPts val="0"/>
-              </a:spcAft>
-              <a:buNone/>
-            </a:pPr>
-            <a:r>
-              <a:rPr sz="1300" b="0" i="0">
-                <a:solidFill>
-                  <a:srgbClr val="63636B"/>
-                </a:solidFill>
-              </a:rPr>
-              <a:t>code · deps · binaries · certs · config</a:t>
-            </a:r>
-          </a:p>
-        </p:txBody>
-      </p:sp>
-      <p:sp>
-        <p:nvSpPr>
-          <p:cNvPr id="15368" name="cd-stage"/>
+          <p:cNvPr id="15375" name="cd-out"/>
           <p:cNvSpPr/>
           <p:nvPr/>
         </p:nvSpPr>
         <p:spPr>
           <a:xfrm>
-            <a:off x="3294125" y="5577840"/>
-            <a:ext cx="2727197" cy="585216"/>
-          </a:xfrm>
-          <a:prstGeom prst="rect">
-            <a:avLst/>
+            <a:off x="7248905" y="4352544"/>
+            <a:ext cx="1396745" cy="566928"/>
+          </a:xfrm>
+          <a:prstGeom prst="roundRect">
+            <a:avLst>
+              <a:gd name="adj" fmla="val 9000"/>
+            </a:avLst>
           </a:prstGeom>
           <a:solidFill>
-            <a:srgbClr val="F4F2EE"/>
+            <a:srgbClr val="F5F3EF"/>
           </a:solidFill>
           <a:ln w="9525">
             <a:solidFill>
@@ -6719,23 +7182,58 @@
           </a:fontRef>
         </p:style>
         <p:txBody>
-          <a:bodyPr rtlCol="0" anchor="ctr"/>
-          <a:lstStyle/>
-          <a:p>
-            <a:pPr algn="ctr"/>
-          </a:p>
-        </p:txBody>
-      </p:sp>
-      <p:sp>
-        <p:nvSpPr>
-          <p:cNvPr id="15369" name="cd-panel-edge"/>
+          <a:bodyPr rtlCol="0" anchor="ctr" wrap="square" lIns="54864" rIns="54864" tIns="27432" bIns="27432"/>
+          <a:lstStyle/>
+          <a:p>
+            <a:pPr algn="ctr" marL="0" indent="0">
+              <a:spcBef>
+                <a:spcPts val="0"/>
+              </a:spcBef>
+              <a:spcAft>
+                <a:spcPts val="200"/>
+              </a:spcAft>
+              <a:buNone/>
+            </a:pPr>
+            <a:r>
+              <a:rPr sz="1150" b="1" i="0">
+                <a:solidFill>
+                  <a:srgbClr val="1B3A6B"/>
+                </a:solidFill>
+              </a:rPr>
+              <a:t>RISK</a:t>
+            </a:r>
+          </a:p>
+          <a:p>
+            <a:pPr algn="ctr" marL="0" indent="0">
+              <a:spcBef>
+                <a:spcPts val="0"/>
+              </a:spcBef>
+              <a:spcAft>
+                <a:spcPts val="0"/>
+              </a:spcAft>
+              <a:buNone/>
+            </a:pPr>
+            <a:r>
+              <a:rPr sz="1100" b="0" i="0">
+                <a:solidFill>
+                  <a:srgbClr val="63636B"/>
+                </a:solidFill>
+              </a:rPr>
+              <a:t>Mosca exposure</a:t>
+            </a:r>
+          </a:p>
+        </p:txBody>
+      </p:sp>
+      <p:sp>
+        <p:nvSpPr>
+          <p:cNvPr id="15376" name="cd-chip-edge"/>
           <p:cNvSpPr/>
           <p:nvPr/>
         </p:nvSpPr>
         <p:spPr>
           <a:xfrm>
-            <a:off x="3294125" y="5577840"/>
-            <a:ext cx="38100" cy="585216"/>
+            <a:off x="7248905" y="4352544"/>
+            <a:ext cx="40640" cy="566928"/>
           </a:xfrm>
           <a:prstGeom prst="rect">
             <a:avLst/>
@@ -6772,81 +7270,22 @@
       </p:sp>
       <p:sp>
         <p:nvSpPr>
-          <p:cNvPr id="15370" name="cd-stage-text"/>
-          <p:cNvSpPr txBox="1"/>
-          <p:nvPr/>
-        </p:nvSpPr>
-        <p:spPr>
-          <a:xfrm>
-            <a:off x="3440429" y="5660136"/>
-            <a:ext cx="2471165" cy="457200"/>
-          </a:xfrm>
-          <a:prstGeom prst="rect">
-            <a:avLst/>
-          </a:prstGeom>
-          <a:noFill/>
-        </p:spPr>
-        <p:txBody>
-          <a:bodyPr wrap="square" lIns="0" rIns="0" tIns="0" bIns="0">
-            <a:spAutoFit/>
-          </a:bodyPr>
-          <a:lstStyle/>
-          <a:p>
-            <a:pPr marL="0" indent="0">
-              <a:spcBef>
-                <a:spcPts val="0"/>
-              </a:spcBef>
-              <a:spcAft>
-                <a:spcPts val="300"/>
-              </a:spcAft>
-              <a:buNone/>
-            </a:pPr>
-            <a:r>
-              <a:rPr sz="1500" b="1" i="0">
-                <a:solidFill>
-                  <a:srgbClr val="1B3A6B"/>
-                </a:solidFill>
-              </a:rPr>
-              <a:t>NORMALISED INVENTORY</a:t>
-            </a:r>
-          </a:p>
-          <a:p>
-            <a:pPr marL="0" indent="0">
-              <a:spcBef>
-                <a:spcPts val="0"/>
-              </a:spcBef>
-              <a:spcAft>
-                <a:spcPts val="0"/>
-              </a:spcAft>
-              <a:buNone/>
-            </a:pPr>
-            <a:r>
-              <a:rPr sz="1300" b="0" i="0">
-                <a:solidFill>
-                  <a:srgbClr val="63636B"/>
-                </a:solidFill>
-              </a:rPr>
-              <a:t>assets with purpose + assurance</a:t>
-            </a:r>
-          </a:p>
-        </p:txBody>
-      </p:sp>
-      <p:sp>
-        <p:nvSpPr>
-          <p:cNvPr id="15371" name="cd-stage"/>
+          <p:cNvPr id="15377" name="cd-out"/>
           <p:cNvSpPr/>
           <p:nvPr/>
         </p:nvSpPr>
         <p:spPr>
           <a:xfrm>
-            <a:off x="6167627" y="5577840"/>
-            <a:ext cx="2727197" cy="585216"/>
-          </a:xfrm>
-          <a:prstGeom prst="rect">
-            <a:avLst/>
+            <a:off x="8810244" y="4352544"/>
+            <a:ext cx="1396745" cy="566928"/>
+          </a:xfrm>
+          <a:prstGeom prst="roundRect">
+            <a:avLst>
+              <a:gd name="adj" fmla="val 9000"/>
+            </a:avLst>
           </a:prstGeom>
           <a:solidFill>
-            <a:srgbClr val="F4F2EE"/>
+            <a:srgbClr val="F5F3EF"/>
           </a:solidFill>
           <a:ln w="9525">
             <a:solidFill>
@@ -6870,23 +7309,58 @@
           </a:fontRef>
         </p:style>
         <p:txBody>
-          <a:bodyPr rtlCol="0" anchor="ctr"/>
-          <a:lstStyle/>
-          <a:p>
-            <a:pPr algn="ctr"/>
-          </a:p>
-        </p:txBody>
-      </p:sp>
-      <p:sp>
-        <p:nvSpPr>
-          <p:cNvPr id="15372" name="cd-panel-edge"/>
+          <a:bodyPr rtlCol="0" anchor="ctr" wrap="square" lIns="54864" rIns="54864" tIns="27432" bIns="27432"/>
+          <a:lstStyle/>
+          <a:p>
+            <a:pPr algn="ctr" marL="0" indent="0">
+              <a:spcBef>
+                <a:spcPts val="0"/>
+              </a:spcBef>
+              <a:spcAft>
+                <a:spcPts val="200"/>
+              </a:spcAft>
+              <a:buNone/>
+            </a:pPr>
+            <a:r>
+              <a:rPr sz="1150" b="1" i="0">
+                <a:solidFill>
+                  <a:srgbClr val="1B3A6B"/>
+                </a:solidFill>
+              </a:rPr>
+              <a:t>MIGRATION</a:t>
+            </a:r>
+          </a:p>
+          <a:p>
+            <a:pPr algn="ctr" marL="0" indent="0">
+              <a:spcBef>
+                <a:spcPts val="0"/>
+              </a:spcBef>
+              <a:spcAft>
+                <a:spcPts val="0"/>
+              </a:spcAft>
+              <a:buNone/>
+            </a:pPr>
+            <a:r>
+              <a:rPr sz="1100" b="0" i="0">
+                <a:solidFill>
+                  <a:srgbClr val="63636B"/>
+                </a:solidFill>
+              </a:rPr>
+              <a:t>named target</a:t>
+            </a:r>
+          </a:p>
+        </p:txBody>
+      </p:sp>
+      <p:sp>
+        <p:nvSpPr>
+          <p:cNvPr id="15378" name="cd-chip-edge"/>
           <p:cNvSpPr/>
           <p:nvPr/>
         </p:nvSpPr>
         <p:spPr>
           <a:xfrm>
-            <a:off x="6167627" y="5577840"/>
-            <a:ext cx="38100" cy="585216"/>
+            <a:off x="8810244" y="4352544"/>
+            <a:ext cx="40640" cy="566928"/>
           </a:xfrm>
           <a:prstGeom prst="rect">
             <a:avLst/>
@@ -6923,81 +7397,22 @@
       </p:sp>
       <p:sp>
         <p:nvSpPr>
-          <p:cNvPr id="15373" name="cd-stage-text"/>
-          <p:cNvSpPr txBox="1"/>
-          <p:nvPr/>
-        </p:nvSpPr>
-        <p:spPr>
-          <a:xfrm>
-            <a:off x="6313931" y="5660136"/>
-            <a:ext cx="2471165" cy="457200"/>
-          </a:xfrm>
-          <a:prstGeom prst="rect">
-            <a:avLst/>
-          </a:prstGeom>
-          <a:noFill/>
-        </p:spPr>
-        <p:txBody>
-          <a:bodyPr wrap="square" lIns="0" rIns="0" tIns="0" bIns="0">
-            <a:spAutoFit/>
-          </a:bodyPr>
-          <a:lstStyle/>
-          <a:p>
-            <a:pPr marL="0" indent="0">
-              <a:spcBef>
-                <a:spcPts val="0"/>
-              </a:spcBef>
-              <a:spcAft>
-                <a:spcPts val="300"/>
-              </a:spcAft>
-              <a:buNone/>
-            </a:pPr>
-            <a:r>
-              <a:rPr sz="1500" b="1" i="0">
-                <a:solidFill>
-                  <a:srgbClr val="1B3A6B"/>
-                </a:solidFill>
-              </a:rPr>
-              <a:t>RISK + MIGRATION</a:t>
-            </a:r>
-          </a:p>
-          <a:p>
-            <a:pPr marL="0" indent="0">
-              <a:spcBef>
-                <a:spcPts val="0"/>
-              </a:spcBef>
-              <a:spcAft>
-                <a:spcPts val="0"/>
-              </a:spcAft>
-              <a:buNone/>
-            </a:pPr>
-            <a:r>
-              <a:rPr sz="1300" b="0" i="0">
-                <a:solidFill>
-                  <a:srgbClr val="63636B"/>
-                </a:solidFill>
-              </a:rPr>
-              <a:t>Mosca exposure → matched target</a:t>
-            </a:r>
-          </a:p>
-        </p:txBody>
-      </p:sp>
-      <p:sp>
-        <p:nvSpPr>
-          <p:cNvPr id="15374" name="cd-stage"/>
+          <p:cNvPr id="15379" name="cd-out"/>
           <p:cNvSpPr/>
           <p:nvPr/>
         </p:nvSpPr>
         <p:spPr>
           <a:xfrm>
-            <a:off x="9041130" y="5577840"/>
-            <a:ext cx="2727197" cy="585216"/>
-          </a:xfrm>
-          <a:prstGeom prst="rect">
-            <a:avLst/>
+            <a:off x="10371582" y="4352544"/>
+            <a:ext cx="1396745" cy="566928"/>
+          </a:xfrm>
+          <a:prstGeom prst="roundRect">
+            <a:avLst>
+              <a:gd name="adj" fmla="val 9000"/>
+            </a:avLst>
           </a:prstGeom>
           <a:solidFill>
-            <a:srgbClr val="F4F2EE"/>
+            <a:srgbClr val="F5F3EF"/>
           </a:solidFill>
           <a:ln w="9525">
             <a:solidFill>
@@ -7021,23 +7436,58 @@
           </a:fontRef>
         </p:style>
         <p:txBody>
-          <a:bodyPr rtlCol="0" anchor="ctr"/>
-          <a:lstStyle/>
-          <a:p>
-            <a:pPr algn="ctr"/>
-          </a:p>
-        </p:txBody>
-      </p:sp>
-      <p:sp>
-        <p:nvSpPr>
-          <p:cNvPr id="15375" name="cd-panel-edge"/>
+          <a:bodyPr rtlCol="0" anchor="ctr" wrap="square" lIns="54864" rIns="54864" tIns="27432" bIns="27432"/>
+          <a:lstStyle/>
+          <a:p>
+            <a:pPr algn="ctr" marL="0" indent="0">
+              <a:spcBef>
+                <a:spcPts val="0"/>
+              </a:spcBef>
+              <a:spcAft>
+                <a:spcPts val="200"/>
+              </a:spcAft>
+              <a:buNone/>
+            </a:pPr>
+            <a:r>
+              <a:rPr sz="1150" b="1" i="0">
+                <a:solidFill>
+                  <a:srgbClr val="1B3A6B"/>
+                </a:solidFill>
+              </a:rPr>
+              <a:t>CBOM</a:t>
+            </a:r>
+          </a:p>
+          <a:p>
+            <a:pPr algn="ctr" marL="0" indent="0">
+              <a:spcBef>
+                <a:spcPts val="0"/>
+              </a:spcBef>
+              <a:spcAft>
+                <a:spcPts val="0"/>
+              </a:spcAft>
+              <a:buNone/>
+            </a:pPr>
+            <a:r>
+              <a:rPr sz="1100" b="0" i="0">
+                <a:solidFill>
+                  <a:srgbClr val="63636B"/>
+                </a:solidFill>
+              </a:rPr>
+              <a:t>CycloneDX 1.6/1.7</a:t>
+            </a:r>
+          </a:p>
+        </p:txBody>
+      </p:sp>
+      <p:sp>
+        <p:nvSpPr>
+          <p:cNvPr id="15380" name="cd-chip-edge"/>
           <p:cNvSpPr/>
           <p:nvPr/>
         </p:nvSpPr>
         <p:spPr>
           <a:xfrm>
-            <a:off x="9041130" y="5577840"/>
-            <a:ext cx="38100" cy="585216"/>
+            <a:off x="10371582" y="4352544"/>
+            <a:ext cx="40640" cy="566928"/>
           </a:xfrm>
           <a:prstGeom prst="rect">
             <a:avLst/>
@@ -7074,14 +7524,14 @@
       </p:sp>
       <p:sp>
         <p:nvSpPr>
-          <p:cNvPr id="15376" name="cd-stage-text"/>
+          <p:cNvPr id="15381" name="cd-tls-note"/>
           <p:cNvSpPr txBox="1"/>
           <p:nvPr/>
         </p:nvSpPr>
         <p:spPr>
           <a:xfrm>
-            <a:off x="9187434" y="5660136"/>
-            <a:ext cx="2471165" cy="457200"/>
+            <a:off x="5687568" y="5010912"/>
+            <a:ext cx="6080759" cy="420624"/>
           </a:xfrm>
           <a:prstGeom prst="rect">
             <a:avLst/>
@@ -7094,41 +7544,22 @@
           </a:bodyPr>
           <a:lstStyle/>
           <a:p>
-            <a:pPr marL="0" indent="0">
-              <a:spcBef>
-                <a:spcPts val="0"/>
-              </a:spcBef>
-              <a:spcAft>
-                <a:spcPts val="300"/>
-              </a:spcAft>
-              <a:buNone/>
-            </a:pPr>
-            <a:r>
-              <a:rPr sz="1500" b="1" i="0">
-                <a:solidFill>
-                  <a:srgbClr val="1B3A6B"/>
-                </a:solidFill>
-              </a:rPr>
-              <a:t>CBOM + REPORT</a:t>
-            </a:r>
-          </a:p>
-          <a:p>
-            <a:pPr marL="0" indent="0">
-              <a:spcBef>
-                <a:spcPts val="0"/>
-              </a:spcBef>
-              <a:spcAft>
-                <a:spcPts val="0"/>
-              </a:spcAft>
-              <a:buNone/>
-            </a:pPr>
-            <a:r>
-              <a:rPr sz="1300" b="0" i="0">
+            <a:pPr algn="l" marL="0" indent="0">
+              <a:spcBef>
+                <a:spcPts val="0"/>
+              </a:spcBef>
+              <a:spcAft>
+                <a:spcPts val="0"/>
+              </a:spcAft>
+              <a:buNone/>
+            </a:pPr>
+            <a:r>
+              <a:rPr sz="1050" b="0" i="1">
                 <a:solidFill>
                   <a:srgbClr val="63636B"/>
                 </a:solidFill>
               </a:rPr>
-              <a:t>CycloneDX 1.6 / 1.7 + HTML report</a:t>
+              <a:t>A seventh sensor completes a live TLS handshake — only against an endpoint the operator names, and only after the destination policy vets every resolved address.</a:t>
             </a:r>
           </a:p>
         </p:txBody>
@@ -7260,7 +7691,7 @@
         <p:spPr bwMode="auto">
           <a:xfrm>
             <a:off x="420624" y="1097280"/>
-            <a:ext cx="5541264" cy="2359152"/>
+            <a:ext cx="3767328" cy="310896"/>
           </a:xfrm>
           <a:prstGeom prst="rect">
             <a:avLst/>
@@ -7289,92 +7720,12 @@
               <a:buNone/>
             </a:pPr>
             <a:r>
-              <a:rPr sz="2100" b="1" i="0">
+              <a:rPr sz="1700" b="1" i="0">
                 <a:solidFill>
                   <a:srgbClr val="9E3A24"/>
                 </a:solidFill>
               </a:rPr>
-              <a:t>System architecture</a:t>
-            </a:r>
-          </a:p>
-          <a:p>
-            <a:pPr marL="146050" indent="-146050">
-              <a:spcBef>
-                <a:spcPts val="0"/>
-              </a:spcBef>
-              <a:spcAft>
-                <a:spcPts val="400"/>
-              </a:spcAft>
-              <a:buFont typeface="Arial"/>
-              <a:buChar char="–"/>
-            </a:pPr>
-            <a:r>
-              <a:rPr sz="1500" b="0" i="0">
-                <a:solidFill>
-                  <a:srgbClr val="3E3E44"/>
-                </a:solidFill>
-              </a:rPr>
-              <a:t>Inputs — a directory, a container image archive, or a named TLS endpoint</a:t>
-            </a:r>
-          </a:p>
-          <a:p>
-            <a:pPr marL="146050" indent="-146050">
-              <a:spcBef>
-                <a:spcPts val="0"/>
-              </a:spcBef>
-              <a:spcAft>
-                <a:spcPts val="400"/>
-              </a:spcAft>
-              <a:buFont typeface="Arial"/>
-              <a:buChar char="–"/>
-            </a:pPr>
-            <a:r>
-              <a:rPr sz="1500" b="0" i="0">
-                <a:solidFill>
-                  <a:srgbClr val="3E3E44"/>
-                </a:solidFill>
-              </a:rPr>
-              <a:t>Seven sensors return evidence, not verdicts; hits become distinct assets carrying purpose and assurance</a:t>
-            </a:r>
-          </a:p>
-          <a:p>
-            <a:pPr marL="146050" indent="-146050">
-              <a:spcBef>
-                <a:spcPts val="0"/>
-              </a:spcBef>
-              <a:spcAft>
-                <a:spcPts val="400"/>
-              </a:spcAft>
-              <a:buFont typeface="Arial"/>
-              <a:buChar char="–"/>
-            </a:pPr>
-            <a:r>
-              <a:rPr sz="1500" b="0" i="0">
-                <a:solidFill>
-                  <a:srgbClr val="3E3E44"/>
-                </a:solidFill>
-              </a:rPr>
-              <a:t>Correlation links findings sharing an artefact, never merges them; a 74-algorithm registry classifies each</a:t>
-            </a:r>
-          </a:p>
-          <a:p>
-            <a:pPr marL="146050" indent="-146050">
-              <a:spcBef>
-                <a:spcPts val="0"/>
-              </a:spcBef>
-              <a:spcAft>
-                <a:spcPts val="400"/>
-              </a:spcAft>
-              <a:buFont typeface="Arial"/>
-              <a:buChar char="–"/>
-            </a:pPr>
-            <a:r>
-              <a:rPr sz="1500" b="0" i="0">
-                <a:solidFill>
-                  <a:srgbClr val="3E3E44"/>
-                </a:solidFill>
-              </a:rPr>
-              <a:t>Mosca X + Y &gt; Z read per purpose, then a named target, a CycloneDX CBOM and a traceable HTML report</a:t>
+              <a:t>How a finding is processed</a:t>
             </a:r>
           </a:p>
         </p:txBody>
@@ -7533,504 +7884,103 @@
       </p:pic>
       <p:sp>
         <p:nvSpPr>
-          <p:cNvPr id="17411" name="cd-impl"/>
-          <p:cNvSpPr txBox="1"/>
-          <p:nvPr/>
-        </p:nvSpPr>
-        <p:spPr>
-          <a:xfrm>
-            <a:off x="6400800" y="1097280"/>
-            <a:ext cx="5367527" cy="2359152"/>
-          </a:xfrm>
-          <a:prstGeom prst="rect">
-            <a:avLst/>
-          </a:prstGeom>
-          <a:noFill/>
-        </p:spPr>
-        <p:txBody>
-          <a:bodyPr wrap="square" lIns="0" rIns="0" tIns="0" bIns="0">
-            <a:spAutoFit/>
-          </a:bodyPr>
-          <a:lstStyle/>
-          <a:p>
-            <a:pPr marL="0" indent="0">
-              <a:spcBef>
-                <a:spcPts val="0"/>
-              </a:spcBef>
-              <a:spcAft>
-                <a:spcPts val="500"/>
-              </a:spcAft>
-              <a:buNone/>
-            </a:pPr>
-            <a:r>
-              <a:rPr sz="2100" b="1" i="0">
-                <a:solidFill>
-                  <a:srgbClr val="9E3A24"/>
-                </a:solidFill>
-              </a:rPr>
-              <a:t>Technical implementation</a:t>
-            </a:r>
-          </a:p>
-          <a:p>
-            <a:pPr marL="146050" indent="-146050">
-              <a:spcBef>
-                <a:spcPts val="0"/>
-              </a:spcBef>
-              <a:spcAft>
-                <a:spcPts val="400"/>
-              </a:spcAft>
-              <a:buFont typeface="Arial"/>
-              <a:buChar char="–"/>
-            </a:pPr>
-            <a:r>
-              <a:rPr sz="1500" b="1" i="0">
-                <a:solidFill>
-                  <a:srgbClr val="1A1A1C"/>
-                </a:solidFill>
-              </a:rPr>
-              <a:t>Backend / API — </a:t>
-            </a:r>
-            <a:r>
-              <a:rPr sz="1500" b="0" i="0">
-                <a:solidFill>
-                  <a:srgbClr val="3E3E44"/>
-                </a:solidFill>
-              </a:rPr>
-              <a:t>Python 3.11+, FastAPI, uvicorn</a:t>
-            </a:r>
-          </a:p>
-          <a:p>
-            <a:pPr marL="146050" indent="-146050">
-              <a:spcBef>
-                <a:spcPts val="0"/>
-              </a:spcBef>
-              <a:spcAft>
-                <a:spcPts val="400"/>
-              </a:spcAft>
-              <a:buFont typeface="Arial"/>
-              <a:buChar char="–"/>
-            </a:pPr>
-            <a:r>
-              <a:rPr sz="1500" b="1" i="0">
-                <a:solidFill>
-                  <a:srgbClr val="1A1A1C"/>
-                </a:solidFill>
-              </a:rPr>
-              <a:t>Persistence — </a:t>
-            </a:r>
-            <a:r>
-              <a:rPr sz="1500" b="0" i="0">
-                <a:solidFill>
-                  <a:srgbClr val="3E3E44"/>
-                </a:solidFill>
-              </a:rPr>
-              <a:t>SQLite (WAL) — scans, findings, overrides</a:t>
-            </a:r>
-          </a:p>
-          <a:p>
-            <a:pPr marL="146050" indent="-146050">
-              <a:spcBef>
-                <a:spcPts val="0"/>
-              </a:spcBef>
-              <a:spcAft>
-                <a:spcPts val="400"/>
-              </a:spcAft>
-              <a:buFont typeface="Arial"/>
-              <a:buChar char="–"/>
-            </a:pPr>
-            <a:r>
-              <a:rPr sz="1500" b="1" i="0">
-                <a:solidFill>
-                  <a:srgbClr val="1A1A1C"/>
-                </a:solidFill>
-              </a:rPr>
-              <a:t>Console — </a:t>
-            </a:r>
-            <a:r>
-              <a:rPr sz="1500" b="0" i="0">
-                <a:solidFill>
-                  <a:srgbClr val="3E3E44"/>
-                </a:solidFill>
-              </a:rPr>
-              <a:t>vanilla JavaScript, 2,881 lines, no framework</a:t>
-            </a:r>
-          </a:p>
-          <a:p>
-            <a:pPr marL="146050" indent="-146050">
-              <a:spcBef>
-                <a:spcPts val="0"/>
-              </a:spcBef>
-              <a:spcAft>
-                <a:spcPts val="400"/>
-              </a:spcAft>
-              <a:buFont typeface="Arial"/>
-              <a:buChar char="–"/>
-            </a:pPr>
-            <a:r>
-              <a:rPr sz="1500" b="1" i="0">
-                <a:solidFill>
-                  <a:srgbClr val="1A1A1C"/>
-                </a:solidFill>
-              </a:rPr>
-              <a:t>Source scanning — </a:t>
-            </a:r>
-            <a:r>
-              <a:rPr sz="1500" b="0" i="0">
-                <a:solidFill>
-                  <a:srgbClr val="3E3E44"/>
-                </a:solidFill>
-              </a:rPr>
-              <a:t>Python AST; 60 rules across 7 more languages</a:t>
-            </a:r>
-          </a:p>
-          <a:p>
-            <a:pPr marL="146050" indent="-146050">
-              <a:spcBef>
-                <a:spcPts val="0"/>
-              </a:spcBef>
-              <a:spcAft>
-                <a:spcPts val="400"/>
-              </a:spcAft>
-              <a:buFont typeface="Arial"/>
-              <a:buChar char="–"/>
-            </a:pPr>
-            <a:r>
-              <a:rPr sz="1500" b="1" i="0">
-                <a:solidFill>
-                  <a:srgbClr val="1A1A1C"/>
-                </a:solidFill>
-              </a:rPr>
-              <a:t>Dependencies — </a:t>
-            </a:r>
-            <a:r>
-              <a:rPr sz="1500" b="0" i="0">
-                <a:solidFill>
-                  <a:srgbClr val="3E3E44"/>
-                </a:solidFill>
-              </a:rPr>
-              <a:t>13 manifest formats, 22 known crypto libraries</a:t>
-            </a:r>
-          </a:p>
-          <a:p>
-            <a:pPr marL="146050" indent="-146050">
-              <a:spcBef>
-                <a:spcPts val="0"/>
-              </a:spcBef>
-              <a:spcAft>
-                <a:spcPts val="400"/>
-              </a:spcAft>
-              <a:buFont typeface="Arial"/>
-              <a:buChar char="–"/>
-            </a:pPr>
-            <a:r>
-              <a:rPr sz="1500" b="1" i="0">
-                <a:solidFill>
-                  <a:srgbClr val="1A1A1C"/>
-                </a:solidFill>
-              </a:rPr>
-              <a:t>Binaries — </a:t>
-            </a:r>
-            <a:r>
-              <a:rPr sz="1500" b="0" i="0">
-                <a:solidFill>
-                  <a:srgbClr val="3E3E44"/>
-                </a:solidFill>
-              </a:rPr>
-              <a:t>ELF symbols — 72 symbols, 8 constants, 9 banners</a:t>
-            </a:r>
-          </a:p>
-          <a:p>
-            <a:pPr marL="146050" indent="-146050">
-              <a:spcBef>
-                <a:spcPts val="0"/>
-              </a:spcBef>
-              <a:spcAft>
-                <a:spcPts val="400"/>
-              </a:spcAft>
-              <a:buFont typeface="Arial"/>
-              <a:buChar char="–"/>
-            </a:pPr>
-            <a:r>
-              <a:rPr sz="1500" b="1" i="0">
-                <a:solidFill>
-                  <a:srgbClr val="1A1A1C"/>
-                </a:solidFill>
-              </a:rPr>
-              <a:t>Containers — </a:t>
-            </a:r>
-            <a:r>
-              <a:rPr sz="1500" b="0" i="0">
-                <a:solidFill>
-                  <a:srgbClr val="3E3E44"/>
-                </a:solidFill>
-              </a:rPr>
-              <a:t>OCI, OCI tar, docker-save; layer replay</a:t>
-            </a:r>
-          </a:p>
-          <a:p>
-            <a:pPr marL="146050" indent="-146050">
-              <a:spcBef>
-                <a:spcPts val="0"/>
-              </a:spcBef>
-              <a:spcAft>
-                <a:spcPts val="400"/>
-              </a:spcAft>
-              <a:buFont typeface="Arial"/>
-              <a:buChar char="–"/>
-            </a:pPr>
-            <a:r>
-              <a:rPr sz="1500" b="1" i="0">
-                <a:solidFill>
-                  <a:srgbClr val="1A1A1C"/>
-                </a:solidFill>
-              </a:rPr>
-              <a:t>Export — </a:t>
-            </a:r>
-            <a:r>
-              <a:rPr sz="1500" b="0" i="0">
-                <a:solidFill>
-                  <a:srgbClr val="3E3E44"/>
-                </a:solidFill>
-              </a:rPr>
-              <a:t>CycloneDX 1.6 / 1.7 with offline schema validation</a:t>
-            </a:r>
-          </a:p>
-        </p:txBody>
-      </p:sp>
-      <p:sp>
-        <p:nvSpPr>
-          <p:cNvPr id="17412" name="cd-rsa-head"/>
-          <p:cNvSpPr txBox="1"/>
-          <p:nvPr/>
-        </p:nvSpPr>
-        <p:spPr>
-          <a:xfrm>
-            <a:off x="420624" y="3529584"/>
-            <a:ext cx="11347703" cy="329184"/>
-          </a:xfrm>
-          <a:prstGeom prst="rect">
-            <a:avLst/>
-          </a:prstGeom>
-          <a:noFill/>
-        </p:spPr>
-        <p:txBody>
-          <a:bodyPr wrap="square" lIns="0" rIns="0" tIns="0" bIns="0">
-            <a:spAutoFit/>
-          </a:bodyPr>
-          <a:lstStyle/>
-          <a:p>
-            <a:pPr marL="0" indent="0">
-              <a:spcBef>
-                <a:spcPts val="0"/>
-              </a:spcBef>
-              <a:spcAft>
-                <a:spcPts val="0"/>
-              </a:spcAft>
-              <a:buNone/>
-            </a:pPr>
-            <a:r>
-              <a:rPr sz="2100" b="1" i="0">
-                <a:solidFill>
-                  <a:srgbClr val="9E3A24"/>
-                </a:solidFill>
-              </a:rPr>
-              <a:t>One algorithm, three decisions. </a:t>
-            </a:r>
-            <a:r>
-              <a:rPr sz="1800" b="0" i="0">
-                <a:solidFill>
-                  <a:srgbClr val="3E3E44"/>
-                </a:solidFill>
-              </a:rPr>
-              <a:t>The same RSA, resolved three ways by a single scan.</a:t>
-            </a:r>
-          </a:p>
-        </p:txBody>
-      </p:sp>
-      <p:sp>
-        <p:nvSpPr>
-          <p:cNvPr id="17414" name="cd-rsa-col"/>
-          <p:cNvSpPr txBox="1"/>
-          <p:nvPr/>
-        </p:nvSpPr>
-        <p:spPr>
-          <a:xfrm>
-            <a:off x="420624" y="3895344"/>
-            <a:ext cx="2999232" cy="237744"/>
-          </a:xfrm>
-          <a:prstGeom prst="rect">
-            <a:avLst/>
-          </a:prstGeom>
-          <a:noFill/>
-        </p:spPr>
-        <p:txBody>
-          <a:bodyPr wrap="square" lIns="0" rIns="0" tIns="0" bIns="0">
-            <a:spAutoFit/>
-          </a:bodyPr>
-          <a:lstStyle/>
-          <a:p>
-            <a:pPr marL="0" indent="0">
-              <a:spcBef>
-                <a:spcPts val="0"/>
-              </a:spcBef>
-              <a:spcAft>
-                <a:spcPts val="0"/>
-              </a:spcAft>
-              <a:buNone/>
-            </a:pPr>
-            <a:r>
-              <a:rPr sz="1200" b="1" i="0">
-                <a:solidFill>
-                  <a:srgbClr val="63636B"/>
-                </a:solidFill>
-              </a:rPr>
-              <a:t>EVIDENCE</a:t>
-            </a:r>
-          </a:p>
-        </p:txBody>
-      </p:sp>
-      <p:sp>
-        <p:nvSpPr>
-          <p:cNvPr id="17415" name="cd-rsa-col"/>
-          <p:cNvSpPr txBox="1"/>
-          <p:nvPr/>
-        </p:nvSpPr>
-        <p:spPr>
-          <a:xfrm>
-            <a:off x="3547872" y="3895344"/>
-            <a:ext cx="2578608" cy="237744"/>
-          </a:xfrm>
-          <a:prstGeom prst="rect">
-            <a:avLst/>
-          </a:prstGeom>
-          <a:noFill/>
-        </p:spPr>
-        <p:txBody>
-          <a:bodyPr wrap="square" lIns="0" rIns="0" tIns="0" bIns="0">
-            <a:spAutoFit/>
-          </a:bodyPr>
-          <a:lstStyle/>
-          <a:p>
-            <a:pPr marL="0" indent="0">
-              <a:spcBef>
-                <a:spcPts val="0"/>
-              </a:spcBef>
-              <a:spcAft>
-                <a:spcPts val="0"/>
-              </a:spcAft>
-              <a:buNone/>
-            </a:pPr>
-            <a:r>
-              <a:rPr sz="1200" b="1" i="0">
-                <a:solidFill>
-                  <a:srgbClr val="63636B"/>
-                </a:solidFill>
-              </a:rPr>
-              <a:t>WHY THE PURPOSE RESOLVES THAT WAY</a:t>
-            </a:r>
-          </a:p>
-        </p:txBody>
-      </p:sp>
-      <p:sp>
-        <p:nvSpPr>
-          <p:cNvPr id="17416" name="cd-rsa-col"/>
-          <p:cNvSpPr txBox="1"/>
-          <p:nvPr/>
-        </p:nvSpPr>
-        <p:spPr>
-          <a:xfrm>
-            <a:off x="6236208" y="3895344"/>
-            <a:ext cx="2432304" cy="237744"/>
-          </a:xfrm>
-          <a:prstGeom prst="rect">
-            <a:avLst/>
-          </a:prstGeom>
-          <a:noFill/>
-        </p:spPr>
-        <p:txBody>
-          <a:bodyPr wrap="square" lIns="0" rIns="0" tIns="0" bIns="0">
-            <a:spAutoFit/>
-          </a:bodyPr>
-          <a:lstStyle/>
-          <a:p>
-            <a:pPr marL="0" indent="0">
-              <a:spcBef>
-                <a:spcPts val="0"/>
-              </a:spcBef>
-              <a:spcAft>
-                <a:spcPts val="0"/>
-              </a:spcAft>
-              <a:buNone/>
-            </a:pPr>
-            <a:r>
-              <a:rPr sz="1200" b="1" i="0">
-                <a:solidFill>
-                  <a:srgbClr val="63636B"/>
-                </a:solidFill>
-              </a:rPr>
-              <a:t>RECOMMENDATION</a:t>
-            </a:r>
-          </a:p>
-        </p:txBody>
-      </p:sp>
-      <p:sp>
-        <p:nvSpPr>
-          <p:cNvPr id="17417" name="cd-rsa-col"/>
-          <p:cNvSpPr txBox="1"/>
-          <p:nvPr/>
-        </p:nvSpPr>
-        <p:spPr>
-          <a:xfrm>
-            <a:off x="8796528" y="3895344"/>
-            <a:ext cx="2971800" cy="237744"/>
-          </a:xfrm>
-          <a:prstGeom prst="rect">
-            <a:avLst/>
-          </a:prstGeom>
-          <a:noFill/>
-        </p:spPr>
-        <p:txBody>
-          <a:bodyPr wrap="square" lIns="0" rIns="0" tIns="0" bIns="0">
-            <a:spAutoFit/>
-          </a:bodyPr>
-          <a:lstStyle/>
-          <a:p>
-            <a:pPr marL="0" indent="0">
-              <a:spcBef>
-                <a:spcPts val="0"/>
-              </a:spcBef>
-              <a:spcAft>
-                <a:spcPts val="0"/>
-              </a:spcAft>
-              <a:buNone/>
-            </a:pPr>
-            <a:r>
-              <a:rPr sz="1200" b="1" i="0">
-                <a:solidFill>
-                  <a:srgbClr val="63636B"/>
-                </a:solidFill>
-              </a:rPr>
-              <a:t>MEANING</a:t>
-            </a:r>
-          </a:p>
-        </p:txBody>
-      </p:sp>
-      <p:sp>
-        <p:nvSpPr>
-          <p:cNvPr id="17418" name="cd-rule"/>
+          <p:cNvPr id="17411" name="cd-step"/>
           <p:cNvSpPr/>
           <p:nvPr/>
         </p:nvSpPr>
         <p:spPr>
           <a:xfrm>
-            <a:off x="420624" y="4123944"/>
-            <a:ext cx="11347703" cy="12700"/>
+            <a:off x="420624" y="1481328"/>
+            <a:ext cx="3767328" cy="475488"/>
+          </a:xfrm>
+          <a:prstGeom prst="roundRect">
+            <a:avLst>
+              <a:gd name="adj" fmla="val 9000"/>
+            </a:avLst>
+          </a:prstGeom>
+          <a:solidFill>
+            <a:srgbClr val="F5F3EF"/>
+          </a:solidFill>
+          <a:ln w="9525">
+            <a:solidFill>
+              <a:srgbClr val="D2D0CB"/>
+            </a:solidFill>
+          </a:ln>
+          <a:effectLst/>
+        </p:spPr>
+        <p:style>
+          <a:lnRef idx="1">
+            <a:schemeClr val="accent1"/>
+          </a:lnRef>
+          <a:fillRef idx="3">
+            <a:schemeClr val="accent1"/>
+          </a:fillRef>
+          <a:effectRef idx="2">
+            <a:schemeClr val="accent1"/>
+          </a:effectRef>
+          <a:fontRef idx="minor">
+            <a:schemeClr val="lt1"/>
+          </a:fontRef>
+        </p:style>
+        <p:txBody>
+          <a:bodyPr rtlCol="0" anchor="ctr" wrap="square" lIns="54864" rIns="54864" tIns="27432" bIns="27432"/>
+          <a:lstStyle/>
+          <a:p>
+            <a:pPr algn="l" marL="0" indent="0">
+              <a:spcBef>
+                <a:spcPts val="0"/>
+              </a:spcBef>
+              <a:spcAft>
+                <a:spcPts val="200"/>
+              </a:spcAft>
+              <a:buNone/>
+            </a:pPr>
+            <a:r>
+              <a:rPr sz="1250" b="1" i="0">
+                <a:solidFill>
+                  <a:srgbClr val="1A1A1C"/>
+                </a:solidFill>
+              </a:rPr>
+              <a:t>Scanner evidence</a:t>
+            </a:r>
+          </a:p>
+          <a:p>
+            <a:pPr algn="l" marL="0" indent="0">
+              <a:spcBef>
+                <a:spcPts val="0"/>
+              </a:spcBef>
+              <a:spcAft>
+                <a:spcPts val="0"/>
+              </a:spcAft>
+              <a:buNone/>
+            </a:pPr>
+            <a:r>
+              <a:rPr sz="1050" b="0" i="0">
+                <a:solidFill>
+                  <a:srgbClr val="63636B"/>
+                </a:solidFill>
+              </a:rPr>
+              <a:t>file, line, symbol, technique, confidence</a:t>
+            </a:r>
+          </a:p>
+        </p:txBody>
+      </p:sp>
+      <p:sp>
+        <p:nvSpPr>
+          <p:cNvPr id="17412" name="cd-chip-edge"/>
+          <p:cNvSpPr/>
+          <p:nvPr/>
+        </p:nvSpPr>
+        <p:spPr>
+          <a:xfrm>
+            <a:off x="420624" y="1481328"/>
+            <a:ext cx="40640" cy="475488"/>
           </a:xfrm>
           <a:prstGeom prst="rect">
             <a:avLst/>
           </a:prstGeom>
           <a:solidFill>
-            <a:srgbClr val="D2D0CB"/>
+            <a:srgbClr val="1B3A6B"/>
           </a:solidFill>
           <a:ln>
             <a:noFill/>
@@ -8061,207 +8011,20 @@
       </p:sp>
       <p:sp>
         <p:nvSpPr>
-          <p:cNvPr id="17419" name="cd-rsa-ev"/>
-          <p:cNvSpPr txBox="1"/>
-          <p:nvPr/>
-        </p:nvSpPr>
-        <p:spPr>
-          <a:xfrm>
-            <a:off x="420624" y="4206240"/>
-            <a:ext cx="2999232" cy="365760"/>
-          </a:xfrm>
-          <a:prstGeom prst="rect">
-            <a:avLst/>
-          </a:prstGeom>
-          <a:noFill/>
-        </p:spPr>
-        <p:txBody>
-          <a:bodyPr wrap="square" lIns="0" rIns="0" tIns="0" bIns="0">
-            <a:spAutoFit/>
-          </a:bodyPr>
-          <a:lstStyle/>
-          <a:p>
-            <a:pPr marL="0" indent="0">
-              <a:spcBef>
-                <a:spcPts val="0"/>
-              </a:spcBef>
-              <a:spcAft>
-                <a:spcPts val="200"/>
-              </a:spcAft>
-              <a:buNone/>
-            </a:pPr>
-            <a:r>
-              <a:rPr sz="1600" b="1" i="0">
-                <a:solidFill>
-                  <a:srgbClr val="1A1A1C"/>
-                </a:solidFill>
-              </a:rPr>
-              <a:t>Case 1 — RSA signing</a:t>
-            </a:r>
-          </a:p>
-          <a:p>
-            <a:pPr marL="0" indent="0">
-              <a:spcBef>
-                <a:spcPts val="0"/>
-              </a:spcBef>
-              <a:spcAft>
-                <a:spcPts val="0"/>
-              </a:spcAft>
-              <a:buNone/>
-            </a:pPr>
-            <a:r>
-              <a:rPr sz="1300" b="0" i="0">
-                <a:solidFill>
-                  <a:srgbClr val="63636B"/>
-                </a:solidFill>
-              </a:rPr>
-              <a:t>svc-payments/signing.py:15   (source · used)</a:t>
-            </a:r>
-          </a:p>
-        </p:txBody>
-      </p:sp>
-      <p:sp>
-        <p:nvSpPr>
-          <p:cNvPr id="17420" name="cd-rsa-cell"/>
-          <p:cNvSpPr txBox="1"/>
-          <p:nvPr/>
-        </p:nvSpPr>
-        <p:spPr>
-          <a:xfrm>
-            <a:off x="3547872" y="4261103"/>
-            <a:ext cx="2578608" cy="310896"/>
-          </a:xfrm>
-          <a:prstGeom prst="rect">
-            <a:avLst/>
-          </a:prstGeom>
-          <a:noFill/>
-        </p:spPr>
-        <p:txBody>
-          <a:bodyPr wrap="square" lIns="0" rIns="0" tIns="0" bIns="0">
-            <a:spAutoFit/>
-          </a:bodyPr>
-          <a:lstStyle/>
-          <a:p>
-            <a:pPr marL="0" indent="0">
-              <a:spcBef>
-                <a:spcPts val="0"/>
-              </a:spcBef>
-              <a:spcAft>
-                <a:spcPts val="0"/>
-              </a:spcAft>
-              <a:buNone/>
-            </a:pPr>
-            <a:r>
-              <a:rPr sz="1500" b="0" i="0">
-                <a:solidFill>
-                  <a:srgbClr val="3E3E44"/>
-                </a:solidFill>
-              </a:rPr>
-              <a:t>RSA-PSS padding signs</a:t>
-            </a:r>
-          </a:p>
-        </p:txBody>
-      </p:sp>
-      <p:sp>
-        <p:nvSpPr>
-          <p:cNvPr id="17421" name="cd-rsa-cell"/>
-          <p:cNvSpPr txBox="1"/>
-          <p:nvPr/>
-        </p:nvSpPr>
-        <p:spPr>
-          <a:xfrm>
-            <a:off x="6236208" y="4261103"/>
-            <a:ext cx="2432304" cy="310896"/>
-          </a:xfrm>
-          <a:prstGeom prst="rect">
-            <a:avLst/>
-          </a:prstGeom>
-          <a:noFill/>
-        </p:spPr>
-        <p:txBody>
-          <a:bodyPr wrap="square" lIns="0" rIns="0" tIns="0" bIns="0">
-            <a:spAutoFit/>
-          </a:bodyPr>
-          <a:lstStyle/>
-          <a:p>
-            <a:pPr marL="0" indent="0">
-              <a:spcBef>
-                <a:spcPts val="0"/>
-              </a:spcBef>
-              <a:spcAft>
-                <a:spcPts val="0"/>
-              </a:spcAft>
-              <a:buNone/>
-            </a:pPr>
-            <a:r>
-              <a:rPr sz="1600" b="1" i="0">
-                <a:solidFill>
-                  <a:srgbClr val="9E3A24"/>
-                </a:solidFill>
-              </a:rPr>
-              <a:t>ML-DSA-65</a:t>
-            </a:r>
-          </a:p>
-        </p:txBody>
-      </p:sp>
-      <p:sp>
-        <p:nvSpPr>
-          <p:cNvPr id="17422" name="cd-rsa-cell"/>
-          <p:cNvSpPr txBox="1"/>
-          <p:nvPr/>
-        </p:nvSpPr>
-        <p:spPr>
-          <a:xfrm>
-            <a:off x="8796528" y="4261103"/>
-            <a:ext cx="2971800" cy="310896"/>
-          </a:xfrm>
-          <a:prstGeom prst="rect">
-            <a:avLst/>
-          </a:prstGeom>
-          <a:noFill/>
-        </p:spPr>
-        <p:txBody>
-          <a:bodyPr wrap="square" lIns="0" rIns="0" tIns="0" bIns="0">
-            <a:spAutoFit/>
-          </a:bodyPr>
-          <a:lstStyle/>
-          <a:p>
-            <a:pPr marL="0" indent="0">
-              <a:spcBef>
-                <a:spcPts val="0"/>
-              </a:spcBef>
-              <a:spcAft>
-                <a:spcPts val="0"/>
-              </a:spcAft>
-              <a:buNone/>
-            </a:pPr>
-            <a:r>
-              <a:rPr sz="1500" b="0" i="0">
-                <a:solidFill>
-                  <a:srgbClr val="3E3E44"/>
-                </a:solidFill>
-              </a:rPr>
-              <a:t>signature-oriented migration</a:t>
-            </a:r>
-          </a:p>
-        </p:txBody>
-      </p:sp>
-      <p:sp>
-        <p:nvSpPr>
-          <p:cNvPr id="17423" name="cd-rule"/>
+          <p:cNvPr id="17413" name="cd-caret"/>
           <p:cNvSpPr/>
           <p:nvPr/>
         </p:nvSpPr>
         <p:spPr>
           <a:xfrm>
-            <a:off x="420624" y="4654296"/>
-            <a:ext cx="11347703" cy="12700"/>
-          </a:xfrm>
-          <a:prstGeom prst="rect">
+            <a:off x="2253996" y="1967788"/>
+            <a:ext cx="100584" cy="115671"/>
+          </a:xfrm>
+          <a:prstGeom prst="downArrow">
             <a:avLst/>
           </a:prstGeom>
           <a:solidFill>
-            <a:srgbClr val="D2D0CB"/>
+            <a:srgbClr val="63636B"/>
           </a:solidFill>
           <a:ln>
             <a:noFill/>
@@ -8292,207 +8055,103 @@
       </p:sp>
       <p:sp>
         <p:nvSpPr>
-          <p:cNvPr id="17424" name="cd-rsa-ev"/>
-          <p:cNvSpPr txBox="1"/>
-          <p:nvPr/>
-        </p:nvSpPr>
-        <p:spPr>
-          <a:xfrm>
-            <a:off x="420624" y="4736592"/>
-            <a:ext cx="2999232" cy="365760"/>
-          </a:xfrm>
-          <a:prstGeom prst="rect">
-            <a:avLst/>
-          </a:prstGeom>
-          <a:noFill/>
-        </p:spPr>
-        <p:txBody>
-          <a:bodyPr wrap="square" lIns="0" rIns="0" tIns="0" bIns="0">
-            <a:spAutoFit/>
-          </a:bodyPr>
-          <a:lstStyle/>
-          <a:p>
-            <a:pPr marL="0" indent="0">
-              <a:spcBef>
-                <a:spcPts val="0"/>
-              </a:spcBef>
-              <a:spcAft>
-                <a:spcPts val="200"/>
-              </a:spcAft>
-              <a:buNone/>
-            </a:pPr>
-            <a:r>
-              <a:rPr sz="1600" b="1" i="0">
-                <a:solidFill>
-                  <a:srgbClr val="1A1A1C"/>
-                </a:solidFill>
-              </a:rPr>
-              <a:t>Case 2 — RSA key establishment</a:t>
-            </a:r>
-          </a:p>
-          <a:p>
-            <a:pPr marL="0" indent="0">
-              <a:spcBef>
-                <a:spcPts val="0"/>
-              </a:spcBef>
-              <a:spcAft>
-                <a:spcPts val="0"/>
-              </a:spcAft>
-              <a:buNone/>
-            </a:pPr>
-            <a:r>
-              <a:rPr sz="1300" b="0" i="0">
-                <a:solidFill>
-                  <a:srgbClr val="63636B"/>
-                </a:solidFill>
-              </a:rPr>
-              <a:t>svc-gateway/transport.py:16   (source · used)</a:t>
-            </a:r>
-          </a:p>
-        </p:txBody>
-      </p:sp>
-      <p:sp>
-        <p:nvSpPr>
-          <p:cNvPr id="17425" name="cd-rsa-cell"/>
-          <p:cNvSpPr txBox="1"/>
-          <p:nvPr/>
-        </p:nvSpPr>
-        <p:spPr>
-          <a:xfrm>
-            <a:off x="3547872" y="4791455"/>
-            <a:ext cx="2578608" cy="310896"/>
-          </a:xfrm>
-          <a:prstGeom prst="rect">
-            <a:avLst/>
-          </a:prstGeom>
-          <a:noFill/>
-        </p:spPr>
-        <p:txBody>
-          <a:bodyPr wrap="square" lIns="0" rIns="0" tIns="0" bIns="0">
-            <a:spAutoFit/>
-          </a:bodyPr>
-          <a:lstStyle/>
-          <a:p>
-            <a:pPr marL="0" indent="0">
-              <a:spcBef>
-                <a:spcPts val="0"/>
-              </a:spcBef>
-              <a:spcAft>
-                <a:spcPts val="0"/>
-              </a:spcAft>
-              <a:buNone/>
-            </a:pPr>
-            <a:r>
-              <a:rPr sz="1500" b="0" i="0">
-                <a:solidFill>
-                  <a:srgbClr val="3E3E44"/>
-                </a:solidFill>
-              </a:rPr>
-              <a:t>RSA-OAEP padding wraps a key</a:t>
-            </a:r>
-          </a:p>
-        </p:txBody>
-      </p:sp>
-      <p:sp>
-        <p:nvSpPr>
-          <p:cNvPr id="17426" name="cd-rsa-cell"/>
-          <p:cNvSpPr txBox="1"/>
-          <p:nvPr/>
-        </p:nvSpPr>
-        <p:spPr>
-          <a:xfrm>
-            <a:off x="6236208" y="4791455"/>
-            <a:ext cx="2432304" cy="310896"/>
-          </a:xfrm>
-          <a:prstGeom prst="rect">
-            <a:avLst/>
-          </a:prstGeom>
-          <a:noFill/>
-        </p:spPr>
-        <p:txBody>
-          <a:bodyPr wrap="square" lIns="0" rIns="0" tIns="0" bIns="0">
-            <a:spAutoFit/>
-          </a:bodyPr>
-          <a:lstStyle/>
-          <a:p>
-            <a:pPr marL="0" indent="0">
-              <a:spcBef>
-                <a:spcPts val="0"/>
-              </a:spcBef>
-              <a:spcAft>
-                <a:spcPts val="0"/>
-              </a:spcAft>
-              <a:buNone/>
-            </a:pPr>
-            <a:r>
-              <a:rPr sz="1600" b="1" i="0">
-                <a:solidFill>
-                  <a:srgbClr val="9E3A24"/>
-                </a:solidFill>
-              </a:rPr>
-              <a:t>X25519MLKEM768</a:t>
-            </a:r>
-          </a:p>
-        </p:txBody>
-      </p:sp>
-      <p:sp>
-        <p:nvSpPr>
-          <p:cNvPr id="17427" name="cd-rsa-cell"/>
-          <p:cNvSpPr txBox="1"/>
-          <p:nvPr/>
-        </p:nvSpPr>
-        <p:spPr>
-          <a:xfrm>
-            <a:off x="8796528" y="4791455"/>
-            <a:ext cx="2971800" cy="310896"/>
-          </a:xfrm>
-          <a:prstGeom prst="rect">
-            <a:avLst/>
-          </a:prstGeom>
-          <a:noFill/>
-        </p:spPr>
-        <p:txBody>
-          <a:bodyPr wrap="square" lIns="0" rIns="0" tIns="0" bIns="0">
-            <a:spAutoFit/>
-          </a:bodyPr>
-          <a:lstStyle/>
-          <a:p>
-            <a:pPr marL="0" indent="0">
-              <a:spcBef>
-                <a:spcPts val="0"/>
-              </a:spcBef>
-              <a:spcAft>
-                <a:spcPts val="0"/>
-              </a:spcAft>
-              <a:buNone/>
-            </a:pPr>
-            <a:r>
-              <a:rPr sz="1500" b="0" i="0">
-                <a:solidFill>
-                  <a:srgbClr val="3E3E44"/>
-                </a:solidFill>
-              </a:rPr>
-              <a:t>key-establishment migration</a:t>
-            </a:r>
-          </a:p>
-        </p:txBody>
-      </p:sp>
-      <p:sp>
-        <p:nvSpPr>
-          <p:cNvPr id="17428" name="cd-rule"/>
+          <p:cNvPr id="17414" name="cd-step"/>
           <p:cNvSpPr/>
           <p:nvPr/>
         </p:nvSpPr>
         <p:spPr>
           <a:xfrm>
-            <a:off x="420624" y="5184648"/>
-            <a:ext cx="11347703" cy="12700"/>
+            <a:off x="420624" y="2093976"/>
+            <a:ext cx="3767328" cy="475488"/>
+          </a:xfrm>
+          <a:prstGeom prst="roundRect">
+            <a:avLst>
+              <a:gd name="adj" fmla="val 9000"/>
+            </a:avLst>
+          </a:prstGeom>
+          <a:solidFill>
+            <a:srgbClr val="F5F3EF"/>
+          </a:solidFill>
+          <a:ln w="9525">
+            <a:solidFill>
+              <a:srgbClr val="D2D0CB"/>
+            </a:solidFill>
+          </a:ln>
+          <a:effectLst/>
+        </p:spPr>
+        <p:style>
+          <a:lnRef idx="1">
+            <a:schemeClr val="accent1"/>
+          </a:lnRef>
+          <a:fillRef idx="3">
+            <a:schemeClr val="accent1"/>
+          </a:fillRef>
+          <a:effectRef idx="2">
+            <a:schemeClr val="accent1"/>
+          </a:effectRef>
+          <a:fontRef idx="minor">
+            <a:schemeClr val="lt1"/>
+          </a:fontRef>
+        </p:style>
+        <p:txBody>
+          <a:bodyPr rtlCol="0" anchor="ctr" wrap="square" lIns="54864" rIns="54864" tIns="27432" bIns="27432"/>
+          <a:lstStyle/>
+          <a:p>
+            <a:pPr algn="l" marL="0" indent="0">
+              <a:spcBef>
+                <a:spcPts val="0"/>
+              </a:spcBef>
+              <a:spcAft>
+                <a:spcPts val="200"/>
+              </a:spcAft>
+              <a:buNone/>
+            </a:pPr>
+            <a:r>
+              <a:rPr sz="1250" b="1" i="0">
+                <a:solidFill>
+                  <a:srgbClr val="1A1A1C"/>
+                </a:solidFill>
+              </a:rPr>
+              <a:t>Normalisation</a:t>
+            </a:r>
+          </a:p>
+          <a:p>
+            <a:pPr algn="l" marL="0" indent="0">
+              <a:spcBef>
+                <a:spcPts val="0"/>
+              </a:spcBef>
+              <a:spcAft>
+                <a:spcPts val="0"/>
+              </a:spcAft>
+              <a:buNone/>
+            </a:pPr>
+            <a:r>
+              <a:rPr sz="1050" b="0" i="0">
+                <a:solidFill>
+                  <a:srgbClr val="63636B"/>
+                </a:solidFill>
+              </a:rPr>
+              <a:t>hits become one distinct asset</a:t>
+            </a:r>
+          </a:p>
+        </p:txBody>
+      </p:sp>
+      <p:sp>
+        <p:nvSpPr>
+          <p:cNvPr id="17415" name="cd-chip-edge"/>
+          <p:cNvSpPr/>
+          <p:nvPr/>
+        </p:nvSpPr>
+        <p:spPr>
+          <a:xfrm>
+            <a:off x="420624" y="2093976"/>
+            <a:ext cx="40640" cy="475488"/>
           </a:xfrm>
           <a:prstGeom prst="rect">
             <a:avLst/>
           </a:prstGeom>
           <a:solidFill>
-            <a:srgbClr val="D2D0CB"/>
+            <a:srgbClr val="1B3A6B"/>
           </a:solidFill>
           <a:ln>
             <a:noFill/>
@@ -8523,14 +8182,698 @@
       </p:sp>
       <p:sp>
         <p:nvSpPr>
-          <p:cNvPr id="17429" name="cd-rsa-ev"/>
+          <p:cNvPr id="17416" name="cd-caret"/>
+          <p:cNvSpPr/>
+          <p:nvPr/>
+        </p:nvSpPr>
+        <p:spPr>
+          <a:xfrm>
+            <a:off x="2253996" y="2580436"/>
+            <a:ext cx="100584" cy="115671"/>
+          </a:xfrm>
+          <a:prstGeom prst="downArrow">
+            <a:avLst/>
+          </a:prstGeom>
+          <a:solidFill>
+            <a:srgbClr val="63636B"/>
+          </a:solidFill>
+          <a:ln>
+            <a:noFill/>
+          </a:ln>
+          <a:effectLst/>
+        </p:spPr>
+        <p:style>
+          <a:lnRef idx="1">
+            <a:schemeClr val="accent1"/>
+          </a:lnRef>
+          <a:fillRef idx="3">
+            <a:schemeClr val="accent1"/>
+          </a:fillRef>
+          <a:effectRef idx="2">
+            <a:schemeClr val="accent1"/>
+          </a:effectRef>
+          <a:fontRef idx="minor">
+            <a:schemeClr val="lt1"/>
+          </a:fontRef>
+        </p:style>
+        <p:txBody>
+          <a:bodyPr rtlCol="0" anchor="ctr"/>
+          <a:lstStyle/>
+          <a:p>
+            <a:pPr algn="ctr"/>
+          </a:p>
+        </p:txBody>
+      </p:sp>
+      <p:sp>
+        <p:nvSpPr>
+          <p:cNvPr id="17417" name="cd-step"/>
+          <p:cNvSpPr/>
+          <p:nvPr/>
+        </p:nvSpPr>
+        <p:spPr>
+          <a:xfrm>
+            <a:off x="420624" y="2706624"/>
+            <a:ext cx="3767328" cy="475488"/>
+          </a:xfrm>
+          <a:prstGeom prst="roundRect">
+            <a:avLst>
+              <a:gd name="adj" fmla="val 9000"/>
+            </a:avLst>
+          </a:prstGeom>
+          <a:solidFill>
+            <a:srgbClr val="F5F3EF"/>
+          </a:solidFill>
+          <a:ln w="9525">
+            <a:solidFill>
+              <a:srgbClr val="D2D0CB"/>
+            </a:solidFill>
+          </a:ln>
+          <a:effectLst/>
+        </p:spPr>
+        <p:style>
+          <a:lnRef idx="1">
+            <a:schemeClr val="accent1"/>
+          </a:lnRef>
+          <a:fillRef idx="3">
+            <a:schemeClr val="accent1"/>
+          </a:fillRef>
+          <a:effectRef idx="2">
+            <a:schemeClr val="accent1"/>
+          </a:effectRef>
+          <a:fontRef idx="minor">
+            <a:schemeClr val="lt1"/>
+          </a:fontRef>
+        </p:style>
+        <p:txBody>
+          <a:bodyPr rtlCol="0" anchor="ctr" wrap="square" lIns="54864" rIns="54864" tIns="27432" bIns="27432"/>
+          <a:lstStyle/>
+          <a:p>
+            <a:pPr algn="l" marL="0" indent="0">
+              <a:spcBef>
+                <a:spcPts val="0"/>
+              </a:spcBef>
+              <a:spcAft>
+                <a:spcPts val="200"/>
+              </a:spcAft>
+              <a:buNone/>
+            </a:pPr>
+            <a:r>
+              <a:rPr sz="1250" b="1" i="0">
+                <a:solidFill>
+                  <a:srgbClr val="1A1A1C"/>
+                </a:solidFill>
+              </a:rPr>
+              <a:t>Purpose + assurance</a:t>
+            </a:r>
+          </a:p>
+          <a:p>
+            <a:pPr algn="l" marL="0" indent="0">
+              <a:spcBef>
+                <a:spcPts val="0"/>
+              </a:spcBef>
+              <a:spcAft>
+                <a:spcPts val="0"/>
+              </a:spcAft>
+              <a:buNone/>
+            </a:pPr>
+            <a:r>
+              <a:rPr sz="1050" b="0" i="0">
+                <a:solidFill>
+                  <a:srgbClr val="63636B"/>
+                </a:solidFill>
+              </a:rPr>
+              <a:t>what it is for; how strong the proof is</a:t>
+            </a:r>
+          </a:p>
+        </p:txBody>
+      </p:sp>
+      <p:sp>
+        <p:nvSpPr>
+          <p:cNvPr id="17418" name="cd-chip-edge"/>
+          <p:cNvSpPr/>
+          <p:nvPr/>
+        </p:nvSpPr>
+        <p:spPr>
+          <a:xfrm>
+            <a:off x="420624" y="2706624"/>
+            <a:ext cx="40640" cy="475488"/>
+          </a:xfrm>
+          <a:prstGeom prst="rect">
+            <a:avLst/>
+          </a:prstGeom>
+          <a:solidFill>
+            <a:srgbClr val="1B3A6B"/>
+          </a:solidFill>
+          <a:ln>
+            <a:noFill/>
+          </a:ln>
+          <a:effectLst/>
+        </p:spPr>
+        <p:style>
+          <a:lnRef idx="1">
+            <a:schemeClr val="accent1"/>
+          </a:lnRef>
+          <a:fillRef idx="3">
+            <a:schemeClr val="accent1"/>
+          </a:fillRef>
+          <a:effectRef idx="2">
+            <a:schemeClr val="accent1"/>
+          </a:effectRef>
+          <a:fontRef idx="minor">
+            <a:schemeClr val="lt1"/>
+          </a:fontRef>
+        </p:style>
+        <p:txBody>
+          <a:bodyPr rtlCol="0" anchor="ctr"/>
+          <a:lstStyle/>
+          <a:p>
+            <a:pPr algn="ctr"/>
+          </a:p>
+        </p:txBody>
+      </p:sp>
+      <p:sp>
+        <p:nvSpPr>
+          <p:cNvPr id="17419" name="cd-caret"/>
+          <p:cNvSpPr/>
+          <p:nvPr/>
+        </p:nvSpPr>
+        <p:spPr>
+          <a:xfrm>
+            <a:off x="2253996" y="3193084"/>
+            <a:ext cx="100584" cy="115671"/>
+          </a:xfrm>
+          <a:prstGeom prst="downArrow">
+            <a:avLst/>
+          </a:prstGeom>
+          <a:solidFill>
+            <a:srgbClr val="63636B"/>
+          </a:solidFill>
+          <a:ln>
+            <a:noFill/>
+          </a:ln>
+          <a:effectLst/>
+        </p:spPr>
+        <p:style>
+          <a:lnRef idx="1">
+            <a:schemeClr val="accent1"/>
+          </a:lnRef>
+          <a:fillRef idx="3">
+            <a:schemeClr val="accent1"/>
+          </a:fillRef>
+          <a:effectRef idx="2">
+            <a:schemeClr val="accent1"/>
+          </a:effectRef>
+          <a:fontRef idx="minor">
+            <a:schemeClr val="lt1"/>
+          </a:fontRef>
+        </p:style>
+        <p:txBody>
+          <a:bodyPr rtlCol="0" anchor="ctr"/>
+          <a:lstStyle/>
+          <a:p>
+            <a:pPr algn="ctr"/>
+          </a:p>
+        </p:txBody>
+      </p:sp>
+      <p:sp>
+        <p:nvSpPr>
+          <p:cNvPr id="17420" name="cd-step"/>
+          <p:cNvSpPr/>
+          <p:nvPr/>
+        </p:nvSpPr>
+        <p:spPr>
+          <a:xfrm>
+            <a:off x="420624" y="3319272"/>
+            <a:ext cx="3767328" cy="475488"/>
+          </a:xfrm>
+          <a:prstGeom prst="roundRect">
+            <a:avLst>
+              <a:gd name="adj" fmla="val 9000"/>
+            </a:avLst>
+          </a:prstGeom>
+          <a:solidFill>
+            <a:srgbClr val="F5F3EF"/>
+          </a:solidFill>
+          <a:ln w="9525">
+            <a:solidFill>
+              <a:srgbClr val="D2D0CB"/>
+            </a:solidFill>
+          </a:ln>
+          <a:effectLst/>
+        </p:spPr>
+        <p:style>
+          <a:lnRef idx="1">
+            <a:schemeClr val="accent1"/>
+          </a:lnRef>
+          <a:fillRef idx="3">
+            <a:schemeClr val="accent1"/>
+          </a:fillRef>
+          <a:effectRef idx="2">
+            <a:schemeClr val="accent1"/>
+          </a:effectRef>
+          <a:fontRef idx="minor">
+            <a:schemeClr val="lt1"/>
+          </a:fontRef>
+        </p:style>
+        <p:txBody>
+          <a:bodyPr rtlCol="0" anchor="ctr" wrap="square" lIns="54864" rIns="54864" tIns="27432" bIns="27432"/>
+          <a:lstStyle/>
+          <a:p>
+            <a:pPr algn="l" marL="0" indent="0">
+              <a:spcBef>
+                <a:spcPts val="0"/>
+              </a:spcBef>
+              <a:spcAft>
+                <a:spcPts val="200"/>
+              </a:spcAft>
+              <a:buNone/>
+            </a:pPr>
+            <a:r>
+              <a:rPr sz="1250" b="1" i="0">
+                <a:solidFill>
+                  <a:srgbClr val="1A1A1C"/>
+                </a:solidFill>
+              </a:rPr>
+              <a:t>Risk assessment</a:t>
+            </a:r>
+          </a:p>
+          <a:p>
+            <a:pPr algn="l" marL="0" indent="0">
+              <a:spcBef>
+                <a:spcPts val="0"/>
+              </a:spcBef>
+              <a:spcAft>
+                <a:spcPts val="0"/>
+              </a:spcAft>
+              <a:buNone/>
+            </a:pPr>
+            <a:r>
+              <a:rPr sz="1050" b="0" i="0">
+                <a:solidFill>
+                  <a:srgbClr val="63636B"/>
+                </a:solidFill>
+              </a:rPr>
+              <a:t>Mosca X + Y &gt; Z, per purpose</a:t>
+            </a:r>
+          </a:p>
+        </p:txBody>
+      </p:sp>
+      <p:sp>
+        <p:nvSpPr>
+          <p:cNvPr id="17421" name="cd-chip-edge"/>
+          <p:cNvSpPr/>
+          <p:nvPr/>
+        </p:nvSpPr>
+        <p:spPr>
+          <a:xfrm>
+            <a:off x="420624" y="3319272"/>
+            <a:ext cx="40640" cy="475488"/>
+          </a:xfrm>
+          <a:prstGeom prst="rect">
+            <a:avLst/>
+          </a:prstGeom>
+          <a:solidFill>
+            <a:srgbClr val="1B3A6B"/>
+          </a:solidFill>
+          <a:ln>
+            <a:noFill/>
+          </a:ln>
+          <a:effectLst/>
+        </p:spPr>
+        <p:style>
+          <a:lnRef idx="1">
+            <a:schemeClr val="accent1"/>
+          </a:lnRef>
+          <a:fillRef idx="3">
+            <a:schemeClr val="accent1"/>
+          </a:fillRef>
+          <a:effectRef idx="2">
+            <a:schemeClr val="accent1"/>
+          </a:effectRef>
+          <a:fontRef idx="minor">
+            <a:schemeClr val="lt1"/>
+          </a:fontRef>
+        </p:style>
+        <p:txBody>
+          <a:bodyPr rtlCol="0" anchor="ctr"/>
+          <a:lstStyle/>
+          <a:p>
+            <a:pPr algn="ctr"/>
+          </a:p>
+        </p:txBody>
+      </p:sp>
+      <p:sp>
+        <p:nvSpPr>
+          <p:cNvPr id="17422" name="cd-caret"/>
+          <p:cNvSpPr/>
+          <p:nvPr/>
+        </p:nvSpPr>
+        <p:spPr>
+          <a:xfrm>
+            <a:off x="2253996" y="3805732"/>
+            <a:ext cx="100584" cy="115671"/>
+          </a:xfrm>
+          <a:prstGeom prst="downArrow">
+            <a:avLst/>
+          </a:prstGeom>
+          <a:solidFill>
+            <a:srgbClr val="63636B"/>
+          </a:solidFill>
+          <a:ln>
+            <a:noFill/>
+          </a:ln>
+          <a:effectLst/>
+        </p:spPr>
+        <p:style>
+          <a:lnRef idx="1">
+            <a:schemeClr val="accent1"/>
+          </a:lnRef>
+          <a:fillRef idx="3">
+            <a:schemeClr val="accent1"/>
+          </a:fillRef>
+          <a:effectRef idx="2">
+            <a:schemeClr val="accent1"/>
+          </a:effectRef>
+          <a:fontRef idx="minor">
+            <a:schemeClr val="lt1"/>
+          </a:fontRef>
+        </p:style>
+        <p:txBody>
+          <a:bodyPr rtlCol="0" anchor="ctr"/>
+          <a:lstStyle/>
+          <a:p>
+            <a:pPr algn="ctr"/>
+          </a:p>
+        </p:txBody>
+      </p:sp>
+      <p:sp>
+        <p:nvSpPr>
+          <p:cNvPr id="17423" name="cd-step"/>
+          <p:cNvSpPr/>
+          <p:nvPr/>
+        </p:nvSpPr>
+        <p:spPr>
+          <a:xfrm>
+            <a:off x="420624" y="3931920"/>
+            <a:ext cx="3767328" cy="475488"/>
+          </a:xfrm>
+          <a:prstGeom prst="roundRect">
+            <a:avLst>
+              <a:gd name="adj" fmla="val 9000"/>
+            </a:avLst>
+          </a:prstGeom>
+          <a:solidFill>
+            <a:srgbClr val="F5F3EF"/>
+          </a:solidFill>
+          <a:ln w="9525">
+            <a:solidFill>
+              <a:srgbClr val="D2D0CB"/>
+            </a:solidFill>
+          </a:ln>
+          <a:effectLst/>
+        </p:spPr>
+        <p:style>
+          <a:lnRef idx="1">
+            <a:schemeClr val="accent1"/>
+          </a:lnRef>
+          <a:fillRef idx="3">
+            <a:schemeClr val="accent1"/>
+          </a:fillRef>
+          <a:effectRef idx="2">
+            <a:schemeClr val="accent1"/>
+          </a:effectRef>
+          <a:fontRef idx="minor">
+            <a:schemeClr val="lt1"/>
+          </a:fontRef>
+        </p:style>
+        <p:txBody>
+          <a:bodyPr rtlCol="0" anchor="ctr" wrap="square" lIns="54864" rIns="54864" tIns="27432" bIns="27432"/>
+          <a:lstStyle/>
+          <a:p>
+            <a:pPr algn="l" marL="0" indent="0">
+              <a:spcBef>
+                <a:spcPts val="0"/>
+              </a:spcBef>
+              <a:spcAft>
+                <a:spcPts val="200"/>
+              </a:spcAft>
+              <a:buNone/>
+            </a:pPr>
+            <a:r>
+              <a:rPr sz="1250" b="1" i="0">
+                <a:solidFill>
+                  <a:srgbClr val="1A1A1C"/>
+                </a:solidFill>
+              </a:rPr>
+              <a:t>Migration decision</a:t>
+            </a:r>
+          </a:p>
+          <a:p>
+            <a:pPr algn="l" marL="0" indent="0">
+              <a:spcBef>
+                <a:spcPts val="0"/>
+              </a:spcBef>
+              <a:spcAft>
+                <a:spcPts val="0"/>
+              </a:spcAft>
+              <a:buNone/>
+            </a:pPr>
+            <a:r>
+              <a:rPr sz="1050" b="0" i="0">
+                <a:solidFill>
+                  <a:srgbClr val="63636B"/>
+                </a:solidFill>
+              </a:rPr>
+              <a:t>a named target — or none</a:t>
+            </a:r>
+          </a:p>
+        </p:txBody>
+      </p:sp>
+      <p:sp>
+        <p:nvSpPr>
+          <p:cNvPr id="17424" name="cd-chip-edge"/>
+          <p:cNvSpPr/>
+          <p:nvPr/>
+        </p:nvSpPr>
+        <p:spPr>
+          <a:xfrm>
+            <a:off x="420624" y="3931920"/>
+            <a:ext cx="40640" cy="475488"/>
+          </a:xfrm>
+          <a:prstGeom prst="rect">
+            <a:avLst/>
+          </a:prstGeom>
+          <a:solidFill>
+            <a:srgbClr val="1B3A6B"/>
+          </a:solidFill>
+          <a:ln>
+            <a:noFill/>
+          </a:ln>
+          <a:effectLst/>
+        </p:spPr>
+        <p:style>
+          <a:lnRef idx="1">
+            <a:schemeClr val="accent1"/>
+          </a:lnRef>
+          <a:fillRef idx="3">
+            <a:schemeClr val="accent1"/>
+          </a:fillRef>
+          <a:effectRef idx="2">
+            <a:schemeClr val="accent1"/>
+          </a:effectRef>
+          <a:fontRef idx="minor">
+            <a:schemeClr val="lt1"/>
+          </a:fontRef>
+        </p:style>
+        <p:txBody>
+          <a:bodyPr rtlCol="0" anchor="ctr"/>
+          <a:lstStyle/>
+          <a:p>
+            <a:pPr algn="ctr"/>
+          </a:p>
+        </p:txBody>
+      </p:sp>
+      <p:sp>
+        <p:nvSpPr>
+          <p:cNvPr id="17425" name="cd-caret"/>
+          <p:cNvSpPr/>
+          <p:nvPr/>
+        </p:nvSpPr>
+        <p:spPr>
+          <a:xfrm>
+            <a:off x="2253996" y="4418380"/>
+            <a:ext cx="100584" cy="115671"/>
+          </a:xfrm>
+          <a:prstGeom prst="downArrow">
+            <a:avLst/>
+          </a:prstGeom>
+          <a:solidFill>
+            <a:srgbClr val="63636B"/>
+          </a:solidFill>
+          <a:ln>
+            <a:noFill/>
+          </a:ln>
+          <a:effectLst/>
+        </p:spPr>
+        <p:style>
+          <a:lnRef idx="1">
+            <a:schemeClr val="accent1"/>
+          </a:lnRef>
+          <a:fillRef idx="3">
+            <a:schemeClr val="accent1"/>
+          </a:fillRef>
+          <a:effectRef idx="2">
+            <a:schemeClr val="accent1"/>
+          </a:effectRef>
+          <a:fontRef idx="minor">
+            <a:schemeClr val="lt1"/>
+          </a:fontRef>
+        </p:style>
+        <p:txBody>
+          <a:bodyPr rtlCol="0" anchor="ctr"/>
+          <a:lstStyle/>
+          <a:p>
+            <a:pPr algn="ctr"/>
+          </a:p>
+        </p:txBody>
+      </p:sp>
+      <p:sp>
+        <p:nvSpPr>
+          <p:cNvPr id="17426" name="cd-step"/>
+          <p:cNvSpPr/>
+          <p:nvPr/>
+        </p:nvSpPr>
+        <p:spPr>
+          <a:xfrm>
+            <a:off x="420624" y="4544568"/>
+            <a:ext cx="3767328" cy="475488"/>
+          </a:xfrm>
+          <a:prstGeom prst="roundRect">
+            <a:avLst>
+              <a:gd name="adj" fmla="val 9000"/>
+            </a:avLst>
+          </a:prstGeom>
+          <a:solidFill>
+            <a:srgbClr val="F5F3EF"/>
+          </a:solidFill>
+          <a:ln w="9525">
+            <a:solidFill>
+              <a:srgbClr val="D2D0CB"/>
+            </a:solidFill>
+          </a:ln>
+          <a:effectLst/>
+        </p:spPr>
+        <p:style>
+          <a:lnRef idx="1">
+            <a:schemeClr val="accent1"/>
+          </a:lnRef>
+          <a:fillRef idx="3">
+            <a:schemeClr val="accent1"/>
+          </a:fillRef>
+          <a:effectRef idx="2">
+            <a:schemeClr val="accent1"/>
+          </a:effectRef>
+          <a:fontRef idx="minor">
+            <a:schemeClr val="lt1"/>
+          </a:fontRef>
+        </p:style>
+        <p:txBody>
+          <a:bodyPr rtlCol="0" anchor="ctr" wrap="square" lIns="54864" rIns="54864" tIns="27432" bIns="27432"/>
+          <a:lstStyle/>
+          <a:p>
+            <a:pPr algn="l" marL="0" indent="0">
+              <a:spcBef>
+                <a:spcPts val="0"/>
+              </a:spcBef>
+              <a:spcAft>
+                <a:spcPts val="200"/>
+              </a:spcAft>
+              <a:buNone/>
+            </a:pPr>
+            <a:r>
+              <a:rPr sz="1250" b="1" i="0">
+                <a:solidFill>
+                  <a:srgbClr val="1A1A1C"/>
+                </a:solidFill>
+              </a:rPr>
+              <a:t>CBOM</a:t>
+            </a:r>
+          </a:p>
+          <a:p>
+            <a:pPr algn="l" marL="0" indent="0">
+              <a:spcBef>
+                <a:spcPts val="0"/>
+              </a:spcBef>
+              <a:spcAft>
+                <a:spcPts val="0"/>
+              </a:spcAft>
+              <a:buNone/>
+            </a:pPr>
+            <a:r>
+              <a:rPr sz="1050" b="0" i="0">
+                <a:solidFill>
+                  <a:srgbClr val="63636B"/>
+                </a:solidFill>
+              </a:rPr>
+              <a:t>CycloneDX, schema-validated</a:t>
+            </a:r>
+          </a:p>
+        </p:txBody>
+      </p:sp>
+      <p:sp>
+        <p:nvSpPr>
+          <p:cNvPr id="17427" name="cd-chip-edge"/>
+          <p:cNvSpPr/>
+          <p:nvPr/>
+        </p:nvSpPr>
+        <p:spPr>
+          <a:xfrm>
+            <a:off x="420624" y="4544568"/>
+            <a:ext cx="40640" cy="475488"/>
+          </a:xfrm>
+          <a:prstGeom prst="rect">
+            <a:avLst/>
+          </a:prstGeom>
+          <a:solidFill>
+            <a:srgbClr val="9E3A24"/>
+          </a:solidFill>
+          <a:ln>
+            <a:noFill/>
+          </a:ln>
+          <a:effectLst/>
+        </p:spPr>
+        <p:style>
+          <a:lnRef idx="1">
+            <a:schemeClr val="accent1"/>
+          </a:lnRef>
+          <a:fillRef idx="3">
+            <a:schemeClr val="accent1"/>
+          </a:fillRef>
+          <a:effectRef idx="2">
+            <a:schemeClr val="accent1"/>
+          </a:effectRef>
+          <a:fontRef idx="minor">
+            <a:schemeClr val="lt1"/>
+          </a:fontRef>
+        </p:style>
+        <p:txBody>
+          <a:bodyPr rtlCol="0" anchor="ctr"/>
+          <a:lstStyle/>
+          <a:p>
+            <a:pPr algn="ctr"/>
+          </a:p>
+        </p:txBody>
+      </p:sp>
+      <p:sp>
+        <p:nvSpPr>
+          <p:cNvPr id="17428" name="cd-rsa-eyebrow"/>
           <p:cNvSpPr txBox="1"/>
           <p:nvPr/>
         </p:nvSpPr>
         <p:spPr>
           <a:xfrm>
-            <a:off x="420624" y="5266944"/>
-            <a:ext cx="2999232" cy="365760"/>
+            <a:off x="4498848" y="1078992"/>
+            <a:ext cx="7269479" cy="237744"/>
           </a:xfrm>
           <a:prstGeom prst="rect">
             <a:avLst/>
@@ -8543,55 +8886,36 @@
           </a:bodyPr>
           <a:lstStyle/>
           <a:p>
-            <a:pPr marL="0" indent="0">
-              <a:spcBef>
-                <a:spcPts val="0"/>
-              </a:spcBef>
-              <a:spcAft>
-                <a:spcPts val="200"/>
-              </a:spcAft>
-              <a:buNone/>
-            </a:pPr>
-            <a:r>
-              <a:rPr sz="1600" b="1" i="0">
-                <a:solidFill>
-                  <a:srgbClr val="1A1A1C"/>
-                </a:solidFill>
-              </a:rPr>
-              <a:t>Case 3 — RSA, unresolved</a:t>
-            </a:r>
-          </a:p>
-          <a:p>
-            <a:pPr marL="0" indent="0">
-              <a:spcBef>
-                <a:spcPts val="0"/>
-              </a:spcBef>
-              <a:spcAft>
-                <a:spcPts val="0"/>
-              </a:spcAft>
-              <a:buNone/>
-            </a:pPr>
-            <a:r>
-              <a:rPr sz="1300" b="0" i="0">
+            <a:pPr algn="l" marL="0" indent="0">
+              <a:spcBef>
+                <a:spcPts val="0"/>
+              </a:spcBef>
+              <a:spcAft>
+                <a:spcPts val="0"/>
+              </a:spcAft>
+              <a:buNone/>
+            </a:pPr>
+            <a:r>
+              <a:rPr sz="1100" b="1" i="0">
                 <a:solidFill>
                   <a:srgbClr val="63636B"/>
                 </a:solidFill>
               </a:rPr>
-              <a:t>legacy/nginx.conf:5   (config · declared)</a:t>
-            </a:r>
-          </a:p>
-        </p:txBody>
-      </p:sp>
-      <p:sp>
-        <p:nvSpPr>
-          <p:cNvPr id="17430" name="cd-rsa-cell"/>
+              <a:t>ONE ALGORITHM · THREE PURPOSE STATES · THREE DECISIONS</a:t>
+            </a:r>
+          </a:p>
+        </p:txBody>
+      </p:sp>
+      <p:sp>
+        <p:nvSpPr>
+          <p:cNvPr id="17429" name="cd-rsa-lede"/>
           <p:cNvSpPr txBox="1"/>
           <p:nvPr/>
         </p:nvSpPr>
         <p:spPr>
           <a:xfrm>
-            <a:off x="3547872" y="5321807"/>
-            <a:ext cx="2578608" cy="310896"/>
+            <a:off x="4498848" y="1316736"/>
+            <a:ext cx="7269479" cy="365760"/>
           </a:xfrm>
           <a:prstGeom prst="rect">
             <a:avLst/>
@@ -8604,36 +8928,128 @@
           </a:bodyPr>
           <a:lstStyle/>
           <a:p>
-            <a:pPr marL="0" indent="0">
-              <a:spcBef>
-                <a:spcPts val="0"/>
-              </a:spcBef>
-              <a:spcAft>
-                <a:spcPts val="0"/>
-              </a:spcAft>
-              <a:buNone/>
-            </a:pPr>
-            <a:r>
-              <a:rPr sz="1500" b="0" i="0">
+            <a:pPr algn="l" marL="0" indent="0">
+              <a:spcBef>
+                <a:spcPts val="0"/>
+              </a:spcBef>
+              <a:spcAft>
+                <a:spcPts val="0"/>
+              </a:spcAft>
+              <a:buNone/>
+            </a:pPr>
+            <a:r>
+              <a:rPr sz="1300" b="0" i="0">
                 <a:solidFill>
                   <a:srgbClr val="3E3E44"/>
                 </a:solidFill>
               </a:rPr>
-              <a:t>a cipher list permits RSA, purpose unstated</a:t>
-            </a:r>
-          </a:p>
-        </p:txBody>
-      </p:sp>
-      <p:sp>
-        <p:nvSpPr>
-          <p:cNvPr id="17431" name="cd-rsa-cell"/>
+              <a:t>Every scanner can tell you RSA is present. What decides the migration is what it is being used for.</a:t>
+            </a:r>
+          </a:p>
+        </p:txBody>
+      </p:sp>
+      <p:sp>
+        <p:nvSpPr>
+          <p:cNvPr id="17430" name="cd-rsa"/>
+          <p:cNvSpPr/>
+          <p:nvPr/>
+        </p:nvSpPr>
+        <p:spPr>
+          <a:xfrm>
+            <a:off x="4498848" y="1810512"/>
+            <a:ext cx="7269479" cy="969264"/>
+          </a:xfrm>
+          <a:prstGeom prst="roundRect">
+            <a:avLst>
+              <a:gd name="adj" fmla="val 6000"/>
+            </a:avLst>
+          </a:prstGeom>
+          <a:solidFill>
+            <a:srgbClr val="F5F3EF"/>
+          </a:solidFill>
+          <a:ln w="9525">
+            <a:solidFill>
+              <a:srgbClr val="D2D0CB"/>
+            </a:solidFill>
+          </a:ln>
+          <a:effectLst/>
+        </p:spPr>
+        <p:style>
+          <a:lnRef idx="1">
+            <a:schemeClr val="accent1"/>
+          </a:lnRef>
+          <a:fillRef idx="3">
+            <a:schemeClr val="accent1"/>
+          </a:fillRef>
+          <a:effectRef idx="2">
+            <a:schemeClr val="accent1"/>
+          </a:effectRef>
+          <a:fontRef idx="minor">
+            <a:schemeClr val="lt1"/>
+          </a:fontRef>
+        </p:style>
+        <p:txBody>
+          <a:bodyPr rtlCol="0" anchor="ctr"/>
+          <a:lstStyle/>
+          <a:p>
+            <a:pPr algn="ctr"/>
+          </a:p>
+        </p:txBody>
+      </p:sp>
+      <p:sp>
+        <p:nvSpPr>
+          <p:cNvPr id="17431" name="cd-rsa-edge"/>
+          <p:cNvSpPr/>
+          <p:nvPr/>
+        </p:nvSpPr>
+        <p:spPr>
+          <a:xfrm>
+            <a:off x="4498848" y="1810512"/>
+            <a:ext cx="43180" cy="969264"/>
+          </a:xfrm>
+          <a:prstGeom prst="rect">
+            <a:avLst/>
+          </a:prstGeom>
+          <a:solidFill>
+            <a:srgbClr val="9E3A24"/>
+          </a:solidFill>
+          <a:ln>
+            <a:noFill/>
+          </a:ln>
+          <a:effectLst/>
+        </p:spPr>
+        <p:style>
+          <a:lnRef idx="1">
+            <a:schemeClr val="accent1"/>
+          </a:lnRef>
+          <a:fillRef idx="3">
+            <a:schemeClr val="accent1"/>
+          </a:fillRef>
+          <a:effectRef idx="2">
+            <a:schemeClr val="accent1"/>
+          </a:effectRef>
+          <a:fontRef idx="minor">
+            <a:schemeClr val="lt1"/>
+          </a:fontRef>
+        </p:style>
+        <p:txBody>
+          <a:bodyPr rtlCol="0" anchor="ctr"/>
+          <a:lstStyle/>
+          <a:p>
+            <a:pPr algn="ctr"/>
+          </a:p>
+        </p:txBody>
+      </p:sp>
+      <p:sp>
+        <p:nvSpPr>
+          <p:cNvPr id="17432" name="cd-rsa-case"/>
           <p:cNvSpPr txBox="1"/>
           <p:nvPr/>
         </p:nvSpPr>
         <p:spPr>
           <a:xfrm>
-            <a:off x="6236208" y="5321807"/>
-            <a:ext cx="2432304" cy="310896"/>
+            <a:off x="4654296" y="1883664"/>
+            <a:ext cx="3618463" cy="201168"/>
           </a:xfrm>
           <a:prstGeom prst="rect">
             <a:avLst/>
@@ -8646,36 +9062,36 @@
           </a:bodyPr>
           <a:lstStyle/>
           <a:p>
-            <a:pPr marL="0" indent="0">
-              <a:spcBef>
-                <a:spcPts val="0"/>
-              </a:spcBef>
-              <a:spcAft>
-                <a:spcPts val="0"/>
-              </a:spcAft>
-              <a:buNone/>
-            </a:pPr>
-            <a:r>
-              <a:rPr sz="1600" b="1" i="1">
-                <a:solidFill>
-                  <a:srgbClr val="63636B"/>
-                </a:solidFill>
-              </a:rPr>
-              <a:t>Purpose must be resolved first</a:t>
-            </a:r>
-          </a:p>
-        </p:txBody>
-      </p:sp>
-      <p:sp>
-        <p:nvSpPr>
-          <p:cNvPr id="17432" name="cd-rsa-cell"/>
+            <a:pPr algn="l" marL="0" indent="0">
+              <a:spcBef>
+                <a:spcPts val="0"/>
+              </a:spcBef>
+              <a:spcAft>
+                <a:spcPts val="0"/>
+              </a:spcAft>
+              <a:buNone/>
+            </a:pPr>
+            <a:r>
+              <a:rPr sz="1300" b="1" i="0">
+                <a:solidFill>
+                  <a:srgbClr val="1A1A1C"/>
+                </a:solidFill>
+              </a:rPr>
+              <a:t>Case 1 — RSA signing</a:t>
+            </a:r>
+          </a:p>
+        </p:txBody>
+      </p:sp>
+      <p:sp>
+        <p:nvSpPr>
+          <p:cNvPr id="17433" name="cd-rsa-where"/>
           <p:cNvSpPr txBox="1"/>
           <p:nvPr/>
         </p:nvSpPr>
         <p:spPr>
           <a:xfrm>
-            <a:off x="8796528" y="5321807"/>
-            <a:ext cx="2971800" cy="310896"/>
+            <a:off x="4654296" y="2084831"/>
+            <a:ext cx="3757635" cy="182880"/>
           </a:xfrm>
           <a:prstGeom prst="rect">
             <a:avLst/>
@@ -8688,36 +9104,36 @@
           </a:bodyPr>
           <a:lstStyle/>
           <a:p>
-            <a:pPr marL="0" indent="0">
-              <a:spcBef>
-                <a:spcPts val="0"/>
-              </a:spcBef>
-              <a:spcAft>
-                <a:spcPts val="0"/>
-              </a:spcAft>
-              <a:buNone/>
-            </a:pPr>
-            <a:r>
-              <a:rPr sz="1500" b="0" i="0">
-                <a:solidFill>
-                  <a:srgbClr val="3E3E44"/>
-                </a:solidFill>
-              </a:rPr>
-              <a:t>further evidence required</a:t>
-            </a:r>
-          </a:p>
-        </p:txBody>
-      </p:sp>
-      <p:sp>
-        <p:nvSpPr>
-          <p:cNvPr id="17433" name="cd-security"/>
+            <a:pPr algn="l" marL="0" indent="0">
+              <a:spcBef>
+                <a:spcPts val="0"/>
+              </a:spcBef>
+              <a:spcAft>
+                <a:spcPts val="0"/>
+              </a:spcAft>
+              <a:buNone/>
+            </a:pPr>
+            <a:r>
+              <a:rPr sz="1050" b="0" i="0">
+                <a:solidFill>
+                  <a:srgbClr val="63636B"/>
+                </a:solidFill>
+              </a:rPr>
+              <a:t>svc-payments/signing.py:15   ·   source · used</a:t>
+            </a:r>
+          </a:p>
+        </p:txBody>
+      </p:sp>
+      <p:sp>
+        <p:nvSpPr>
+          <p:cNvPr id="17434" name="cd-rsa-purpose"/>
           <p:cNvSpPr txBox="1"/>
           <p:nvPr/>
         </p:nvSpPr>
         <p:spPr>
           <a:xfrm>
-            <a:off x="420624" y="5760720"/>
-            <a:ext cx="11347703" cy="475488"/>
+            <a:off x="4654296" y="2377440"/>
+            <a:ext cx="3479291" cy="274320"/>
           </a:xfrm>
           <a:prstGeom prst="rect">
             <a:avLst/>
@@ -8730,7 +9146,205 @@
           </a:bodyPr>
           <a:lstStyle/>
           <a:p>
-            <a:pPr marL="0" indent="0">
+            <a:pPr algn="l" marL="0" indent="0">
+              <a:spcBef>
+                <a:spcPts val="0"/>
+              </a:spcBef>
+              <a:spcAft>
+                <a:spcPts val="0"/>
+              </a:spcAft>
+              <a:buNone/>
+            </a:pPr>
+            <a:r>
+              <a:rPr sz="1500" b="1" i="0">
+                <a:solidFill>
+                  <a:srgbClr val="9E3A24"/>
+                </a:solidFill>
+              </a:rPr>
+              <a:t>RSA-PSS padding signs</a:t>
+            </a:r>
+          </a:p>
+        </p:txBody>
+      </p:sp>
+      <p:sp>
+        <p:nvSpPr>
+          <p:cNvPr id="17435" name="cd-rsa-target"/>
+          <p:cNvSpPr/>
+          <p:nvPr/>
+        </p:nvSpPr>
+        <p:spPr>
+          <a:xfrm>
+            <a:off x="8551103" y="2322576"/>
+            <a:ext cx="3061776" cy="384048"/>
+          </a:xfrm>
+          <a:prstGeom prst="roundRect">
+            <a:avLst>
+              <a:gd name="adj" fmla="val 14000"/>
+            </a:avLst>
+          </a:prstGeom>
+          <a:solidFill>
+            <a:srgbClr val="FFFFFF"/>
+          </a:solidFill>
+          <a:ln w="12700">
+            <a:solidFill>
+              <a:srgbClr val="144C39"/>
+            </a:solidFill>
+          </a:ln>
+          <a:effectLst/>
+        </p:spPr>
+        <p:style>
+          <a:lnRef idx="1">
+            <a:schemeClr val="accent1"/>
+          </a:lnRef>
+          <a:fillRef idx="3">
+            <a:schemeClr val="accent1"/>
+          </a:fillRef>
+          <a:effectRef idx="2">
+            <a:schemeClr val="accent1"/>
+          </a:effectRef>
+          <a:fontRef idx="minor">
+            <a:schemeClr val="lt1"/>
+          </a:fontRef>
+        </p:style>
+        <p:txBody>
+          <a:bodyPr rtlCol="0" anchor="ctr" wrap="square" lIns="54864" rIns="54864" tIns="27432" bIns="27432"/>
+          <a:lstStyle/>
+          <a:p>
+            <a:pPr algn="ctr" marL="0" indent="0">
+              <a:spcBef>
+                <a:spcPts val="0"/>
+              </a:spcBef>
+              <a:spcAft>
+                <a:spcPts val="0"/>
+              </a:spcAft>
+              <a:buNone/>
+            </a:pPr>
+            <a:r>
+              <a:rPr sz="1250" b="1" i="0">
+                <a:solidFill>
+                  <a:srgbClr val="144C39"/>
+                </a:solidFill>
+              </a:rPr>
+              <a:t>ML-DSA-65</a:t>
+            </a:r>
+          </a:p>
+        </p:txBody>
+      </p:sp>
+      <p:sp>
+        <p:nvSpPr>
+          <p:cNvPr id="17436" name="cd-rsa"/>
+          <p:cNvSpPr/>
+          <p:nvPr/>
+        </p:nvSpPr>
+        <p:spPr>
+          <a:xfrm>
+            <a:off x="4498848" y="2916936"/>
+            <a:ext cx="7269479" cy="969264"/>
+          </a:xfrm>
+          <a:prstGeom prst="roundRect">
+            <a:avLst>
+              <a:gd name="adj" fmla="val 6000"/>
+            </a:avLst>
+          </a:prstGeom>
+          <a:solidFill>
+            <a:srgbClr val="F5F3EF"/>
+          </a:solidFill>
+          <a:ln w="9525">
+            <a:solidFill>
+              <a:srgbClr val="D2D0CB"/>
+            </a:solidFill>
+          </a:ln>
+          <a:effectLst/>
+        </p:spPr>
+        <p:style>
+          <a:lnRef idx="1">
+            <a:schemeClr val="accent1"/>
+          </a:lnRef>
+          <a:fillRef idx="3">
+            <a:schemeClr val="accent1"/>
+          </a:fillRef>
+          <a:effectRef idx="2">
+            <a:schemeClr val="accent1"/>
+          </a:effectRef>
+          <a:fontRef idx="minor">
+            <a:schemeClr val="lt1"/>
+          </a:fontRef>
+        </p:style>
+        <p:txBody>
+          <a:bodyPr rtlCol="0" anchor="ctr"/>
+          <a:lstStyle/>
+          <a:p>
+            <a:pPr algn="ctr"/>
+          </a:p>
+        </p:txBody>
+      </p:sp>
+      <p:sp>
+        <p:nvSpPr>
+          <p:cNvPr id="17437" name="cd-rsa-edge"/>
+          <p:cNvSpPr/>
+          <p:nvPr/>
+        </p:nvSpPr>
+        <p:spPr>
+          <a:xfrm>
+            <a:off x="4498848" y="2916936"/>
+            <a:ext cx="43180" cy="969264"/>
+          </a:xfrm>
+          <a:prstGeom prst="rect">
+            <a:avLst/>
+          </a:prstGeom>
+          <a:solidFill>
+            <a:srgbClr val="9E3A24"/>
+          </a:solidFill>
+          <a:ln>
+            <a:noFill/>
+          </a:ln>
+          <a:effectLst/>
+        </p:spPr>
+        <p:style>
+          <a:lnRef idx="1">
+            <a:schemeClr val="accent1"/>
+          </a:lnRef>
+          <a:fillRef idx="3">
+            <a:schemeClr val="accent1"/>
+          </a:fillRef>
+          <a:effectRef idx="2">
+            <a:schemeClr val="accent1"/>
+          </a:effectRef>
+          <a:fontRef idx="minor">
+            <a:schemeClr val="lt1"/>
+          </a:fontRef>
+        </p:style>
+        <p:txBody>
+          <a:bodyPr rtlCol="0" anchor="ctr"/>
+          <a:lstStyle/>
+          <a:p>
+            <a:pPr algn="ctr"/>
+          </a:p>
+        </p:txBody>
+      </p:sp>
+      <p:sp>
+        <p:nvSpPr>
+          <p:cNvPr id="17438" name="cd-rsa-case"/>
+          <p:cNvSpPr txBox="1"/>
+          <p:nvPr/>
+        </p:nvSpPr>
+        <p:spPr>
+          <a:xfrm>
+            <a:off x="4654296" y="2990088"/>
+            <a:ext cx="3618463" cy="201168"/>
+          </a:xfrm>
+          <a:prstGeom prst="rect">
+            <a:avLst/>
+          </a:prstGeom>
+          <a:noFill/>
+        </p:spPr>
+        <p:txBody>
+          <a:bodyPr wrap="square" lIns="0" rIns="0" tIns="0" bIns="0">
+            <a:spAutoFit/>
+          </a:bodyPr>
+          <a:lstStyle/>
+          <a:p>
+            <a:pPr algn="l" marL="0" indent="0">
               <a:spcBef>
                 <a:spcPts val="0"/>
               </a:spcBef>
@@ -8745,15 +9359,863 @@
                   <a:srgbClr val="1A1A1C"/>
                 </a:solidFill>
               </a:rPr>
-              <a:t>Security design — </a:t>
-            </a:r>
-            <a:r>
-              <a:rPr sz="1300" b="0" i="0">
+              <a:t>Case 2 — RSA key establishment</a:t>
+            </a:r>
+          </a:p>
+        </p:txBody>
+      </p:sp>
+      <p:sp>
+        <p:nvSpPr>
+          <p:cNvPr id="17439" name="cd-rsa-where"/>
+          <p:cNvSpPr txBox="1"/>
+          <p:nvPr/>
+        </p:nvSpPr>
+        <p:spPr>
+          <a:xfrm>
+            <a:off x="4654296" y="3191256"/>
+            <a:ext cx="3757635" cy="182880"/>
+          </a:xfrm>
+          <a:prstGeom prst="rect">
+            <a:avLst/>
+          </a:prstGeom>
+          <a:noFill/>
+        </p:spPr>
+        <p:txBody>
+          <a:bodyPr wrap="square" lIns="0" rIns="0" tIns="0" bIns="0">
+            <a:spAutoFit/>
+          </a:bodyPr>
+          <a:lstStyle/>
+          <a:p>
+            <a:pPr algn="l" marL="0" indent="0">
+              <a:spcBef>
+                <a:spcPts val="0"/>
+              </a:spcBef>
+              <a:spcAft>
+                <a:spcPts val="0"/>
+              </a:spcAft>
+              <a:buNone/>
+            </a:pPr>
+            <a:r>
+              <a:rPr sz="1050" b="0" i="0">
                 <a:solidFill>
                   <a:srgbClr val="63636B"/>
                 </a:solidFill>
               </a:rPr>
-              <a:t>operator-named targets only, every resolved address vetted first; local-first with nothing written to disk; partial scans disclosed and exported evidence redacted.</a:t>
+              <a:t>svc-gateway/transport.py:16   ·   source · used</a:t>
+            </a:r>
+          </a:p>
+        </p:txBody>
+      </p:sp>
+      <p:sp>
+        <p:nvSpPr>
+          <p:cNvPr id="17440" name="cd-rsa-purpose"/>
+          <p:cNvSpPr txBox="1"/>
+          <p:nvPr/>
+        </p:nvSpPr>
+        <p:spPr>
+          <a:xfrm>
+            <a:off x="4654296" y="3483864"/>
+            <a:ext cx="3479291" cy="274320"/>
+          </a:xfrm>
+          <a:prstGeom prst="rect">
+            <a:avLst/>
+          </a:prstGeom>
+          <a:noFill/>
+        </p:spPr>
+        <p:txBody>
+          <a:bodyPr wrap="square" lIns="0" rIns="0" tIns="0" bIns="0">
+            <a:spAutoFit/>
+          </a:bodyPr>
+          <a:lstStyle/>
+          <a:p>
+            <a:pPr algn="l" marL="0" indent="0">
+              <a:spcBef>
+                <a:spcPts val="0"/>
+              </a:spcBef>
+              <a:spcAft>
+                <a:spcPts val="0"/>
+              </a:spcAft>
+              <a:buNone/>
+            </a:pPr>
+            <a:r>
+              <a:rPr sz="1500" b="1" i="0">
+                <a:solidFill>
+                  <a:srgbClr val="9E3A24"/>
+                </a:solidFill>
+              </a:rPr>
+              <a:t>RSA-OAEP padding wraps a key</a:t>
+            </a:r>
+          </a:p>
+        </p:txBody>
+      </p:sp>
+      <p:sp>
+        <p:nvSpPr>
+          <p:cNvPr id="17441" name="cd-rsa-target"/>
+          <p:cNvSpPr/>
+          <p:nvPr/>
+        </p:nvSpPr>
+        <p:spPr>
+          <a:xfrm>
+            <a:off x="8551103" y="3429000"/>
+            <a:ext cx="3061776" cy="384048"/>
+          </a:xfrm>
+          <a:prstGeom prst="roundRect">
+            <a:avLst>
+              <a:gd name="adj" fmla="val 14000"/>
+            </a:avLst>
+          </a:prstGeom>
+          <a:solidFill>
+            <a:srgbClr val="FFFFFF"/>
+          </a:solidFill>
+          <a:ln w="12700">
+            <a:solidFill>
+              <a:srgbClr val="144C39"/>
+            </a:solidFill>
+          </a:ln>
+          <a:effectLst/>
+        </p:spPr>
+        <p:style>
+          <a:lnRef idx="1">
+            <a:schemeClr val="accent1"/>
+          </a:lnRef>
+          <a:fillRef idx="3">
+            <a:schemeClr val="accent1"/>
+          </a:fillRef>
+          <a:effectRef idx="2">
+            <a:schemeClr val="accent1"/>
+          </a:effectRef>
+          <a:fontRef idx="minor">
+            <a:schemeClr val="lt1"/>
+          </a:fontRef>
+        </p:style>
+        <p:txBody>
+          <a:bodyPr rtlCol="0" anchor="ctr" wrap="square" lIns="54864" rIns="54864" tIns="27432" bIns="27432"/>
+          <a:lstStyle/>
+          <a:p>
+            <a:pPr algn="ctr" marL="0" indent="0">
+              <a:spcBef>
+                <a:spcPts val="0"/>
+              </a:spcBef>
+              <a:spcAft>
+                <a:spcPts val="0"/>
+              </a:spcAft>
+              <a:buNone/>
+            </a:pPr>
+            <a:r>
+              <a:rPr sz="1250" b="1" i="0">
+                <a:solidFill>
+                  <a:srgbClr val="144C39"/>
+                </a:solidFill>
+              </a:rPr>
+              <a:t>X25519MLKEM768</a:t>
+            </a:r>
+          </a:p>
+        </p:txBody>
+      </p:sp>
+      <p:sp>
+        <p:nvSpPr>
+          <p:cNvPr id="17442" name="cd-rsa"/>
+          <p:cNvSpPr/>
+          <p:nvPr/>
+        </p:nvSpPr>
+        <p:spPr>
+          <a:xfrm>
+            <a:off x="4498848" y="4023360"/>
+            <a:ext cx="7269479" cy="969264"/>
+          </a:xfrm>
+          <a:prstGeom prst="roundRect">
+            <a:avLst>
+              <a:gd name="adj" fmla="val 6000"/>
+            </a:avLst>
+          </a:prstGeom>
+          <a:solidFill>
+            <a:srgbClr val="F5F3EF"/>
+          </a:solidFill>
+          <a:ln w="9525">
+            <a:solidFill>
+              <a:srgbClr val="D2D0CB"/>
+            </a:solidFill>
+          </a:ln>
+          <a:effectLst/>
+        </p:spPr>
+        <p:style>
+          <a:lnRef idx="1">
+            <a:schemeClr val="accent1"/>
+          </a:lnRef>
+          <a:fillRef idx="3">
+            <a:schemeClr val="accent1"/>
+          </a:fillRef>
+          <a:effectRef idx="2">
+            <a:schemeClr val="accent1"/>
+          </a:effectRef>
+          <a:fontRef idx="minor">
+            <a:schemeClr val="lt1"/>
+          </a:fontRef>
+        </p:style>
+        <p:txBody>
+          <a:bodyPr rtlCol="0" anchor="ctr"/>
+          <a:lstStyle/>
+          <a:p>
+            <a:pPr algn="ctr"/>
+          </a:p>
+        </p:txBody>
+      </p:sp>
+      <p:sp>
+        <p:nvSpPr>
+          <p:cNvPr id="17443" name="cd-rsa-edge"/>
+          <p:cNvSpPr/>
+          <p:nvPr/>
+        </p:nvSpPr>
+        <p:spPr>
+          <a:xfrm>
+            <a:off x="4498848" y="4023360"/>
+            <a:ext cx="43180" cy="969264"/>
+          </a:xfrm>
+          <a:prstGeom prst="rect">
+            <a:avLst/>
+          </a:prstGeom>
+          <a:solidFill>
+            <a:srgbClr val="63636B"/>
+          </a:solidFill>
+          <a:ln>
+            <a:noFill/>
+          </a:ln>
+          <a:effectLst/>
+        </p:spPr>
+        <p:style>
+          <a:lnRef idx="1">
+            <a:schemeClr val="accent1"/>
+          </a:lnRef>
+          <a:fillRef idx="3">
+            <a:schemeClr val="accent1"/>
+          </a:fillRef>
+          <a:effectRef idx="2">
+            <a:schemeClr val="accent1"/>
+          </a:effectRef>
+          <a:fontRef idx="minor">
+            <a:schemeClr val="lt1"/>
+          </a:fontRef>
+        </p:style>
+        <p:txBody>
+          <a:bodyPr rtlCol="0" anchor="ctr"/>
+          <a:lstStyle/>
+          <a:p>
+            <a:pPr algn="ctr"/>
+          </a:p>
+        </p:txBody>
+      </p:sp>
+      <p:sp>
+        <p:nvSpPr>
+          <p:cNvPr id="17444" name="cd-rsa-case"/>
+          <p:cNvSpPr txBox="1"/>
+          <p:nvPr/>
+        </p:nvSpPr>
+        <p:spPr>
+          <a:xfrm>
+            <a:off x="4654296" y="4096512"/>
+            <a:ext cx="3618463" cy="201168"/>
+          </a:xfrm>
+          <a:prstGeom prst="rect">
+            <a:avLst/>
+          </a:prstGeom>
+          <a:noFill/>
+        </p:spPr>
+        <p:txBody>
+          <a:bodyPr wrap="square" lIns="0" rIns="0" tIns="0" bIns="0">
+            <a:spAutoFit/>
+          </a:bodyPr>
+          <a:lstStyle/>
+          <a:p>
+            <a:pPr algn="l" marL="0" indent="0">
+              <a:spcBef>
+                <a:spcPts val="0"/>
+              </a:spcBef>
+              <a:spcAft>
+                <a:spcPts val="0"/>
+              </a:spcAft>
+              <a:buNone/>
+            </a:pPr>
+            <a:r>
+              <a:rPr sz="1300" b="1" i="0">
+                <a:solidFill>
+                  <a:srgbClr val="1A1A1C"/>
+                </a:solidFill>
+              </a:rPr>
+              <a:t>Case 3 — RSA, unresolved</a:t>
+            </a:r>
+          </a:p>
+        </p:txBody>
+      </p:sp>
+      <p:sp>
+        <p:nvSpPr>
+          <p:cNvPr id="17445" name="cd-rsa-where"/>
+          <p:cNvSpPr txBox="1"/>
+          <p:nvPr/>
+        </p:nvSpPr>
+        <p:spPr>
+          <a:xfrm>
+            <a:off x="4654296" y="4297680"/>
+            <a:ext cx="3757635" cy="182880"/>
+          </a:xfrm>
+          <a:prstGeom prst="rect">
+            <a:avLst/>
+          </a:prstGeom>
+          <a:noFill/>
+        </p:spPr>
+        <p:txBody>
+          <a:bodyPr wrap="square" lIns="0" rIns="0" tIns="0" bIns="0">
+            <a:spAutoFit/>
+          </a:bodyPr>
+          <a:lstStyle/>
+          <a:p>
+            <a:pPr algn="l" marL="0" indent="0">
+              <a:spcBef>
+                <a:spcPts val="0"/>
+              </a:spcBef>
+              <a:spcAft>
+                <a:spcPts val="0"/>
+              </a:spcAft>
+              <a:buNone/>
+            </a:pPr>
+            <a:r>
+              <a:rPr sz="1050" b="0" i="0">
+                <a:solidFill>
+                  <a:srgbClr val="63636B"/>
+                </a:solidFill>
+              </a:rPr>
+              <a:t>legacy/nginx.conf:5   ·   config · declared</a:t>
+            </a:r>
+          </a:p>
+        </p:txBody>
+      </p:sp>
+      <p:sp>
+        <p:nvSpPr>
+          <p:cNvPr id="17446" name="cd-rsa-purpose"/>
+          <p:cNvSpPr txBox="1"/>
+          <p:nvPr/>
+        </p:nvSpPr>
+        <p:spPr>
+          <a:xfrm>
+            <a:off x="4654296" y="4590288"/>
+            <a:ext cx="3479291" cy="274320"/>
+          </a:xfrm>
+          <a:prstGeom prst="rect">
+            <a:avLst/>
+          </a:prstGeom>
+          <a:noFill/>
+        </p:spPr>
+        <p:txBody>
+          <a:bodyPr wrap="square" lIns="0" rIns="0" tIns="0" bIns="0">
+            <a:spAutoFit/>
+          </a:bodyPr>
+          <a:lstStyle/>
+          <a:p>
+            <a:pPr algn="l" marL="0" indent="0">
+              <a:spcBef>
+                <a:spcPts val="0"/>
+              </a:spcBef>
+              <a:spcAft>
+                <a:spcPts val="0"/>
+              </a:spcAft>
+              <a:buNone/>
+            </a:pPr>
+            <a:r>
+              <a:rPr sz="1500" b="1" i="0">
+                <a:solidFill>
+                  <a:srgbClr val="63636B"/>
+                </a:solidFill>
+              </a:rPr>
+              <a:t>a cipher list permits RSA, purpose unstated</a:t>
+            </a:r>
+          </a:p>
+        </p:txBody>
+      </p:sp>
+      <p:sp>
+        <p:nvSpPr>
+          <p:cNvPr id="17447" name="cd-rsa-target"/>
+          <p:cNvSpPr/>
+          <p:nvPr/>
+        </p:nvSpPr>
+        <p:spPr>
+          <a:xfrm>
+            <a:off x="8551103" y="4535424"/>
+            <a:ext cx="3061776" cy="384048"/>
+          </a:xfrm>
+          <a:prstGeom prst="roundRect">
+            <a:avLst>
+              <a:gd name="adj" fmla="val 14000"/>
+            </a:avLst>
+          </a:prstGeom>
+          <a:solidFill>
+            <a:srgbClr val="ECE9E3"/>
+          </a:solidFill>
+          <a:ln w="9525">
+            <a:solidFill>
+              <a:srgbClr val="D2D0CB"/>
+            </a:solidFill>
+          </a:ln>
+          <a:effectLst/>
+        </p:spPr>
+        <p:style>
+          <a:lnRef idx="1">
+            <a:schemeClr val="accent1"/>
+          </a:lnRef>
+          <a:fillRef idx="3">
+            <a:schemeClr val="accent1"/>
+          </a:fillRef>
+          <a:effectRef idx="2">
+            <a:schemeClr val="accent1"/>
+          </a:effectRef>
+          <a:fontRef idx="minor">
+            <a:schemeClr val="lt1"/>
+          </a:fontRef>
+        </p:style>
+        <p:txBody>
+          <a:bodyPr rtlCol="0" anchor="ctr" wrap="square" lIns="54864" rIns="54864" tIns="27432" bIns="27432"/>
+          <a:lstStyle/>
+          <a:p>
+            <a:pPr algn="ctr" marL="0" indent="0">
+              <a:spcBef>
+                <a:spcPts val="0"/>
+              </a:spcBef>
+              <a:spcAft>
+                <a:spcPts val="0"/>
+              </a:spcAft>
+              <a:buNone/>
+            </a:pPr>
+            <a:r>
+              <a:rPr sz="1100" b="0" i="1">
+                <a:solidFill>
+                  <a:srgbClr val="63636B"/>
+                </a:solidFill>
+              </a:rPr>
+              <a:t>Purpose must be resolved first</a:t>
+            </a:r>
+          </a:p>
+        </p:txBody>
+      </p:sp>
+      <p:sp>
+        <p:nvSpPr>
+          <p:cNvPr id="17448" name="cd-stack-eyebrow"/>
+          <p:cNvSpPr txBox="1"/>
+          <p:nvPr/>
+        </p:nvSpPr>
+        <p:spPr>
+          <a:xfrm>
+            <a:off x="420624" y="5303520"/>
+            <a:ext cx="11347703" cy="237744"/>
+          </a:xfrm>
+          <a:prstGeom prst="rect">
+            <a:avLst/>
+          </a:prstGeom>
+          <a:noFill/>
+        </p:spPr>
+        <p:txBody>
+          <a:bodyPr wrap="square" lIns="0" rIns="0" tIns="0" bIns="0">
+            <a:spAutoFit/>
+          </a:bodyPr>
+          <a:lstStyle/>
+          <a:p>
+            <a:pPr algn="l" marL="0" indent="0">
+              <a:spcBef>
+                <a:spcPts val="0"/>
+              </a:spcBef>
+              <a:spcAft>
+                <a:spcPts val="0"/>
+              </a:spcAft>
+              <a:buNone/>
+            </a:pPr>
+            <a:r>
+              <a:rPr sz="1050" b="1" i="0">
+                <a:solidFill>
+                  <a:srgbClr val="63636B"/>
+                </a:solidFill>
+              </a:rPr>
+              <a:t>BUILT WITH</a:t>
+            </a:r>
+          </a:p>
+        </p:txBody>
+      </p:sp>
+      <p:sp>
+        <p:nvSpPr>
+          <p:cNvPr id="17449" name="cd-stack"/>
+          <p:cNvSpPr/>
+          <p:nvPr/>
+        </p:nvSpPr>
+        <p:spPr>
+          <a:xfrm>
+            <a:off x="420624" y="5541264"/>
+            <a:ext cx="1784603" cy="365760"/>
+          </a:xfrm>
+          <a:prstGeom prst="roundRect">
+            <a:avLst>
+              <a:gd name="adj" fmla="val 9000"/>
+            </a:avLst>
+          </a:prstGeom>
+          <a:solidFill>
+            <a:srgbClr val="ECE9E3"/>
+          </a:solidFill>
+          <a:ln w="9525">
+            <a:solidFill>
+              <a:srgbClr val="D2D0CB"/>
+            </a:solidFill>
+          </a:ln>
+          <a:effectLst/>
+        </p:spPr>
+        <p:style>
+          <a:lnRef idx="1">
+            <a:schemeClr val="accent1"/>
+          </a:lnRef>
+          <a:fillRef idx="3">
+            <a:schemeClr val="accent1"/>
+          </a:fillRef>
+          <a:effectRef idx="2">
+            <a:schemeClr val="accent1"/>
+          </a:effectRef>
+          <a:fontRef idx="minor">
+            <a:schemeClr val="lt1"/>
+          </a:fontRef>
+        </p:style>
+        <p:txBody>
+          <a:bodyPr rtlCol="0" anchor="ctr" wrap="square" lIns="54864" rIns="54864" tIns="27432" bIns="27432"/>
+          <a:lstStyle/>
+          <a:p>
+            <a:pPr algn="ctr" marL="0" indent="0">
+              <a:spcBef>
+                <a:spcPts val="0"/>
+              </a:spcBef>
+              <a:spcAft>
+                <a:spcPts val="0"/>
+              </a:spcAft>
+              <a:buNone/>
+            </a:pPr>
+            <a:r>
+              <a:rPr sz="1100" b="1" i="0">
+                <a:solidFill>
+                  <a:srgbClr val="3E3E44"/>
+                </a:solidFill>
+              </a:rPr>
+              <a:t>Python 3.11+ · FastAPI</a:t>
+            </a:r>
+          </a:p>
+        </p:txBody>
+      </p:sp>
+      <p:sp>
+        <p:nvSpPr>
+          <p:cNvPr id="17450" name="cd-stack"/>
+          <p:cNvSpPr/>
+          <p:nvPr/>
+        </p:nvSpPr>
+        <p:spPr>
+          <a:xfrm>
+            <a:off x="2333243" y="5541264"/>
+            <a:ext cx="1784603" cy="365760"/>
+          </a:xfrm>
+          <a:prstGeom prst="roundRect">
+            <a:avLst>
+              <a:gd name="adj" fmla="val 9000"/>
+            </a:avLst>
+          </a:prstGeom>
+          <a:solidFill>
+            <a:srgbClr val="ECE9E3"/>
+          </a:solidFill>
+          <a:ln w="9525">
+            <a:solidFill>
+              <a:srgbClr val="D2D0CB"/>
+            </a:solidFill>
+          </a:ln>
+          <a:effectLst/>
+        </p:spPr>
+        <p:style>
+          <a:lnRef idx="1">
+            <a:schemeClr val="accent1"/>
+          </a:lnRef>
+          <a:fillRef idx="3">
+            <a:schemeClr val="accent1"/>
+          </a:fillRef>
+          <a:effectRef idx="2">
+            <a:schemeClr val="accent1"/>
+          </a:effectRef>
+          <a:fontRef idx="minor">
+            <a:schemeClr val="lt1"/>
+          </a:fontRef>
+        </p:style>
+        <p:txBody>
+          <a:bodyPr rtlCol="0" anchor="ctr" wrap="square" lIns="54864" rIns="54864" tIns="27432" bIns="27432"/>
+          <a:lstStyle/>
+          <a:p>
+            <a:pPr algn="ctr" marL="0" indent="0">
+              <a:spcBef>
+                <a:spcPts val="0"/>
+              </a:spcBef>
+              <a:spcAft>
+                <a:spcPts val="0"/>
+              </a:spcAft>
+              <a:buNone/>
+            </a:pPr>
+            <a:r>
+              <a:rPr sz="1100" b="1" i="0">
+                <a:solidFill>
+                  <a:srgbClr val="3E3E44"/>
+                </a:solidFill>
+              </a:rPr>
+              <a:t>SQLite (WAL)</a:t>
+            </a:r>
+          </a:p>
+        </p:txBody>
+      </p:sp>
+      <p:sp>
+        <p:nvSpPr>
+          <p:cNvPr id="17451" name="cd-stack"/>
+          <p:cNvSpPr/>
+          <p:nvPr/>
+        </p:nvSpPr>
+        <p:spPr>
+          <a:xfrm>
+            <a:off x="4245863" y="5541264"/>
+            <a:ext cx="1784603" cy="365760"/>
+          </a:xfrm>
+          <a:prstGeom prst="roundRect">
+            <a:avLst>
+              <a:gd name="adj" fmla="val 9000"/>
+            </a:avLst>
+          </a:prstGeom>
+          <a:solidFill>
+            <a:srgbClr val="ECE9E3"/>
+          </a:solidFill>
+          <a:ln w="9525">
+            <a:solidFill>
+              <a:srgbClr val="D2D0CB"/>
+            </a:solidFill>
+          </a:ln>
+          <a:effectLst/>
+        </p:spPr>
+        <p:style>
+          <a:lnRef idx="1">
+            <a:schemeClr val="accent1"/>
+          </a:lnRef>
+          <a:fillRef idx="3">
+            <a:schemeClr val="accent1"/>
+          </a:fillRef>
+          <a:effectRef idx="2">
+            <a:schemeClr val="accent1"/>
+          </a:effectRef>
+          <a:fontRef idx="minor">
+            <a:schemeClr val="lt1"/>
+          </a:fontRef>
+        </p:style>
+        <p:txBody>
+          <a:bodyPr rtlCol="0" anchor="ctr" wrap="square" lIns="54864" rIns="54864" tIns="27432" bIns="27432"/>
+          <a:lstStyle/>
+          <a:p>
+            <a:pPr algn="ctr" marL="0" indent="0">
+              <a:spcBef>
+                <a:spcPts val="0"/>
+              </a:spcBef>
+              <a:spcAft>
+                <a:spcPts val="0"/>
+              </a:spcAft>
+              <a:buNone/>
+            </a:pPr>
+            <a:r>
+              <a:rPr sz="1100" b="1" i="0">
+                <a:solidFill>
+                  <a:srgbClr val="3E3E44"/>
+                </a:solidFill>
+              </a:rPr>
+              <a:t>Vanilla JS console</a:t>
+            </a:r>
+          </a:p>
+        </p:txBody>
+      </p:sp>
+      <p:sp>
+        <p:nvSpPr>
+          <p:cNvPr id="17452" name="cd-stack"/>
+          <p:cNvSpPr/>
+          <p:nvPr/>
+        </p:nvSpPr>
+        <p:spPr>
+          <a:xfrm>
+            <a:off x="6158483" y="5541264"/>
+            <a:ext cx="1784603" cy="365760"/>
+          </a:xfrm>
+          <a:prstGeom prst="roundRect">
+            <a:avLst>
+              <a:gd name="adj" fmla="val 9000"/>
+            </a:avLst>
+          </a:prstGeom>
+          <a:solidFill>
+            <a:srgbClr val="ECE9E3"/>
+          </a:solidFill>
+          <a:ln w="9525">
+            <a:solidFill>
+              <a:srgbClr val="D2D0CB"/>
+            </a:solidFill>
+          </a:ln>
+          <a:effectLst/>
+        </p:spPr>
+        <p:style>
+          <a:lnRef idx="1">
+            <a:schemeClr val="accent1"/>
+          </a:lnRef>
+          <a:fillRef idx="3">
+            <a:schemeClr val="accent1"/>
+          </a:fillRef>
+          <a:effectRef idx="2">
+            <a:schemeClr val="accent1"/>
+          </a:effectRef>
+          <a:fontRef idx="minor">
+            <a:schemeClr val="lt1"/>
+          </a:fontRef>
+        </p:style>
+        <p:txBody>
+          <a:bodyPr rtlCol="0" anchor="ctr" wrap="square" lIns="54864" rIns="54864" tIns="27432" bIns="27432"/>
+          <a:lstStyle/>
+          <a:p>
+            <a:pPr algn="ctr" marL="0" indent="0">
+              <a:spcBef>
+                <a:spcPts val="0"/>
+              </a:spcBef>
+              <a:spcAft>
+                <a:spcPts val="0"/>
+              </a:spcAft>
+              <a:buNone/>
+            </a:pPr>
+            <a:r>
+              <a:rPr sz="1100" b="1" i="0">
+                <a:solidFill>
+                  <a:srgbClr val="3E3E44"/>
+                </a:solidFill>
+              </a:rPr>
+              <a:t>60 rules · 8 languages</a:t>
+            </a:r>
+          </a:p>
+        </p:txBody>
+      </p:sp>
+      <p:sp>
+        <p:nvSpPr>
+          <p:cNvPr id="17453" name="cd-stack"/>
+          <p:cNvSpPr/>
+          <p:nvPr/>
+        </p:nvSpPr>
+        <p:spPr>
+          <a:xfrm>
+            <a:off x="8071104" y="5541264"/>
+            <a:ext cx="1784603" cy="365760"/>
+          </a:xfrm>
+          <a:prstGeom prst="roundRect">
+            <a:avLst>
+              <a:gd name="adj" fmla="val 9000"/>
+            </a:avLst>
+          </a:prstGeom>
+          <a:solidFill>
+            <a:srgbClr val="ECE9E3"/>
+          </a:solidFill>
+          <a:ln w="9525">
+            <a:solidFill>
+              <a:srgbClr val="D2D0CB"/>
+            </a:solidFill>
+          </a:ln>
+          <a:effectLst/>
+        </p:spPr>
+        <p:style>
+          <a:lnRef idx="1">
+            <a:schemeClr val="accent1"/>
+          </a:lnRef>
+          <a:fillRef idx="3">
+            <a:schemeClr val="accent1"/>
+          </a:fillRef>
+          <a:effectRef idx="2">
+            <a:schemeClr val="accent1"/>
+          </a:effectRef>
+          <a:fontRef idx="minor">
+            <a:schemeClr val="lt1"/>
+          </a:fontRef>
+        </p:style>
+        <p:txBody>
+          <a:bodyPr rtlCol="0" anchor="ctr" wrap="square" lIns="54864" rIns="54864" tIns="27432" bIns="27432"/>
+          <a:lstStyle/>
+          <a:p>
+            <a:pPr algn="ctr" marL="0" indent="0">
+              <a:spcBef>
+                <a:spcPts val="0"/>
+              </a:spcBef>
+              <a:spcAft>
+                <a:spcPts val="0"/>
+              </a:spcAft>
+              <a:buNone/>
+            </a:pPr>
+            <a:r>
+              <a:rPr sz="1100" b="1" i="0">
+                <a:solidFill>
+                  <a:srgbClr val="3E3E44"/>
+                </a:solidFill>
+              </a:rPr>
+              <a:t>ELF symbol parsing</a:t>
+            </a:r>
+          </a:p>
+        </p:txBody>
+      </p:sp>
+      <p:sp>
+        <p:nvSpPr>
+          <p:cNvPr id="17454" name="cd-stack"/>
+          <p:cNvSpPr/>
+          <p:nvPr/>
+        </p:nvSpPr>
+        <p:spPr>
+          <a:xfrm>
+            <a:off x="9983724" y="5541264"/>
+            <a:ext cx="1784603" cy="365760"/>
+          </a:xfrm>
+          <a:prstGeom prst="roundRect">
+            <a:avLst>
+              <a:gd name="adj" fmla="val 9000"/>
+            </a:avLst>
+          </a:prstGeom>
+          <a:solidFill>
+            <a:srgbClr val="ECE9E3"/>
+          </a:solidFill>
+          <a:ln w="9525">
+            <a:solidFill>
+              <a:srgbClr val="D2D0CB"/>
+            </a:solidFill>
+          </a:ln>
+          <a:effectLst/>
+        </p:spPr>
+        <p:style>
+          <a:lnRef idx="1">
+            <a:schemeClr val="accent1"/>
+          </a:lnRef>
+          <a:fillRef idx="3">
+            <a:schemeClr val="accent1"/>
+          </a:fillRef>
+          <a:effectRef idx="2">
+            <a:schemeClr val="accent1"/>
+          </a:effectRef>
+          <a:fontRef idx="minor">
+            <a:schemeClr val="lt1"/>
+          </a:fontRef>
+        </p:style>
+        <p:txBody>
+          <a:bodyPr rtlCol="0" anchor="ctr" wrap="square" lIns="54864" rIns="54864" tIns="27432" bIns="27432"/>
+          <a:lstStyle/>
+          <a:p>
+            <a:pPr algn="ctr" marL="0" indent="0">
+              <a:spcBef>
+                <a:spcPts val="0"/>
+              </a:spcBef>
+              <a:spcAft>
+                <a:spcPts val="0"/>
+              </a:spcAft>
+              <a:buNone/>
+            </a:pPr>
+            <a:r>
+              <a:rPr sz="1100" b="1" i="0">
+                <a:solidFill>
+                  <a:srgbClr val="3E3E44"/>
+                </a:solidFill>
+              </a:rPr>
+              <a:t>CycloneDX 1.6 / 1.7</a:t>
             </a:r>
           </a:p>
         </p:txBody>
@@ -8900,7 +10362,7 @@
         <p:spPr bwMode="auto">
           <a:xfrm>
             <a:off x="420624" y="1097280"/>
-            <a:ext cx="6510528" cy="4937760"/>
+            <a:ext cx="5413248" cy="4535424"/>
           </a:xfrm>
           <a:prstGeom prst="rect">
             <a:avLst/>
@@ -8936,12 +10398,12 @@
               <a:defRPr/>
             </a:pPr>
             <a:r>
-              <a:rPr sz="2100" b="1" i="0">
+              <a:rPr sz="1800" b="1" i="0">
                 <a:solidFill>
                   <a:srgbClr val="9E3A24"/>
                 </a:solidFill>
               </a:rPr>
-              <a:t>Implemented prototype</a:t>
+              <a:t>Implemented</a:t>
             </a:r>
             <a:endParaRPr kumimoji="0" lang="en-US" sz="2800" b="0" i="0" u="none" strike="noStrike" kern="1200" cap="none" spc="0" normalizeH="0" baseline="0" noProof="0" dirty="0">
               <a:ln>
@@ -8970,7 +10432,7 @@
               <a:buChar char="–"/>
             </a:pPr>
             <a:r>
-              <a:rPr sz="1500" b="0" i="0">
+              <a:rPr sz="1400" b="0" i="0">
                 <a:solidFill>
                   <a:srgbClr val="3E3E44"/>
                 </a:solidFill>
@@ -8990,7 +10452,7 @@
               <a:buChar char="–"/>
             </a:pPr>
             <a:r>
-              <a:rPr sz="1500" b="0" i="0">
+              <a:rPr sz="1400" b="0" i="0">
                 <a:solidFill>
                   <a:srgbClr val="3E3E44"/>
                 </a:solidFill>
@@ -9010,12 +10472,31 @@
               <a:buChar char="–"/>
             </a:pPr>
             <a:r>
-              <a:rPr sz="1500" b="0" i="0">
+              <a:rPr sz="1400" b="0" i="0">
                 <a:solidFill>
                   <a:srgbClr val="3E3E44"/>
                 </a:solidFill>
               </a:rPr>
               <a:t>A quantum-risk model taking operator-supplied shelf life, criticality and constraints, saved per asset and surviving a rescan</a:t>
+            </a:r>
+          </a:p>
+          <a:p>
+            <a:pPr marL="0" indent="0">
+              <a:spcBef>
+                <a:spcPts val="800"/>
+              </a:spcBef>
+              <a:spcAft>
+                <a:spcPts val="500"/>
+              </a:spcAft>
+              <a:buNone/>
+            </a:pPr>
+            <a:r>
+              <a:rPr sz="1800" b="1" i="0">
+                <a:solidFill>
+                  <a:srgbClr val="9E3A24"/>
+                </a:solidFill>
+              </a:rPr>
+              <a:t>Validated</a:t>
             </a:r>
           </a:p>
           <a:p>
@@ -9030,12 +10511,20 @@
               <a:buChar char="–"/>
             </a:pPr>
             <a:r>
-              <a:rPr sz="1500" b="0" i="0">
+              <a:rPr sz="1400" b="1" i="0">
+                <a:solidFill>
+                  <a:srgbClr val="1A1A1C"/>
+                </a:solidFill>
+              </a:rPr>
+              <a:t>664 automated tests — </a:t>
+            </a:r>
+            <a:r>
+              <a:rPr sz="1400" b="0" i="0">
                 <a:solidFill>
                   <a:srgbClr val="3E3E44"/>
                 </a:solidFill>
               </a:rPr>
-              <a:t>Interactive investigation: filters, an evidence drawer, scan history</a:t>
+              <a:t>on Python 3.11, 3.12 and 3.13 in CI</a:t>
             </a:r>
           </a:p>
           <a:p>
@@ -9050,31 +10539,20 @@
               <a:buChar char="–"/>
             </a:pPr>
             <a:r>
-              <a:rPr sz="1500" b="0" i="0">
+              <a:rPr sz="1400" b="1" i="0">
+                <a:solidFill>
+                  <a:srgbClr val="1A1A1C"/>
+                </a:solidFill>
+              </a:rPr>
+              <a:t>Official schema validation — </a:t>
+            </a:r>
+            <a:r>
+              <a:rPr sz="1400" b="0" i="0">
                 <a:solidFill>
                   <a:srgbClr val="3E3E44"/>
                 </a:solidFill>
               </a:rPr>
-              <a:t>CycloneDX 1.6 / 1.7 export and a self-contained HTML report reaching every finding</a:t>
-            </a:r>
-          </a:p>
-          <a:p>
-            <a:pPr marL="0" indent="0">
-              <a:spcBef>
-                <a:spcPts val="900"/>
-              </a:spcBef>
-              <a:spcAft>
-                <a:spcPts val="500"/>
-              </a:spcAft>
-              <a:buNone/>
-            </a:pPr>
-            <a:r>
-              <a:rPr sz="2100" b="1" i="0">
-                <a:solidFill>
-                  <a:srgbClr val="9E3A24"/>
-                </a:solidFill>
-              </a:rPr>
-              <a:t>Validation</a:t>
+              <a:t>every CBOM checked offline against the CycloneDX schemas at pinned commit 0bd48c8; CI fails on a violation</a:t>
             </a:r>
           </a:p>
           <a:p>
@@ -9089,104 +10567,58 @@
               <a:buChar char="–"/>
             </a:pPr>
             <a:r>
-              <a:rPr sz="1500" b="1" i="0">
+              <a:rPr sz="1400" b="1" i="0">
                 <a:solidFill>
                   <a:srgbClr val="1A1A1C"/>
                 </a:solidFill>
               </a:rPr>
-              <a:t>664 automated tests — </a:t>
-            </a:r>
-            <a:r>
-              <a:rPr sz="1500" b="0" i="0">
+              <a:t>Hand-labelled benchmark — </a:t>
+            </a:r>
+            <a:r>
+              <a:rPr sz="1400" b="0" i="0">
                 <a:solidFill>
                   <a:srgbClr val="3E3E44"/>
                 </a:solidFill>
               </a:rPr>
-              <a:t>on Python 3.11, 3.12 and 3.13 in CI</a:t>
-            </a:r>
-          </a:p>
-          <a:p>
-            <a:pPr marL="146050" indent="-146050">
-              <a:spcBef>
-                <a:spcPts val="0"/>
-              </a:spcBef>
-              <a:spcAft>
-                <a:spcPts val="400"/>
-              </a:spcAft>
-              <a:buFont typeface="Arial"/>
-              <a:buChar char="–"/>
-            </a:pPr>
-            <a:r>
-              <a:rPr sz="1500" b="1" i="0">
-                <a:solidFill>
-                  <a:srgbClr val="1A1A1C"/>
-                </a:solidFill>
-              </a:rPr>
-              <a:t>Official schema validation — </a:t>
-            </a:r>
-            <a:r>
-              <a:rPr sz="1500" b="0" i="0">
+              <a:t>116 findings over six scanners, labelled from the fixtures, not from the tool's output</a:t>
+            </a:r>
+          </a:p>
+          <a:p>
+            <a:pPr marL="0" indent="0">
+              <a:spcBef>
+                <a:spcPts val="800"/>
+              </a:spcBef>
+              <a:spcAft>
+                <a:spcPts val="500"/>
+              </a:spcAft>
+              <a:buNone/>
+            </a:pPr>
+            <a:r>
+              <a:rPr sz="1800" b="1" i="0">
+                <a:solidFill>
+                  <a:srgbClr val="9E3A24"/>
+                </a:solidFill>
+              </a:rPr>
+              <a:t>Feasible to deploy</a:t>
+            </a:r>
+          </a:p>
+          <a:p>
+            <a:pPr marL="0" indent="0">
+              <a:spcBef>
+                <a:spcPts val="0"/>
+              </a:spcBef>
+              <a:spcAft>
+                <a:spcPts val="0"/>
+              </a:spcAft>
+              <a:buNone/>
+            </a:pPr>
+            <a:r>
+              <a:rPr sz="1400" b="0" i="0">
                 <a:solidFill>
                   <a:srgbClr val="3E3E44"/>
                 </a:solidFill>
               </a:rPr>
-              <a:t>every CBOM checked offline against the CycloneDX schemas at pinned commit 0bd48c8; CI fails on a violation</a:t>
-            </a:r>
-          </a:p>
-          <a:p>
-            <a:pPr marL="146050" indent="-146050">
-              <a:spcBef>
-                <a:spcPts val="0"/>
-              </a:spcBef>
-              <a:spcAft>
-                <a:spcPts val="400"/>
-              </a:spcAft>
-              <a:buFont typeface="Arial"/>
-              <a:buChar char="–"/>
-            </a:pPr>
-            <a:r>
-              <a:rPr sz="1500" b="1" i="0">
-                <a:solidFill>
-                  <a:srgbClr val="1A1A1C"/>
-                </a:solidFill>
-              </a:rPr>
-              <a:t>Hand-labelled benchmark — </a:t>
-            </a:r>
-            <a:r>
-              <a:rPr sz="1500" b="0" i="0">
-                <a:solidFill>
-                  <a:srgbClr val="3E3E44"/>
-                </a:solidFill>
-              </a:rPr>
-              <a:t>116 findings over six scanners, labelled from the fixtures, not from the tool's output</a:t>
-            </a:r>
-          </a:p>
-          <a:p>
-            <a:pPr marL="146050" indent="-146050">
-              <a:spcBef>
-                <a:spcPts val="0"/>
-              </a:spcBef>
-              <a:spcAft>
-                <a:spcPts val="400"/>
-              </a:spcAft>
-              <a:buFont typeface="Arial"/>
-              <a:buChar char="–"/>
-            </a:pPr>
-            <a:r>
-              <a:rPr sz="1500" b="1" i="0">
-                <a:solidFill>
-                  <a:srgbClr val="1A1A1C"/>
-                </a:solidFill>
-              </a:rPr>
-              <a:t>A test per defect found — </a:t>
-            </a:r>
-            <a:r>
-              <a:rPr sz="1500" b="0" i="0">
-                <a:solidFill>
-                  <a:srgbClr val="3E3E44"/>
-                </a:solidFill>
-              </a:rPr>
-              <a:t>the benchmark caught seven detector defects code review had missed</a:t>
+              <a:t>The tool is local-first: one machine, loopback by default, no cloud service, and it validates its own output offline. Committed demo fixtures reproduce every figure in this deck with one command.</a:t>
             </a:r>
           </a:p>
         </p:txBody>
@@ -9426,9 +10858,51 @@
           </a:prstGeom>
         </p:spPr>
       </p:pic>
+      <p:sp>
+        <p:nvSpPr>
+          <p:cNvPr id="17411" name="cd-limits"/>
+          <p:cNvSpPr txBox="1"/>
+          <p:nvPr/>
+        </p:nvSpPr>
+        <p:spPr>
+          <a:xfrm>
+            <a:off x="420624" y="5724144"/>
+            <a:ext cx="5413248" cy="512064"/>
+          </a:xfrm>
+          <a:prstGeom prst="rect">
+            <a:avLst/>
+          </a:prstGeom>
+          <a:noFill/>
+        </p:spPr>
+        <p:txBody>
+          <a:bodyPr wrap="square" lIns="0" rIns="0" tIns="0" bIns="0">
+            <a:spAutoFit/>
+          </a:bodyPr>
+          <a:lstStyle/>
+          <a:p>
+            <a:pPr algn="l" marL="0" indent="0">
+              <a:spcBef>
+                <a:spcPts val="0"/>
+              </a:spcBef>
+              <a:spcAft>
+                <a:spcPts val="0"/>
+              </a:spcAft>
+              <a:buNone/>
+            </a:pPr>
+            <a:r>
+              <a:rPr sz="1050" b="0" i="1">
+                <a:solidFill>
+                  <a:srgbClr val="63636B"/>
+                </a:solidFill>
+              </a:rPr>
+              <a:t>Limits — Full AST analysis is Python only; seven further languages use rule packs, and Rust and Swift are recognised but effectively uncovered. Binary parsing is ELF only. No KMS, HSM, cloud or Kubernetes integration. A working prototype, not a deployed product.</a:t>
+            </a:r>
+          </a:p>
+        </p:txBody>
+      </p:sp>
       <p:pic>
         <p:nvPicPr>
-          <p:cNvPr id="17411" name="cd-shot-01-assessment-0.30" descr="01-assessment-0.300-0.115-0.990-0.725.png"/>
+          <p:cNvPr id="17412" name="cd-shot-01-assessment-0.31" descr="01-assessment-0.316-0.112-0.990-0.468.png"/>
           <p:cNvPicPr>
             <a:picLocks noChangeAspect="1"/>
           </p:cNvPicPr>
@@ -9442,8 +10916,8 @@
         </p:blipFill>
         <p:spPr>
           <a:xfrm>
-            <a:off x="7278624" y="1133856"/>
-            <a:ext cx="4489703" cy="2481152"/>
+            <a:off x="6126480" y="1097280"/>
+            <a:ext cx="5641847" cy="1860689"/>
           </a:xfrm>
           <a:prstGeom prst="rect">
             <a:avLst/>
@@ -9452,14 +10926,14 @@
       </p:pic>
       <p:sp>
         <p:nvSpPr>
-          <p:cNvPr id="17412" name="cd-caption"/>
+          <p:cNvPr id="17413" name="cd-caption"/>
           <p:cNvSpPr txBox="1"/>
           <p:nvPr/>
         </p:nvSpPr>
         <p:spPr>
           <a:xfrm>
-            <a:off x="7278624" y="3715592"/>
-            <a:ext cx="4489703" cy="274320"/>
+            <a:off x="6126480" y="3031121"/>
+            <a:ext cx="5641847" cy="274320"/>
           </a:xfrm>
           <a:prstGeom prst="rect">
             <a:avLst/>
@@ -9487,21 +10961,45 @@
                   <a:srgbClr val="63636B"/>
                 </a:solidFill>
               </a:rPr>
-              <a:t>Live console, demo estate — the partial-scan warning names the refused endpoint, above the real counts.</a:t>
-            </a:r>
-          </a:p>
-        </p:txBody>
-      </p:sp>
-      <p:sp>
-        <p:nvSpPr>
-          <p:cNvPr id="17413" name="cd-feas"/>
+              <a:t>Assessment — the scan states its own completeness first: one endpoint refused, so the inventory is marked PARTIAL.</a:t>
+            </a:r>
+          </a:p>
+        </p:txBody>
+      </p:sp>
+      <p:pic>
+        <p:nvPicPr>
+          <p:cNvPr id="17414" name="cd-shot-07-evidence-drawer" descr="07-evidence-drawer-0.020-0.118-0.990-0.302.png"/>
+          <p:cNvPicPr>
+            <a:picLocks noChangeAspect="1"/>
+          </p:cNvPicPr>
+          <p:nvPr/>
+        </p:nvPicPr>
+        <p:blipFill>
+          <a:blip r:embed="rId5"/>
+          <a:stretch>
+            <a:fillRect/>
+          </a:stretch>
+        </p:blipFill>
+        <p:spPr>
+          <a:xfrm>
+            <a:off x="6126480" y="3561473"/>
+            <a:ext cx="5641847" cy="2083392"/>
+          </a:xfrm>
+          <a:prstGeom prst="rect">
+            <a:avLst/>
+          </a:prstGeom>
+        </p:spPr>
+      </p:pic>
+      <p:sp>
+        <p:nvSpPr>
+          <p:cNvPr id="17415" name="cd-caption"/>
           <p:cNvSpPr txBox="1"/>
           <p:nvPr/>
         </p:nvSpPr>
         <p:spPr>
           <a:xfrm>
-            <a:off x="7278624" y="4224528"/>
-            <a:ext cx="4489703" cy="2011680"/>
+            <a:off x="6126480" y="5718017"/>
+            <a:ext cx="5641847" cy="274320"/>
           </a:xfrm>
           <a:prstGeom prst="rect">
             <a:avLst/>
@@ -9519,52 +11017,17 @@
                 <a:spcPts val="0"/>
               </a:spcBef>
               <a:spcAft>
-                <a:spcPts val="400"/>
-              </a:spcAft>
-              <a:buNone/>
-            </a:pPr>
-            <a:r>
-              <a:rPr sz="1500" b="1" i="0">
-                <a:solidFill>
-                  <a:srgbClr val="1A1A1C"/>
-                </a:solidFill>
-              </a:rPr>
-              <a:t>Why deployment is feasible — </a:t>
-            </a:r>
-            <a:r>
-              <a:rPr sz="1500" b="0" i="0">
-                <a:solidFill>
-                  <a:srgbClr val="3E3E44"/>
-                </a:solidFill>
-              </a:rPr>
-              <a:t>The tool is local-first: one machine, loopback by default, no cloud service, and it validates its own output offline. Committed demo fixtures reproduce every figure in this deck with one command.</a:t>
-            </a:r>
-          </a:p>
-          <a:p>
-            <a:pPr marL="0" indent="0">
-              <a:spcBef>
-                <a:spcPts val="0"/>
-              </a:spcBef>
-              <a:spcAft>
-                <a:spcPts val="0"/>
-              </a:spcAft>
-              <a:buNone/>
-            </a:pPr>
-            <a:r>
-              <a:rPr sz="1300" b="1" i="0">
-                <a:solidFill>
-                  <a:srgbClr val="1A1A1C"/>
-                </a:solidFill>
-              </a:rPr>
-              <a:t>Current limits — </a:t>
-            </a:r>
-            <a:r>
-              <a:rPr sz="1300" b="0" i="0">
+                <a:spcPts val="0"/>
+              </a:spcAft>
+              <a:buNone/>
+            </a:pPr>
+            <a:r>
+              <a:rPr sz="1300" b="0" i="1">
                 <a:solidFill>
                   <a:srgbClr val="63636B"/>
                 </a:solidFill>
               </a:rPr>
-              <a:t>Full AST analysis is Python only; seven further languages use rule packs, and Rust and Swift are recognised but effectively uncovered. Binary parsing is ELF only. No KMS, HSM, cloud or Kubernetes integration. A working prototype, not a deployed product.</a:t>
+              <a:t>Evidence drawer — purpose, assurance and the exposure arithmetic behind one finding's score.</a:t>
             </a:r>
           </a:p>
         </p:txBody>
@@ -9716,7 +11179,7 @@
         <p:spPr bwMode="auto">
           <a:xfrm>
             <a:off x="420624" y="1097280"/>
-            <a:ext cx="6035040" cy="4663440"/>
+            <a:ext cx="11347703" cy="292608"/>
           </a:xfrm>
           <a:prstGeom prst="rect">
             <a:avLst/>
@@ -9752,185 +11215,12 @@
               <a:defRPr/>
             </a:pPr>
             <a:r>
-              <a:rPr sz="2100" b="1" i="0">
+              <a:rPr sz="1900" b="1" i="0">
                 <a:solidFill>
                   <a:srgbClr val="9E3A24"/>
                 </a:solidFill>
               </a:rPr>
-              <a:t>How a migration team actually uses the output</a:t>
-            </a:r>
-          </a:p>
-          <a:p>
-            <a:pPr marL="0" indent="0">
-              <a:spcBef>
-                <a:spcPts val="0"/>
-              </a:spcBef>
-              <a:spcAft>
-                <a:spcPts val="700"/>
-              </a:spcAft>
-              <a:buNone/>
-            </a:pPr>
-            <a:r>
-              <a:rPr sz="1600" b="1" i="0">
-                <a:solidFill>
-                  <a:srgbClr val="1B3A6B"/>
-                </a:solidFill>
-              </a:rPr>
-              <a:t>DISCOVER  </a:t>
-            </a:r>
-            <a:r>
-              <a:rPr sz="1600" b="0" i="0">
-                <a:solidFill>
-                  <a:srgbClr val="3E3E44"/>
-                </a:solidFill>
-              </a:rPr>
-              <a:t>Build an inventory of the cryptographic assets present across the supported surfaces.</a:t>
-            </a:r>
-          </a:p>
-          <a:p>
-            <a:pPr marL="0" indent="0">
-              <a:spcBef>
-                <a:spcPts val="0"/>
-              </a:spcBef>
-              <a:spcAft>
-                <a:spcPts val="700"/>
-              </a:spcAft>
-              <a:buNone/>
-            </a:pPr>
-            <a:r>
-              <a:rPr sz="1600" b="1" i="0">
-                <a:solidFill>
-                  <a:srgbClr val="1B3A6B"/>
-                </a:solidFill>
-              </a:rPr>
-              <a:t>UNDERSTAND  </a:t>
-            </a:r>
-            <a:r>
-              <a:rPr sz="1600" b="0" i="0">
-                <a:solidFill>
-                  <a:srgbClr val="3E3E44"/>
-                </a:solidFill>
-              </a:rPr>
-              <a:t>For each asset: the algorithm, the purpose it serves, how strong the evidence is, and exactly where it lives.</a:t>
-            </a:r>
-          </a:p>
-          <a:p>
-            <a:pPr marL="0" indent="0">
-              <a:spcBef>
-                <a:spcPts val="0"/>
-              </a:spcBef>
-              <a:spcAft>
-                <a:spcPts val="700"/>
-              </a:spcAft>
-              <a:buNone/>
-            </a:pPr>
-            <a:r>
-              <a:rPr sz="1600" b="1" i="0">
-                <a:solidFill>
-                  <a:srgbClr val="1B3A6B"/>
-                </a:solidFill>
-              </a:rPr>
-              <a:t>PRIORITISE  </a:t>
-            </a:r>
-            <a:r>
-              <a:rPr sz="1600" b="0" i="0">
-                <a:solidFill>
-                  <a:srgbClr val="3E3E44"/>
-                </a:solidFill>
-              </a:rPr>
-              <a:t>Assess quantum exposure with documented assumptions and operator-supplied asset context, so the order of work is defensible.</a:t>
-            </a:r>
-          </a:p>
-          <a:p>
-            <a:pPr marL="0" indent="0">
-              <a:spcBef>
-                <a:spcPts val="0"/>
-              </a:spcBef>
-              <a:spcAft>
-                <a:spcPts val="700"/>
-              </a:spcAft>
-              <a:buNone/>
-            </a:pPr>
-            <a:r>
-              <a:rPr sz="1600" b="1" i="0">
-                <a:solidFill>
-                  <a:srgbClr val="1B3A6B"/>
-                </a:solidFill>
-              </a:rPr>
-              <a:t>PLAN  </a:t>
-            </a:r>
-            <a:r>
-              <a:rPr sz="1600" b="0" i="0">
-                <a:solidFill>
-                  <a:srgbClr val="3E3E44"/>
-                </a:solidFill>
-              </a:rPr>
-              <a:t>Attach a purpose-appropriate migration target — or record that more evidence is needed before one can be chosen.</a:t>
-            </a:r>
-          </a:p>
-          <a:p>
-            <a:pPr marL="0" indent="0">
-              <a:spcBef>
-                <a:spcPts val="0"/>
-              </a:spcBef>
-              <a:spcAft>
-                <a:spcPts val="700"/>
-              </a:spcAft>
-              <a:buNone/>
-            </a:pPr>
-            <a:r>
-              <a:rPr sz="1600" b="1" i="0">
-                <a:solidFill>
-                  <a:srgbClr val="1B3A6B"/>
-                </a:solidFill>
-              </a:rPr>
-              <a:t>EXPORT  </a:t>
-            </a:r>
-            <a:r>
-              <a:rPr sz="1600" b="0" i="0">
-                <a:solidFill>
-                  <a:srgbClr val="3E3E44"/>
-                </a:solidFill>
-              </a:rPr>
-              <a:t>Produce a schema-validated CBOM and a traceable report that another team or tool can consume.</a:t>
-            </a:r>
-          </a:p>
-          <a:p>
-            <a:pPr marL="0" indent="0">
-              <a:spcBef>
-                <a:spcPts val="900"/>
-              </a:spcBef>
-              <a:spcAft>
-                <a:spcPts val="500"/>
-              </a:spcAft>
-              <a:buNone/>
-            </a:pPr>
-            <a:r>
-              <a:rPr sz="2100" b="1" i="0">
-                <a:solidFill>
-                  <a:srgbClr val="9E3A24"/>
-                </a:solidFill>
-              </a:rPr>
-              <a:t>Intended users</a:t>
-            </a:r>
-          </a:p>
-          <a:p>
-            <a:pPr marL="0" indent="0">
-              <a:spcBef>
-                <a:spcPts val="0"/>
-              </a:spcBef>
-              <a:spcAft>
-                <a:spcPts val="0"/>
-              </a:spcAft>
-              <a:buNone/>
-            </a:pPr>
-            <a:r>
-              <a:rPr sz="1500" b="0" i="0">
-                <a:solidFill>
-                  <a:srgbClr val="3E3E44"/>
-                </a:solidFill>
-              </a:rPr>
-              <a:t>Intended for security engineering teams, cryptographic inventory and migration-planning teams, and infrastructure operators. These are intended users; the tool has not been deployed in production.</a:t>
+              <a:t>What a migration team does with the output</a:t>
             </a:r>
           </a:p>
         </p:txBody>
@@ -10172,62 +11462,22 @@
       </p:pic>
       <p:sp>
         <p:nvSpPr>
-          <p:cNvPr id="17411" name="cd-bench-head"/>
-          <p:cNvSpPr txBox="1"/>
-          <p:nvPr/>
-        </p:nvSpPr>
-        <p:spPr>
-          <a:xfrm>
-            <a:off x="6876288" y="1097280"/>
-            <a:ext cx="4892040" cy="365760"/>
-          </a:xfrm>
-          <a:prstGeom prst="rect">
-            <a:avLst/>
-          </a:prstGeom>
-          <a:noFill/>
-        </p:spPr>
-        <p:txBody>
-          <a:bodyPr wrap="square" lIns="0" rIns="0" tIns="0" bIns="0">
-            <a:spAutoFit/>
-          </a:bodyPr>
-          <a:lstStyle/>
-          <a:p>
-            <a:pPr marL="0" indent="0">
-              <a:spcBef>
-                <a:spcPts val="0"/>
-              </a:spcBef>
-              <a:spcAft>
-                <a:spcPts val="500"/>
-              </a:spcAft>
-              <a:buNone/>
-            </a:pPr>
-            <a:r>
-              <a:rPr sz="2100" b="1" i="0">
-                <a:solidFill>
-                  <a:srgbClr val="9E3A24"/>
-                </a:solidFill>
-              </a:rPr>
-              <a:t>Benchmark evidence</a:t>
-            </a:r>
-          </a:p>
-        </p:txBody>
-      </p:sp>
-      <p:sp>
-        <p:nvSpPr>
-          <p:cNvPr id="17412" name="cd-bench-a"/>
+          <p:cNvPr id="17411" name="cd-stage"/>
           <p:cNvSpPr/>
           <p:nvPr/>
         </p:nvSpPr>
         <p:spPr>
           <a:xfrm>
-            <a:off x="6876288" y="1517904"/>
-            <a:ext cx="4892040" cy="1152144"/>
-          </a:xfrm>
-          <a:prstGeom prst="rect">
-            <a:avLst/>
+            <a:off x="420624" y="1517904"/>
+            <a:ext cx="2050084" cy="1316736"/>
+          </a:xfrm>
+          <a:prstGeom prst="roundRect">
+            <a:avLst>
+              <a:gd name="adj" fmla="val 9000"/>
+            </a:avLst>
           </a:prstGeom>
           <a:solidFill>
-            <a:srgbClr val="F4F2EE"/>
+            <a:srgbClr val="F5F3EF"/>
           </a:solidFill>
           <a:ln w="9525">
             <a:solidFill>
@@ -10251,23 +11501,58 @@
           </a:fontRef>
         </p:style>
         <p:txBody>
-          <a:bodyPr rtlCol="0" anchor="ctr"/>
-          <a:lstStyle/>
-          <a:p>
-            <a:pPr algn="ctr"/>
-          </a:p>
-        </p:txBody>
-      </p:sp>
-      <p:sp>
-        <p:nvSpPr>
-          <p:cNvPr id="17413" name="cd-panel-edge"/>
+          <a:bodyPr rtlCol="0" anchor="ctr" wrap="square" lIns="54864" rIns="54864" tIns="27432" bIns="27432"/>
+          <a:lstStyle/>
+          <a:p>
+            <a:pPr algn="ctr" marL="0" indent="0">
+              <a:spcBef>
+                <a:spcPts val="0"/>
+              </a:spcBef>
+              <a:spcAft>
+                <a:spcPts val="200"/>
+              </a:spcAft>
+              <a:buNone/>
+            </a:pPr>
+            <a:r>
+              <a:rPr sz="1350" b="1" i="0">
+                <a:solidFill>
+                  <a:srgbClr val="1B3A6B"/>
+                </a:solidFill>
+              </a:rPr>
+              <a:t>DISCOVER</a:t>
+            </a:r>
+          </a:p>
+          <a:p>
+            <a:pPr algn="ctr" marL="0" indent="0">
+              <a:spcBef>
+                <a:spcPts val="0"/>
+              </a:spcBef>
+              <a:spcAft>
+                <a:spcPts val="0"/>
+              </a:spcAft>
+              <a:buNone/>
+            </a:pPr>
+            <a:r>
+              <a:rPr sz="1100" b="0" i="0">
+                <a:solidFill>
+                  <a:srgbClr val="63636B"/>
+                </a:solidFill>
+              </a:rPr>
+              <a:t>Inventory the cryptographic assets that are actually present.</a:t>
+            </a:r>
+          </a:p>
+        </p:txBody>
+      </p:sp>
+      <p:sp>
+        <p:nvSpPr>
+          <p:cNvPr id="17412" name="cd-chip-edge"/>
           <p:cNvSpPr/>
           <p:nvPr/>
         </p:nvSpPr>
         <p:spPr>
           <a:xfrm>
-            <a:off x="6876288" y="1517904"/>
-            <a:ext cx="38100" cy="1152144"/>
+            <a:off x="420624" y="1517904"/>
+            <a:ext cx="40640" cy="1316736"/>
           </a:xfrm>
           <a:prstGeom prst="rect">
             <a:avLst/>
@@ -10304,132 +11589,66 @@
       </p:sp>
       <p:sp>
         <p:nvSpPr>
-          <p:cNvPr id="17414" name="cd-bench-at"/>
-          <p:cNvSpPr txBox="1"/>
-          <p:nvPr/>
-        </p:nvSpPr>
-        <p:spPr>
-          <a:xfrm>
-            <a:off x="7040879" y="1636776"/>
-            <a:ext cx="4581144" cy="950976"/>
-          </a:xfrm>
-          <a:prstGeom prst="rect">
-            <a:avLst/>
-          </a:prstGeom>
-          <a:noFill/>
-        </p:spPr>
-        <p:txBody>
-          <a:bodyPr wrap="square" lIns="0" rIns="0" tIns="0" bIns="0">
-            <a:spAutoFit/>
-          </a:bodyPr>
-          <a:lstStyle/>
-          <a:p>
-            <a:pPr marL="0" indent="0">
-              <a:spcBef>
-                <a:spcPts val="0"/>
-              </a:spcBef>
-              <a:spcAft>
-                <a:spcPts val="500"/>
-              </a:spcAft>
-              <a:buNone/>
-            </a:pPr>
-            <a:r>
-              <a:rPr sz="1500" b="1" i="0">
-                <a:solidFill>
-                  <a:srgbClr val="1A1A1C"/>
-                </a:solidFill>
-              </a:rPr>
-              <a:t>Like-for-like: the same corpus, before and after</a:t>
-            </a:r>
-          </a:p>
-          <a:p>
-            <a:pPr marL="0" indent="0">
-              <a:spcBef>
-                <a:spcPts val="0"/>
-              </a:spcBef>
-              <a:spcAft>
-                <a:spcPts val="300"/>
-              </a:spcAft>
-              <a:buNone/>
-            </a:pPr>
-            <a:r>
-              <a:rPr sz="1500" b="1" i="0">
-                <a:solidFill>
-                  <a:srgbClr val="3E3E44"/>
-                </a:solidFill>
-              </a:rPr>
-              <a:t>Baseline: </a:t>
-            </a:r>
-            <a:r>
-              <a:rPr sz="1500" b="0" i="0">
-                <a:solidFill>
-                  <a:srgbClr val="3E3E44"/>
-                </a:solidFill>
-              </a:rPr>
-              <a:t>79 TP · 5 FP · 5 FN   </a:t>
-            </a:r>
-            <a:r>
-              <a:rPr sz="1500" b="1" i="0">
-                <a:solidFill>
-                  <a:srgbClr val="9E3A24"/>
-                </a:solidFill>
-              </a:rPr>
-              <a:t>F1 0.941</a:t>
-            </a:r>
-          </a:p>
-          <a:p>
-            <a:pPr marL="0" indent="0">
-              <a:spcBef>
-                <a:spcPts val="0"/>
-              </a:spcBef>
-              <a:spcAft>
-                <a:spcPts val="300"/>
-              </a:spcAft>
-              <a:buNone/>
-            </a:pPr>
-            <a:r>
-              <a:rPr sz="1500" b="1" i="0">
-                <a:solidFill>
-                  <a:srgbClr val="3E3E44"/>
-                </a:solidFill>
-              </a:rPr>
-              <a:t>After detector fixes: </a:t>
-            </a:r>
-            <a:r>
-              <a:rPr sz="1500" b="0" i="0">
-                <a:solidFill>
-                  <a:srgbClr val="3E3E44"/>
-                </a:solidFill>
-              </a:rPr>
-              <a:t>84 TP · 3 FP · 0 FN   </a:t>
-            </a:r>
-            <a:r>
-              <a:rPr sz="1500" b="1" i="0">
-                <a:solidFill>
-                  <a:srgbClr val="9E3A24"/>
-                </a:solidFill>
-              </a:rPr>
-              <a:t>F1 0.983</a:t>
-            </a:r>
-          </a:p>
-        </p:txBody>
-      </p:sp>
-      <p:sp>
-        <p:nvSpPr>
-          <p:cNvPr id="17415" name="cd-bench-b"/>
+          <p:cNvPr id="17413" name="cd-arrow"/>
           <p:cNvSpPr/>
           <p:nvPr/>
         </p:nvSpPr>
         <p:spPr>
           <a:xfrm>
-            <a:off x="6876288" y="2834639"/>
-            <a:ext cx="4892040" cy="841248"/>
-          </a:xfrm>
-          <a:prstGeom prst="rect">
+            <a:off x="2516428" y="2066543"/>
+            <a:ext cx="182879" cy="219456"/>
+          </a:xfrm>
+          <a:prstGeom prst="rightArrow">
             <a:avLst/>
           </a:prstGeom>
           <a:solidFill>
-            <a:srgbClr val="F4F2EE"/>
+            <a:srgbClr val="D2D0CB"/>
+          </a:solidFill>
+          <a:ln>
+            <a:noFill/>
+          </a:ln>
+          <a:effectLst/>
+        </p:spPr>
+        <p:style>
+          <a:lnRef idx="1">
+            <a:schemeClr val="accent1"/>
+          </a:lnRef>
+          <a:fillRef idx="3">
+            <a:schemeClr val="accent1"/>
+          </a:fillRef>
+          <a:effectRef idx="2">
+            <a:schemeClr val="accent1"/>
+          </a:effectRef>
+          <a:fontRef idx="minor">
+            <a:schemeClr val="lt1"/>
+          </a:fontRef>
+        </p:style>
+        <p:txBody>
+          <a:bodyPr rtlCol="0" anchor="ctr"/>
+          <a:lstStyle/>
+          <a:p>
+            <a:pPr algn="ctr"/>
+          </a:p>
+        </p:txBody>
+      </p:sp>
+      <p:sp>
+        <p:nvSpPr>
+          <p:cNvPr id="17414" name="cd-stage"/>
+          <p:cNvSpPr/>
+          <p:nvPr/>
+        </p:nvSpPr>
+        <p:spPr>
+          <a:xfrm>
+            <a:off x="2745028" y="1517904"/>
+            <a:ext cx="2050084" cy="1316736"/>
+          </a:xfrm>
+          <a:prstGeom prst="roundRect">
+            <a:avLst>
+              <a:gd name="adj" fmla="val 9000"/>
+            </a:avLst>
+          </a:prstGeom>
+          <a:solidFill>
+            <a:srgbClr val="F5F3EF"/>
           </a:solidFill>
           <a:ln w="9525">
             <a:solidFill>
@@ -10453,23 +11672,58 @@
           </a:fontRef>
         </p:style>
         <p:txBody>
-          <a:bodyPr rtlCol="0" anchor="ctr"/>
-          <a:lstStyle/>
-          <a:p>
-            <a:pPr algn="ctr"/>
-          </a:p>
-        </p:txBody>
-      </p:sp>
-      <p:sp>
-        <p:nvSpPr>
-          <p:cNvPr id="17416" name="cd-panel-edge"/>
+          <a:bodyPr rtlCol="0" anchor="ctr" wrap="square" lIns="54864" rIns="54864" tIns="27432" bIns="27432"/>
+          <a:lstStyle/>
+          <a:p>
+            <a:pPr algn="ctr" marL="0" indent="0">
+              <a:spcBef>
+                <a:spcPts val="0"/>
+              </a:spcBef>
+              <a:spcAft>
+                <a:spcPts val="200"/>
+              </a:spcAft>
+              <a:buNone/>
+            </a:pPr>
+            <a:r>
+              <a:rPr sz="1350" b="1" i="0">
+                <a:solidFill>
+                  <a:srgbClr val="1B3A6B"/>
+                </a:solidFill>
+              </a:rPr>
+              <a:t>UNDERSTAND</a:t>
+            </a:r>
+          </a:p>
+          <a:p>
+            <a:pPr algn="ctr" marL="0" indent="0">
+              <a:spcBef>
+                <a:spcPts val="0"/>
+              </a:spcBef>
+              <a:spcAft>
+                <a:spcPts val="0"/>
+              </a:spcAft>
+              <a:buNone/>
+            </a:pPr>
+            <a:r>
+              <a:rPr sz="1100" b="0" i="0">
+                <a:solidFill>
+                  <a:srgbClr val="63636B"/>
+                </a:solidFill>
+              </a:rPr>
+              <a:t>Algorithm, purpose, evidence strength and exact location.</a:t>
+            </a:r>
+          </a:p>
+        </p:txBody>
+      </p:sp>
+      <p:sp>
+        <p:nvSpPr>
+          <p:cNvPr id="17415" name="cd-chip-edge"/>
           <p:cNvSpPr/>
           <p:nvPr/>
         </p:nvSpPr>
         <p:spPr>
           <a:xfrm>
-            <a:off x="6876288" y="2834639"/>
-            <a:ext cx="38100" cy="841248"/>
+            <a:off x="2745028" y="1517904"/>
+            <a:ext cx="40640" cy="1316736"/>
           </a:xfrm>
           <a:prstGeom prst="rect">
             <a:avLst/>
@@ -10506,14 +11760,527 @@
       </p:sp>
       <p:sp>
         <p:nvSpPr>
-          <p:cNvPr id="17417" name="cd-bench-bt"/>
+          <p:cNvPr id="17416" name="cd-arrow"/>
+          <p:cNvSpPr/>
+          <p:nvPr/>
+        </p:nvSpPr>
+        <p:spPr>
+          <a:xfrm>
+            <a:off x="4840833" y="2066543"/>
+            <a:ext cx="182879" cy="219456"/>
+          </a:xfrm>
+          <a:prstGeom prst="rightArrow">
+            <a:avLst/>
+          </a:prstGeom>
+          <a:solidFill>
+            <a:srgbClr val="D2D0CB"/>
+          </a:solidFill>
+          <a:ln>
+            <a:noFill/>
+          </a:ln>
+          <a:effectLst/>
+        </p:spPr>
+        <p:style>
+          <a:lnRef idx="1">
+            <a:schemeClr val="accent1"/>
+          </a:lnRef>
+          <a:fillRef idx="3">
+            <a:schemeClr val="accent1"/>
+          </a:fillRef>
+          <a:effectRef idx="2">
+            <a:schemeClr val="accent1"/>
+          </a:effectRef>
+          <a:fontRef idx="minor">
+            <a:schemeClr val="lt1"/>
+          </a:fontRef>
+        </p:style>
+        <p:txBody>
+          <a:bodyPr rtlCol="0" anchor="ctr"/>
+          <a:lstStyle/>
+          <a:p>
+            <a:pPr algn="ctr"/>
+          </a:p>
+        </p:txBody>
+      </p:sp>
+      <p:sp>
+        <p:nvSpPr>
+          <p:cNvPr id="17417" name="cd-stage"/>
+          <p:cNvSpPr/>
+          <p:nvPr/>
+        </p:nvSpPr>
+        <p:spPr>
+          <a:xfrm>
+            <a:off x="5069433" y="1517904"/>
+            <a:ext cx="2050084" cy="1316736"/>
+          </a:xfrm>
+          <a:prstGeom prst="roundRect">
+            <a:avLst>
+              <a:gd name="adj" fmla="val 9000"/>
+            </a:avLst>
+          </a:prstGeom>
+          <a:solidFill>
+            <a:srgbClr val="F5F3EF"/>
+          </a:solidFill>
+          <a:ln w="9525">
+            <a:solidFill>
+              <a:srgbClr val="D2D0CB"/>
+            </a:solidFill>
+          </a:ln>
+          <a:effectLst/>
+        </p:spPr>
+        <p:style>
+          <a:lnRef idx="1">
+            <a:schemeClr val="accent1"/>
+          </a:lnRef>
+          <a:fillRef idx="3">
+            <a:schemeClr val="accent1"/>
+          </a:fillRef>
+          <a:effectRef idx="2">
+            <a:schemeClr val="accent1"/>
+          </a:effectRef>
+          <a:fontRef idx="minor">
+            <a:schemeClr val="lt1"/>
+          </a:fontRef>
+        </p:style>
+        <p:txBody>
+          <a:bodyPr rtlCol="0" anchor="ctr" wrap="square" lIns="54864" rIns="54864" tIns="27432" bIns="27432"/>
+          <a:lstStyle/>
+          <a:p>
+            <a:pPr algn="ctr" marL="0" indent="0">
+              <a:spcBef>
+                <a:spcPts val="0"/>
+              </a:spcBef>
+              <a:spcAft>
+                <a:spcPts val="200"/>
+              </a:spcAft>
+              <a:buNone/>
+            </a:pPr>
+            <a:r>
+              <a:rPr sz="1350" b="1" i="0">
+                <a:solidFill>
+                  <a:srgbClr val="1B3A6B"/>
+                </a:solidFill>
+              </a:rPr>
+              <a:t>PRIORITISE</a:t>
+            </a:r>
+          </a:p>
+          <a:p>
+            <a:pPr algn="ctr" marL="0" indent="0">
+              <a:spcBef>
+                <a:spcPts val="0"/>
+              </a:spcBef>
+              <a:spcAft>
+                <a:spcPts val="0"/>
+              </a:spcAft>
+              <a:buNone/>
+            </a:pPr>
+            <a:r>
+              <a:rPr sz="1100" b="0" i="0">
+                <a:solidFill>
+                  <a:srgbClr val="63636B"/>
+                </a:solidFill>
+              </a:rPr>
+              <a:t>Quantum exposure with documented, operator-set assumptions.</a:t>
+            </a:r>
+          </a:p>
+        </p:txBody>
+      </p:sp>
+      <p:sp>
+        <p:nvSpPr>
+          <p:cNvPr id="17418" name="cd-chip-edge"/>
+          <p:cNvSpPr/>
+          <p:nvPr/>
+        </p:nvSpPr>
+        <p:spPr>
+          <a:xfrm>
+            <a:off x="5069433" y="1517904"/>
+            <a:ext cx="40640" cy="1316736"/>
+          </a:xfrm>
+          <a:prstGeom prst="rect">
+            <a:avLst/>
+          </a:prstGeom>
+          <a:solidFill>
+            <a:srgbClr val="9E3A24"/>
+          </a:solidFill>
+          <a:ln>
+            <a:noFill/>
+          </a:ln>
+          <a:effectLst/>
+        </p:spPr>
+        <p:style>
+          <a:lnRef idx="1">
+            <a:schemeClr val="accent1"/>
+          </a:lnRef>
+          <a:fillRef idx="3">
+            <a:schemeClr val="accent1"/>
+          </a:fillRef>
+          <a:effectRef idx="2">
+            <a:schemeClr val="accent1"/>
+          </a:effectRef>
+          <a:fontRef idx="minor">
+            <a:schemeClr val="lt1"/>
+          </a:fontRef>
+        </p:style>
+        <p:txBody>
+          <a:bodyPr rtlCol="0" anchor="ctr"/>
+          <a:lstStyle/>
+          <a:p>
+            <a:pPr algn="ctr"/>
+          </a:p>
+        </p:txBody>
+      </p:sp>
+      <p:sp>
+        <p:nvSpPr>
+          <p:cNvPr id="17419" name="cd-arrow"/>
+          <p:cNvSpPr/>
+          <p:nvPr/>
+        </p:nvSpPr>
+        <p:spPr>
+          <a:xfrm>
+            <a:off x="7165238" y="2066543"/>
+            <a:ext cx="182879" cy="219456"/>
+          </a:xfrm>
+          <a:prstGeom prst="rightArrow">
+            <a:avLst/>
+          </a:prstGeom>
+          <a:solidFill>
+            <a:srgbClr val="D2D0CB"/>
+          </a:solidFill>
+          <a:ln>
+            <a:noFill/>
+          </a:ln>
+          <a:effectLst/>
+        </p:spPr>
+        <p:style>
+          <a:lnRef idx="1">
+            <a:schemeClr val="accent1"/>
+          </a:lnRef>
+          <a:fillRef idx="3">
+            <a:schemeClr val="accent1"/>
+          </a:fillRef>
+          <a:effectRef idx="2">
+            <a:schemeClr val="accent1"/>
+          </a:effectRef>
+          <a:fontRef idx="minor">
+            <a:schemeClr val="lt1"/>
+          </a:fontRef>
+        </p:style>
+        <p:txBody>
+          <a:bodyPr rtlCol="0" anchor="ctr"/>
+          <a:lstStyle/>
+          <a:p>
+            <a:pPr algn="ctr"/>
+          </a:p>
+        </p:txBody>
+      </p:sp>
+      <p:sp>
+        <p:nvSpPr>
+          <p:cNvPr id="17420" name="cd-stage"/>
+          <p:cNvSpPr/>
+          <p:nvPr/>
+        </p:nvSpPr>
+        <p:spPr>
+          <a:xfrm>
+            <a:off x="7393838" y="1517904"/>
+            <a:ext cx="2050084" cy="1316736"/>
+          </a:xfrm>
+          <a:prstGeom prst="roundRect">
+            <a:avLst>
+              <a:gd name="adj" fmla="val 9000"/>
+            </a:avLst>
+          </a:prstGeom>
+          <a:solidFill>
+            <a:srgbClr val="F5F3EF"/>
+          </a:solidFill>
+          <a:ln w="9525">
+            <a:solidFill>
+              <a:srgbClr val="D2D0CB"/>
+            </a:solidFill>
+          </a:ln>
+          <a:effectLst/>
+        </p:spPr>
+        <p:style>
+          <a:lnRef idx="1">
+            <a:schemeClr val="accent1"/>
+          </a:lnRef>
+          <a:fillRef idx="3">
+            <a:schemeClr val="accent1"/>
+          </a:fillRef>
+          <a:effectRef idx="2">
+            <a:schemeClr val="accent1"/>
+          </a:effectRef>
+          <a:fontRef idx="minor">
+            <a:schemeClr val="lt1"/>
+          </a:fontRef>
+        </p:style>
+        <p:txBody>
+          <a:bodyPr rtlCol="0" anchor="ctr" wrap="square" lIns="54864" rIns="54864" tIns="27432" bIns="27432"/>
+          <a:lstStyle/>
+          <a:p>
+            <a:pPr algn="ctr" marL="0" indent="0">
+              <a:spcBef>
+                <a:spcPts val="0"/>
+              </a:spcBef>
+              <a:spcAft>
+                <a:spcPts val="200"/>
+              </a:spcAft>
+              <a:buNone/>
+            </a:pPr>
+            <a:r>
+              <a:rPr sz="1350" b="1" i="0">
+                <a:solidFill>
+                  <a:srgbClr val="1B3A6B"/>
+                </a:solidFill>
+              </a:rPr>
+              <a:t>PLAN</a:t>
+            </a:r>
+          </a:p>
+          <a:p>
+            <a:pPr algn="ctr" marL="0" indent="0">
+              <a:spcBef>
+                <a:spcPts val="0"/>
+              </a:spcBef>
+              <a:spcAft>
+                <a:spcPts val="0"/>
+              </a:spcAft>
+              <a:buNone/>
+            </a:pPr>
+            <a:r>
+              <a:rPr sz="1100" b="0" i="0">
+                <a:solidFill>
+                  <a:srgbClr val="63636B"/>
+                </a:solidFill>
+              </a:rPr>
+              <a:t>A purpose-matched target — or a request for more evidence.</a:t>
+            </a:r>
+          </a:p>
+        </p:txBody>
+      </p:sp>
+      <p:sp>
+        <p:nvSpPr>
+          <p:cNvPr id="17421" name="cd-chip-edge"/>
+          <p:cNvSpPr/>
+          <p:nvPr/>
+        </p:nvSpPr>
+        <p:spPr>
+          <a:xfrm>
+            <a:off x="7393838" y="1517904"/>
+            <a:ext cx="40640" cy="1316736"/>
+          </a:xfrm>
+          <a:prstGeom prst="rect">
+            <a:avLst/>
+          </a:prstGeom>
+          <a:solidFill>
+            <a:srgbClr val="9E3A24"/>
+          </a:solidFill>
+          <a:ln>
+            <a:noFill/>
+          </a:ln>
+          <a:effectLst/>
+        </p:spPr>
+        <p:style>
+          <a:lnRef idx="1">
+            <a:schemeClr val="accent1"/>
+          </a:lnRef>
+          <a:fillRef idx="3">
+            <a:schemeClr val="accent1"/>
+          </a:fillRef>
+          <a:effectRef idx="2">
+            <a:schemeClr val="accent1"/>
+          </a:effectRef>
+          <a:fontRef idx="minor">
+            <a:schemeClr val="lt1"/>
+          </a:fontRef>
+        </p:style>
+        <p:txBody>
+          <a:bodyPr rtlCol="0" anchor="ctr"/>
+          <a:lstStyle/>
+          <a:p>
+            <a:pPr algn="ctr"/>
+          </a:p>
+        </p:txBody>
+      </p:sp>
+      <p:sp>
+        <p:nvSpPr>
+          <p:cNvPr id="17422" name="cd-arrow"/>
+          <p:cNvSpPr/>
+          <p:nvPr/>
+        </p:nvSpPr>
+        <p:spPr>
+          <a:xfrm>
+            <a:off x="9489643" y="2066543"/>
+            <a:ext cx="182879" cy="219456"/>
+          </a:xfrm>
+          <a:prstGeom prst="rightArrow">
+            <a:avLst/>
+          </a:prstGeom>
+          <a:solidFill>
+            <a:srgbClr val="D2D0CB"/>
+          </a:solidFill>
+          <a:ln>
+            <a:noFill/>
+          </a:ln>
+          <a:effectLst/>
+        </p:spPr>
+        <p:style>
+          <a:lnRef idx="1">
+            <a:schemeClr val="accent1"/>
+          </a:lnRef>
+          <a:fillRef idx="3">
+            <a:schemeClr val="accent1"/>
+          </a:fillRef>
+          <a:effectRef idx="2">
+            <a:schemeClr val="accent1"/>
+          </a:effectRef>
+          <a:fontRef idx="minor">
+            <a:schemeClr val="lt1"/>
+          </a:fontRef>
+        </p:style>
+        <p:txBody>
+          <a:bodyPr rtlCol="0" anchor="ctr"/>
+          <a:lstStyle/>
+          <a:p>
+            <a:pPr algn="ctr"/>
+          </a:p>
+        </p:txBody>
+      </p:sp>
+      <p:sp>
+        <p:nvSpPr>
+          <p:cNvPr id="17423" name="cd-stage"/>
+          <p:cNvSpPr/>
+          <p:nvPr/>
+        </p:nvSpPr>
+        <p:spPr>
+          <a:xfrm>
+            <a:off x="9718243" y="1517904"/>
+            <a:ext cx="2050084" cy="1316736"/>
+          </a:xfrm>
+          <a:prstGeom prst="roundRect">
+            <a:avLst>
+              <a:gd name="adj" fmla="val 9000"/>
+            </a:avLst>
+          </a:prstGeom>
+          <a:solidFill>
+            <a:srgbClr val="F5F3EF"/>
+          </a:solidFill>
+          <a:ln w="9525">
+            <a:solidFill>
+              <a:srgbClr val="D2D0CB"/>
+            </a:solidFill>
+          </a:ln>
+          <a:effectLst/>
+        </p:spPr>
+        <p:style>
+          <a:lnRef idx="1">
+            <a:schemeClr val="accent1"/>
+          </a:lnRef>
+          <a:fillRef idx="3">
+            <a:schemeClr val="accent1"/>
+          </a:fillRef>
+          <a:effectRef idx="2">
+            <a:schemeClr val="accent1"/>
+          </a:effectRef>
+          <a:fontRef idx="minor">
+            <a:schemeClr val="lt1"/>
+          </a:fontRef>
+        </p:style>
+        <p:txBody>
+          <a:bodyPr rtlCol="0" anchor="ctr" wrap="square" lIns="54864" rIns="54864" tIns="27432" bIns="27432"/>
+          <a:lstStyle/>
+          <a:p>
+            <a:pPr algn="ctr" marL="0" indent="0">
+              <a:spcBef>
+                <a:spcPts val="0"/>
+              </a:spcBef>
+              <a:spcAft>
+                <a:spcPts val="200"/>
+              </a:spcAft>
+              <a:buNone/>
+            </a:pPr>
+            <a:r>
+              <a:rPr sz="1350" b="1" i="0">
+                <a:solidFill>
+                  <a:srgbClr val="1B3A6B"/>
+                </a:solidFill>
+              </a:rPr>
+              <a:t>EXPORT</a:t>
+            </a:r>
+          </a:p>
+          <a:p>
+            <a:pPr algn="ctr" marL="0" indent="0">
+              <a:spcBef>
+                <a:spcPts val="0"/>
+              </a:spcBef>
+              <a:spcAft>
+                <a:spcPts val="0"/>
+              </a:spcAft>
+              <a:buNone/>
+            </a:pPr>
+            <a:r>
+              <a:rPr sz="1100" b="0" i="0">
+                <a:solidFill>
+                  <a:srgbClr val="63636B"/>
+                </a:solidFill>
+              </a:rPr>
+              <a:t>A schema-validated CBOM and a traceable report.</a:t>
+            </a:r>
+          </a:p>
+        </p:txBody>
+      </p:sp>
+      <p:sp>
+        <p:nvSpPr>
+          <p:cNvPr id="17424" name="cd-chip-edge"/>
+          <p:cNvSpPr/>
+          <p:nvPr/>
+        </p:nvSpPr>
+        <p:spPr>
+          <a:xfrm>
+            <a:off x="9718243" y="1517904"/>
+            <a:ext cx="40640" cy="1316736"/>
+          </a:xfrm>
+          <a:prstGeom prst="rect">
+            <a:avLst/>
+          </a:prstGeom>
+          <a:solidFill>
+            <a:srgbClr val="9E3A24"/>
+          </a:solidFill>
+          <a:ln>
+            <a:noFill/>
+          </a:ln>
+          <a:effectLst/>
+        </p:spPr>
+        <p:style>
+          <a:lnRef idx="1">
+            <a:schemeClr val="accent1"/>
+          </a:lnRef>
+          <a:fillRef idx="3">
+            <a:schemeClr val="accent1"/>
+          </a:fillRef>
+          <a:effectRef idx="2">
+            <a:schemeClr val="accent1"/>
+          </a:effectRef>
+          <a:fontRef idx="minor">
+            <a:schemeClr val="lt1"/>
+          </a:fontRef>
+        </p:style>
+        <p:txBody>
+          <a:bodyPr rtlCol="0" anchor="ctr"/>
+          <a:lstStyle/>
+          <a:p>
+            <a:pPr algn="ctr"/>
+          </a:p>
+        </p:txBody>
+      </p:sp>
+      <p:sp>
+        <p:nvSpPr>
+          <p:cNvPr id="17425" name="cd-users-head"/>
           <p:cNvSpPr txBox="1"/>
           <p:nvPr/>
         </p:nvSpPr>
         <p:spPr>
           <a:xfrm>
-            <a:off x="7040879" y="2953511"/>
-            <a:ext cx="4581144" cy="603504"/>
+            <a:off x="420624" y="3090672"/>
+            <a:ext cx="5760720" cy="274320"/>
           </a:xfrm>
           <a:prstGeom prst="rect">
             <a:avLst/>
@@ -10526,63 +12293,36 @@
           </a:bodyPr>
           <a:lstStyle/>
           <a:p>
-            <a:pPr marL="0" indent="0">
-              <a:spcBef>
-                <a:spcPts val="0"/>
-              </a:spcBef>
-              <a:spcAft>
-                <a:spcPts val="500"/>
-              </a:spcAft>
-              <a:buNone/>
-            </a:pPr>
-            <a:r>
-              <a:rPr sz="1500" b="1" i="0">
-                <a:solidFill>
-                  <a:srgbClr val="1A1A1C"/>
-                </a:solidFill>
-              </a:rPr>
-              <a:t>Expanded synthetic corpus, six scanners</a:t>
-            </a:r>
-          </a:p>
-          <a:p>
-            <a:pPr marL="0" indent="0">
-              <a:spcBef>
-                <a:spcPts val="0"/>
-              </a:spcBef>
-              <a:spcAft>
-                <a:spcPts val="0"/>
-              </a:spcAft>
-              <a:buNone/>
-            </a:pPr>
-            <a:r>
-              <a:rPr sz="1500" b="0" i="0">
-                <a:solidFill>
-                  <a:srgbClr val="3E3E44"/>
-                </a:solidFill>
-              </a:rPr>
-              <a:t>116 TP · 0 FP · 0 FN   </a:t>
-            </a:r>
-            <a:r>
-              <a:rPr sz="1500" b="1" i="0">
+            <a:pPr algn="l" marL="0" indent="0">
+              <a:spcBef>
+                <a:spcPts val="0"/>
+              </a:spcBef>
+              <a:spcAft>
+                <a:spcPts val="0"/>
+              </a:spcAft>
+              <a:buNone/>
+            </a:pPr>
+            <a:r>
+              <a:rPr sz="1700" b="1" i="0">
                 <a:solidFill>
                   <a:srgbClr val="9E3A24"/>
                 </a:solidFill>
               </a:rPr>
-              <a:t>F1 1.000</a:t>
-            </a:r>
-          </a:p>
-        </p:txBody>
-      </p:sp>
-      <p:sp>
-        <p:nvSpPr>
-          <p:cNvPr id="17418" name="cd-bench-caveat"/>
+              <a:t>Who this is for</a:t>
+            </a:r>
+          </a:p>
+        </p:txBody>
+      </p:sp>
+      <p:sp>
+        <p:nvSpPr>
+          <p:cNvPr id="17426" name="cd-users"/>
           <p:cNvSpPr txBox="1"/>
           <p:nvPr/>
         </p:nvSpPr>
         <p:spPr>
           <a:xfrm>
-            <a:off x="6876288" y="3822191"/>
-            <a:ext cx="4892040" cy="1463040"/>
+            <a:off x="420624" y="3383279"/>
+            <a:ext cx="5760720" cy="640080"/>
           </a:xfrm>
           <a:prstGeom prst="rect">
             <a:avLst/>
@@ -10595,26 +12335,491 @@
           </a:bodyPr>
           <a:lstStyle/>
           <a:p>
-            <a:pPr marL="0" indent="0">
-              <a:spcBef>
-                <a:spcPts val="0"/>
-              </a:spcBef>
-              <a:spcAft>
-                <a:spcPts val="0"/>
-              </a:spcAft>
-              <a:buNone/>
-            </a:pPr>
-            <a:r>
-              <a:rPr sz="1300" b="0" i="1">
+            <a:pPr algn="l" marL="0" indent="0">
+              <a:spcBef>
+                <a:spcPts val="0"/>
+              </a:spcBef>
+              <a:spcAft>
+                <a:spcPts val="0"/>
+              </a:spcAft>
+              <a:buNone/>
+            </a:pPr>
+            <a:r>
+              <a:rPr sz="1350" b="0" i="0">
+                <a:solidFill>
+                  <a:srgbClr val="3E3E44"/>
+                </a:solidFill>
+              </a:rPr>
+              <a:t>Intended for security engineering teams, cryptographic inventory and migration-planning teams, and infrastructure operators. These are intended users; the tool has not been deployed in production.</a:t>
+            </a:r>
+          </a:p>
+        </p:txBody>
+      </p:sp>
+      <p:sp>
+        <p:nvSpPr>
+          <p:cNvPr id="17427" name="cd-changes-head"/>
+          <p:cNvSpPr txBox="1"/>
+          <p:nvPr/>
+        </p:nvSpPr>
+        <p:spPr>
+          <a:xfrm>
+            <a:off x="420624" y="4059935"/>
+            <a:ext cx="5760720" cy="274320"/>
+          </a:xfrm>
+          <a:prstGeom prst="rect">
+            <a:avLst/>
+          </a:prstGeom>
+          <a:noFill/>
+        </p:spPr>
+        <p:txBody>
+          <a:bodyPr wrap="square" lIns="0" rIns="0" tIns="0" bIns="0">
+            <a:spAutoFit/>
+          </a:bodyPr>
+          <a:lstStyle/>
+          <a:p>
+            <a:pPr algn="l" marL="0" indent="0">
+              <a:spcBef>
+                <a:spcPts val="0"/>
+              </a:spcBef>
+              <a:spcAft>
+                <a:spcPts val="0"/>
+              </a:spcAft>
+              <a:buNone/>
+            </a:pPr>
+            <a:r>
+              <a:rPr sz="1700" b="1" i="0">
+                <a:solidFill>
+                  <a:srgbClr val="9E3A24"/>
+                </a:solidFill>
+              </a:rPr>
+              <a:t>What changes for them</a:t>
+            </a:r>
+          </a:p>
+        </p:txBody>
+      </p:sp>
+      <p:sp>
+        <p:nvSpPr>
+          <p:cNvPr id="17428" name="cd-changes"/>
+          <p:cNvSpPr txBox="1"/>
+          <p:nvPr/>
+        </p:nvSpPr>
+        <p:spPr>
+          <a:xfrm>
+            <a:off x="420624" y="4370831"/>
+            <a:ext cx="5760720" cy="1371600"/>
+          </a:xfrm>
+          <a:prstGeom prst="rect">
+            <a:avLst/>
+          </a:prstGeom>
+          <a:noFill/>
+        </p:spPr>
+        <p:txBody>
+          <a:bodyPr wrap="square" lIns="0" rIns="0" tIns="0" bIns="0">
+            <a:spAutoFit/>
+          </a:bodyPr>
+          <a:lstStyle/>
+          <a:p>
+            <a:pPr marL="146050" indent="-146050">
+              <a:spcBef>
+                <a:spcPts val="0"/>
+              </a:spcBef>
+              <a:spcAft>
+                <a:spcPts val="600"/>
+              </a:spcAft>
+              <a:buFont typeface="Arial"/>
+              <a:buChar char="–"/>
+            </a:pPr>
+            <a:r>
+              <a:rPr sz="1350" b="0" i="0">
+                <a:solidFill>
+                  <a:srgbClr val="3E3E44"/>
+                </a:solidFill>
+              </a:rPr>
+              <a:t>“We think we use RSA somewhere” becomes a per-asset list with file, line, purpose, evidence strength and a named replacement.</a:t>
+            </a:r>
+          </a:p>
+          <a:p>
+            <a:pPr marL="146050" indent="-146050">
+              <a:spcBef>
+                <a:spcPts val="0"/>
+              </a:spcBef>
+              <a:spcAft>
+                <a:spcPts val="600"/>
+              </a:spcAft>
+              <a:buFont typeface="Arial"/>
+              <a:buChar char="–"/>
+            </a:pPr>
+            <a:r>
+              <a:rPr sz="1350" b="0" i="0">
+                <a:solidFill>
+                  <a:srgbClr val="3E3E44"/>
+                </a:solidFill>
+              </a:rPr>
+              <a:t>What an estate runs is separated from what it merely has installed, so the plan is not padded with libraries nobody calls.</a:t>
+            </a:r>
+          </a:p>
+          <a:p>
+            <a:pPr marL="146050" indent="-146050">
+              <a:spcBef>
+                <a:spcPts val="0"/>
+              </a:spcBef>
+              <a:spcAft>
+                <a:spcPts val="600"/>
+              </a:spcAft>
+              <a:buFont typeface="Arial"/>
+              <a:buChar char="–"/>
+            </a:pPr>
+            <a:r>
+              <a:rPr sz="1350" b="0" i="0">
+                <a:solidFill>
+                  <a:srgbClr val="3E3E44"/>
+                </a:solidFill>
+              </a:rPr>
+              <a:t>A partial scan is labelled partial, so nobody signs off an estate on an inventory that silently missed half of it.</a:t>
+            </a:r>
+          </a:p>
+        </p:txBody>
+      </p:sp>
+      <p:sp>
+        <p:nvSpPr>
+          <p:cNvPr id="17429" name="cd-bench-head"/>
+          <p:cNvSpPr txBox="1"/>
+          <p:nvPr/>
+        </p:nvSpPr>
+        <p:spPr>
+          <a:xfrm>
+            <a:off x="6492240" y="3090672"/>
+            <a:ext cx="5276088" cy="274320"/>
+          </a:xfrm>
+          <a:prstGeom prst="rect">
+            <a:avLst/>
+          </a:prstGeom>
+          <a:noFill/>
+        </p:spPr>
+        <p:txBody>
+          <a:bodyPr wrap="square" lIns="0" rIns="0" tIns="0" bIns="0">
+            <a:spAutoFit/>
+          </a:bodyPr>
+          <a:lstStyle/>
+          <a:p>
+            <a:pPr algn="l" marL="0" indent="0">
+              <a:spcBef>
+                <a:spcPts val="0"/>
+              </a:spcBef>
+              <a:spcAft>
+                <a:spcPts val="0"/>
+              </a:spcAft>
+              <a:buNone/>
+            </a:pPr>
+            <a:r>
+              <a:rPr sz="1700" b="1" i="0">
+                <a:solidFill>
+                  <a:srgbClr val="9E3A24"/>
+                </a:solidFill>
+              </a:rPr>
+              <a:t>Measured on a labelled corpus</a:t>
+            </a:r>
+          </a:p>
+        </p:txBody>
+      </p:sp>
+      <p:sp>
+        <p:nvSpPr>
+          <p:cNvPr id="17430" name="cd-bench-box"/>
+          <p:cNvSpPr/>
+          <p:nvPr/>
+        </p:nvSpPr>
+        <p:spPr>
+          <a:xfrm>
+            <a:off x="6492240" y="3419856"/>
+            <a:ext cx="5276088" cy="786384"/>
+          </a:xfrm>
+          <a:prstGeom prst="roundRect">
+            <a:avLst>
+              <a:gd name="adj" fmla="val 9000"/>
+            </a:avLst>
+          </a:prstGeom>
+          <a:solidFill>
+            <a:srgbClr val="F5F3EF"/>
+          </a:solidFill>
+          <a:ln w="9525">
+            <a:solidFill>
+              <a:srgbClr val="D2D0CB"/>
+            </a:solidFill>
+          </a:ln>
+          <a:effectLst/>
+        </p:spPr>
+        <p:style>
+          <a:lnRef idx="1">
+            <a:schemeClr val="accent1"/>
+          </a:lnRef>
+          <a:fillRef idx="3">
+            <a:schemeClr val="accent1"/>
+          </a:fillRef>
+          <a:effectRef idx="2">
+            <a:schemeClr val="accent1"/>
+          </a:effectRef>
+          <a:fontRef idx="minor">
+            <a:schemeClr val="lt1"/>
+          </a:fontRef>
+        </p:style>
+        <p:txBody>
+          <a:bodyPr rtlCol="0" anchor="ctr" wrap="square" lIns="54864" rIns="54864" tIns="27432" bIns="27432"/>
+          <a:lstStyle/>
+          <a:p>
+            <a:pPr algn="ctr" marL="0" indent="0">
+              <a:spcBef>
+                <a:spcPts val="0"/>
+              </a:spcBef>
+              <a:spcAft>
+                <a:spcPts val="0"/>
+              </a:spcAft>
+              <a:buNone/>
+            </a:pPr>
+            <a:r>
+              <a:rPr sz="1300" b="1" i="0">
+                <a:solidFill>
+                  <a:srgbClr val="1A1A1C"/>
+                </a:solidFill>
+              </a:rPr>
+              <a:t/>
+            </a:r>
+          </a:p>
+        </p:txBody>
+      </p:sp>
+      <p:sp>
+        <p:nvSpPr>
+          <p:cNvPr id="17431" name="cd-bench-label"/>
+          <p:cNvSpPr txBox="1"/>
+          <p:nvPr/>
+        </p:nvSpPr>
+        <p:spPr>
+          <a:xfrm>
+            <a:off x="6656831" y="3493008"/>
+            <a:ext cx="4946903" cy="237744"/>
+          </a:xfrm>
+          <a:prstGeom prst="rect">
+            <a:avLst/>
+          </a:prstGeom>
+          <a:noFill/>
+        </p:spPr>
+        <p:txBody>
+          <a:bodyPr wrap="square" lIns="0" rIns="0" tIns="0" bIns="0">
+            <a:spAutoFit/>
+          </a:bodyPr>
+          <a:lstStyle/>
+          <a:p>
+            <a:pPr algn="l" marL="0" indent="0">
+              <a:spcBef>
+                <a:spcPts val="0"/>
+              </a:spcBef>
+              <a:spcAft>
+                <a:spcPts val="0"/>
+              </a:spcAft>
+              <a:buNone/>
+            </a:pPr>
+            <a:r>
+              <a:rPr sz="1150" b="1" i="0">
+                <a:solidFill>
+                  <a:srgbClr val="1A1A1C"/>
+                </a:solidFill>
+              </a:rPr>
+              <a:t>Like-for-like, same corpus, before → after</a:t>
+            </a:r>
+          </a:p>
+        </p:txBody>
+      </p:sp>
+      <p:sp>
+        <p:nvSpPr>
+          <p:cNvPr id="17432" name="cd-bench-f1"/>
+          <p:cNvSpPr txBox="1"/>
+          <p:nvPr/>
+        </p:nvSpPr>
+        <p:spPr>
+          <a:xfrm>
+            <a:off x="6656831" y="3730752"/>
+            <a:ext cx="4946903" cy="310896"/>
+          </a:xfrm>
+          <a:prstGeom prst="rect">
+            <a:avLst/>
+          </a:prstGeom>
+          <a:noFill/>
+        </p:spPr>
+        <p:txBody>
+          <a:bodyPr wrap="square" lIns="0" rIns="0" tIns="0" bIns="0">
+            <a:spAutoFit/>
+          </a:bodyPr>
+          <a:lstStyle/>
+          <a:p>
+            <a:pPr algn="l" marL="0" indent="0">
+              <a:spcBef>
+                <a:spcPts val="0"/>
+              </a:spcBef>
+              <a:spcAft>
+                <a:spcPts val="0"/>
+              </a:spcAft>
+              <a:buNone/>
+            </a:pPr>
+            <a:r>
+              <a:rPr sz="1900" b="1" i="0">
+                <a:solidFill>
+                  <a:srgbClr val="144C39"/>
+                </a:solidFill>
+              </a:rPr>
+              <a:t>F1  0.941  →  0.983</a:t>
+            </a:r>
+          </a:p>
+        </p:txBody>
+      </p:sp>
+      <p:sp>
+        <p:nvSpPr>
+          <p:cNvPr id="17433" name="cd-bench-counts"/>
+          <p:cNvSpPr txBox="1"/>
+          <p:nvPr/>
+        </p:nvSpPr>
+        <p:spPr>
+          <a:xfrm>
+            <a:off x="9144000" y="3767328"/>
+            <a:ext cx="2441447" cy="237744"/>
+          </a:xfrm>
+          <a:prstGeom prst="rect">
+            <a:avLst/>
+          </a:prstGeom>
+          <a:noFill/>
+        </p:spPr>
+        <p:txBody>
+          <a:bodyPr wrap="square" lIns="0" rIns="0" tIns="0" bIns="0">
+            <a:spAutoFit/>
+          </a:bodyPr>
+          <a:lstStyle/>
+          <a:p>
+            <a:pPr algn="l" marL="0" indent="0">
+              <a:spcBef>
+                <a:spcPts val="0"/>
+              </a:spcBef>
+              <a:spcAft>
+                <a:spcPts val="0"/>
+              </a:spcAft>
+              <a:buNone/>
+            </a:pPr>
+            <a:r>
+              <a:rPr sz="1100" b="0" i="0">
                 <a:solidFill>
                   <a:srgbClr val="63636B"/>
                 </a:solidFill>
               </a:rPr>
-              <a:t>Both corpora were created by the developers of this tool. These figures measure those corpora and nothing else — they are NOT an estimate of real-world enterprise accuracy, which has not been measured. The two experiments are not comparable to each other: the expanded corpus covers three scanners the original did not exercise.</a:t>
-            </a:r>
-          </a:p>
-        </p:txBody>
-      </p:sp>
+              <a:t>79/5/5  →  84 TP · 3 FP · 0 FN</a:t>
+            </a:r>
+          </a:p>
+        </p:txBody>
+      </p:sp>
+      <p:sp>
+        <p:nvSpPr>
+          <p:cNvPr id="17434" name="cd-bench-caveat"/>
+          <p:cNvSpPr txBox="1"/>
+          <p:nvPr/>
+        </p:nvSpPr>
+        <p:spPr>
+          <a:xfrm>
+            <a:off x="6492240" y="4297680"/>
+            <a:ext cx="5276088" cy="658368"/>
+          </a:xfrm>
+          <a:prstGeom prst="rect">
+            <a:avLst/>
+          </a:prstGeom>
+          <a:noFill/>
+        </p:spPr>
+        <p:txBody>
+          <a:bodyPr wrap="square" lIns="0" rIns="0" tIns="0" bIns="0">
+            <a:spAutoFit/>
+          </a:bodyPr>
+          <a:lstStyle/>
+          <a:p>
+            <a:pPr algn="l" marL="0" indent="0">
+              <a:spcBef>
+                <a:spcPts val="0"/>
+              </a:spcBef>
+              <a:spcAft>
+                <a:spcPts val="0"/>
+              </a:spcAft>
+              <a:buNone/>
+            </a:pPr>
+            <a:r>
+              <a:rPr sz="1050" b="0" i="1">
+                <a:solidFill>
+                  <a:srgbClr val="63636B"/>
+                </a:solidFill>
+              </a:rPr>
+              <a:t>An expanded synthetic corpus of 116 findings across six scanners scores 1.000 — a separate, non-comparable experiment. Both corpora were written by this project's developers and measure those corpora only; real-world enterprise accuracy has not been measured.</a:t>
+            </a:r>
+          </a:p>
+        </p:txBody>
+      </p:sp>
+      <p:sp>
+        <p:nvSpPr>
+          <p:cNvPr id="17435" name="cd-plan-caption"/>
+          <p:cNvSpPr txBox="1"/>
+          <p:nvPr/>
+        </p:nvSpPr>
+        <p:spPr>
+          <a:xfrm>
+            <a:off x="6492240" y="4974336"/>
+            <a:ext cx="5276088" cy="237744"/>
+          </a:xfrm>
+          <a:prstGeom prst="rect">
+            <a:avLst/>
+          </a:prstGeom>
+          <a:noFill/>
+        </p:spPr>
+        <p:txBody>
+          <a:bodyPr wrap="square" lIns="0" rIns="0" tIns="0" bIns="0">
+            <a:spAutoFit/>
+          </a:bodyPr>
+          <a:lstStyle/>
+          <a:p>
+            <a:pPr algn="l" marL="0" indent="0">
+              <a:spcBef>
+                <a:spcPts val="0"/>
+              </a:spcBef>
+              <a:spcAft>
+                <a:spcPts val="0"/>
+              </a:spcAft>
+              <a:buNone/>
+            </a:pPr>
+            <a:r>
+              <a:rPr sz="1050" b="0" i="1">
+                <a:solidFill>
+                  <a:srgbClr val="63636B"/>
+                </a:solidFill>
+              </a:rPr>
+              <a:t>Remediation programme — grouped by the replacement each asset needs, which is how the work is staffed.</a:t>
+            </a:r>
+          </a:p>
+        </p:txBody>
+      </p:sp>
+      <p:pic>
+        <p:nvPicPr>
+          <p:cNvPr id="17436" name="cd-shot-03-migration-plan-" descr="03-migration-plan-0.055-0.300-1.000-0.560.png"/>
+          <p:cNvPicPr>
+            <a:picLocks noChangeAspect="1"/>
+          </p:cNvPicPr>
+          <p:nvPr/>
+        </p:nvPicPr>
+        <p:blipFill>
+          <a:blip r:embed="rId4"/>
+          <a:stretch>
+            <a:fillRect/>
+          </a:stretch>
+        </p:blipFill>
+        <p:spPr>
+          <a:xfrm>
+            <a:off x="6492240" y="5248656"/>
+            <a:ext cx="5276088" cy="907035"/>
+          </a:xfrm>
+          <a:prstGeom prst="rect">
+            <a:avLst/>
+          </a:prstGeom>
+        </p:spPr>
+      </p:pic>
     </p:spTree>
     <p:extLst>
       <p:ext uri="{BB962C8B-B14F-4D97-AF65-F5344CB8AC3E}">
@@ -10762,7 +12967,7 @@
         <p:spPr bwMode="auto">
           <a:xfrm>
             <a:off x="420624" y="1097280"/>
-            <a:ext cx="5541264" cy="4663440"/>
+            <a:ext cx="5541264" cy="3749039"/>
           </a:xfrm>
           <a:prstGeom prst="rect">
             <a:avLst/>
@@ -10916,7 +13121,7 @@
                   <a:srgbClr val="9E3A24"/>
                 </a:solidFill>
               </a:rPr>
-              <a:t>Risk methodology</a:t>
+              <a:t>Problem statement and repository</a:t>
             </a:r>
           </a:p>
           <a:p>
@@ -10936,7 +13141,7 @@
                   <a:srgbClr val="3E3E44"/>
                 </a:solidFill>
               </a:rPr>
-              <a:t>M. Mosca, “Cybersecurity in an Era with Quantum Computers: Will We Be Ready?”, IEEE Security &amp; Privacy, vol. 16, no. 5, 2018 — the source of the X + Y &gt; Z inequality used by the risk model.</a:t>
+              <a:t>Smart India Hackathon 2026, Problem Statement SIH26164 — Enterprise Cryptographic Discovery &amp; Analysis Tool (ECDAT), National Technical Research Organisation (NTRO).</a:t>
             </a:r>
           </a:p>
           <a:p>
@@ -10956,27 +13161,7 @@
                   <a:srgbClr val="3E3E44"/>
                 </a:solidFill>
               </a:rPr>
-              <a:t>P. W. Shor, “Polynomial-Time Algorithms for Prime Factorization and Discrete Logarithms on a Quantum Computer”, SIAM J. Computing, 1997.</a:t>
-            </a:r>
-          </a:p>
-          <a:p>
-            <a:pPr marL="146050" indent="-146050">
-              <a:spcBef>
-                <a:spcPts val="0"/>
-              </a:spcBef>
-              <a:spcAft>
-                <a:spcPts val="400"/>
-              </a:spcAft>
-              <a:buFont typeface="Arial"/>
-              <a:buChar char="–"/>
-            </a:pPr>
-            <a:r>
-              <a:rPr sz="1300" b="0" i="0">
-                <a:solidFill>
-                  <a:srgbClr val="3E3E44"/>
-                </a:solidFill>
-              </a:rPr>
-              <a:t>L. K. Grover, “A fast quantum mechanical algorithm for database search”, STOC 1996 — the basis for the symmetric-key margin.</a:t>
+              <a:t>Source, 664 tests, the labelled benchmark corpus and its committed results, and the vendored schemas: github.com/sgtsujith141-wq/cryptodrishti</a:t>
             </a:r>
           </a:p>
         </p:txBody>
@@ -11225,7 +13410,7 @@
         <p:spPr>
           <a:xfrm>
             <a:off x="6400800" y="1097280"/>
-            <a:ext cx="5367527" cy="4663440"/>
+            <a:ext cx="5367527" cy="3749039"/>
           </a:xfrm>
           <a:prstGeom prst="rect">
             <a:avLst/>
@@ -11352,7 +13537,7 @@
                   <a:srgbClr val="9E3A24"/>
                 </a:solidFill>
               </a:rPr>
-              <a:t>Problem statement and repository</a:t>
+              <a:t>Risk methodology</a:t>
             </a:r>
           </a:p>
           <a:p>
@@ -11372,7 +13557,7 @@
                   <a:srgbClr val="3E3E44"/>
                 </a:solidFill>
               </a:rPr>
-              <a:t>Smart India Hackathon 2026, Problem Statement SIH26164 — Enterprise Cryptographic Discovery &amp; Analysis Tool (ECDAT), National Technical Research Organisation (NTRO).</a:t>
+              <a:t>M. Mosca, “Cybersecurity in an Era with Quantum Computers: Will We Be Ready?”, IEEE Security &amp; Privacy, vol. 16, no. 5, 2018 — the source of the X + Y &gt; Z inequality used by the risk model.</a:t>
             </a:r>
           </a:p>
           <a:p>
@@ -11392,21 +13577,41 @@
                   <a:srgbClr val="3E3E44"/>
                 </a:solidFill>
               </a:rPr>
-              <a:t>Source, 664 tests, the labelled benchmark corpus and its committed results, and the vendored schemas: github.com/sgtsujith141-wq/cryptodrishti</a:t>
-            </a:r>
-          </a:p>
-        </p:txBody>
-      </p:sp>
-      <p:sp>
-        <p:nvSpPr>
-          <p:cNvPr id="17412" name="cd-ref-note"/>
+              <a:t>P. W. Shor, “Polynomial-Time Algorithms for Prime Factorization and Discrete Logarithms on a Quantum Computer”, SIAM J. Computing, 1997.</a:t>
+            </a:r>
+          </a:p>
+          <a:p>
+            <a:pPr marL="146050" indent="-146050">
+              <a:spcBef>
+                <a:spcPts val="0"/>
+              </a:spcBef>
+              <a:spcAft>
+                <a:spcPts val="400"/>
+              </a:spcAft>
+              <a:buFont typeface="Arial"/>
+              <a:buChar char="–"/>
+            </a:pPr>
+            <a:r>
+              <a:rPr sz="1300" b="0" i="0">
+                <a:solidFill>
+                  <a:srgbClr val="3E3E44"/>
+                </a:solidFill>
+              </a:rPr>
+              <a:t>L. K. Grover, “A fast quantum mechanical algorithm for database search”, STOC 1996.</a:t>
+            </a:r>
+          </a:p>
+        </p:txBody>
+      </p:sp>
+      <p:sp>
+        <p:nvSpPr>
+          <p:cNvPr id="17412" name="cd-map-eyebrow"/>
           <p:cNvSpPr txBox="1"/>
           <p:nvPr/>
         </p:nvSpPr>
         <p:spPr>
           <a:xfrm>
-            <a:off x="420624" y="5742432"/>
-            <a:ext cx="11347703" cy="512064"/>
+            <a:off x="420624" y="5029200"/>
+            <a:ext cx="11347703" cy="237744"/>
           </a:xfrm>
           <a:prstGeom prst="rect">
             <a:avLst/>
@@ -11419,30 +13624,699 @@
           </a:bodyPr>
           <a:lstStyle/>
           <a:p>
-            <a:pPr marL="0" indent="0">
-              <a:spcBef>
-                <a:spcPts val="0"/>
-              </a:spcBef>
-              <a:spcAft>
-                <a:spcPts val="0"/>
-              </a:spcAft>
-              <a:buNone/>
-            </a:pPr>
-            <a:r>
-              <a:rPr sz="1300" b="1" i="0">
-                <a:solidFill>
-                  <a:srgbClr val="1A1A1C"/>
-                </a:solidFill>
-              </a:rPr>
-              <a:t>Scope of these references — </a:t>
-            </a:r>
-            <a:r>
-              <a:rPr sz="1300" b="0" i="0">
+            <a:pPr algn="l" marL="0" indent="0">
+              <a:spcBef>
+                <a:spcPts val="0"/>
+              </a:spcBef>
+              <a:spcAft>
+                <a:spcPts val="0"/>
+              </a:spcAft>
+              <a:buNone/>
+            </a:pPr>
+            <a:r>
+              <a:rPr sz="1050" b="1" i="0">
                 <a:solidFill>
                   <a:srgbClr val="63636B"/>
                 </a:solidFill>
               </a:rPr>
-              <a:t>CryptoDrishti discovers, classifies, assesses and recommends cryptography. It does not implement the post-quantum primitives above; it uses them as the standards that inform classification and migration targets.</a:t>
+              <a:t>WHICH STANDARD GOVERNS WHICH PART OF THE PRODUCT</a:t>
+            </a:r>
+          </a:p>
+        </p:txBody>
+      </p:sp>
+      <p:sp>
+        <p:nvSpPr>
+          <p:cNvPr id="17413" name="cd-map"/>
+          <p:cNvSpPr/>
+          <p:nvPr/>
+        </p:nvSpPr>
+        <p:spPr>
+          <a:xfrm>
+            <a:off x="420624" y="5266944"/>
+            <a:ext cx="2167127" cy="566928"/>
+          </a:xfrm>
+          <a:prstGeom prst="roundRect">
+            <a:avLst>
+              <a:gd name="adj" fmla="val 9000"/>
+            </a:avLst>
+          </a:prstGeom>
+          <a:solidFill>
+            <a:srgbClr val="F5F3EF"/>
+          </a:solidFill>
+          <a:ln w="9525">
+            <a:solidFill>
+              <a:srgbClr val="D2D0CB"/>
+            </a:solidFill>
+          </a:ln>
+          <a:effectLst/>
+        </p:spPr>
+        <p:style>
+          <a:lnRef idx="1">
+            <a:schemeClr val="accent1"/>
+          </a:lnRef>
+          <a:fillRef idx="3">
+            <a:schemeClr val="accent1"/>
+          </a:fillRef>
+          <a:effectRef idx="2">
+            <a:schemeClr val="accent1"/>
+          </a:effectRef>
+          <a:fontRef idx="minor">
+            <a:schemeClr val="lt1"/>
+          </a:fontRef>
+        </p:style>
+        <p:txBody>
+          <a:bodyPr rtlCol="0" anchor="ctr" wrap="square" lIns="54864" rIns="54864" tIns="27432" bIns="27432"/>
+          <a:lstStyle/>
+          <a:p>
+            <a:pPr algn="ctr" marL="0" indent="0">
+              <a:spcBef>
+                <a:spcPts val="0"/>
+              </a:spcBef>
+              <a:spcAft>
+                <a:spcPts val="200"/>
+              </a:spcAft>
+              <a:buNone/>
+            </a:pPr>
+            <a:r>
+              <a:rPr sz="1100" b="1" i="0">
+                <a:solidFill>
+                  <a:srgbClr val="1B3A6B"/>
+                </a:solidFill>
+              </a:rPr>
+              <a:t>FIPS 203 / 204 / 205</a:t>
+            </a:r>
+          </a:p>
+          <a:p>
+            <a:pPr algn="ctr" marL="0" indent="0">
+              <a:spcBef>
+                <a:spcPts val="0"/>
+              </a:spcBef>
+              <a:spcAft>
+                <a:spcPts val="0"/>
+              </a:spcAft>
+              <a:buNone/>
+            </a:pPr>
+            <a:r>
+              <a:rPr sz="1050" b="0" i="0">
+                <a:solidFill>
+                  <a:srgbClr val="63636B"/>
+                </a:solidFill>
+              </a:rPr>
+              <a:t>the migration targets it names</a:t>
+            </a:r>
+          </a:p>
+        </p:txBody>
+      </p:sp>
+      <p:sp>
+        <p:nvSpPr>
+          <p:cNvPr id="17414" name="cd-chip-edge"/>
+          <p:cNvSpPr/>
+          <p:nvPr/>
+        </p:nvSpPr>
+        <p:spPr>
+          <a:xfrm>
+            <a:off x="420624" y="5266944"/>
+            <a:ext cx="40640" cy="566928"/>
+          </a:xfrm>
+          <a:prstGeom prst="rect">
+            <a:avLst/>
+          </a:prstGeom>
+          <a:solidFill>
+            <a:srgbClr val="9E3A24"/>
+          </a:solidFill>
+          <a:ln>
+            <a:noFill/>
+          </a:ln>
+          <a:effectLst/>
+        </p:spPr>
+        <p:style>
+          <a:lnRef idx="1">
+            <a:schemeClr val="accent1"/>
+          </a:lnRef>
+          <a:fillRef idx="3">
+            <a:schemeClr val="accent1"/>
+          </a:fillRef>
+          <a:effectRef idx="2">
+            <a:schemeClr val="accent1"/>
+          </a:effectRef>
+          <a:fontRef idx="minor">
+            <a:schemeClr val="lt1"/>
+          </a:fontRef>
+        </p:style>
+        <p:txBody>
+          <a:bodyPr rtlCol="0" anchor="ctr"/>
+          <a:lstStyle/>
+          <a:p>
+            <a:pPr algn="ctr"/>
+          </a:p>
+        </p:txBody>
+      </p:sp>
+      <p:sp>
+        <p:nvSpPr>
+          <p:cNvPr id="17415" name="cd-map"/>
+          <p:cNvSpPr/>
+          <p:nvPr/>
+        </p:nvSpPr>
+        <p:spPr>
+          <a:xfrm>
+            <a:off x="2715768" y="5266944"/>
+            <a:ext cx="2167127" cy="566928"/>
+          </a:xfrm>
+          <a:prstGeom prst="roundRect">
+            <a:avLst>
+              <a:gd name="adj" fmla="val 9000"/>
+            </a:avLst>
+          </a:prstGeom>
+          <a:solidFill>
+            <a:srgbClr val="F5F3EF"/>
+          </a:solidFill>
+          <a:ln w="9525">
+            <a:solidFill>
+              <a:srgbClr val="D2D0CB"/>
+            </a:solidFill>
+          </a:ln>
+          <a:effectLst/>
+        </p:spPr>
+        <p:style>
+          <a:lnRef idx="1">
+            <a:schemeClr val="accent1"/>
+          </a:lnRef>
+          <a:fillRef idx="3">
+            <a:schemeClr val="accent1"/>
+          </a:fillRef>
+          <a:effectRef idx="2">
+            <a:schemeClr val="accent1"/>
+          </a:effectRef>
+          <a:fontRef idx="minor">
+            <a:schemeClr val="lt1"/>
+          </a:fontRef>
+        </p:style>
+        <p:txBody>
+          <a:bodyPr rtlCol="0" anchor="ctr" wrap="square" lIns="54864" rIns="54864" tIns="27432" bIns="27432"/>
+          <a:lstStyle/>
+          <a:p>
+            <a:pPr algn="ctr" marL="0" indent="0">
+              <a:spcBef>
+                <a:spcPts val="0"/>
+              </a:spcBef>
+              <a:spcAft>
+                <a:spcPts val="200"/>
+              </a:spcAft>
+              <a:buNone/>
+            </a:pPr>
+            <a:r>
+              <a:rPr sz="1100" b="1" i="0">
+                <a:solidFill>
+                  <a:srgbClr val="1B3A6B"/>
+                </a:solidFill>
+              </a:rPr>
+              <a:t>NIST IR 8547</a:t>
+            </a:r>
+          </a:p>
+          <a:p>
+            <a:pPr algn="ctr" marL="0" indent="0">
+              <a:spcBef>
+                <a:spcPts val="0"/>
+              </a:spcBef>
+              <a:spcAft>
+                <a:spcPts val="0"/>
+              </a:spcAft>
+              <a:buNone/>
+            </a:pPr>
+            <a:r>
+              <a:rPr sz="1050" b="0" i="0">
+                <a:solidFill>
+                  <a:srgbClr val="63636B"/>
+                </a:solidFill>
+              </a:rPr>
+              <a:t>how it classifies what is at risk</a:t>
+            </a:r>
+          </a:p>
+        </p:txBody>
+      </p:sp>
+      <p:sp>
+        <p:nvSpPr>
+          <p:cNvPr id="17416" name="cd-chip-edge"/>
+          <p:cNvSpPr/>
+          <p:nvPr/>
+        </p:nvSpPr>
+        <p:spPr>
+          <a:xfrm>
+            <a:off x="2715768" y="5266944"/>
+            <a:ext cx="40640" cy="566928"/>
+          </a:xfrm>
+          <a:prstGeom prst="rect">
+            <a:avLst/>
+          </a:prstGeom>
+          <a:solidFill>
+            <a:srgbClr val="9E3A24"/>
+          </a:solidFill>
+          <a:ln>
+            <a:noFill/>
+          </a:ln>
+          <a:effectLst/>
+        </p:spPr>
+        <p:style>
+          <a:lnRef idx="1">
+            <a:schemeClr val="accent1"/>
+          </a:lnRef>
+          <a:fillRef idx="3">
+            <a:schemeClr val="accent1"/>
+          </a:fillRef>
+          <a:effectRef idx="2">
+            <a:schemeClr val="accent1"/>
+          </a:effectRef>
+          <a:fontRef idx="minor">
+            <a:schemeClr val="lt1"/>
+          </a:fontRef>
+        </p:style>
+        <p:txBody>
+          <a:bodyPr rtlCol="0" anchor="ctr"/>
+          <a:lstStyle/>
+          <a:p>
+            <a:pPr algn="ctr"/>
+          </a:p>
+        </p:txBody>
+      </p:sp>
+      <p:sp>
+        <p:nvSpPr>
+          <p:cNvPr id="17417" name="cd-map"/>
+          <p:cNvSpPr/>
+          <p:nvPr/>
+        </p:nvSpPr>
+        <p:spPr>
+          <a:xfrm>
+            <a:off x="5010912" y="5266944"/>
+            <a:ext cx="2167127" cy="566928"/>
+          </a:xfrm>
+          <a:prstGeom prst="roundRect">
+            <a:avLst>
+              <a:gd name="adj" fmla="val 9000"/>
+            </a:avLst>
+          </a:prstGeom>
+          <a:solidFill>
+            <a:srgbClr val="F5F3EF"/>
+          </a:solidFill>
+          <a:ln w="9525">
+            <a:solidFill>
+              <a:srgbClr val="D2D0CB"/>
+            </a:solidFill>
+          </a:ln>
+          <a:effectLst/>
+        </p:spPr>
+        <p:style>
+          <a:lnRef idx="1">
+            <a:schemeClr val="accent1"/>
+          </a:lnRef>
+          <a:fillRef idx="3">
+            <a:schemeClr val="accent1"/>
+          </a:fillRef>
+          <a:effectRef idx="2">
+            <a:schemeClr val="accent1"/>
+          </a:effectRef>
+          <a:fontRef idx="minor">
+            <a:schemeClr val="lt1"/>
+          </a:fontRef>
+        </p:style>
+        <p:txBody>
+          <a:bodyPr rtlCol="0" anchor="ctr" wrap="square" lIns="54864" rIns="54864" tIns="27432" bIns="27432"/>
+          <a:lstStyle/>
+          <a:p>
+            <a:pPr algn="ctr" marL="0" indent="0">
+              <a:spcBef>
+                <a:spcPts val="0"/>
+              </a:spcBef>
+              <a:spcAft>
+                <a:spcPts val="200"/>
+              </a:spcAft>
+              <a:buNone/>
+            </a:pPr>
+            <a:r>
+              <a:rPr sz="1100" b="1" i="0">
+                <a:solidFill>
+                  <a:srgbClr val="1B3A6B"/>
+                </a:solidFill>
+              </a:rPr>
+              <a:t>CycloneDX 1.6 / 1.7</a:t>
+            </a:r>
+          </a:p>
+          <a:p>
+            <a:pPr algn="ctr" marL="0" indent="0">
+              <a:spcBef>
+                <a:spcPts val="0"/>
+              </a:spcBef>
+              <a:spcAft>
+                <a:spcPts val="0"/>
+              </a:spcAft>
+              <a:buNone/>
+            </a:pPr>
+            <a:r>
+              <a:rPr sz="1050" b="0" i="0">
+                <a:solidFill>
+                  <a:srgbClr val="63636B"/>
+                </a:solidFill>
+              </a:rPr>
+              <a:t>the CBOM it exports and validates</a:t>
+            </a:r>
+          </a:p>
+        </p:txBody>
+      </p:sp>
+      <p:sp>
+        <p:nvSpPr>
+          <p:cNvPr id="17418" name="cd-chip-edge"/>
+          <p:cNvSpPr/>
+          <p:nvPr/>
+        </p:nvSpPr>
+        <p:spPr>
+          <a:xfrm>
+            <a:off x="5010912" y="5266944"/>
+            <a:ext cx="40640" cy="566928"/>
+          </a:xfrm>
+          <a:prstGeom prst="rect">
+            <a:avLst/>
+          </a:prstGeom>
+          <a:solidFill>
+            <a:srgbClr val="9E3A24"/>
+          </a:solidFill>
+          <a:ln>
+            <a:noFill/>
+          </a:ln>
+          <a:effectLst/>
+        </p:spPr>
+        <p:style>
+          <a:lnRef idx="1">
+            <a:schemeClr val="accent1"/>
+          </a:lnRef>
+          <a:fillRef idx="3">
+            <a:schemeClr val="accent1"/>
+          </a:fillRef>
+          <a:effectRef idx="2">
+            <a:schemeClr val="accent1"/>
+          </a:effectRef>
+          <a:fontRef idx="minor">
+            <a:schemeClr val="lt1"/>
+          </a:fontRef>
+        </p:style>
+        <p:txBody>
+          <a:bodyPr rtlCol="0" anchor="ctr"/>
+          <a:lstStyle/>
+          <a:p>
+            <a:pPr algn="ctr"/>
+          </a:p>
+        </p:txBody>
+      </p:sp>
+      <p:sp>
+        <p:nvSpPr>
+          <p:cNvPr id="17419" name="cd-map"/>
+          <p:cNvSpPr/>
+          <p:nvPr/>
+        </p:nvSpPr>
+        <p:spPr>
+          <a:xfrm>
+            <a:off x="7306055" y="5266944"/>
+            <a:ext cx="2167127" cy="566928"/>
+          </a:xfrm>
+          <a:prstGeom prst="roundRect">
+            <a:avLst>
+              <a:gd name="adj" fmla="val 9000"/>
+            </a:avLst>
+          </a:prstGeom>
+          <a:solidFill>
+            <a:srgbClr val="F5F3EF"/>
+          </a:solidFill>
+          <a:ln w="9525">
+            <a:solidFill>
+              <a:srgbClr val="D2D0CB"/>
+            </a:solidFill>
+          </a:ln>
+          <a:effectLst/>
+        </p:spPr>
+        <p:style>
+          <a:lnRef idx="1">
+            <a:schemeClr val="accent1"/>
+          </a:lnRef>
+          <a:fillRef idx="3">
+            <a:schemeClr val="accent1"/>
+          </a:fillRef>
+          <a:effectRef idx="2">
+            <a:schemeClr val="accent1"/>
+          </a:effectRef>
+          <a:fontRef idx="minor">
+            <a:schemeClr val="lt1"/>
+          </a:fontRef>
+        </p:style>
+        <p:txBody>
+          <a:bodyPr rtlCol="0" anchor="ctr" wrap="square" lIns="54864" rIns="54864" tIns="27432" bIns="27432"/>
+          <a:lstStyle/>
+          <a:p>
+            <a:pPr algn="ctr" marL="0" indent="0">
+              <a:spcBef>
+                <a:spcPts val="0"/>
+              </a:spcBef>
+              <a:spcAft>
+                <a:spcPts val="200"/>
+              </a:spcAft>
+              <a:buNone/>
+            </a:pPr>
+            <a:r>
+              <a:rPr sz="1100" b="1" i="0">
+                <a:solidFill>
+                  <a:srgbClr val="1B3A6B"/>
+                </a:solidFill>
+              </a:rPr>
+              <a:t>OCI image spec</a:t>
+            </a:r>
+          </a:p>
+          <a:p>
+            <a:pPr algn="ctr" marL="0" indent="0">
+              <a:spcBef>
+                <a:spcPts val="0"/>
+              </a:spcBef>
+              <a:spcAft>
+                <a:spcPts val="0"/>
+              </a:spcAft>
+              <a:buNone/>
+            </a:pPr>
+            <a:r>
+              <a:rPr sz="1050" b="0" i="0">
+                <a:solidFill>
+                  <a:srgbClr val="63636B"/>
+                </a:solidFill>
+              </a:rPr>
+              <a:t>how it reads container layers</a:t>
+            </a:r>
+          </a:p>
+        </p:txBody>
+      </p:sp>
+      <p:sp>
+        <p:nvSpPr>
+          <p:cNvPr id="17420" name="cd-chip-edge"/>
+          <p:cNvSpPr/>
+          <p:nvPr/>
+        </p:nvSpPr>
+        <p:spPr>
+          <a:xfrm>
+            <a:off x="7306055" y="5266944"/>
+            <a:ext cx="40640" cy="566928"/>
+          </a:xfrm>
+          <a:prstGeom prst="rect">
+            <a:avLst/>
+          </a:prstGeom>
+          <a:solidFill>
+            <a:srgbClr val="9E3A24"/>
+          </a:solidFill>
+          <a:ln>
+            <a:noFill/>
+          </a:ln>
+          <a:effectLst/>
+        </p:spPr>
+        <p:style>
+          <a:lnRef idx="1">
+            <a:schemeClr val="accent1"/>
+          </a:lnRef>
+          <a:fillRef idx="3">
+            <a:schemeClr val="accent1"/>
+          </a:fillRef>
+          <a:effectRef idx="2">
+            <a:schemeClr val="accent1"/>
+          </a:effectRef>
+          <a:fontRef idx="minor">
+            <a:schemeClr val="lt1"/>
+          </a:fontRef>
+        </p:style>
+        <p:txBody>
+          <a:bodyPr rtlCol="0" anchor="ctr"/>
+          <a:lstStyle/>
+          <a:p>
+            <a:pPr algn="ctr"/>
+          </a:p>
+        </p:txBody>
+      </p:sp>
+      <p:sp>
+        <p:nvSpPr>
+          <p:cNvPr id="17421" name="cd-map"/>
+          <p:cNvSpPr/>
+          <p:nvPr/>
+        </p:nvSpPr>
+        <p:spPr>
+          <a:xfrm>
+            <a:off x="9601200" y="5266944"/>
+            <a:ext cx="2167127" cy="566928"/>
+          </a:xfrm>
+          <a:prstGeom prst="roundRect">
+            <a:avLst>
+              <a:gd name="adj" fmla="val 9000"/>
+            </a:avLst>
+          </a:prstGeom>
+          <a:solidFill>
+            <a:srgbClr val="F5F3EF"/>
+          </a:solidFill>
+          <a:ln w="9525">
+            <a:solidFill>
+              <a:srgbClr val="D2D0CB"/>
+            </a:solidFill>
+          </a:ln>
+          <a:effectLst/>
+        </p:spPr>
+        <p:style>
+          <a:lnRef idx="1">
+            <a:schemeClr val="accent1"/>
+          </a:lnRef>
+          <a:fillRef idx="3">
+            <a:schemeClr val="accent1"/>
+          </a:fillRef>
+          <a:effectRef idx="2">
+            <a:schemeClr val="accent1"/>
+          </a:effectRef>
+          <a:fontRef idx="minor">
+            <a:schemeClr val="lt1"/>
+          </a:fontRef>
+        </p:style>
+        <p:txBody>
+          <a:bodyPr rtlCol="0" anchor="ctr" wrap="square" lIns="54864" rIns="54864" tIns="27432" bIns="27432"/>
+          <a:lstStyle/>
+          <a:p>
+            <a:pPr algn="ctr" marL="0" indent="0">
+              <a:spcBef>
+                <a:spcPts val="0"/>
+              </a:spcBef>
+              <a:spcAft>
+                <a:spcPts val="200"/>
+              </a:spcAft>
+              <a:buNone/>
+            </a:pPr>
+            <a:r>
+              <a:rPr sz="1100" b="1" i="0">
+                <a:solidFill>
+                  <a:srgbClr val="1B3A6B"/>
+                </a:solidFill>
+              </a:rPr>
+              <a:t>Mosca X + Y &gt; Z</a:t>
+            </a:r>
+          </a:p>
+          <a:p>
+            <a:pPr algn="ctr" marL="0" indent="0">
+              <a:spcBef>
+                <a:spcPts val="0"/>
+              </a:spcBef>
+              <a:spcAft>
+                <a:spcPts val="0"/>
+              </a:spcAft>
+              <a:buNone/>
+            </a:pPr>
+            <a:r>
+              <a:rPr sz="1050" b="0" i="0">
+                <a:solidFill>
+                  <a:srgbClr val="63636B"/>
+                </a:solidFill>
+              </a:rPr>
+              <a:t>how it scores exposure</a:t>
+            </a:r>
+          </a:p>
+        </p:txBody>
+      </p:sp>
+      <p:sp>
+        <p:nvSpPr>
+          <p:cNvPr id="17422" name="cd-chip-edge"/>
+          <p:cNvSpPr/>
+          <p:nvPr/>
+        </p:nvSpPr>
+        <p:spPr>
+          <a:xfrm>
+            <a:off x="9601200" y="5266944"/>
+            <a:ext cx="40640" cy="566928"/>
+          </a:xfrm>
+          <a:prstGeom prst="rect">
+            <a:avLst/>
+          </a:prstGeom>
+          <a:solidFill>
+            <a:srgbClr val="9E3A24"/>
+          </a:solidFill>
+          <a:ln>
+            <a:noFill/>
+          </a:ln>
+          <a:effectLst/>
+        </p:spPr>
+        <p:style>
+          <a:lnRef idx="1">
+            <a:schemeClr val="accent1"/>
+          </a:lnRef>
+          <a:fillRef idx="3">
+            <a:schemeClr val="accent1"/>
+          </a:fillRef>
+          <a:effectRef idx="2">
+            <a:schemeClr val="accent1"/>
+          </a:effectRef>
+          <a:fontRef idx="minor">
+            <a:schemeClr val="lt1"/>
+          </a:fontRef>
+        </p:style>
+        <p:txBody>
+          <a:bodyPr rtlCol="0" anchor="ctr"/>
+          <a:lstStyle/>
+          <a:p>
+            <a:pPr algn="ctr"/>
+          </a:p>
+        </p:txBody>
+      </p:sp>
+      <p:sp>
+        <p:nvSpPr>
+          <p:cNvPr id="17423" name="cd-ref-note"/>
+          <p:cNvSpPr txBox="1"/>
+          <p:nvPr/>
+        </p:nvSpPr>
+        <p:spPr>
+          <a:xfrm>
+            <a:off x="420624" y="5925312"/>
+            <a:ext cx="11347703" cy="402336"/>
+          </a:xfrm>
+          <a:prstGeom prst="rect">
+            <a:avLst/>
+          </a:prstGeom>
+          <a:noFill/>
+        </p:spPr>
+        <p:txBody>
+          <a:bodyPr wrap="square" lIns="0" rIns="0" tIns="0" bIns="0">
+            <a:spAutoFit/>
+          </a:bodyPr>
+          <a:lstStyle/>
+          <a:p>
+            <a:pPr algn="l" marL="0" indent="0">
+              <a:spcBef>
+                <a:spcPts val="0"/>
+              </a:spcBef>
+              <a:spcAft>
+                <a:spcPts val="0"/>
+              </a:spcAft>
+              <a:buNone/>
+            </a:pPr>
+            <a:r>
+              <a:rPr sz="1050" b="0" i="1">
+                <a:solidFill>
+                  <a:srgbClr val="63636B"/>
+                </a:solidFill>
+              </a:rPr>
+              <a:t>Scope — CryptoDrishti discovers, classifies, assesses and recommends cryptography. It does not implement the post-quantum primitives above; it uses them as the standards that inform classification and migration targets.</a:t>
             </a:r>
           </a:p>
         </p:txBody>

--- a/submission/CryptoDrishti-SIH26164-Idea-Presentation.pptx
+++ b/submission/CryptoDrishti-SIH26164-Idea-Presentation.pptx
@@ -12721,7 +12721,7 @@
         <p:spPr>
           <a:xfrm>
             <a:off x="6492240" y="4297680"/>
-            <a:ext cx="5276088" cy="658368"/>
+            <a:ext cx="5276088" cy="530352"/>
           </a:xfrm>
           <a:prstGeom prst="rect">
             <a:avLst/>
@@ -12756,13 +12756,13 @@
       </p:sp>
       <p:sp>
         <p:nvSpPr>
-          <p:cNvPr id="17435" name="cd-plan-caption"/>
+          <p:cNvPr id="17435" name="cd-report-caption"/>
           <p:cNvSpPr txBox="1"/>
           <p:nvPr/>
         </p:nvSpPr>
         <p:spPr>
           <a:xfrm>
-            <a:off x="6492240" y="4974336"/>
+            <a:off x="6492240" y="4901183"/>
             <a:ext cx="5276088" cy="237744"/>
           </a:xfrm>
           <a:prstGeom prst="rect">
@@ -12791,14 +12791,14 @@
                   <a:srgbClr val="63636B"/>
                 </a:solidFill>
               </a:rPr>
-              <a:t>Remediation programme — grouped by the replacement each asset needs, which is how the work is staffed.</a:t>
+              <a:t>The generated report — the same scan, as a printable document.</a:t>
             </a:r>
           </a:p>
         </p:txBody>
       </p:sp>
       <p:pic>
         <p:nvPicPr>
-          <p:cNvPr id="17436" name="cd-shot-03-migration-plan-" descr="03-migration-plan-0.055-0.300-1.000-0.560.png"/>
+          <p:cNvPr id="17436" name="cd-shot-08-report-0.000-0." descr="08-report-0.000-0.000-1.000-0.300.png"/>
           <p:cNvPicPr>
             <a:picLocks noChangeAspect="1"/>
           </p:cNvPicPr>
@@ -12812,8 +12812,8 @@
         </p:blipFill>
         <p:spPr>
           <a:xfrm>
-            <a:off x="6492240" y="5248656"/>
-            <a:ext cx="5276088" cy="907035"/>
+            <a:off x="6492240" y="5157216"/>
+            <a:ext cx="5276088" cy="1076322"/>
           </a:xfrm>
           <a:prstGeom prst="rect">
             <a:avLst/>
@@ -12967,7 +12967,7 @@
         <p:spPr bwMode="auto">
           <a:xfrm>
             <a:off x="420624" y="1097280"/>
-            <a:ext cx="5541264" cy="3749039"/>
+            <a:ext cx="5541264" cy="3529584"/>
           </a:xfrm>
           <a:prstGeom prst="rect">
             <a:avLst/>
@@ -13410,7 +13410,7 @@
         <p:spPr>
           <a:xfrm>
             <a:off x="6400800" y="1097280"/>
-            <a:ext cx="5367527" cy="3749039"/>
+            <a:ext cx="5367527" cy="3529584"/>
           </a:xfrm>
           <a:prstGeom prst="rect">
             <a:avLst/>
@@ -13557,7 +13557,7 @@
                   <a:srgbClr val="3E3E44"/>
                 </a:solidFill>
               </a:rPr>
-              <a:t>M. Mosca, “Cybersecurity in an Era with Quantum Computers: Will We Be Ready?”, IEEE Security &amp; Privacy, vol. 16, no. 5, 2018 — the source of the X + Y &gt; Z inequality used by the risk model.</a:t>
+              <a:t>M. Mosca, “Cybersecurity in an Era with Quantum Computers: Will We Be Ready?”, IEEE Security &amp; Privacy 16(5), 2018 — the source of the X + Y &gt; Z inequality.</a:t>
             </a:r>
           </a:p>
           <a:p>
@@ -13577,7 +13577,7 @@
                   <a:srgbClr val="3E3E44"/>
                 </a:solidFill>
               </a:rPr>
-              <a:t>P. W. Shor, “Polynomial-Time Algorithms for Prime Factorization and Discrete Logarithms on a Quantum Computer”, SIAM J. Computing, 1997.</a:t>
+              <a:t>P. W. Shor, “Polynomial-Time Algorithms for Prime Factorization and Discrete Logarithms”, SIAM J. Computing, 1997.</a:t>
             </a:r>
           </a:p>
           <a:p>
@@ -13604,56 +13604,14 @@
       </p:sp>
       <p:sp>
         <p:nvSpPr>
-          <p:cNvPr id="17412" name="cd-map-eyebrow"/>
-          <p:cNvSpPr txBox="1"/>
-          <p:nvPr/>
-        </p:nvSpPr>
-        <p:spPr>
-          <a:xfrm>
-            <a:off x="420624" y="5029200"/>
-            <a:ext cx="11347703" cy="237744"/>
-          </a:xfrm>
-          <a:prstGeom prst="rect">
-            <a:avLst/>
-          </a:prstGeom>
-          <a:noFill/>
-        </p:spPr>
-        <p:txBody>
-          <a:bodyPr wrap="square" lIns="0" rIns="0" tIns="0" bIns="0">
-            <a:spAutoFit/>
-          </a:bodyPr>
-          <a:lstStyle/>
-          <a:p>
-            <a:pPr algn="l" marL="0" indent="0">
-              <a:spcBef>
-                <a:spcPts val="0"/>
-              </a:spcBef>
-              <a:spcAft>
-                <a:spcPts val="0"/>
-              </a:spcAft>
-              <a:buNone/>
-            </a:pPr>
-            <a:r>
-              <a:rPr sz="1050" b="1" i="0">
-                <a:solidFill>
-                  <a:srgbClr val="63636B"/>
-                </a:solidFill>
-              </a:rPr>
-              <a:t>WHICH STANDARD GOVERNS WHICH PART OF THE PRODUCT</a:t>
-            </a:r>
-          </a:p>
-        </p:txBody>
-      </p:sp>
-      <p:sp>
-        <p:nvSpPr>
-          <p:cNvPr id="17413" name="cd-map"/>
+          <p:cNvPr id="17412" name="cd-repo"/>
           <p:cNvSpPr/>
           <p:nvPr/>
         </p:nvSpPr>
         <p:spPr>
           <a:xfrm>
-            <a:off x="420624" y="5266944"/>
-            <a:ext cx="2167127" cy="566928"/>
+            <a:off x="420624" y="4992624"/>
+            <a:ext cx="3660647" cy="603504"/>
           </a:xfrm>
           <a:prstGeom prst="roundRect">
             <a:avLst>
@@ -13698,12 +13656,12 @@
               <a:buNone/>
             </a:pPr>
             <a:r>
-              <a:rPr sz="1100" b="1" i="0">
+              <a:rPr sz="1200" b="1" i="0">
                 <a:solidFill>
                   <a:srgbClr val="1B3A6B"/>
                 </a:solidFill>
               </a:rPr>
-              <a:t>FIPS 203 / 204 / 205</a:t>
+              <a:t>Repository</a:t>
             </a:r>
           </a:p>
           <a:p>
@@ -13717,26 +13675,26 @@
               <a:buNone/>
             </a:pPr>
             <a:r>
-              <a:rPr sz="1050" b="0" i="0">
+              <a:rPr sz="1150" b="0" i="0">
                 <a:solidFill>
                   <a:srgbClr val="63636B"/>
                 </a:solidFill>
               </a:rPr>
-              <a:t>the migration targets it names</a:t>
-            </a:r>
-          </a:p>
-        </p:txBody>
-      </p:sp>
-      <p:sp>
-        <p:nvSpPr>
-          <p:cNvPr id="17414" name="cd-chip-edge"/>
+              <a:t>github.com/sgtsujith141-wq/cryptodrishti</a:t>
+            </a:r>
+          </a:p>
+        </p:txBody>
+      </p:sp>
+      <p:sp>
+        <p:nvSpPr>
+          <p:cNvPr id="17413" name="cd-chip-edge"/>
           <p:cNvSpPr/>
           <p:nvPr/>
         </p:nvSpPr>
         <p:spPr>
           <a:xfrm>
-            <a:off x="420624" y="5266944"/>
-            <a:ext cx="40640" cy="566928"/>
+            <a:off x="420624" y="4992624"/>
+            <a:ext cx="40640" cy="603504"/>
           </a:xfrm>
           <a:prstGeom prst="rect">
             <a:avLst/>
@@ -13773,14 +13731,14 @@
       </p:sp>
       <p:sp>
         <p:nvSpPr>
-          <p:cNvPr id="17415" name="cd-map"/>
+          <p:cNvPr id="17414" name="cd-youtube"/>
           <p:cNvSpPr/>
           <p:nvPr/>
         </p:nvSpPr>
         <p:spPr>
           <a:xfrm>
-            <a:off x="2715768" y="5266944"/>
-            <a:ext cx="2167127" cy="566928"/>
+            <a:off x="4264152" y="4992624"/>
+            <a:ext cx="3660647" cy="603504"/>
           </a:xfrm>
           <a:prstGeom prst="roundRect">
             <a:avLst>
@@ -13825,12 +13783,12 @@
               <a:buNone/>
             </a:pPr>
             <a:r>
-              <a:rPr sz="1100" b="1" i="0">
+              <a:rPr sz="1200" b="1" i="0">
                 <a:solidFill>
                   <a:srgbClr val="1B3A6B"/>
                 </a:solidFill>
               </a:rPr>
-              <a:t>NIST IR 8547</a:t>
+              <a:t>Demo video</a:t>
             </a:r>
           </a:p>
           <a:p>
@@ -13849,21 +13807,21 @@
                   <a:srgbClr val="63636B"/>
                 </a:solidFill>
               </a:rPr>
-              <a:t>how it classifies what is at risk</a:t>
-            </a:r>
-          </a:p>
-        </p:txBody>
-      </p:sp>
-      <p:sp>
-        <p:nvSpPr>
-          <p:cNvPr id="17416" name="cd-chip-edge"/>
+              <a:t>[YOUTUBE LINK TO BE ADDED AFTER UPLOAD]</a:t>
+            </a:r>
+          </a:p>
+        </p:txBody>
+      </p:sp>
+      <p:sp>
+        <p:nvSpPr>
+          <p:cNvPr id="17415" name="cd-chip-edge"/>
           <p:cNvSpPr/>
           <p:nvPr/>
         </p:nvSpPr>
         <p:spPr>
           <a:xfrm>
-            <a:off x="2715768" y="5266944"/>
-            <a:ext cx="40640" cy="566928"/>
+            <a:off x="4264152" y="4992624"/>
+            <a:ext cx="40640" cy="603504"/>
           </a:xfrm>
           <a:prstGeom prst="rect">
             <a:avLst/>
@@ -13900,14 +13858,14 @@
       </p:sp>
       <p:sp>
         <p:nvSpPr>
-          <p:cNvPr id="17417" name="cd-map"/>
+          <p:cNvPr id="17416" name="cd-validated"/>
           <p:cNvSpPr/>
           <p:nvPr/>
         </p:nvSpPr>
         <p:spPr>
           <a:xfrm>
-            <a:off x="5010912" y="5266944"/>
-            <a:ext cx="2167127" cy="566928"/>
+            <a:off x="8107680" y="4992624"/>
+            <a:ext cx="3660647" cy="603504"/>
           </a:xfrm>
           <a:prstGeom prst="roundRect">
             <a:avLst>
@@ -13952,12 +13910,12 @@
               <a:buNone/>
             </a:pPr>
             <a:r>
-              <a:rPr sz="1100" b="1" i="0">
-                <a:solidFill>
-                  <a:srgbClr val="1B3A6B"/>
-                </a:solidFill>
-              </a:rPr>
-              <a:t>CycloneDX 1.6 / 1.7</a:t>
+              <a:rPr sz="1200" b="1" i="0">
+                <a:solidFill>
+                  <a:srgbClr val="144C39"/>
+                </a:solidFill>
+              </a:rPr>
+              <a:t>CycloneDX 1.6 / 1.7 — validated</a:t>
             </a:r>
           </a:p>
           <a:p>
@@ -13976,27 +13934,27 @@
                   <a:srgbClr val="63636B"/>
                 </a:solidFill>
               </a:rPr>
-              <a:t>the CBOM it exports and validates</a:t>
-            </a:r>
-          </a:p>
-        </p:txBody>
-      </p:sp>
-      <p:sp>
-        <p:nvSpPr>
-          <p:cNvPr id="17418" name="cd-chip-edge"/>
+              <a:t>offline, against the official JSON Schema at a pinned commit</a:t>
+            </a:r>
+          </a:p>
+        </p:txBody>
+      </p:sp>
+      <p:sp>
+        <p:nvSpPr>
+          <p:cNvPr id="17417" name="cd-chip-edge"/>
           <p:cNvSpPr/>
           <p:nvPr/>
         </p:nvSpPr>
         <p:spPr>
           <a:xfrm>
-            <a:off x="5010912" y="5266944"/>
-            <a:ext cx="40640" cy="566928"/>
+            <a:off x="8107680" y="4992624"/>
+            <a:ext cx="40640" cy="603504"/>
           </a:xfrm>
           <a:prstGeom prst="rect">
             <a:avLst/>
           </a:prstGeom>
           <a:solidFill>
-            <a:srgbClr val="9E3A24"/>
+            <a:srgbClr val="144C39"/>
           </a:solidFill>
           <a:ln>
             <a:noFill/>
@@ -14027,268 +13985,14 @@
       </p:sp>
       <p:sp>
         <p:nvSpPr>
-          <p:cNvPr id="17419" name="cd-map"/>
-          <p:cNvSpPr/>
-          <p:nvPr/>
-        </p:nvSpPr>
-        <p:spPr>
-          <a:xfrm>
-            <a:off x="7306055" y="5266944"/>
-            <a:ext cx="2167127" cy="566928"/>
-          </a:xfrm>
-          <a:prstGeom prst="roundRect">
-            <a:avLst>
-              <a:gd name="adj" fmla="val 9000"/>
-            </a:avLst>
-          </a:prstGeom>
-          <a:solidFill>
-            <a:srgbClr val="F5F3EF"/>
-          </a:solidFill>
-          <a:ln w="9525">
-            <a:solidFill>
-              <a:srgbClr val="D2D0CB"/>
-            </a:solidFill>
-          </a:ln>
-          <a:effectLst/>
-        </p:spPr>
-        <p:style>
-          <a:lnRef idx="1">
-            <a:schemeClr val="accent1"/>
-          </a:lnRef>
-          <a:fillRef idx="3">
-            <a:schemeClr val="accent1"/>
-          </a:fillRef>
-          <a:effectRef idx="2">
-            <a:schemeClr val="accent1"/>
-          </a:effectRef>
-          <a:fontRef idx="minor">
-            <a:schemeClr val="lt1"/>
-          </a:fontRef>
-        </p:style>
-        <p:txBody>
-          <a:bodyPr rtlCol="0" anchor="ctr" wrap="square" lIns="54864" rIns="54864" tIns="27432" bIns="27432"/>
-          <a:lstStyle/>
-          <a:p>
-            <a:pPr algn="ctr" marL="0" indent="0">
-              <a:spcBef>
-                <a:spcPts val="0"/>
-              </a:spcBef>
-              <a:spcAft>
-                <a:spcPts val="200"/>
-              </a:spcAft>
-              <a:buNone/>
-            </a:pPr>
-            <a:r>
-              <a:rPr sz="1100" b="1" i="0">
-                <a:solidFill>
-                  <a:srgbClr val="1B3A6B"/>
-                </a:solidFill>
-              </a:rPr>
-              <a:t>OCI image spec</a:t>
-            </a:r>
-          </a:p>
-          <a:p>
-            <a:pPr algn="ctr" marL="0" indent="0">
-              <a:spcBef>
-                <a:spcPts val="0"/>
-              </a:spcBef>
-              <a:spcAft>
-                <a:spcPts val="0"/>
-              </a:spcAft>
-              <a:buNone/>
-            </a:pPr>
-            <a:r>
-              <a:rPr sz="1050" b="0" i="0">
-                <a:solidFill>
-                  <a:srgbClr val="63636B"/>
-                </a:solidFill>
-              </a:rPr>
-              <a:t>how it reads container layers</a:t>
-            </a:r>
-          </a:p>
-        </p:txBody>
-      </p:sp>
-      <p:sp>
-        <p:nvSpPr>
-          <p:cNvPr id="17420" name="cd-chip-edge"/>
-          <p:cNvSpPr/>
-          <p:nvPr/>
-        </p:nvSpPr>
-        <p:spPr>
-          <a:xfrm>
-            <a:off x="7306055" y="5266944"/>
-            <a:ext cx="40640" cy="566928"/>
-          </a:xfrm>
-          <a:prstGeom prst="rect">
-            <a:avLst/>
-          </a:prstGeom>
-          <a:solidFill>
-            <a:srgbClr val="9E3A24"/>
-          </a:solidFill>
-          <a:ln>
-            <a:noFill/>
-          </a:ln>
-          <a:effectLst/>
-        </p:spPr>
-        <p:style>
-          <a:lnRef idx="1">
-            <a:schemeClr val="accent1"/>
-          </a:lnRef>
-          <a:fillRef idx="3">
-            <a:schemeClr val="accent1"/>
-          </a:fillRef>
-          <a:effectRef idx="2">
-            <a:schemeClr val="accent1"/>
-          </a:effectRef>
-          <a:fontRef idx="minor">
-            <a:schemeClr val="lt1"/>
-          </a:fontRef>
-        </p:style>
-        <p:txBody>
-          <a:bodyPr rtlCol="0" anchor="ctr"/>
-          <a:lstStyle/>
-          <a:p>
-            <a:pPr algn="ctr"/>
-          </a:p>
-        </p:txBody>
-      </p:sp>
-      <p:sp>
-        <p:nvSpPr>
-          <p:cNvPr id="17421" name="cd-map"/>
-          <p:cNvSpPr/>
-          <p:nvPr/>
-        </p:nvSpPr>
-        <p:spPr>
-          <a:xfrm>
-            <a:off x="9601200" y="5266944"/>
-            <a:ext cx="2167127" cy="566928"/>
-          </a:xfrm>
-          <a:prstGeom prst="roundRect">
-            <a:avLst>
-              <a:gd name="adj" fmla="val 9000"/>
-            </a:avLst>
-          </a:prstGeom>
-          <a:solidFill>
-            <a:srgbClr val="F5F3EF"/>
-          </a:solidFill>
-          <a:ln w="9525">
-            <a:solidFill>
-              <a:srgbClr val="D2D0CB"/>
-            </a:solidFill>
-          </a:ln>
-          <a:effectLst/>
-        </p:spPr>
-        <p:style>
-          <a:lnRef idx="1">
-            <a:schemeClr val="accent1"/>
-          </a:lnRef>
-          <a:fillRef idx="3">
-            <a:schemeClr val="accent1"/>
-          </a:fillRef>
-          <a:effectRef idx="2">
-            <a:schemeClr val="accent1"/>
-          </a:effectRef>
-          <a:fontRef idx="minor">
-            <a:schemeClr val="lt1"/>
-          </a:fontRef>
-        </p:style>
-        <p:txBody>
-          <a:bodyPr rtlCol="0" anchor="ctr" wrap="square" lIns="54864" rIns="54864" tIns="27432" bIns="27432"/>
-          <a:lstStyle/>
-          <a:p>
-            <a:pPr algn="ctr" marL="0" indent="0">
-              <a:spcBef>
-                <a:spcPts val="0"/>
-              </a:spcBef>
-              <a:spcAft>
-                <a:spcPts val="200"/>
-              </a:spcAft>
-              <a:buNone/>
-            </a:pPr>
-            <a:r>
-              <a:rPr sz="1100" b="1" i="0">
-                <a:solidFill>
-                  <a:srgbClr val="1B3A6B"/>
-                </a:solidFill>
-              </a:rPr>
-              <a:t>Mosca X + Y &gt; Z</a:t>
-            </a:r>
-          </a:p>
-          <a:p>
-            <a:pPr algn="ctr" marL="0" indent="0">
-              <a:spcBef>
-                <a:spcPts val="0"/>
-              </a:spcBef>
-              <a:spcAft>
-                <a:spcPts val="0"/>
-              </a:spcAft>
-              <a:buNone/>
-            </a:pPr>
-            <a:r>
-              <a:rPr sz="1050" b="0" i="0">
-                <a:solidFill>
-                  <a:srgbClr val="63636B"/>
-                </a:solidFill>
-              </a:rPr>
-              <a:t>how it scores exposure</a:t>
-            </a:r>
-          </a:p>
-        </p:txBody>
-      </p:sp>
-      <p:sp>
-        <p:nvSpPr>
-          <p:cNvPr id="17422" name="cd-chip-edge"/>
-          <p:cNvSpPr/>
-          <p:nvPr/>
-        </p:nvSpPr>
-        <p:spPr>
-          <a:xfrm>
-            <a:off x="9601200" y="5266944"/>
-            <a:ext cx="40640" cy="566928"/>
-          </a:xfrm>
-          <a:prstGeom prst="rect">
-            <a:avLst/>
-          </a:prstGeom>
-          <a:solidFill>
-            <a:srgbClr val="9E3A24"/>
-          </a:solidFill>
-          <a:ln>
-            <a:noFill/>
-          </a:ln>
-          <a:effectLst/>
-        </p:spPr>
-        <p:style>
-          <a:lnRef idx="1">
-            <a:schemeClr val="accent1"/>
-          </a:lnRef>
-          <a:fillRef idx="3">
-            <a:schemeClr val="accent1"/>
-          </a:fillRef>
-          <a:effectRef idx="2">
-            <a:schemeClr val="accent1"/>
-          </a:effectRef>
-          <a:fontRef idx="minor">
-            <a:schemeClr val="lt1"/>
-          </a:fontRef>
-        </p:style>
-        <p:txBody>
-          <a:bodyPr rtlCol="0" anchor="ctr"/>
-          <a:lstStyle/>
-          <a:p>
-            <a:pPr algn="ctr"/>
-          </a:p>
-        </p:txBody>
-      </p:sp>
-      <p:sp>
-        <p:nvSpPr>
-          <p:cNvPr id="17423" name="cd-ref-note"/>
+          <p:cNvPr id="17418" name="cd-ref-note"/>
           <p:cNvSpPr txBox="1"/>
           <p:nvPr/>
         </p:nvSpPr>
         <p:spPr>
           <a:xfrm>
-            <a:off x="420624" y="5925312"/>
-            <a:ext cx="11347703" cy="402336"/>
+            <a:off x="420624" y="5705856"/>
+            <a:ext cx="11347703" cy="310896"/>
           </a:xfrm>
           <a:prstGeom prst="rect">
             <a:avLst/>
@@ -14311,7 +14015,7 @@
               <a:buNone/>
             </a:pPr>
             <a:r>
-              <a:rPr sz="1050" b="0" i="1">
+              <a:rPr sz="1000" b="0" i="1">
                 <a:solidFill>
                   <a:srgbClr val="63636B"/>
                 </a:solidFill>

--- a/submission/CryptoDrishti-SIH26164-Idea-Presentation.pptx
+++ b/submission/CryptoDrishti-SIH26164-Idea-Presentation.pptx
@@ -5762,7 +5762,7 @@
                   <a:srgbClr val="3E3E44"/>
                 </a:solidFill>
               </a:rPr>
-              <a:t>26164</a:t>
+              <a:t>Blockchain &amp; Cybersecurity</a:t>
             </a:r>
           </a:p>
           <a:p>
@@ -12798,7 +12798,7 @@
       </p:sp>
       <p:pic>
         <p:nvPicPr>
-          <p:cNvPr id="17436" name="cd-shot-08-report-0.000-0." descr="08-report-0.000-0.000-1.000-0.300.png"/>
+          <p:cNvPr id="17436" name="cd-shot-08-report-0.000-0." descr="08-report-0.000-0.000-1.000-0.250.png"/>
           <p:cNvPicPr>
             <a:picLocks noChangeAspect="1"/>
           </p:cNvPicPr>
@@ -12813,7 +12813,7 @@
         <p:spPr>
           <a:xfrm>
             <a:off x="6492240" y="5157216"/>
-            <a:ext cx="5276088" cy="1076322"/>
+            <a:ext cx="5276088" cy="896935"/>
           </a:xfrm>
           <a:prstGeom prst="rect">
             <a:avLst/>

--- a/submission/CryptoDrishti-SIH26164-Idea-Presentation.pptx
+++ b/submission/CryptoDrishti-SIH26164-Idea-Presentation.pptx
@@ -10362,7 +10362,7 @@
         <p:spPr bwMode="auto">
           <a:xfrm>
             <a:off x="420624" y="1097280"/>
-            <a:ext cx="5413248" cy="4535424"/>
+            <a:ext cx="4753686" cy="4480560"/>
           </a:xfrm>
           <a:prstGeom prst="rect">
             <a:avLst/>
@@ -10398,7 +10398,7 @@
               <a:defRPr/>
             </a:pPr>
             <a:r>
-              <a:rPr sz="1800" b="1" i="0">
+              <a:rPr sz="1600" b="1" i="0">
                 <a:solidFill>
                   <a:srgbClr val="9E3A24"/>
                 </a:solidFill>
@@ -10426,13 +10426,13 @@
                 <a:spcPts val="0"/>
               </a:spcBef>
               <a:spcAft>
-                <a:spcPts val="400"/>
+                <a:spcPts val="200"/>
               </a:spcAft>
               <a:buFont typeface="Arial"/>
               <a:buChar char="–"/>
             </a:pPr>
             <a:r>
-              <a:rPr sz="1400" b="0" i="0">
+              <a:rPr sz="1300" b="0" i="0">
                 <a:solidFill>
                   <a:srgbClr val="3E3E44"/>
                 </a:solidFill>
@@ -10446,13 +10446,13 @@
                 <a:spcPts val="0"/>
               </a:spcBef>
               <a:spcAft>
-                <a:spcPts val="400"/>
+                <a:spcPts val="200"/>
               </a:spcAft>
               <a:buFont typeface="Arial"/>
               <a:buChar char="–"/>
             </a:pPr>
             <a:r>
-              <a:rPr sz="1400" b="0" i="0">
+              <a:rPr sz="1300" b="0" i="0">
                 <a:solidFill>
                   <a:srgbClr val="3E3E44"/>
                 </a:solidFill>
@@ -10466,13 +10466,13 @@
                 <a:spcPts val="0"/>
               </a:spcBef>
               <a:spcAft>
-                <a:spcPts val="400"/>
+                <a:spcPts val="200"/>
               </a:spcAft>
               <a:buFont typeface="Arial"/>
               <a:buChar char="–"/>
             </a:pPr>
             <a:r>
-              <a:rPr sz="1400" b="0" i="0">
+              <a:rPr sz="1300" b="0" i="0">
                 <a:solidFill>
                   <a:srgbClr val="3E3E44"/>
                 </a:solidFill>
@@ -10483,7 +10483,7 @@
           <a:p>
             <a:pPr marL="0" indent="0">
               <a:spcBef>
-                <a:spcPts val="800"/>
+                <a:spcPts val="600"/>
               </a:spcBef>
               <a:spcAft>
                 <a:spcPts val="500"/>
@@ -10491,7 +10491,7 @@
               <a:buNone/>
             </a:pPr>
             <a:r>
-              <a:rPr sz="1800" b="1" i="0">
+              <a:rPr sz="1600" b="1" i="0">
                 <a:solidFill>
                   <a:srgbClr val="9E3A24"/>
                 </a:solidFill>
@@ -10505,13 +10505,13 @@
                 <a:spcPts val="0"/>
               </a:spcBef>
               <a:spcAft>
-                <a:spcPts val="400"/>
+                <a:spcPts val="200"/>
               </a:spcAft>
               <a:buFont typeface="Arial"/>
               <a:buChar char="–"/>
             </a:pPr>
             <a:r>
-              <a:rPr sz="1400" b="1" i="0">
+              <a:rPr sz="1300" b="1" i="0">
                 <a:solidFill>
                   <a:srgbClr val="1A1A1C"/>
                 </a:solidFill>
@@ -10519,7 +10519,7 @@
               <a:t>664 automated tests — </a:t>
             </a:r>
             <a:r>
-              <a:rPr sz="1400" b="0" i="0">
+              <a:rPr sz="1300" b="0" i="0">
                 <a:solidFill>
                   <a:srgbClr val="3E3E44"/>
                 </a:solidFill>
@@ -10533,13 +10533,13 @@
                 <a:spcPts val="0"/>
               </a:spcBef>
               <a:spcAft>
-                <a:spcPts val="400"/>
+                <a:spcPts val="200"/>
               </a:spcAft>
               <a:buFont typeface="Arial"/>
               <a:buChar char="–"/>
             </a:pPr>
             <a:r>
-              <a:rPr sz="1400" b="1" i="0">
+              <a:rPr sz="1300" b="1" i="0">
                 <a:solidFill>
                   <a:srgbClr val="1A1A1C"/>
                 </a:solidFill>
@@ -10547,7 +10547,7 @@
               <a:t>Official schema validation — </a:t>
             </a:r>
             <a:r>
-              <a:rPr sz="1400" b="0" i="0">
+              <a:rPr sz="1300" b="0" i="0">
                 <a:solidFill>
                   <a:srgbClr val="3E3E44"/>
                 </a:solidFill>
@@ -10561,13 +10561,13 @@
                 <a:spcPts val="0"/>
               </a:spcBef>
               <a:spcAft>
-                <a:spcPts val="400"/>
+                <a:spcPts val="200"/>
               </a:spcAft>
               <a:buFont typeface="Arial"/>
               <a:buChar char="–"/>
             </a:pPr>
             <a:r>
-              <a:rPr sz="1400" b="1" i="0">
+              <a:rPr sz="1300" b="1" i="0">
                 <a:solidFill>
                   <a:srgbClr val="1A1A1C"/>
                 </a:solidFill>
@@ -10575,7 +10575,7 @@
               <a:t>Hand-labelled benchmark — </a:t>
             </a:r>
             <a:r>
-              <a:rPr sz="1400" b="0" i="0">
+              <a:rPr sz="1300" b="0" i="0">
                 <a:solidFill>
                   <a:srgbClr val="3E3E44"/>
                 </a:solidFill>
@@ -10586,7 +10586,7 @@
           <a:p>
             <a:pPr marL="0" indent="0">
               <a:spcBef>
-                <a:spcPts val="800"/>
+                <a:spcPts val="600"/>
               </a:spcBef>
               <a:spcAft>
                 <a:spcPts val="500"/>
@@ -10594,7 +10594,7 @@
               <a:buNone/>
             </a:pPr>
             <a:r>
-              <a:rPr sz="1800" b="1" i="0">
+              <a:rPr sz="1600" b="1" i="0">
                 <a:solidFill>
                   <a:srgbClr val="9E3A24"/>
                 </a:solidFill>
@@ -10613,7 +10613,7 @@
               <a:buNone/>
             </a:pPr>
             <a:r>
-              <a:rPr sz="1400" b="0" i="0">
+              <a:rPr sz="1300" b="0" i="0">
                 <a:solidFill>
                   <a:srgbClr val="3E3E44"/>
                 </a:solidFill>
@@ -10866,8 +10866,8 @@
         </p:nvSpPr>
         <p:spPr>
           <a:xfrm>
-            <a:off x="420624" y="5724144"/>
-            <a:ext cx="5413248" cy="512064"/>
+            <a:off x="420624" y="5650992"/>
+            <a:ext cx="4753686" cy="566928"/>
           </a:xfrm>
           <a:prstGeom prst="rect">
             <a:avLst/>
@@ -10890,7 +10890,7 @@
               <a:buNone/>
             </a:pPr>
             <a:r>
-              <a:rPr sz="1050" b="0" i="1">
+              <a:rPr sz="1000" b="0" i="1">
                 <a:solidFill>
                   <a:srgbClr val="63636B"/>
                 </a:solidFill>
@@ -10902,7 +10902,7 @@
       </p:sp>
       <p:pic>
         <p:nvPicPr>
-          <p:cNvPr id="17412" name="cd-shot-01-assessment-0.31" descr="01-assessment-0.316-0.112-0.990-0.468.png"/>
+          <p:cNvPr id="17412" name="cd-shot-w01-assessment-0.5" descr="w01-assessment-0.508-0.132-0.825-0.935.png"/>
           <p:cNvPicPr>
             <a:picLocks noChangeAspect="1"/>
           </p:cNvPicPr>
@@ -10916,59 +10916,17 @@
         </p:blipFill>
         <p:spPr>
           <a:xfrm>
-            <a:off x="6126480" y="1097280"/>
-            <a:ext cx="5641847" cy="1860689"/>
+            <a:off x="5466918" y="1097280"/>
+            <a:ext cx="2823464" cy="4023359"/>
           </a:xfrm>
           <a:prstGeom prst="rect">
             <a:avLst/>
           </a:prstGeom>
         </p:spPr>
       </p:pic>
-      <p:sp>
-        <p:nvSpPr>
-          <p:cNvPr id="17413" name="cd-caption"/>
-          <p:cNvSpPr txBox="1"/>
-          <p:nvPr/>
-        </p:nvSpPr>
-        <p:spPr>
-          <a:xfrm>
-            <a:off x="6126480" y="3031121"/>
-            <a:ext cx="5641847" cy="274320"/>
-          </a:xfrm>
-          <a:prstGeom prst="rect">
-            <a:avLst/>
-          </a:prstGeom>
-          <a:noFill/>
-        </p:spPr>
-        <p:txBody>
-          <a:bodyPr wrap="square" lIns="0" rIns="0" tIns="0" bIns="0">
-            <a:spAutoFit/>
-          </a:bodyPr>
-          <a:lstStyle/>
-          <a:p>
-            <a:pPr marL="0" indent="0">
-              <a:spcBef>
-                <a:spcPts val="0"/>
-              </a:spcBef>
-              <a:spcAft>
-                <a:spcPts val="0"/>
-              </a:spcAft>
-              <a:buNone/>
-            </a:pPr>
-            <a:r>
-              <a:rPr sz="1300" b="0" i="1">
-                <a:solidFill>
-                  <a:srgbClr val="63636B"/>
-                </a:solidFill>
-              </a:rPr>
-              <a:t>Assessment — the scan states its own completeness first: one endpoint refused, so the inventory is marked PARTIAL.</a:t>
-            </a:r>
-          </a:p>
-        </p:txBody>
-      </p:sp>
       <p:pic>
         <p:nvPicPr>
-          <p:cNvPr id="17414" name="cd-shot-07-evidence-drawer" descr="07-evidence-drawer-0.020-0.118-0.990-0.302.png"/>
+          <p:cNvPr id="17413" name="cd-shot-w04-drawer-0.637-0" descr="w04-drawer-0.637-0.018-0.988-0.415.png"/>
           <p:cNvPicPr>
             <a:picLocks noChangeAspect="1"/>
           </p:cNvPicPr>
@@ -10982,8 +10940,8 @@
         </p:blipFill>
         <p:spPr>
           <a:xfrm>
-            <a:off x="6126480" y="3561473"/>
-            <a:ext cx="5641847" cy="2083392"/>
+            <a:off x="8491551" y="1097280"/>
+            <a:ext cx="3276776" cy="2084043"/>
           </a:xfrm>
           <a:prstGeom prst="rect">
             <a:avLst/>
@@ -10992,14 +10950,14 @@
       </p:pic>
       <p:sp>
         <p:nvSpPr>
-          <p:cNvPr id="17415" name="cd-caption"/>
+          <p:cNvPr id="17414" name="cd-caption"/>
           <p:cNvSpPr txBox="1"/>
           <p:nvPr/>
         </p:nvSpPr>
         <p:spPr>
           <a:xfrm>
-            <a:off x="6126480" y="5718017"/>
-            <a:ext cx="5641847" cy="274320"/>
+            <a:off x="8491551" y="3227042"/>
+            <a:ext cx="3276776" cy="274320"/>
           </a:xfrm>
           <a:prstGeom prst="rect">
             <a:avLst/>
@@ -11027,7 +10985,115 @@
                   <a:srgbClr val="63636B"/>
                 </a:solidFill>
               </a:rPr>
-              <a:t>Evidence drawer — purpose, assurance and the exposure arithmetic behind one finding's score.</a:t>
+              <a:t>Evidence drawer — one finding's proof.</a:t>
+            </a:r>
+          </a:p>
+        </p:txBody>
+      </p:sp>
+      <p:pic>
+        <p:nvPicPr>
+          <p:cNvPr id="17415" name="cd-shot-w04-drawer-0.637-0" descr="w04-drawer-0.637-0.425-0.988-0.700.png"/>
+          <p:cNvPicPr>
+            <a:picLocks noChangeAspect="1"/>
+          </p:cNvPicPr>
+          <p:nvPr/>
+        </p:nvPicPr>
+        <p:blipFill>
+          <a:blip r:embed="rId6"/>
+          <a:stretch>
+            <a:fillRect/>
+          </a:stretch>
+        </p:blipFill>
+        <p:spPr>
+          <a:xfrm>
+            <a:off x="8491551" y="3675098"/>
+            <a:ext cx="3276776" cy="1445541"/>
+          </a:xfrm>
+          <a:prstGeom prst="rect">
+            <a:avLst/>
+          </a:prstGeom>
+        </p:spPr>
+      </p:pic>
+      <p:sp>
+        <p:nvSpPr>
+          <p:cNvPr id="17416" name="cd-caption"/>
+          <p:cNvSpPr txBox="1"/>
+          <p:nvPr/>
+        </p:nvSpPr>
+        <p:spPr>
+          <a:xfrm>
+            <a:off x="5466918" y="5184648"/>
+            <a:ext cx="2823464" cy="274320"/>
+          </a:xfrm>
+          <a:prstGeom prst="rect">
+            <a:avLst/>
+          </a:prstGeom>
+          <a:noFill/>
+        </p:spPr>
+        <p:txBody>
+          <a:bodyPr wrap="square" lIns="0" rIns="0" tIns="0" bIns="0">
+            <a:spAutoFit/>
+          </a:bodyPr>
+          <a:lstStyle/>
+          <a:p>
+            <a:pPr marL="0" indent="0">
+              <a:spcBef>
+                <a:spcPts val="0"/>
+              </a:spcBef>
+              <a:spcAft>
+                <a:spcPts val="0"/>
+              </a:spcAft>
+              <a:buNone/>
+            </a:pPr>
+            <a:r>
+              <a:rPr sz="1300" b="0" i="1">
+                <a:solidFill>
+                  <a:srgbClr val="63636B"/>
+                </a:solidFill>
+              </a:rPr>
+              <a:t>Assessment — PARTIAL stated first, then 23 assets, 16 vulnerable.</a:t>
+            </a:r>
+          </a:p>
+        </p:txBody>
+      </p:sp>
+      <p:sp>
+        <p:nvSpPr>
+          <p:cNvPr id="17417" name="cd-caption"/>
+          <p:cNvSpPr txBox="1"/>
+          <p:nvPr/>
+        </p:nvSpPr>
+        <p:spPr>
+          <a:xfrm>
+            <a:off x="8491551" y="5184648"/>
+            <a:ext cx="3276776" cy="274320"/>
+          </a:xfrm>
+          <a:prstGeom prst="rect">
+            <a:avLst/>
+          </a:prstGeom>
+          <a:noFill/>
+        </p:spPr>
+        <p:txBody>
+          <a:bodyPr wrap="square" lIns="0" rIns="0" tIns="0" bIns="0">
+            <a:spAutoFit/>
+          </a:bodyPr>
+          <a:lstStyle/>
+          <a:p>
+            <a:pPr marL="0" indent="0">
+              <a:spcBef>
+                <a:spcPts val="0"/>
+              </a:spcBef>
+              <a:spcAft>
+                <a:spcPts val="0"/>
+              </a:spcAft>
+              <a:buNone/>
+            </a:pPr>
+            <a:r>
+              <a:rPr sz="1300" b="0" i="1">
+                <a:solidFill>
+                  <a:srgbClr val="63636B"/>
+                </a:solidFill>
+              </a:rPr>
+              <a:t>The exposure arithmetic behind its score.</a:t>
             </a:r>
           </a:p>
         </p:txBody>
@@ -11469,7 +11535,7 @@
         <p:spPr>
           <a:xfrm>
             <a:off x="420624" y="1517904"/>
-            <a:ext cx="2050084" cy="1316736"/>
+            <a:ext cx="2050084" cy="950976"/>
           </a:xfrm>
           <a:prstGeom prst="roundRect">
             <a:avLst>
@@ -11533,7 +11599,7 @@
               <a:buNone/>
             </a:pPr>
             <a:r>
-              <a:rPr sz="1100" b="0" i="0">
+              <a:rPr sz="1050" b="0" i="0">
                 <a:solidFill>
                   <a:srgbClr val="63636B"/>
                 </a:solidFill>
@@ -11552,7 +11618,7 @@
         <p:spPr>
           <a:xfrm>
             <a:off x="420624" y="1517904"/>
-            <a:ext cx="40640" cy="1316736"/>
+            <a:ext cx="40640" cy="950976"/>
           </a:xfrm>
           <a:prstGeom prst="rect">
             <a:avLst/>
@@ -11595,7 +11661,7 @@
         </p:nvSpPr>
         <p:spPr>
           <a:xfrm>
-            <a:off x="2516428" y="2066543"/>
+            <a:off x="2516428" y="1883663"/>
             <a:ext cx="182879" cy="219456"/>
           </a:xfrm>
           <a:prstGeom prst="rightArrow">
@@ -11640,7 +11706,7 @@
         <p:spPr>
           <a:xfrm>
             <a:off x="2745028" y="1517904"/>
-            <a:ext cx="2050084" cy="1316736"/>
+            <a:ext cx="2050084" cy="950976"/>
           </a:xfrm>
           <a:prstGeom prst="roundRect">
             <a:avLst>
@@ -11704,7 +11770,7 @@
               <a:buNone/>
             </a:pPr>
             <a:r>
-              <a:rPr sz="1100" b="0" i="0">
+              <a:rPr sz="1050" b="0" i="0">
                 <a:solidFill>
                   <a:srgbClr val="63636B"/>
                 </a:solidFill>
@@ -11723,7 +11789,7 @@
         <p:spPr>
           <a:xfrm>
             <a:off x="2745028" y="1517904"/>
-            <a:ext cx="40640" cy="1316736"/>
+            <a:ext cx="40640" cy="950976"/>
           </a:xfrm>
           <a:prstGeom prst="rect">
             <a:avLst/>
@@ -11766,7 +11832,7 @@
         </p:nvSpPr>
         <p:spPr>
           <a:xfrm>
-            <a:off x="4840833" y="2066543"/>
+            <a:off x="4840833" y="1883663"/>
             <a:ext cx="182879" cy="219456"/>
           </a:xfrm>
           <a:prstGeom prst="rightArrow">
@@ -11811,7 +11877,7 @@
         <p:spPr>
           <a:xfrm>
             <a:off x="5069433" y="1517904"/>
-            <a:ext cx="2050084" cy="1316736"/>
+            <a:ext cx="2050084" cy="950976"/>
           </a:xfrm>
           <a:prstGeom prst="roundRect">
             <a:avLst>
@@ -11875,7 +11941,7 @@
               <a:buNone/>
             </a:pPr>
             <a:r>
-              <a:rPr sz="1100" b="0" i="0">
+              <a:rPr sz="1050" b="0" i="0">
                 <a:solidFill>
                   <a:srgbClr val="63636B"/>
                 </a:solidFill>
@@ -11894,7 +11960,7 @@
         <p:spPr>
           <a:xfrm>
             <a:off x="5069433" y="1517904"/>
-            <a:ext cx="40640" cy="1316736"/>
+            <a:ext cx="40640" cy="950976"/>
           </a:xfrm>
           <a:prstGeom prst="rect">
             <a:avLst/>
@@ -11937,7 +12003,7 @@
         </p:nvSpPr>
         <p:spPr>
           <a:xfrm>
-            <a:off x="7165238" y="2066543"/>
+            <a:off x="7165238" y="1883663"/>
             <a:ext cx="182879" cy="219456"/>
           </a:xfrm>
           <a:prstGeom prst="rightArrow">
@@ -11982,7 +12048,7 @@
         <p:spPr>
           <a:xfrm>
             <a:off x="7393838" y="1517904"/>
-            <a:ext cx="2050084" cy="1316736"/>
+            <a:ext cx="2050084" cy="950976"/>
           </a:xfrm>
           <a:prstGeom prst="roundRect">
             <a:avLst>
@@ -12046,7 +12112,7 @@
               <a:buNone/>
             </a:pPr>
             <a:r>
-              <a:rPr sz="1100" b="0" i="0">
+              <a:rPr sz="1050" b="0" i="0">
                 <a:solidFill>
                   <a:srgbClr val="63636B"/>
                 </a:solidFill>
@@ -12065,7 +12131,7 @@
         <p:spPr>
           <a:xfrm>
             <a:off x="7393838" y="1517904"/>
-            <a:ext cx="40640" cy="1316736"/>
+            <a:ext cx="40640" cy="950976"/>
           </a:xfrm>
           <a:prstGeom prst="rect">
             <a:avLst/>
@@ -12108,7 +12174,7 @@
         </p:nvSpPr>
         <p:spPr>
           <a:xfrm>
-            <a:off x="9489643" y="2066543"/>
+            <a:off x="9489643" y="1883663"/>
             <a:ext cx="182879" cy="219456"/>
           </a:xfrm>
           <a:prstGeom prst="rightArrow">
@@ -12153,7 +12219,7 @@
         <p:spPr>
           <a:xfrm>
             <a:off x="9718243" y="1517904"/>
-            <a:ext cx="2050084" cy="1316736"/>
+            <a:ext cx="2050084" cy="950976"/>
           </a:xfrm>
           <a:prstGeom prst="roundRect">
             <a:avLst>
@@ -12217,7 +12283,7 @@
               <a:buNone/>
             </a:pPr>
             <a:r>
-              <a:rPr sz="1100" b="0" i="0">
+              <a:rPr sz="1050" b="0" i="0">
                 <a:solidFill>
                   <a:srgbClr val="63636B"/>
                 </a:solidFill>
@@ -12236,7 +12302,7 @@
         <p:spPr>
           <a:xfrm>
             <a:off x="9718243" y="1517904"/>
-            <a:ext cx="40640" cy="1316736"/>
+            <a:ext cx="40640" cy="950976"/>
           </a:xfrm>
           <a:prstGeom prst="rect">
             <a:avLst/>
@@ -12273,14 +12339,14 @@
       </p:sp>
       <p:sp>
         <p:nvSpPr>
-          <p:cNvPr id="17425" name="cd-users-head"/>
+          <p:cNvPr id="17425" name="cd-users"/>
           <p:cNvSpPr txBox="1"/>
           <p:nvPr/>
         </p:nvSpPr>
         <p:spPr>
           <a:xfrm>
-            <a:off x="420624" y="3090672"/>
-            <a:ext cx="5760720" cy="274320"/>
+            <a:off x="420624" y="2688336"/>
+            <a:ext cx="6190488" cy="566928"/>
           </a:xfrm>
           <a:prstGeom prst="rect">
             <a:avLst/>
@@ -12303,26 +12369,26 @@
               <a:buNone/>
             </a:pPr>
             <a:r>
-              <a:rPr sz="1700" b="1" i="0">
-                <a:solidFill>
-                  <a:srgbClr val="9E3A24"/>
-                </a:solidFill>
-              </a:rPr>
-              <a:t>Who this is for</a:t>
-            </a:r>
-          </a:p>
-        </p:txBody>
-      </p:sp>
-      <p:sp>
-        <p:nvSpPr>
-          <p:cNvPr id="17426" name="cd-users"/>
+              <a:rPr sz="1200" b="0" i="1">
+                <a:solidFill>
+                  <a:srgbClr val="3E3E44"/>
+                </a:solidFill>
+              </a:rPr>
+              <a:t>Intended for security engineering teams, cryptographic inventory and migration-planning teams, and infrastructure operators. These are intended users; the tool has not been deployed in production.</a:t>
+            </a:r>
+          </a:p>
+        </p:txBody>
+      </p:sp>
+      <p:sp>
+        <p:nvSpPr>
+          <p:cNvPr id="17426" name="cd-changes-head"/>
           <p:cNvSpPr txBox="1"/>
           <p:nvPr/>
         </p:nvSpPr>
         <p:spPr>
           <a:xfrm>
-            <a:off x="420624" y="3383279"/>
-            <a:ext cx="5760720" cy="640080"/>
+            <a:off x="420624" y="3328416"/>
+            <a:ext cx="6190488" cy="274320"/>
           </a:xfrm>
           <a:prstGeom prst="rect">
             <a:avLst/>
@@ -12345,26 +12411,26 @@
               <a:buNone/>
             </a:pPr>
             <a:r>
-              <a:rPr sz="1350" b="0" i="0">
-                <a:solidFill>
-                  <a:srgbClr val="3E3E44"/>
-                </a:solidFill>
-              </a:rPr>
-              <a:t>Intended for security engineering teams, cryptographic inventory and migration-planning teams, and infrastructure operators. These are intended users; the tool has not been deployed in production.</a:t>
-            </a:r>
-          </a:p>
-        </p:txBody>
-      </p:sp>
-      <p:sp>
-        <p:nvSpPr>
-          <p:cNvPr id="17427" name="cd-changes-head"/>
+              <a:rPr sz="1700" b="1" i="0">
+                <a:solidFill>
+                  <a:srgbClr val="9E3A24"/>
+                </a:solidFill>
+              </a:rPr>
+              <a:t>What changes for them</a:t>
+            </a:r>
+          </a:p>
+        </p:txBody>
+      </p:sp>
+      <p:sp>
+        <p:nvSpPr>
+          <p:cNvPr id="17427" name="cd-changes"/>
           <p:cNvSpPr txBox="1"/>
           <p:nvPr/>
         </p:nvSpPr>
         <p:spPr>
           <a:xfrm>
-            <a:off x="420624" y="4059935"/>
-            <a:ext cx="5760720" cy="274320"/>
+            <a:off x="420624" y="3621024"/>
+            <a:ext cx="6190488" cy="1335024"/>
           </a:xfrm>
           <a:prstGeom prst="rect">
             <a:avLst/>
@@ -12377,60 +12443,18 @@
           </a:bodyPr>
           <a:lstStyle/>
           <a:p>
-            <a:pPr algn="l" marL="0" indent="0">
-              <a:spcBef>
-                <a:spcPts val="0"/>
-              </a:spcBef>
-              <a:spcAft>
-                <a:spcPts val="0"/>
-              </a:spcAft>
-              <a:buNone/>
-            </a:pPr>
-            <a:r>
-              <a:rPr sz="1700" b="1" i="0">
-                <a:solidFill>
-                  <a:srgbClr val="9E3A24"/>
-                </a:solidFill>
-              </a:rPr>
-              <a:t>What changes for them</a:t>
-            </a:r>
-          </a:p>
-        </p:txBody>
-      </p:sp>
-      <p:sp>
-        <p:nvSpPr>
-          <p:cNvPr id="17428" name="cd-changes"/>
-          <p:cNvSpPr txBox="1"/>
-          <p:nvPr/>
-        </p:nvSpPr>
-        <p:spPr>
-          <a:xfrm>
-            <a:off x="420624" y="4370831"/>
-            <a:ext cx="5760720" cy="1371600"/>
-          </a:xfrm>
-          <a:prstGeom prst="rect">
-            <a:avLst/>
-          </a:prstGeom>
-          <a:noFill/>
-        </p:spPr>
-        <p:txBody>
-          <a:bodyPr wrap="square" lIns="0" rIns="0" tIns="0" bIns="0">
-            <a:spAutoFit/>
-          </a:bodyPr>
-          <a:lstStyle/>
-          <a:p>
             <a:pPr marL="146050" indent="-146050">
               <a:spcBef>
                 <a:spcPts val="0"/>
               </a:spcBef>
               <a:spcAft>
-                <a:spcPts val="600"/>
+                <a:spcPts val="400"/>
               </a:spcAft>
               <a:buFont typeface="Arial"/>
               <a:buChar char="–"/>
             </a:pPr>
             <a:r>
-              <a:rPr sz="1350" b="0" i="0">
+              <a:rPr sz="1300" b="0" i="0">
                 <a:solidFill>
                   <a:srgbClr val="3E3E44"/>
                 </a:solidFill>
@@ -12444,13 +12468,13 @@
                 <a:spcPts val="0"/>
               </a:spcBef>
               <a:spcAft>
-                <a:spcPts val="600"/>
+                <a:spcPts val="400"/>
               </a:spcAft>
               <a:buFont typeface="Arial"/>
               <a:buChar char="–"/>
             </a:pPr>
             <a:r>
-              <a:rPr sz="1350" b="0" i="0">
+              <a:rPr sz="1300" b="0" i="0">
                 <a:solidFill>
                   <a:srgbClr val="3E3E44"/>
                 </a:solidFill>
@@ -12464,13 +12488,13 @@
                 <a:spcPts val="0"/>
               </a:spcBef>
               <a:spcAft>
-                <a:spcPts val="600"/>
+                <a:spcPts val="400"/>
               </a:spcAft>
               <a:buFont typeface="Arial"/>
               <a:buChar char="–"/>
             </a:pPr>
             <a:r>
-              <a:rPr sz="1350" b="0" i="0">
+              <a:rPr sz="1300" b="0" i="0">
                 <a:solidFill>
                   <a:srgbClr val="3E3E44"/>
                 </a:solidFill>
@@ -12482,56 +12506,14 @@
       </p:sp>
       <p:sp>
         <p:nvSpPr>
-          <p:cNvPr id="17429" name="cd-bench-head"/>
-          <p:cNvSpPr txBox="1"/>
-          <p:nvPr/>
-        </p:nvSpPr>
-        <p:spPr>
-          <a:xfrm>
-            <a:off x="6492240" y="3090672"/>
-            <a:ext cx="5276088" cy="274320"/>
-          </a:xfrm>
-          <a:prstGeom prst="rect">
-            <a:avLst/>
-          </a:prstGeom>
-          <a:noFill/>
-        </p:spPr>
-        <p:txBody>
-          <a:bodyPr wrap="square" lIns="0" rIns="0" tIns="0" bIns="0">
-            <a:spAutoFit/>
-          </a:bodyPr>
-          <a:lstStyle/>
-          <a:p>
-            <a:pPr algn="l" marL="0" indent="0">
-              <a:spcBef>
-                <a:spcPts val="0"/>
-              </a:spcBef>
-              <a:spcAft>
-                <a:spcPts val="0"/>
-              </a:spcAft>
-              <a:buNone/>
-            </a:pPr>
-            <a:r>
-              <a:rPr sz="1700" b="1" i="0">
-                <a:solidFill>
-                  <a:srgbClr val="9E3A24"/>
-                </a:solidFill>
-              </a:rPr>
-              <a:t>Measured on a labelled corpus</a:t>
-            </a:r>
-          </a:p>
-        </p:txBody>
-      </p:sp>
-      <p:sp>
-        <p:nvSpPr>
-          <p:cNvPr id="17430" name="cd-bench-box"/>
+          <p:cNvPr id="17428" name="cd-bench-box"/>
           <p:cNvSpPr/>
           <p:nvPr/>
         </p:nvSpPr>
         <p:spPr>
           <a:xfrm>
-            <a:off x="6492240" y="3419856"/>
-            <a:ext cx="5276088" cy="786384"/>
+            <a:off x="420624" y="5029200"/>
+            <a:ext cx="6190488" cy="603504"/>
           </a:xfrm>
           <a:prstGeom prst="roundRect">
             <a:avLst>
@@ -12588,14 +12570,14 @@
       </p:sp>
       <p:sp>
         <p:nvSpPr>
-          <p:cNvPr id="17431" name="cd-bench-label"/>
+          <p:cNvPr id="17429" name="cd-bench-label"/>
           <p:cNvSpPr txBox="1"/>
           <p:nvPr/>
         </p:nvSpPr>
         <p:spPr>
           <a:xfrm>
-            <a:off x="6656831" y="3493008"/>
-            <a:ext cx="4946903" cy="237744"/>
+            <a:off x="585216" y="5093208"/>
+            <a:ext cx="5861303" cy="201168"/>
           </a:xfrm>
           <a:prstGeom prst="rect">
             <a:avLst/>
@@ -12618,26 +12600,26 @@
               <a:buNone/>
             </a:pPr>
             <a:r>
-              <a:rPr sz="1150" b="1" i="0">
+              <a:rPr sz="1100" b="1" i="0">
                 <a:solidFill>
                   <a:srgbClr val="1A1A1C"/>
                 </a:solidFill>
               </a:rPr>
-              <a:t>Like-for-like, same corpus, before → after</a:t>
-            </a:r>
-          </a:p>
-        </p:txBody>
-      </p:sp>
-      <p:sp>
-        <p:nvSpPr>
-          <p:cNvPr id="17432" name="cd-bench-f1"/>
+              <a:t>Measured on a labelled corpus — like-for-like, before → after</a:t>
+            </a:r>
+          </a:p>
+        </p:txBody>
+      </p:sp>
+      <p:sp>
+        <p:nvSpPr>
+          <p:cNvPr id="17430" name="cd-bench-f1"/>
           <p:cNvSpPr txBox="1"/>
           <p:nvPr/>
         </p:nvSpPr>
         <p:spPr>
           <a:xfrm>
-            <a:off x="6656831" y="3730752"/>
-            <a:ext cx="4946903" cy="310896"/>
+            <a:off x="585216" y="5303520"/>
+            <a:ext cx="2651760" cy="292608"/>
           </a:xfrm>
           <a:prstGeom prst="rect">
             <a:avLst/>
@@ -12660,7 +12642,7 @@
               <a:buNone/>
             </a:pPr>
             <a:r>
-              <a:rPr sz="1900" b="1" i="0">
+              <a:rPr sz="1800" b="1" i="0">
                 <a:solidFill>
                   <a:srgbClr val="144C39"/>
                 </a:solidFill>
@@ -12672,14 +12654,14 @@
       </p:sp>
       <p:sp>
         <p:nvSpPr>
-          <p:cNvPr id="17433" name="cd-bench-counts"/>
+          <p:cNvPr id="17431" name="cd-bench-counts"/>
           <p:cNvSpPr txBox="1"/>
           <p:nvPr/>
         </p:nvSpPr>
         <p:spPr>
           <a:xfrm>
-            <a:off x="9144000" y="3767328"/>
-            <a:ext cx="2441447" cy="237744"/>
+            <a:off x="3255264" y="5358384"/>
+            <a:ext cx="3191256" cy="237744"/>
           </a:xfrm>
           <a:prstGeom prst="rect">
             <a:avLst/>
@@ -12714,14 +12696,14 @@
       </p:sp>
       <p:sp>
         <p:nvSpPr>
-          <p:cNvPr id="17434" name="cd-bench-caveat"/>
+          <p:cNvPr id="17432" name="cd-bench-caveat"/>
           <p:cNvSpPr txBox="1"/>
           <p:nvPr/>
         </p:nvSpPr>
         <p:spPr>
           <a:xfrm>
-            <a:off x="6492240" y="4297680"/>
-            <a:ext cx="5276088" cy="530352"/>
+            <a:off x="420624" y="5687568"/>
+            <a:ext cx="6190488" cy="457200"/>
           </a:xfrm>
           <a:prstGeom prst="rect">
             <a:avLst/>
@@ -12744,7 +12726,7 @@
               <a:buNone/>
             </a:pPr>
             <a:r>
-              <a:rPr sz="1050" b="0" i="1">
+              <a:rPr sz="1000" b="0" i="1">
                 <a:solidFill>
                   <a:srgbClr val="63636B"/>
                 </a:solidFill>
@@ -12756,14 +12738,14 @@
       </p:sp>
       <p:sp>
         <p:nvSpPr>
-          <p:cNvPr id="17435" name="cd-report-caption"/>
+          <p:cNvPr id="17433" name="cd-gen-head"/>
           <p:cNvSpPr txBox="1"/>
           <p:nvPr/>
         </p:nvSpPr>
         <p:spPr>
           <a:xfrm>
-            <a:off x="6492240" y="4901183"/>
-            <a:ext cx="5276088" cy="237744"/>
+            <a:off x="6922007" y="2688336"/>
+            <a:ext cx="4846320" cy="274320"/>
           </a:xfrm>
           <a:prstGeom prst="rect">
             <a:avLst/>
@@ -12786,19 +12768,19 @@
               <a:buNone/>
             </a:pPr>
             <a:r>
-              <a:rPr sz="1050" b="0" i="1">
-                <a:solidFill>
-                  <a:srgbClr val="63636B"/>
-                </a:solidFill>
-              </a:rPr>
-              <a:t>The generated report — the same scan, as a printable document.</a:t>
+              <a:rPr sz="1700" b="1" i="0">
+                <a:solidFill>
+                  <a:srgbClr val="9E3A24"/>
+                </a:solidFill>
+              </a:rPr>
+              <a:t>What it generates</a:t>
             </a:r>
           </a:p>
         </p:txBody>
       </p:sp>
       <p:pic>
         <p:nvPicPr>
-          <p:cNvPr id="17436" name="cd-shot-08-report-0.000-0." descr="08-report-0.000-0.000-1.000-0.250.png"/>
+          <p:cNvPr id="17434" name="cd-shot-09-report-headline" descr="09-report-headline.png"/>
           <p:cNvPicPr>
             <a:picLocks noChangeAspect="1"/>
           </p:cNvPicPr>
@@ -12812,14 +12794,127 @@
         </p:blipFill>
         <p:spPr>
           <a:xfrm>
-            <a:off x="6492240" y="5157216"/>
-            <a:ext cx="5276088" cy="896935"/>
+            <a:off x="6922007" y="3017520"/>
+            <a:ext cx="4846320" cy="1996738"/>
           </a:xfrm>
           <a:prstGeom prst="rect">
             <a:avLst/>
           </a:prstGeom>
+          <a:ln w="9525">
+            <a:solidFill>
+              <a:srgbClr val="D2D0CB"/>
+            </a:solidFill>
+          </a:ln>
         </p:spPr>
       </p:pic>
+      <p:sp>
+        <p:nvSpPr>
+          <p:cNvPr id="17435" name="cd-caption"/>
+          <p:cNvSpPr txBox="1"/>
+          <p:nvPr/>
+        </p:nvSpPr>
+        <p:spPr>
+          <a:xfrm>
+            <a:off x="6922007" y="5050834"/>
+            <a:ext cx="4846320" cy="274320"/>
+          </a:xfrm>
+          <a:prstGeom prst="rect">
+            <a:avLst/>
+          </a:prstGeom>
+          <a:noFill/>
+        </p:spPr>
+        <p:txBody>
+          <a:bodyPr wrap="square" lIns="0" rIns="0" tIns="0" bIns="0">
+            <a:spAutoFit/>
+          </a:bodyPr>
+          <a:lstStyle/>
+          <a:p>
+            <a:pPr marL="0" indent="0">
+              <a:spcBef>
+                <a:spcPts val="0"/>
+              </a:spcBef>
+              <a:spcAft>
+                <a:spcPts val="0"/>
+              </a:spcAft>
+              <a:buNone/>
+            </a:pPr>
+            <a:r>
+              <a:rPr sz="1300" b="0" i="1">
+                <a:solidFill>
+                  <a:srgbClr val="63636B"/>
+                </a:solidFill>
+              </a:rPr>
+              <a:t>The generated report — headline counts from the same scan.</a:t>
+            </a:r>
+          </a:p>
+        </p:txBody>
+      </p:sp>
+      <p:pic>
+        <p:nvPicPr>
+          <p:cNvPr id="17436" name="cd-shot-w07-validated-0.05" descr="w07-validated-0.058-0.575-0.492-0.668.png"/>
+          <p:cNvPicPr>
+            <a:picLocks noChangeAspect="1"/>
+          </p:cNvPicPr>
+          <p:nvPr/>
+        </p:nvPicPr>
+        <p:blipFill>
+          <a:blip r:embed="rId5"/>
+          <a:stretch>
+            <a:fillRect/>
+          </a:stretch>
+        </p:blipFill>
+        <p:spPr>
+          <a:xfrm>
+            <a:off x="6922007" y="5361730"/>
+            <a:ext cx="4846320" cy="585904"/>
+          </a:xfrm>
+          <a:prstGeom prst="rect">
+            <a:avLst/>
+          </a:prstGeom>
+        </p:spPr>
+      </p:pic>
+      <p:sp>
+        <p:nvSpPr>
+          <p:cNvPr id="17437" name="cd-caption"/>
+          <p:cNvSpPr txBox="1"/>
+          <p:nvPr/>
+        </p:nvSpPr>
+        <p:spPr>
+          <a:xfrm>
+            <a:off x="6922007" y="5984210"/>
+            <a:ext cx="4846320" cy="274320"/>
+          </a:xfrm>
+          <a:prstGeom prst="rect">
+            <a:avLst/>
+          </a:prstGeom>
+          <a:noFill/>
+        </p:spPr>
+        <p:txBody>
+          <a:bodyPr wrap="square" lIns="0" rIns="0" tIns="0" bIns="0">
+            <a:spAutoFit/>
+          </a:bodyPr>
+          <a:lstStyle/>
+          <a:p>
+            <a:pPr marL="0" indent="0">
+              <a:spcBef>
+                <a:spcPts val="0"/>
+              </a:spcBef>
+              <a:spcAft>
+                <a:spcPts val="0"/>
+              </a:spcAft>
+              <a:buNone/>
+            </a:pPr>
+            <a:r>
+              <a:rPr sz="1300" b="0" i="1">
+                <a:solidFill>
+                  <a:srgbClr val="63636B"/>
+                </a:solidFill>
+              </a:rPr>
+              <a:t>CBOM validation, run live in the console — both checks pass.</a:t>
+            </a:r>
+          </a:p>
+        </p:txBody>
+      </p:sp>
     </p:spTree>
     <p:extLst>
       <p:ext uri="{BB962C8B-B14F-4D97-AF65-F5344CB8AC3E}">
@@ -13610,8 +13705,8 @@
         </p:nvSpPr>
         <p:spPr>
           <a:xfrm>
-            <a:off x="420624" y="4992624"/>
-            <a:ext cx="3660647" cy="603504"/>
+            <a:off x="420624" y="4974336"/>
+            <a:ext cx="3380231" cy="713232"/>
           </a:xfrm>
           <a:prstGeom prst="roundRect">
             <a:avLst>
@@ -13693,8 +13788,8 @@
         </p:nvSpPr>
         <p:spPr>
           <a:xfrm>
-            <a:off x="420624" y="4992624"/>
-            <a:ext cx="40640" cy="603504"/>
+            <a:off x="420624" y="4974336"/>
+            <a:ext cx="40640" cy="713232"/>
           </a:xfrm>
           <a:prstGeom prst="rect">
             <a:avLst/>
@@ -13737,8 +13832,8 @@
         </p:nvSpPr>
         <p:spPr>
           <a:xfrm>
-            <a:off x="4264152" y="4992624"/>
-            <a:ext cx="3660647" cy="603504"/>
+            <a:off x="3983736" y="4974336"/>
+            <a:ext cx="3380231" cy="713232"/>
           </a:xfrm>
           <a:prstGeom prst="roundRect">
             <a:avLst>
@@ -13820,8 +13915,8 @@
         </p:nvSpPr>
         <p:spPr>
           <a:xfrm>
-            <a:off x="4264152" y="4992624"/>
-            <a:ext cx="40640" cy="603504"/>
+            <a:off x="3983736" y="4974336"/>
+            <a:ext cx="40640" cy="713232"/>
           </a:xfrm>
           <a:prstGeom prst="rect">
             <a:avLst/>
@@ -13864,8 +13959,8 @@
         </p:nvSpPr>
         <p:spPr>
           <a:xfrm>
-            <a:off x="8107680" y="4992624"/>
-            <a:ext cx="3660647" cy="603504"/>
+            <a:off x="7546847" y="4974336"/>
+            <a:ext cx="3380231" cy="713232"/>
           </a:xfrm>
           <a:prstGeom prst="roundRect">
             <a:avLst>
@@ -13947,8 +14042,8 @@
         </p:nvSpPr>
         <p:spPr>
           <a:xfrm>
-            <a:off x="8107680" y="4992624"/>
-            <a:ext cx="40640" cy="603504"/>
+            <a:off x="7546847" y="4974336"/>
+            <a:ext cx="40640" cy="713232"/>
           </a:xfrm>
           <a:prstGeom prst="rect">
             <a:avLst/>
@@ -13983,15 +14078,39 @@
           </a:p>
         </p:txBody>
       </p:sp>
-      <p:sp>
-        <p:nvSpPr>
-          <p:cNvPr id="17418" name="cd-ref-note"/>
+      <p:pic>
+        <p:nvPicPr>
+          <p:cNvPr id="17418" name="cd-qr-repo" descr="qr-14840615.png"/>
+          <p:cNvPicPr>
+            <a:picLocks noChangeAspect="1"/>
+          </p:cNvPicPr>
+          <p:nvPr/>
+        </p:nvPicPr>
+        <p:blipFill>
+          <a:blip r:embed="rId4"/>
+          <a:stretch>
+            <a:fillRect/>
+          </a:stretch>
+        </p:blipFill>
+        <p:spPr>
+          <a:xfrm>
+            <a:off x="11055095" y="4974336"/>
+            <a:ext cx="713232" cy="713232"/>
+          </a:xfrm>
+          <a:prstGeom prst="rect">
+            <a:avLst/>
+          </a:prstGeom>
+        </p:spPr>
+      </p:pic>
+      <p:sp>
+        <p:nvSpPr>
+          <p:cNvPr id="17419" name="cd-ref-note"/>
           <p:cNvSpPr txBox="1"/>
           <p:nvPr/>
         </p:nvSpPr>
         <p:spPr>
           <a:xfrm>
-            <a:off x="420624" y="5705856"/>
+            <a:off x="420624" y="5779008"/>
             <a:ext cx="11347703" cy="310896"/>
           </a:xfrm>
           <a:prstGeom prst="rect">
